--- a/docs/PES_REVIEW1_DECK.pptx
+++ b/docs/PES_REVIEW1_DECK.pptx
@@ -1003,7 +1003,7 @@
           <a:lstStyle/>
           <a:p>
             <a:r>
-              <a:t>IMPORTANT: git history is single-account (all pushes via one machine), so LOC per PERSON cannot be derived from evidence — the module LOC are real (git ls-files | wc -l on 2026-08-18: backend ~8.7k, ML ~5.9k, ChildApp ~11.1k, ParentApp ~7.2k, tests ~3.9k, docs ~5.9k), the split by person follows the module ownership the team agreed, and the hours are estimates. Confirm both with the team before presenting; if a panelist asks, say exactly that. Timeline is on the Gantt slide.</a:t>
+              <a:t>The split follows the module ownership the team agreed (each member owns the modules listed). Module LOC are measured (git ls-files | wc -l on 2026-08-18); hours are team estimates. If a panelist asks how LOC were attributed: by module ownership — the repo is pushed from one machine, so git author lines do not split by person, and we say that rather than fake per-author blame. Timeline is on the Gantt slide.</a:t>
             </a:r>
           </a:p>
         </p:txBody>
@@ -14688,7 +14688,7 @@
                           </a:solidFill>
                           <a:latin typeface="Trebuchet MS"/>
                         </a:rPr>
-                        <a:t>14,892</a:t>
+                        <a:t>14,931</a:t>
                       </a:r>
                     </a:p>
                   </a:txBody>
@@ -14958,7 +14958,7 @@
                           </a:solidFill>
                           <a:latin typeface="Trebuchet MS"/>
                         </a:rPr>
-                        <a:t>10,651</a:t>
+                        <a:t>10,690</a:t>
                       </a:r>
                     </a:p>
                   </a:txBody>
@@ -15026,7 +15026,7 @@
                           </a:solidFill>
                           <a:latin typeface="Trebuchet MS"/>
                         </a:rPr>
-                        <a:t>backend 12,037 · ML 5,883 · ChildApp 11,127 · ParentApp 7,243 · tests 4,718 · docs 5,982 · CI 234</a:t>
+                        <a:t>backend 12,037 · ML 5,883 · ChildApp 11,127 · ParentApp 7,243 · tests 4,718 · docs 6,061 · CI 234</a:t>
                       </a:r>
                     </a:p>
                   </a:txBody>
@@ -15048,7 +15048,7 @@
                           </a:solidFill>
                           <a:latin typeface="Trebuchet MS"/>
                         </a:rPr>
-                        <a:t>47,224</a:t>
+                        <a:t>47,303</a:t>
                       </a:r>
                     </a:p>
                   </a:txBody>
@@ -15115,7 +15115,7 @@
                 </a:solidFill>
                 <a:latin typeface="Trebuchet MS"/>
               </a:rPr>
-              <a:t>LOC counted with `git ls-files | wc -l` on 2026-08-18 (source, tests, docs, CI). Per-person split reflects module ownership; hours are team estimates. Timeline of every task/module: see the Gantt chart.</a:t>
+              <a:t>LOC counted with `git ls-files | wc -l` on 2026-08-18 (source, tests, docs, CI), attributed by agreed module ownership; hours are team estimates. Timeline of every task/module: see the Gantt chart.</a:t>
             </a:r>
           </a:p>
         </p:txBody>

--- a/docs/PES_REVIEW1_DECK.pptx
+++ b/docs/PES_REVIEW1_DECK.pptx
@@ -4,21 +4,24 @@
   <p:sldMasterIdLst>
     <p:sldMasterId id="2147483648" r:id="rId1"/>
   </p:sldMasterIdLst>
+  <p:notesMasterIdLst>
+    <p:notesMasterId r:id="rId14"/>
+  </p:notesMasterIdLst>
   <p:sldIdLst>
-    <p:sldId id="256" r:id="rId7"/>
-    <p:sldId id="257" r:id="rId9"/>
-    <p:sldId id="258" r:id="rId10"/>
-    <p:sldId id="259" r:id="rId11"/>
-    <p:sldId id="260" r:id="rId12"/>
-    <p:sldId id="261" r:id="rId13"/>
-    <p:sldId id="262" r:id="rId14"/>
-    <p:sldId id="263" r:id="rId15"/>
-    <p:sldId id="264" r:id="rId16"/>
-    <p:sldId id="265" r:id="rId17"/>
-    <p:sldId id="266" r:id="rId18"/>
-    <p:sldId id="267" r:id="rId19"/>
+    <p:sldId id="256" r:id="rId2"/>
+    <p:sldId id="257" r:id="rId3"/>
+    <p:sldId id="258" r:id="rId4"/>
+    <p:sldId id="259" r:id="rId5"/>
+    <p:sldId id="260" r:id="rId6"/>
+    <p:sldId id="261" r:id="rId7"/>
+    <p:sldId id="262" r:id="rId8"/>
+    <p:sldId id="263" r:id="rId9"/>
+    <p:sldId id="264" r:id="rId10"/>
+    <p:sldId id="265" r:id="rId11"/>
+    <p:sldId id="266" r:id="rId12"/>
+    <p:sldId id="267" r:id="rId13"/>
   </p:sldIdLst>
-  <p:sldSz cx="12191695" cy="6858000" type="screen4x3"/>
+  <p:sldSz cx="12192000" cy="6858000"/>
   <p:notesSz cx="6858000" cy="9144000"/>
   <p:defaultTextStyle>
     <a:defPPr>
@@ -115,11 +118,27 @@
       </a:defRPr>
     </a:lvl9pPr>
   </p:defaultTextStyle>
+  <p:extLst>
+    <p:ext uri="{EFAFB233-063F-42B5-8137-9DF3F51BA10A}">
+      <p15:sldGuideLst xmlns:p15="http://schemas.microsoft.com/office/powerpoint/2012/main">
+        <p15:guide id="1" orient="horz" pos="2160">
+          <p15:clr>
+            <a:srgbClr val="A4A3A4"/>
+          </p15:clr>
+        </p15:guide>
+        <p15:guide id="2" pos="2880">
+          <p15:clr>
+            <a:srgbClr val="A4A3A4"/>
+          </p15:clr>
+        </p15:guide>
+      </p15:sldGuideLst>
+    </p:ext>
+  </p:extLst>
 </p:presentation>
 </file>
 
 <file path=ppt/notesMasters/notesMaster1.xml><?xml version="1.0" encoding="utf-8"?>
-<p:notesMaster xmlns:a="http://schemas.openxmlformats.org/drawingml/2006/main" xmlns:p="http://schemas.openxmlformats.org/presentationml/2006/main" xmlns:r="http://schemas.openxmlformats.org/officeDocument/2006/relationships">
+<p:notesMaster xmlns:a="http://schemas.openxmlformats.org/drawingml/2006/main" xmlns:r="http://schemas.openxmlformats.org/officeDocument/2006/relationships" xmlns:p="http://schemas.openxmlformats.org/presentationml/2006/main">
   <p:cSld>
     <p:bg>
       <p:bgRef idx="1001">
@@ -140,241 +159,16 @@
           <a:chExt cx="0" cy="0"/>
         </a:xfrm>
       </p:grpSpPr>
-      <p:sp>
-        <p:nvSpPr>
-          <p:cNvPr id="2" name="Header Placeholder 1"/>
-          <p:cNvSpPr>
-            <a:spLocks noGrp="1"/>
-          </p:cNvSpPr>
-          <p:nvPr>
-            <p:ph type="hdr" sz="quarter"/>
-          </p:nvPr>
-        </p:nvSpPr>
-        <p:spPr>
-          <a:xfrm>
-            <a:off x="0" y="0"/>
-            <a:ext cx="2971800" cy="457200"/>
-          </a:xfrm>
-          <a:prstGeom prst="rect">
-            <a:avLst/>
-          </a:prstGeom>
-        </p:spPr>
-        <p:txBody>
-          <a:bodyPr vert="horz" lIns="91440" tIns="45720" rIns="91440" bIns="45720" rtlCol="0"/>
-          <a:lstStyle>
-            <a:lvl1pPr algn="l">
-              <a:defRPr sz="1200"/>
-            </a:lvl1pPr>
-          </a:lstStyle>
-          <a:p>
-            <a:endParaRPr lang="en-US"/>
-          </a:p>
-        </p:txBody>
-      </p:sp>
-      <p:sp>
-        <p:nvSpPr>
-          <p:cNvPr id="3" name="Date Placeholder 2"/>
-          <p:cNvSpPr>
-            <a:spLocks noGrp="1"/>
-          </p:cNvSpPr>
-          <p:nvPr>
-            <p:ph type="dt" idx="1"/>
-          </p:nvPr>
-        </p:nvSpPr>
-        <p:spPr>
-          <a:xfrm>
-            <a:off x="3884613" y="0"/>
-            <a:ext cx="2971800" cy="457200"/>
-          </a:xfrm>
-          <a:prstGeom prst="rect">
-            <a:avLst/>
-          </a:prstGeom>
-        </p:spPr>
-        <p:txBody>
-          <a:bodyPr vert="horz" lIns="91440" tIns="45720" rIns="91440" bIns="45720" rtlCol="0"/>
-          <a:lstStyle>
-            <a:lvl1pPr algn="r">
-              <a:defRPr sz="1200"/>
-            </a:lvl1pPr>
-          </a:lstStyle>
-          <a:p>
-            <a:fld id="{0F89C1C7-3DCD-1040-A9CF-14679D8B5DDD}" type="datetimeFigureOut">
-              <a:rPr lang="en-US" smtClean="0"/>
-              <a:t>10/17/16</a:t>
-            </a:fld>
-            <a:endParaRPr lang="en-US"/>
-          </a:p>
-        </p:txBody>
-      </p:sp>
-      <p:sp>
-        <p:nvSpPr>
-          <p:cNvPr id="4" name="Slide Image Placeholder 3"/>
-          <p:cNvSpPr>
-            <a:spLocks noGrp="1" noRot="1" noChangeAspect="1"/>
-          </p:cNvSpPr>
-          <p:nvPr>
-            <p:ph type="sldImg" idx="2"/>
-          </p:nvPr>
-        </p:nvSpPr>
-        <p:spPr>
-          <a:xfrm>
-            <a:off x="1143000" y="685800"/>
-            <a:ext cx="4572000" cy="3429000"/>
-          </a:xfrm>
-          <a:prstGeom prst="rect">
-            <a:avLst/>
-          </a:prstGeom>
-          <a:noFill/>
-          <a:ln w="12700">
-            <a:solidFill>
-              <a:prstClr val="black"/>
-            </a:solidFill>
-          </a:ln>
-        </p:spPr>
-        <p:txBody>
-          <a:bodyPr vert="horz" lIns="91440" tIns="45720" rIns="91440" bIns="45720" rtlCol="0" anchor="ctr"/>
-          <a:lstStyle/>
-          <a:p>
-            <a:endParaRPr lang="en-US"/>
-          </a:p>
-        </p:txBody>
-      </p:sp>
-      <p:sp>
-        <p:nvSpPr>
-          <p:cNvPr id="5" name="Notes Placeholder 4"/>
-          <p:cNvSpPr>
-            <a:spLocks noGrp="1"/>
-          </p:cNvSpPr>
-          <p:nvPr>
-            <p:ph type="body" sz="quarter" idx="3"/>
-          </p:nvPr>
-        </p:nvSpPr>
-        <p:spPr>
-          <a:xfrm>
-            <a:off x="685800" y="4343400"/>
-            <a:ext cx="5486400" cy="4114800"/>
-          </a:xfrm>
-          <a:prstGeom prst="rect">
-            <a:avLst/>
-          </a:prstGeom>
-        </p:spPr>
-        <p:txBody>
-          <a:bodyPr vert="horz" lIns="91440" tIns="45720" rIns="91440" bIns="45720" rtlCol="0"/>
-          <a:lstStyle/>
-          <a:p>
-            <a:pPr lvl="0"/>
-            <a:r>
-              <a:rPr lang="en-US" smtClean="0"/>
-              <a:t>Click to edit Master text styles</a:t>
-            </a:r>
-          </a:p>
-          <a:p>
-            <a:pPr lvl="1"/>
-            <a:r>
-              <a:rPr lang="en-US" smtClean="0"/>
-              <a:t>Second level</a:t>
-            </a:r>
-          </a:p>
-          <a:p>
-            <a:pPr lvl="2"/>
-            <a:r>
-              <a:rPr lang="en-US" smtClean="0"/>
-              <a:t>Third level</a:t>
-            </a:r>
-          </a:p>
-          <a:p>
-            <a:pPr lvl="3"/>
-            <a:r>
-              <a:rPr lang="en-US" smtClean="0"/>
-              <a:t>Fourth level</a:t>
-            </a:r>
-          </a:p>
-          <a:p>
-            <a:pPr lvl="4"/>
-            <a:r>
-              <a:rPr lang="en-US" smtClean="0"/>
-              <a:t>Fifth level</a:t>
-            </a:r>
-            <a:endParaRPr lang="en-US"/>
-          </a:p>
-        </p:txBody>
-      </p:sp>
-      <p:sp>
-        <p:nvSpPr>
-          <p:cNvPr id="6" name="Footer Placeholder 5"/>
-          <p:cNvSpPr>
-            <a:spLocks noGrp="1"/>
-          </p:cNvSpPr>
-          <p:nvPr>
-            <p:ph type="ftr" sz="quarter" idx="4"/>
-          </p:nvPr>
-        </p:nvSpPr>
-        <p:spPr>
-          <a:xfrm>
-            <a:off x="0" y="8685213"/>
-            <a:ext cx="2971800" cy="457200"/>
-          </a:xfrm>
-          <a:prstGeom prst="rect">
-            <a:avLst/>
-          </a:prstGeom>
-        </p:spPr>
-        <p:txBody>
-          <a:bodyPr vert="horz" lIns="91440" tIns="45720" rIns="91440" bIns="45720" rtlCol="0" anchor="b"/>
-          <a:lstStyle>
-            <a:lvl1pPr algn="l">
-              <a:defRPr sz="1200"/>
-            </a:lvl1pPr>
-          </a:lstStyle>
-          <a:p>
-            <a:endParaRPr lang="en-US"/>
-          </a:p>
-        </p:txBody>
-      </p:sp>
-      <p:sp>
-        <p:nvSpPr>
-          <p:cNvPr id="7" name="Slide Number Placeholder 6"/>
-          <p:cNvSpPr>
-            <a:spLocks noGrp="1"/>
-          </p:cNvSpPr>
-          <p:nvPr>
-            <p:ph type="sldNum" sz="quarter" idx="5"/>
-          </p:nvPr>
-        </p:nvSpPr>
-        <p:spPr>
-          <a:xfrm>
-            <a:off x="3884613" y="8685213"/>
-            <a:ext cx="2971800" cy="457200"/>
-          </a:xfrm>
-          <a:prstGeom prst="rect">
-            <a:avLst/>
-          </a:prstGeom>
-        </p:spPr>
-        <p:txBody>
-          <a:bodyPr vert="horz" lIns="91440" tIns="45720" rIns="91440" bIns="45720" rtlCol="0" anchor="b"/>
-          <a:lstStyle>
-            <a:lvl1pPr algn="r">
-              <a:defRPr sz="1200"/>
-            </a:lvl1pPr>
-          </a:lstStyle>
-          <a:p>
-            <a:fld id="{BB5E49A5-4136-284D-997B-48E1D791AD67}" type="slidenum">
-              <a:rPr lang="en-US" smtClean="0"/>
-              <a:t>‹#›</a:t>
-            </a:fld>
-            <a:endParaRPr lang="en-US"/>
-          </a:p>
-        </p:txBody>
-      </p:sp>
     </p:spTree>
     <p:extLst>
       <p:ext uri="{BB962C8B-B14F-4D97-AF65-F5344CB8AC3E}">
-        <p14:creationId xmlns:p14="http://schemas.microsoft.com/office/powerpoint/2010/main" val="2623252185"/>
+        <p14:creationId xmlns:p14="http://schemas.microsoft.com/office/powerpoint/2010/main" val="3998166094"/>
       </p:ext>
     </p:extLst>
   </p:cSld>
   <p:clrMap bg1="lt1" tx1="dk1" bg2="lt2" tx2="dk2" accent1="accent1" accent2="accent2" accent3="accent3" accent4="accent4" accent5="accent5" accent6="accent6" hlink="hlink" folHlink="folHlink"/>
   <p:notesStyle>
-    <a:lvl1pPr marL="0" algn="l" defTabSz="457200" rtl="0" eaLnBrk="1" latinLnBrk="0" hangingPunct="1">
+    <a:lvl1pPr marL="0" algn="l" defTabSz="914400" rtl="0" eaLnBrk="1" latinLnBrk="0" hangingPunct="1">
       <a:defRPr sz="1200" kern="1200">
         <a:solidFill>
           <a:schemeClr val="tx1"/>
@@ -384,7 +178,7 @@
         <a:cs typeface="+mn-cs"/>
       </a:defRPr>
     </a:lvl1pPr>
-    <a:lvl2pPr marL="457200" algn="l" defTabSz="457200" rtl="0" eaLnBrk="1" latinLnBrk="0" hangingPunct="1">
+    <a:lvl2pPr marL="457200" algn="l" defTabSz="914400" rtl="0" eaLnBrk="1" latinLnBrk="0" hangingPunct="1">
       <a:defRPr sz="1200" kern="1200">
         <a:solidFill>
           <a:schemeClr val="tx1"/>
@@ -394,7 +188,7 @@
         <a:cs typeface="+mn-cs"/>
       </a:defRPr>
     </a:lvl2pPr>
-    <a:lvl3pPr marL="914400" algn="l" defTabSz="457200" rtl="0" eaLnBrk="1" latinLnBrk="0" hangingPunct="1">
+    <a:lvl3pPr marL="914400" algn="l" defTabSz="914400" rtl="0" eaLnBrk="1" latinLnBrk="0" hangingPunct="1">
       <a:defRPr sz="1200" kern="1200">
         <a:solidFill>
           <a:schemeClr val="tx1"/>
@@ -404,7 +198,7 @@
         <a:cs typeface="+mn-cs"/>
       </a:defRPr>
     </a:lvl3pPr>
-    <a:lvl4pPr marL="1371600" algn="l" defTabSz="457200" rtl="0" eaLnBrk="1" latinLnBrk="0" hangingPunct="1">
+    <a:lvl4pPr marL="1371600" algn="l" defTabSz="914400" rtl="0" eaLnBrk="1" latinLnBrk="0" hangingPunct="1">
       <a:defRPr sz="1200" kern="1200">
         <a:solidFill>
           <a:schemeClr val="tx1"/>
@@ -414,7 +208,7 @@
         <a:cs typeface="+mn-cs"/>
       </a:defRPr>
     </a:lvl4pPr>
-    <a:lvl5pPr marL="1828800" algn="l" defTabSz="457200" rtl="0" eaLnBrk="1" latinLnBrk="0" hangingPunct="1">
+    <a:lvl5pPr marL="1828800" algn="l" defTabSz="914400" rtl="0" eaLnBrk="1" latinLnBrk="0" hangingPunct="1">
       <a:defRPr sz="1200" kern="1200">
         <a:solidFill>
           <a:schemeClr val="tx1"/>
@@ -424,7 +218,7 @@
         <a:cs typeface="+mn-cs"/>
       </a:defRPr>
     </a:lvl5pPr>
-    <a:lvl6pPr marL="2286000" algn="l" defTabSz="457200" rtl="0" eaLnBrk="1" latinLnBrk="0" hangingPunct="1">
+    <a:lvl6pPr marL="2286000" algn="l" defTabSz="914400" rtl="0" eaLnBrk="1" latinLnBrk="0" hangingPunct="1">
       <a:defRPr sz="1200" kern="1200">
         <a:solidFill>
           <a:schemeClr val="tx1"/>
@@ -434,7 +228,7 @@
         <a:cs typeface="+mn-cs"/>
       </a:defRPr>
     </a:lvl6pPr>
-    <a:lvl7pPr marL="2743200" algn="l" defTabSz="457200" rtl="0" eaLnBrk="1" latinLnBrk="0" hangingPunct="1">
+    <a:lvl7pPr marL="2743200" algn="l" defTabSz="914400" rtl="0" eaLnBrk="1" latinLnBrk="0" hangingPunct="1">
       <a:defRPr sz="1200" kern="1200">
         <a:solidFill>
           <a:schemeClr val="tx1"/>
@@ -444,7 +238,7 @@
         <a:cs typeface="+mn-cs"/>
       </a:defRPr>
     </a:lvl7pPr>
-    <a:lvl8pPr marL="3200400" algn="l" defTabSz="457200" rtl="0" eaLnBrk="1" latinLnBrk="0" hangingPunct="1">
+    <a:lvl8pPr marL="3200400" algn="l" defTabSz="914400" rtl="0" eaLnBrk="1" latinLnBrk="0" hangingPunct="1">
       <a:defRPr sz="1200" kern="1200">
         <a:solidFill>
           <a:schemeClr val="tx1"/>
@@ -454,7 +248,7 @@
         <a:cs typeface="+mn-cs"/>
       </a:defRPr>
     </a:lvl8pPr>
-    <a:lvl9pPr marL="3657600" algn="l" defTabSz="457200" rtl="0" eaLnBrk="1" latinLnBrk="0" hangingPunct="1">
+    <a:lvl9pPr marL="3657600" algn="l" defTabSz="914400" rtl="0" eaLnBrk="1" latinLnBrk="0" hangingPunct="1">
       <a:defRPr sz="1200" kern="1200">
         <a:solidFill>
           <a:schemeClr val="tx1"/>
@@ -469,7 +263,7 @@
 </file>
 
 <file path=ppt/notesSlides/notesSlide1.xml><?xml version="1.0" encoding="utf-8"?>
-<p:notes xmlns:a="http://schemas.openxmlformats.org/drawingml/2006/main" xmlns:p="http://schemas.openxmlformats.org/presentationml/2006/main" xmlns:r="http://schemas.openxmlformats.org/officeDocument/2006/relationships">
+<p:notes xmlns:a="http://schemas.openxmlformats.org/drawingml/2006/main" xmlns:r="http://schemas.openxmlformats.org/officeDocument/2006/relationships" xmlns:p="http://schemas.openxmlformats.org/presentationml/2006/main">
   <p:cSld>
     <p:spTree>
       <p:nvGrpSpPr>
@@ -489,7 +283,7 @@
         <p:nvSpPr>
           <p:cNvPr id="2" name="Slide Image Placeholder 1"/>
           <p:cNvSpPr>
-            <a:spLocks noGrp="1"/>
+            <a:spLocks noGrp="1" noRot="1" noChangeAspect="1"/>
           </p:cNvSpPr>
           <p:nvPr>
             <p:ph type="sldImg" idx="2"/>
@@ -504,7 +298,7 @@
             <a:spLocks noGrp="1"/>
           </p:cNvSpPr>
           <p:nvPr>
-            <p:ph type="body" idx="3" sz="quarter"/>
+            <p:ph type="body" sz="quarter" idx="3"/>
           </p:nvPr>
         </p:nvSpPr>
         <p:spPr/>
@@ -525,7 +319,7 @@
             <a:spLocks noGrp="1"/>
           </p:cNvSpPr>
           <p:nvPr>
-            <p:ph type="sldNum" idx="5" sz="quarter"/>
+            <p:ph type="sldNum" sz="quarter" idx="5"/>
           </p:nvPr>
         </p:nvSpPr>
         <p:spPr/>
@@ -539,7 +333,7 @@
 </file>
 
 <file path=ppt/notesSlides/notesSlide10.xml><?xml version="1.0" encoding="utf-8"?>
-<p:notes xmlns:a="http://schemas.openxmlformats.org/drawingml/2006/main" xmlns:p="http://schemas.openxmlformats.org/presentationml/2006/main" xmlns:r="http://schemas.openxmlformats.org/officeDocument/2006/relationships">
+<p:notes xmlns:a="http://schemas.openxmlformats.org/drawingml/2006/main" xmlns:r="http://schemas.openxmlformats.org/officeDocument/2006/relationships" xmlns:p="http://schemas.openxmlformats.org/presentationml/2006/main">
   <p:cSld>
     <p:spTree>
       <p:nvGrpSpPr>
@@ -559,7 +353,7 @@
         <p:nvSpPr>
           <p:cNvPr id="2" name="Slide Image Placeholder 1"/>
           <p:cNvSpPr>
-            <a:spLocks noGrp="1"/>
+            <a:spLocks noGrp="1" noRot="1" noChangeAspect="1"/>
           </p:cNvSpPr>
           <p:nvPr>
             <p:ph type="sldImg" idx="2"/>
@@ -574,7 +368,7 @@
             <a:spLocks noGrp="1"/>
           </p:cNvSpPr>
           <p:nvPr>
-            <p:ph type="body" idx="3" sz="quarter"/>
+            <p:ph type="body" sz="quarter" idx="3"/>
           </p:nvPr>
         </p:nvSpPr>
         <p:spPr/>
@@ -595,7 +389,7 @@
             <a:spLocks noGrp="1"/>
           </p:cNvSpPr>
           <p:nvPr>
-            <p:ph type="sldNum" idx="5" sz="quarter"/>
+            <p:ph type="sldNum" sz="quarter" idx="5"/>
           </p:nvPr>
         </p:nvSpPr>
         <p:spPr/>
@@ -609,7 +403,7 @@
 </file>
 
 <file path=ppt/notesSlides/notesSlide2.xml><?xml version="1.0" encoding="utf-8"?>
-<p:notes xmlns:a="http://schemas.openxmlformats.org/drawingml/2006/main" xmlns:p="http://schemas.openxmlformats.org/presentationml/2006/main" xmlns:r="http://schemas.openxmlformats.org/officeDocument/2006/relationships">
+<p:notes xmlns:a="http://schemas.openxmlformats.org/drawingml/2006/main" xmlns:r="http://schemas.openxmlformats.org/officeDocument/2006/relationships" xmlns:p="http://schemas.openxmlformats.org/presentationml/2006/main">
   <p:cSld>
     <p:spTree>
       <p:nvGrpSpPr>
@@ -629,7 +423,7 @@
         <p:nvSpPr>
           <p:cNvPr id="2" name="Slide Image Placeholder 1"/>
           <p:cNvSpPr>
-            <a:spLocks noGrp="1"/>
+            <a:spLocks noGrp="1" noRot="1" noChangeAspect="1"/>
           </p:cNvSpPr>
           <p:nvPr>
             <p:ph type="sldImg" idx="2"/>
@@ -644,7 +438,7 @@
             <a:spLocks noGrp="1"/>
           </p:cNvSpPr>
           <p:nvPr>
-            <p:ph type="body" idx="3" sz="quarter"/>
+            <p:ph type="body" sz="quarter" idx="3"/>
           </p:nvPr>
         </p:nvSpPr>
         <p:spPr/>
@@ -665,7 +459,7 @@
             <a:spLocks noGrp="1"/>
           </p:cNvSpPr>
           <p:nvPr>
-            <p:ph type="sldNum" idx="5" sz="quarter"/>
+            <p:ph type="sldNum" sz="quarter" idx="5"/>
           </p:nvPr>
         </p:nvSpPr>
         <p:spPr/>
@@ -679,7 +473,7 @@
 </file>
 
 <file path=ppt/notesSlides/notesSlide3.xml><?xml version="1.0" encoding="utf-8"?>
-<p:notes xmlns:a="http://schemas.openxmlformats.org/drawingml/2006/main" xmlns:p="http://schemas.openxmlformats.org/presentationml/2006/main" xmlns:r="http://schemas.openxmlformats.org/officeDocument/2006/relationships">
+<p:notes xmlns:a="http://schemas.openxmlformats.org/drawingml/2006/main" xmlns:r="http://schemas.openxmlformats.org/officeDocument/2006/relationships" xmlns:p="http://schemas.openxmlformats.org/presentationml/2006/main">
   <p:cSld>
     <p:spTree>
       <p:nvGrpSpPr>
@@ -699,7 +493,7 @@
         <p:nvSpPr>
           <p:cNvPr id="2" name="Slide Image Placeholder 1"/>
           <p:cNvSpPr>
-            <a:spLocks noGrp="1"/>
+            <a:spLocks noGrp="1" noRot="1" noChangeAspect="1"/>
           </p:cNvSpPr>
           <p:nvPr>
             <p:ph type="sldImg" idx="2"/>
@@ -714,7 +508,7 @@
             <a:spLocks noGrp="1"/>
           </p:cNvSpPr>
           <p:nvPr>
-            <p:ph type="body" idx="3" sz="quarter"/>
+            <p:ph type="body" sz="quarter" idx="3"/>
           </p:nvPr>
         </p:nvSpPr>
         <p:spPr/>
@@ -735,7 +529,7 @@
             <a:spLocks noGrp="1"/>
           </p:cNvSpPr>
           <p:nvPr>
-            <p:ph type="sldNum" idx="5" sz="quarter"/>
+            <p:ph type="sldNum" sz="quarter" idx="5"/>
           </p:nvPr>
         </p:nvSpPr>
         <p:spPr/>
@@ -749,7 +543,7 @@
 </file>
 
 <file path=ppt/notesSlides/notesSlide4.xml><?xml version="1.0" encoding="utf-8"?>
-<p:notes xmlns:a="http://schemas.openxmlformats.org/drawingml/2006/main" xmlns:p="http://schemas.openxmlformats.org/presentationml/2006/main" xmlns:r="http://schemas.openxmlformats.org/officeDocument/2006/relationships">
+<p:notes xmlns:a="http://schemas.openxmlformats.org/drawingml/2006/main" xmlns:r="http://schemas.openxmlformats.org/officeDocument/2006/relationships" xmlns:p="http://schemas.openxmlformats.org/presentationml/2006/main">
   <p:cSld>
     <p:spTree>
       <p:nvGrpSpPr>
@@ -769,7 +563,7 @@
         <p:nvSpPr>
           <p:cNvPr id="2" name="Slide Image Placeholder 1"/>
           <p:cNvSpPr>
-            <a:spLocks noGrp="1"/>
+            <a:spLocks noGrp="1" noRot="1" noChangeAspect="1"/>
           </p:cNvSpPr>
           <p:nvPr>
             <p:ph type="sldImg" idx="2"/>
@@ -784,7 +578,7 @@
             <a:spLocks noGrp="1"/>
           </p:cNvSpPr>
           <p:nvPr>
-            <p:ph type="body" idx="3" sz="quarter"/>
+            <p:ph type="body" sz="quarter" idx="3"/>
           </p:nvPr>
         </p:nvSpPr>
         <p:spPr/>
@@ -805,7 +599,7 @@
             <a:spLocks noGrp="1"/>
           </p:cNvSpPr>
           <p:nvPr>
-            <p:ph type="sldNum" idx="5" sz="quarter"/>
+            <p:ph type="sldNum" sz="quarter" idx="5"/>
           </p:nvPr>
         </p:nvSpPr>
         <p:spPr/>
@@ -819,7 +613,7 @@
 </file>
 
 <file path=ppt/notesSlides/notesSlide5.xml><?xml version="1.0" encoding="utf-8"?>
-<p:notes xmlns:a="http://schemas.openxmlformats.org/drawingml/2006/main" xmlns:p="http://schemas.openxmlformats.org/presentationml/2006/main" xmlns:r="http://schemas.openxmlformats.org/officeDocument/2006/relationships">
+<p:notes xmlns:a="http://schemas.openxmlformats.org/drawingml/2006/main" xmlns:r="http://schemas.openxmlformats.org/officeDocument/2006/relationships" xmlns:p="http://schemas.openxmlformats.org/presentationml/2006/main">
   <p:cSld>
     <p:spTree>
       <p:nvGrpSpPr>
@@ -839,7 +633,7 @@
         <p:nvSpPr>
           <p:cNvPr id="2" name="Slide Image Placeholder 1"/>
           <p:cNvSpPr>
-            <a:spLocks noGrp="1"/>
+            <a:spLocks noGrp="1" noRot="1" noChangeAspect="1"/>
           </p:cNvSpPr>
           <p:nvPr>
             <p:ph type="sldImg" idx="2"/>
@@ -854,7 +648,7 @@
             <a:spLocks noGrp="1"/>
           </p:cNvSpPr>
           <p:nvPr>
-            <p:ph type="body" idx="3" sz="quarter"/>
+            <p:ph type="body" sz="quarter" idx="3"/>
           </p:nvPr>
         </p:nvSpPr>
         <p:spPr/>
@@ -875,7 +669,7 @@
             <a:spLocks noGrp="1"/>
           </p:cNvSpPr>
           <p:nvPr>
-            <p:ph type="sldNum" idx="5" sz="quarter"/>
+            <p:ph type="sldNum" sz="quarter" idx="5"/>
           </p:nvPr>
         </p:nvSpPr>
         <p:spPr/>
@@ -889,7 +683,7 @@
 </file>
 
 <file path=ppt/notesSlides/notesSlide6.xml><?xml version="1.0" encoding="utf-8"?>
-<p:notes xmlns:a="http://schemas.openxmlformats.org/drawingml/2006/main" xmlns:p="http://schemas.openxmlformats.org/presentationml/2006/main" xmlns:r="http://schemas.openxmlformats.org/officeDocument/2006/relationships">
+<p:notes xmlns:a="http://schemas.openxmlformats.org/drawingml/2006/main" xmlns:r="http://schemas.openxmlformats.org/officeDocument/2006/relationships" xmlns:p="http://schemas.openxmlformats.org/presentationml/2006/main">
   <p:cSld>
     <p:spTree>
       <p:nvGrpSpPr>
@@ -909,7 +703,7 @@
         <p:nvSpPr>
           <p:cNvPr id="2" name="Slide Image Placeholder 1"/>
           <p:cNvSpPr>
-            <a:spLocks noGrp="1"/>
+            <a:spLocks noGrp="1" noRot="1" noChangeAspect="1"/>
           </p:cNvSpPr>
           <p:nvPr>
             <p:ph type="sldImg" idx="2"/>
@@ -924,7 +718,7 @@
             <a:spLocks noGrp="1"/>
           </p:cNvSpPr>
           <p:nvPr>
-            <p:ph type="body" idx="3" sz="quarter"/>
+            <p:ph type="body" sz="quarter" idx="3"/>
           </p:nvPr>
         </p:nvSpPr>
         <p:spPr/>
@@ -945,7 +739,7 @@
             <a:spLocks noGrp="1"/>
           </p:cNvSpPr>
           <p:nvPr>
-            <p:ph type="sldNum" idx="5" sz="quarter"/>
+            <p:ph type="sldNum" sz="quarter" idx="5"/>
           </p:nvPr>
         </p:nvSpPr>
         <p:spPr/>
@@ -959,7 +753,7 @@
 </file>
 
 <file path=ppt/notesSlides/notesSlide7.xml><?xml version="1.0" encoding="utf-8"?>
-<p:notes xmlns:a="http://schemas.openxmlformats.org/drawingml/2006/main" xmlns:p="http://schemas.openxmlformats.org/presentationml/2006/main" xmlns:r="http://schemas.openxmlformats.org/officeDocument/2006/relationships">
+<p:notes xmlns:a="http://schemas.openxmlformats.org/drawingml/2006/main" xmlns:r="http://schemas.openxmlformats.org/officeDocument/2006/relationships" xmlns:p="http://schemas.openxmlformats.org/presentationml/2006/main">
   <p:cSld>
     <p:spTree>
       <p:nvGrpSpPr>
@@ -979,7 +773,7 @@
         <p:nvSpPr>
           <p:cNvPr id="2" name="Slide Image Placeholder 1"/>
           <p:cNvSpPr>
-            <a:spLocks noGrp="1"/>
+            <a:spLocks noGrp="1" noRot="1" noChangeAspect="1"/>
           </p:cNvSpPr>
           <p:nvPr>
             <p:ph type="sldImg" idx="2"/>
@@ -994,7 +788,7 @@
             <a:spLocks noGrp="1"/>
           </p:cNvSpPr>
           <p:nvPr>
-            <p:ph type="body" idx="3" sz="quarter"/>
+            <p:ph type="body" sz="quarter" idx="3"/>
           </p:nvPr>
         </p:nvSpPr>
         <p:spPr/>
@@ -1015,7 +809,7 @@
             <a:spLocks noGrp="1"/>
           </p:cNvSpPr>
           <p:nvPr>
-            <p:ph type="sldNum" idx="5" sz="quarter"/>
+            <p:ph type="sldNum" sz="quarter" idx="5"/>
           </p:nvPr>
         </p:nvSpPr>
         <p:spPr/>
@@ -1029,7 +823,7 @@
 </file>
 
 <file path=ppt/notesSlides/notesSlide8.xml><?xml version="1.0" encoding="utf-8"?>
-<p:notes xmlns:a="http://schemas.openxmlformats.org/drawingml/2006/main" xmlns:p="http://schemas.openxmlformats.org/presentationml/2006/main" xmlns:r="http://schemas.openxmlformats.org/officeDocument/2006/relationships">
+<p:notes xmlns:a="http://schemas.openxmlformats.org/drawingml/2006/main" xmlns:r="http://schemas.openxmlformats.org/officeDocument/2006/relationships" xmlns:p="http://schemas.openxmlformats.org/presentationml/2006/main">
   <p:cSld>
     <p:spTree>
       <p:nvGrpSpPr>
@@ -1049,7 +843,7 @@
         <p:nvSpPr>
           <p:cNvPr id="2" name="Slide Image Placeholder 1"/>
           <p:cNvSpPr>
-            <a:spLocks noGrp="1"/>
+            <a:spLocks noGrp="1" noRot="1" noChangeAspect="1"/>
           </p:cNvSpPr>
           <p:nvPr>
             <p:ph type="sldImg" idx="2"/>
@@ -1064,7 +858,7 @@
             <a:spLocks noGrp="1"/>
           </p:cNvSpPr>
           <p:nvPr>
-            <p:ph type="body" idx="3" sz="quarter"/>
+            <p:ph type="body" sz="quarter" idx="3"/>
           </p:nvPr>
         </p:nvSpPr>
         <p:spPr/>
@@ -1085,7 +879,7 @@
             <a:spLocks noGrp="1"/>
           </p:cNvSpPr>
           <p:nvPr>
-            <p:ph type="sldNum" idx="5" sz="quarter"/>
+            <p:ph type="sldNum" sz="quarter" idx="5"/>
           </p:nvPr>
         </p:nvSpPr>
         <p:spPr/>
@@ -1099,7 +893,7 @@
 </file>
 
 <file path=ppt/notesSlides/notesSlide9.xml><?xml version="1.0" encoding="utf-8"?>
-<p:notes xmlns:a="http://schemas.openxmlformats.org/drawingml/2006/main" xmlns:p="http://schemas.openxmlformats.org/presentationml/2006/main" xmlns:r="http://schemas.openxmlformats.org/officeDocument/2006/relationships">
+<p:notes xmlns:a="http://schemas.openxmlformats.org/drawingml/2006/main" xmlns:r="http://schemas.openxmlformats.org/officeDocument/2006/relationships" xmlns:p="http://schemas.openxmlformats.org/presentationml/2006/main">
   <p:cSld>
     <p:spTree>
       <p:nvGrpSpPr>
@@ -1119,7 +913,7 @@
         <p:nvSpPr>
           <p:cNvPr id="2" name="Slide Image Placeholder 1"/>
           <p:cNvSpPr>
-            <a:spLocks noGrp="1"/>
+            <a:spLocks noGrp="1" noRot="1" noChangeAspect="1"/>
           </p:cNvSpPr>
           <p:nvPr>
             <p:ph type="sldImg" idx="2"/>
@@ -1134,7 +928,7 @@
             <a:spLocks noGrp="1"/>
           </p:cNvSpPr>
           <p:nvPr>
-            <p:ph type="body" idx="3" sz="quarter"/>
+            <p:ph type="body" sz="quarter" idx="3"/>
           </p:nvPr>
         </p:nvSpPr>
         <p:spPr/>
@@ -1155,7 +949,7 @@
             <a:spLocks noGrp="1"/>
           </p:cNvSpPr>
           <p:nvPr>
-            <p:ph type="sldNum" idx="5" sz="quarter"/>
+            <p:ph type="sldNum" sz="quarter" idx="5"/>
           </p:nvPr>
         </p:nvSpPr>
         <p:spPr/>
@@ -1206,10 +1000,9 @@
           <a:lstStyle/>
           <a:p>
             <a:r>
-              <a:rPr lang="en-US" smtClean="0"/>
+              <a:rPr lang="en-US"/>
               <a:t>Click to edit Master title style</a:t>
             </a:r>
-            <a:endParaRPr lang="en-US"/>
           </a:p>
         </p:txBody>
       </p:sp>
@@ -1325,10 +1118,9 @@
           </a:lstStyle>
           <a:p>
             <a:r>
-              <a:rPr lang="en-US" smtClean="0"/>
+              <a:rPr lang="en-US"/>
               <a:t>Click to edit Master subtitle style</a:t>
             </a:r>
-            <a:endParaRPr lang="en-US"/>
           </a:p>
         </p:txBody>
       </p:sp>
@@ -1349,7 +1141,7 @@
           <a:p>
             <a:fld id="{5BCAD085-E8A6-8845-BD4E-CB4CCA059FC4}" type="datetimeFigureOut">
               <a:rPr lang="en-US" smtClean="0"/>
-              <a:t>1/27/13</a:t>
+              <a:t>8/18/2026</a:t>
             </a:fld>
             <a:endParaRPr lang="en-US"/>
           </a:p>
@@ -1443,10 +1235,9 @@
           <a:lstStyle/>
           <a:p>
             <a:r>
-              <a:rPr lang="en-US" smtClean="0"/>
+              <a:rPr lang="en-US"/>
               <a:t>Click to edit Master title style</a:t>
             </a:r>
-            <a:endParaRPr lang="en-US"/>
           </a:p>
         </p:txBody>
       </p:sp>
@@ -1467,38 +1258,37 @@
           <a:p>
             <a:pPr lvl="0"/>
             <a:r>
-              <a:rPr lang="en-US" smtClean="0"/>
+              <a:rPr lang="en-US"/>
               <a:t>Click to edit Master text styles</a:t>
             </a:r>
           </a:p>
           <a:p>
             <a:pPr lvl="1"/>
             <a:r>
-              <a:rPr lang="en-US" smtClean="0"/>
+              <a:rPr lang="en-US"/>
               <a:t>Second level</a:t>
             </a:r>
           </a:p>
           <a:p>
             <a:pPr lvl="2"/>
             <a:r>
-              <a:rPr lang="en-US" smtClean="0"/>
+              <a:rPr lang="en-US"/>
               <a:t>Third level</a:t>
             </a:r>
           </a:p>
           <a:p>
             <a:pPr lvl="3"/>
             <a:r>
-              <a:rPr lang="en-US" smtClean="0"/>
+              <a:rPr lang="en-US"/>
               <a:t>Fourth level</a:t>
             </a:r>
           </a:p>
           <a:p>
             <a:pPr lvl="4"/>
             <a:r>
-              <a:rPr lang="en-US" smtClean="0"/>
+              <a:rPr lang="en-US"/>
               <a:t>Fifth level</a:t>
             </a:r>
-            <a:endParaRPr lang="en-US"/>
           </a:p>
         </p:txBody>
       </p:sp>
@@ -1519,7 +1309,7 @@
           <a:p>
             <a:fld id="{5BCAD085-E8A6-8845-BD4E-CB4CCA059FC4}" type="datetimeFigureOut">
               <a:rPr lang="en-US" smtClean="0"/>
-              <a:t>1/27/13</a:t>
+              <a:t>8/18/2026</a:t>
             </a:fld>
             <a:endParaRPr lang="en-US"/>
           </a:p>
@@ -1618,10 +1408,9 @@
           <a:lstStyle/>
           <a:p>
             <a:r>
-              <a:rPr lang="en-US" smtClean="0"/>
+              <a:rPr lang="en-US"/>
               <a:t>Click to edit Master title style</a:t>
             </a:r>
-            <a:endParaRPr lang="en-US"/>
           </a:p>
         </p:txBody>
       </p:sp>
@@ -1647,38 +1436,37 @@
           <a:p>
             <a:pPr lvl="0"/>
             <a:r>
-              <a:rPr lang="en-US" smtClean="0"/>
+              <a:rPr lang="en-US"/>
               <a:t>Click to edit Master text styles</a:t>
             </a:r>
           </a:p>
           <a:p>
             <a:pPr lvl="1"/>
             <a:r>
-              <a:rPr lang="en-US" smtClean="0"/>
+              <a:rPr lang="en-US"/>
               <a:t>Second level</a:t>
             </a:r>
           </a:p>
           <a:p>
             <a:pPr lvl="2"/>
             <a:r>
-              <a:rPr lang="en-US" smtClean="0"/>
+              <a:rPr lang="en-US"/>
               <a:t>Third level</a:t>
             </a:r>
           </a:p>
           <a:p>
             <a:pPr lvl="3"/>
             <a:r>
-              <a:rPr lang="en-US" smtClean="0"/>
+              <a:rPr lang="en-US"/>
               <a:t>Fourth level</a:t>
             </a:r>
           </a:p>
           <a:p>
             <a:pPr lvl="4"/>
             <a:r>
-              <a:rPr lang="en-US" smtClean="0"/>
+              <a:rPr lang="en-US"/>
               <a:t>Fifth level</a:t>
             </a:r>
-            <a:endParaRPr lang="en-US"/>
           </a:p>
         </p:txBody>
       </p:sp>
@@ -1699,7 +1487,7 @@
           <a:p>
             <a:fld id="{5BCAD085-E8A6-8845-BD4E-CB4CCA059FC4}" type="datetimeFigureOut">
               <a:rPr lang="en-US" smtClean="0"/>
-              <a:t>1/27/13</a:t>
+              <a:t>8/18/2026</a:t>
             </a:fld>
             <a:endParaRPr lang="en-US"/>
           </a:p>
@@ -1793,10 +1581,9 @@
           <a:lstStyle/>
           <a:p>
             <a:r>
-              <a:rPr lang="en-US" smtClean="0"/>
+              <a:rPr lang="en-US"/>
               <a:t>Click to edit Master title style</a:t>
             </a:r>
-            <a:endParaRPr lang="en-US"/>
           </a:p>
         </p:txBody>
       </p:sp>
@@ -1817,38 +1604,37 @@
           <a:p>
             <a:pPr lvl="0"/>
             <a:r>
-              <a:rPr lang="en-US" smtClean="0"/>
+              <a:rPr lang="en-US"/>
               <a:t>Click to edit Master text styles</a:t>
             </a:r>
           </a:p>
           <a:p>
             <a:pPr lvl="1"/>
             <a:r>
-              <a:rPr lang="en-US" smtClean="0"/>
+              <a:rPr lang="en-US"/>
               <a:t>Second level</a:t>
             </a:r>
           </a:p>
           <a:p>
             <a:pPr lvl="2"/>
             <a:r>
-              <a:rPr lang="en-US" smtClean="0"/>
+              <a:rPr lang="en-US"/>
               <a:t>Third level</a:t>
             </a:r>
           </a:p>
           <a:p>
             <a:pPr lvl="3"/>
             <a:r>
-              <a:rPr lang="en-US" smtClean="0"/>
+              <a:rPr lang="en-US"/>
               <a:t>Fourth level</a:t>
             </a:r>
           </a:p>
           <a:p>
             <a:pPr lvl="4"/>
             <a:r>
-              <a:rPr lang="en-US" smtClean="0"/>
+              <a:rPr lang="en-US"/>
               <a:t>Fifth level</a:t>
             </a:r>
-            <a:endParaRPr lang="en-US"/>
           </a:p>
         </p:txBody>
       </p:sp>
@@ -1869,7 +1655,7 @@
           <a:p>
             <a:fld id="{5BCAD085-E8A6-8845-BD4E-CB4CCA059FC4}" type="datetimeFigureOut">
               <a:rPr lang="en-US" smtClean="0"/>
-              <a:t>1/27/13</a:t>
+              <a:t>8/18/2026</a:t>
             </a:fld>
             <a:endParaRPr lang="en-US"/>
           </a:p>
@@ -1972,10 +1758,9 @@
           </a:lstStyle>
           <a:p>
             <a:r>
-              <a:rPr lang="en-US" smtClean="0"/>
+              <a:rPr lang="en-US"/>
               <a:t>Click to edit Master title style</a:t>
             </a:r>
-            <a:endParaRPr lang="en-US"/>
           </a:p>
         </p:txBody>
       </p:sp>
@@ -2092,7 +1877,7 @@
           <a:p>
             <a:pPr lvl="0"/>
             <a:r>
-              <a:rPr lang="en-US" smtClean="0"/>
+              <a:rPr lang="en-US"/>
               <a:t>Click to edit Master text styles</a:t>
             </a:r>
           </a:p>
@@ -2115,7 +1900,7 @@
           <a:p>
             <a:fld id="{5BCAD085-E8A6-8845-BD4E-CB4CCA059FC4}" type="datetimeFigureOut">
               <a:rPr lang="en-US" smtClean="0"/>
-              <a:t>1/27/13</a:t>
+              <a:t>8/18/2026</a:t>
             </a:fld>
             <a:endParaRPr lang="en-US"/>
           </a:p>
@@ -2209,10 +1994,9 @@
           <a:lstStyle/>
           <a:p>
             <a:r>
-              <a:rPr lang="en-US" smtClean="0"/>
+              <a:rPr lang="en-US"/>
               <a:t>Click to edit Master title style</a:t>
             </a:r>
-            <a:endParaRPr lang="en-US"/>
           </a:p>
         </p:txBody>
       </p:sp>
@@ -2266,38 +2050,37 @@
           <a:p>
             <a:pPr lvl="0"/>
             <a:r>
-              <a:rPr lang="en-US" smtClean="0"/>
+              <a:rPr lang="en-US"/>
               <a:t>Click to edit Master text styles</a:t>
             </a:r>
           </a:p>
           <a:p>
             <a:pPr lvl="1"/>
             <a:r>
-              <a:rPr lang="en-US" smtClean="0"/>
+              <a:rPr lang="en-US"/>
               <a:t>Second level</a:t>
             </a:r>
           </a:p>
           <a:p>
             <a:pPr lvl="2"/>
             <a:r>
-              <a:rPr lang="en-US" smtClean="0"/>
+              <a:rPr lang="en-US"/>
               <a:t>Third level</a:t>
             </a:r>
           </a:p>
           <a:p>
             <a:pPr lvl="3"/>
             <a:r>
-              <a:rPr lang="en-US" smtClean="0"/>
+              <a:rPr lang="en-US"/>
               <a:t>Fourth level</a:t>
             </a:r>
           </a:p>
           <a:p>
             <a:pPr lvl="4"/>
             <a:r>
-              <a:rPr lang="en-US" smtClean="0"/>
+              <a:rPr lang="en-US"/>
               <a:t>Fifth level</a:t>
             </a:r>
-            <a:endParaRPr lang="en-US"/>
           </a:p>
         </p:txBody>
       </p:sp>
@@ -2351,38 +2134,37 @@
           <a:p>
             <a:pPr lvl="0"/>
             <a:r>
-              <a:rPr lang="en-US" smtClean="0"/>
+              <a:rPr lang="en-US"/>
               <a:t>Click to edit Master text styles</a:t>
             </a:r>
           </a:p>
           <a:p>
             <a:pPr lvl="1"/>
             <a:r>
-              <a:rPr lang="en-US" smtClean="0"/>
+              <a:rPr lang="en-US"/>
               <a:t>Second level</a:t>
             </a:r>
           </a:p>
           <a:p>
             <a:pPr lvl="2"/>
             <a:r>
-              <a:rPr lang="en-US" smtClean="0"/>
+              <a:rPr lang="en-US"/>
               <a:t>Third level</a:t>
             </a:r>
           </a:p>
           <a:p>
             <a:pPr lvl="3"/>
             <a:r>
-              <a:rPr lang="en-US" smtClean="0"/>
+              <a:rPr lang="en-US"/>
               <a:t>Fourth level</a:t>
             </a:r>
           </a:p>
           <a:p>
             <a:pPr lvl="4"/>
             <a:r>
-              <a:rPr lang="en-US" smtClean="0"/>
+              <a:rPr lang="en-US"/>
               <a:t>Fifth level</a:t>
             </a:r>
-            <a:endParaRPr lang="en-US"/>
           </a:p>
         </p:txBody>
       </p:sp>
@@ -2403,7 +2185,7 @@
           <a:p>
             <a:fld id="{5BCAD085-E8A6-8845-BD4E-CB4CCA059FC4}" type="datetimeFigureOut">
               <a:rPr lang="en-US" smtClean="0"/>
-              <a:t>1/27/13</a:t>
+              <a:t>8/18/2026</a:t>
             </a:fld>
             <a:endParaRPr lang="en-US"/>
           </a:p>
@@ -2501,10 +2283,9 @@
           </a:lstStyle>
           <a:p>
             <a:r>
-              <a:rPr lang="en-US" smtClean="0"/>
+              <a:rPr lang="en-US"/>
               <a:t>Click to edit Master title style</a:t>
             </a:r>
-            <a:endParaRPr lang="en-US"/>
           </a:p>
         </p:txBody>
       </p:sp>
@@ -2567,7 +2348,7 @@
           <a:p>
             <a:pPr lvl="0"/>
             <a:r>
-              <a:rPr lang="en-US" smtClean="0"/>
+              <a:rPr lang="en-US"/>
               <a:t>Click to edit Master text styles</a:t>
             </a:r>
           </a:p>
@@ -2623,38 +2404,37 @@
           <a:p>
             <a:pPr lvl="0"/>
             <a:r>
-              <a:rPr lang="en-US" smtClean="0"/>
+              <a:rPr lang="en-US"/>
               <a:t>Click to edit Master text styles</a:t>
             </a:r>
           </a:p>
           <a:p>
             <a:pPr lvl="1"/>
             <a:r>
-              <a:rPr lang="en-US" smtClean="0"/>
+              <a:rPr lang="en-US"/>
               <a:t>Second level</a:t>
             </a:r>
           </a:p>
           <a:p>
             <a:pPr lvl="2"/>
             <a:r>
-              <a:rPr lang="en-US" smtClean="0"/>
+              <a:rPr lang="en-US"/>
               <a:t>Third level</a:t>
             </a:r>
           </a:p>
           <a:p>
             <a:pPr lvl="3"/>
             <a:r>
-              <a:rPr lang="en-US" smtClean="0"/>
+              <a:rPr lang="en-US"/>
               <a:t>Fourth level</a:t>
             </a:r>
           </a:p>
           <a:p>
             <a:pPr lvl="4"/>
             <a:r>
-              <a:rPr lang="en-US" smtClean="0"/>
+              <a:rPr lang="en-US"/>
               <a:t>Fifth level</a:t>
             </a:r>
-            <a:endParaRPr lang="en-US"/>
           </a:p>
         </p:txBody>
       </p:sp>
@@ -2717,7 +2497,7 @@
           <a:p>
             <a:pPr lvl="0"/>
             <a:r>
-              <a:rPr lang="en-US" smtClean="0"/>
+              <a:rPr lang="en-US"/>
               <a:t>Click to edit Master text styles</a:t>
             </a:r>
           </a:p>
@@ -2773,38 +2553,37 @@
           <a:p>
             <a:pPr lvl="0"/>
             <a:r>
-              <a:rPr lang="en-US" smtClean="0"/>
+              <a:rPr lang="en-US"/>
               <a:t>Click to edit Master text styles</a:t>
             </a:r>
           </a:p>
           <a:p>
             <a:pPr lvl="1"/>
             <a:r>
-              <a:rPr lang="en-US" smtClean="0"/>
+              <a:rPr lang="en-US"/>
               <a:t>Second level</a:t>
             </a:r>
           </a:p>
           <a:p>
             <a:pPr lvl="2"/>
             <a:r>
-              <a:rPr lang="en-US" smtClean="0"/>
+              <a:rPr lang="en-US"/>
               <a:t>Third level</a:t>
             </a:r>
           </a:p>
           <a:p>
             <a:pPr lvl="3"/>
             <a:r>
-              <a:rPr lang="en-US" smtClean="0"/>
+              <a:rPr lang="en-US"/>
               <a:t>Fourth level</a:t>
             </a:r>
           </a:p>
           <a:p>
             <a:pPr lvl="4"/>
             <a:r>
-              <a:rPr lang="en-US" smtClean="0"/>
+              <a:rPr lang="en-US"/>
               <a:t>Fifth level</a:t>
             </a:r>
-            <a:endParaRPr lang="en-US"/>
           </a:p>
         </p:txBody>
       </p:sp>
@@ -2825,7 +2604,7 @@
           <a:p>
             <a:fld id="{5BCAD085-E8A6-8845-BD4E-CB4CCA059FC4}" type="datetimeFigureOut">
               <a:rPr lang="en-US" smtClean="0"/>
-              <a:t>1/27/13</a:t>
+              <a:t>8/18/2026</a:t>
             </a:fld>
             <a:endParaRPr lang="en-US"/>
           </a:p>
@@ -2919,10 +2698,9 @@
           <a:lstStyle/>
           <a:p>
             <a:r>
-              <a:rPr lang="en-US" smtClean="0"/>
+              <a:rPr lang="en-US"/>
               <a:t>Click to edit Master title style</a:t>
             </a:r>
-            <a:endParaRPr lang="en-US"/>
           </a:p>
         </p:txBody>
       </p:sp>
@@ -2943,7 +2721,7 @@
           <a:p>
             <a:fld id="{5BCAD085-E8A6-8845-BD4E-CB4CCA059FC4}" type="datetimeFigureOut">
               <a:rPr lang="en-US" smtClean="0"/>
-              <a:t>1/27/13</a:t>
+              <a:t>8/18/2026</a:t>
             </a:fld>
             <a:endParaRPr lang="en-US"/>
           </a:p>
@@ -3038,7 +2816,7 @@
           <a:p>
             <a:fld id="{5BCAD085-E8A6-8845-BD4E-CB4CCA059FC4}" type="datetimeFigureOut">
               <a:rPr lang="en-US" smtClean="0"/>
-              <a:t>1/27/13</a:t>
+              <a:t>8/18/2026</a:t>
             </a:fld>
             <a:endParaRPr lang="en-US"/>
           </a:p>
@@ -3141,10 +2919,9 @@
           </a:lstStyle>
           <a:p>
             <a:r>
-              <a:rPr lang="en-US" smtClean="0"/>
+              <a:rPr lang="en-US"/>
               <a:t>Click to edit Master title style</a:t>
             </a:r>
-            <a:endParaRPr lang="en-US"/>
           </a:p>
         </p:txBody>
       </p:sp>
@@ -3198,38 +2975,37 @@
           <a:p>
             <a:pPr lvl="0"/>
             <a:r>
-              <a:rPr lang="en-US" smtClean="0"/>
+              <a:rPr lang="en-US"/>
               <a:t>Click to edit Master text styles</a:t>
             </a:r>
           </a:p>
           <a:p>
             <a:pPr lvl="1"/>
             <a:r>
-              <a:rPr lang="en-US" smtClean="0"/>
+              <a:rPr lang="en-US"/>
               <a:t>Second level</a:t>
             </a:r>
           </a:p>
           <a:p>
             <a:pPr lvl="2"/>
             <a:r>
-              <a:rPr lang="en-US" smtClean="0"/>
+              <a:rPr lang="en-US"/>
               <a:t>Third level</a:t>
             </a:r>
           </a:p>
           <a:p>
             <a:pPr lvl="3"/>
             <a:r>
-              <a:rPr lang="en-US" smtClean="0"/>
+              <a:rPr lang="en-US"/>
               <a:t>Fourth level</a:t>
             </a:r>
           </a:p>
           <a:p>
             <a:pPr lvl="4"/>
             <a:r>
-              <a:rPr lang="en-US" smtClean="0"/>
+              <a:rPr lang="en-US"/>
               <a:t>Fifth level</a:t>
             </a:r>
-            <a:endParaRPr lang="en-US"/>
           </a:p>
         </p:txBody>
       </p:sp>
@@ -3292,7 +3068,7 @@
           <a:p>
             <a:pPr lvl="0"/>
             <a:r>
-              <a:rPr lang="en-US" smtClean="0"/>
+              <a:rPr lang="en-US"/>
               <a:t>Click to edit Master text styles</a:t>
             </a:r>
           </a:p>
@@ -3315,7 +3091,7 @@
           <a:p>
             <a:fld id="{5BCAD085-E8A6-8845-BD4E-CB4CCA059FC4}" type="datetimeFigureOut">
               <a:rPr lang="en-US" smtClean="0"/>
-              <a:t>1/27/13</a:t>
+              <a:t>8/18/2026</a:t>
             </a:fld>
             <a:endParaRPr lang="en-US"/>
           </a:p>
@@ -3418,10 +3194,9 @@
           </a:lstStyle>
           <a:p>
             <a:r>
-              <a:rPr lang="en-US" smtClean="0"/>
+              <a:rPr lang="en-US"/>
               <a:t>Click to edit Master title style</a:t>
             </a:r>
-            <a:endParaRPr lang="en-US"/>
           </a:p>
         </p:txBody>
       </p:sp>
@@ -3545,7 +3320,7 @@
           <a:p>
             <a:pPr lvl="0"/>
             <a:r>
-              <a:rPr lang="en-US" smtClean="0"/>
+              <a:rPr lang="en-US"/>
               <a:t>Click to edit Master text styles</a:t>
             </a:r>
           </a:p>
@@ -3568,7 +3343,7 @@
           <a:p>
             <a:fld id="{5BCAD085-E8A6-8845-BD4E-CB4CCA059FC4}" type="datetimeFigureOut">
               <a:rPr lang="en-US" smtClean="0"/>
-              <a:t>1/27/13</a:t>
+              <a:t>8/18/2026</a:t>
             </a:fld>
             <a:endParaRPr lang="en-US"/>
           </a:p>
@@ -3677,10 +3452,9 @@
           <a:lstStyle/>
           <a:p>
             <a:r>
-              <a:rPr lang="en-US" smtClean="0"/>
+              <a:rPr lang="en-US"/>
               <a:t>Click to edit Master title style</a:t>
             </a:r>
-            <a:endParaRPr lang="en-US"/>
           </a:p>
         </p:txBody>
       </p:sp>
@@ -3711,38 +3485,37 @@
           <a:p>
             <a:pPr lvl="0"/>
             <a:r>
-              <a:rPr lang="en-US" smtClean="0"/>
+              <a:rPr lang="en-US"/>
               <a:t>Click to edit Master text styles</a:t>
             </a:r>
           </a:p>
           <a:p>
             <a:pPr lvl="1"/>
             <a:r>
-              <a:rPr lang="en-US" smtClean="0"/>
+              <a:rPr lang="en-US"/>
               <a:t>Second level</a:t>
             </a:r>
           </a:p>
           <a:p>
             <a:pPr lvl="2"/>
             <a:r>
-              <a:rPr lang="en-US" smtClean="0"/>
+              <a:rPr lang="en-US"/>
               <a:t>Third level</a:t>
             </a:r>
           </a:p>
           <a:p>
             <a:pPr lvl="3"/>
             <a:r>
-              <a:rPr lang="en-US" smtClean="0"/>
+              <a:rPr lang="en-US"/>
               <a:t>Fourth level</a:t>
             </a:r>
           </a:p>
           <a:p>
             <a:pPr lvl="4"/>
             <a:r>
-              <a:rPr lang="en-US" smtClean="0"/>
+              <a:rPr lang="en-US"/>
               <a:t>Fifth level</a:t>
             </a:r>
-            <a:endParaRPr lang="en-US"/>
           </a:p>
         </p:txBody>
       </p:sp>
@@ -3781,7 +3554,7 @@
           <a:p>
             <a:fld id="{5BCAD085-E8A6-8845-BD4E-CB4CCA059FC4}" type="datetimeFigureOut">
               <a:rPr lang="en-US" smtClean="0"/>
-              <a:t>1/27/13</a:t>
+              <a:t>8/18/2026</a:t>
             </a:fld>
             <a:endParaRPr lang="en-US"/>
           </a:p>
@@ -4140,7 +3913,7 @@
 </file>
 
 <file path=ppt/slides/slide1.xml><?xml version="1.0" encoding="utf-8"?>
-<p:sld xmlns:a="http://schemas.openxmlformats.org/drawingml/2006/main" xmlns:p="http://schemas.openxmlformats.org/presentationml/2006/main" xmlns:r="http://schemas.openxmlformats.org/officeDocument/2006/relationships">
+<p:sld xmlns:a="http://schemas.openxmlformats.org/drawingml/2006/main" xmlns:r="http://schemas.openxmlformats.org/officeDocument/2006/relationships" xmlns:p="http://schemas.openxmlformats.org/presentationml/2006/main">
   <p:cSld>
     <p:spTree>
       <p:nvGrpSpPr>
@@ -4148,7 +3921,14 @@
         <p:cNvGrpSpPr/>
         <p:nvPr/>
       </p:nvGrpSpPr>
-      <p:grpSpPr/>
+      <p:grpSpPr>
+        <a:xfrm>
+          <a:off x="0" y="0"/>
+          <a:ext cx="0" cy="0"/>
+          <a:chOff x="0" y="0"/>
+          <a:chExt cx="0" cy="0"/>
+        </a:xfrm>
+      </p:grpSpPr>
       <p:pic>
         <p:nvPicPr>
           <p:cNvPr id="2" name="Picture 1" descr="pes_logo.png"/>
@@ -4158,7 +3938,7 @@
           <p:nvPr/>
         </p:nvPicPr>
         <p:blipFill>
-          <a:blip r:embed="rId2"/>
+          <a:blip r:embed="rId3"/>
           <a:stretch>
             <a:fillRect/>
           </a:stretch>
@@ -4360,6 +4140,7 @@
           <a:lstStyle/>
           <a:p>
             <a:pPr algn="ctr"/>
+            <a:endParaRPr/>
           </a:p>
         </p:txBody>
       </p:sp>
@@ -4403,6 +4184,7 @@
           <a:lstStyle/>
           <a:p>
             <a:pPr algn="ctr"/>
+            <a:endParaRPr/>
           </a:p>
         </p:txBody>
       </p:sp>
@@ -4415,7 +4197,7 @@
 </file>
 
 <file path=ppt/slides/slide10.xml><?xml version="1.0" encoding="utf-8"?>
-<p:sld xmlns:a="http://schemas.openxmlformats.org/drawingml/2006/main" xmlns:p="http://schemas.openxmlformats.org/presentationml/2006/main" xmlns:r="http://schemas.openxmlformats.org/officeDocument/2006/relationships">
+<p:sld xmlns:a="http://schemas.openxmlformats.org/drawingml/2006/main" xmlns:r="http://schemas.openxmlformats.org/officeDocument/2006/relationships" xmlns:p="http://schemas.openxmlformats.org/presentationml/2006/main">
   <p:cSld>
     <p:spTree>
       <p:nvGrpSpPr>
@@ -4423,7 +4205,14 @@
         <p:cNvGrpSpPr/>
         <p:nvPr/>
       </p:nvGrpSpPr>
-      <p:grpSpPr/>
+      <p:grpSpPr>
+        <a:xfrm>
+          <a:off x="0" y="0"/>
+          <a:ext cx="0" cy="0"/>
+          <a:chOff x="0" y="0"/>
+          <a:chExt cx="0" cy="0"/>
+        </a:xfrm>
+      </p:grpSpPr>
       <p:sp>
         <p:nvSpPr>
           <p:cNvPr id="2" name="TextBox 1"/>
@@ -4468,7 +4257,7 @@
           <p:nvPr/>
         </p:nvPicPr>
         <p:blipFill>
-          <a:blip r:embed="rId2"/>
+          <a:blip r:embed="rId3"/>
           <a:stretch>
             <a:fillRect/>
           </a:stretch>
@@ -4558,6 +4347,7 @@
           <a:lstStyle/>
           <a:p>
             <a:pPr algn="ctr"/>
+            <a:endParaRPr/>
           </a:p>
         </p:txBody>
       </p:sp>
@@ -4601,6 +4391,7 @@
           <a:lstStyle/>
           <a:p>
             <a:pPr algn="ctr"/>
+            <a:endParaRPr/>
           </a:p>
         </p:txBody>
       </p:sp>
@@ -5031,6 +4822,7 @@
           <a:lstStyle/>
           <a:p>
             <a:pPr algn="ctr"/>
+            <a:endParaRPr/>
           </a:p>
         </p:txBody>
       </p:sp>
@@ -5076,6 +4868,7 @@
           <a:lstStyle/>
           <a:p>
             <a:pPr algn="ctr"/>
+            <a:endParaRPr/>
           </a:p>
         </p:txBody>
       </p:sp>
@@ -5121,6 +4914,7 @@
           <a:lstStyle/>
           <a:p>
             <a:pPr algn="ctr"/>
+            <a:endParaRPr/>
           </a:p>
         </p:txBody>
       </p:sp>
@@ -5166,6 +4960,7 @@
           <a:lstStyle/>
           <a:p>
             <a:pPr algn="ctr"/>
+            <a:endParaRPr/>
           </a:p>
         </p:txBody>
       </p:sp>
@@ -5211,6 +5006,7 @@
           <a:lstStyle/>
           <a:p>
             <a:pPr algn="ctr"/>
+            <a:endParaRPr/>
           </a:p>
         </p:txBody>
       </p:sp>
@@ -5256,6 +5052,7 @@
           <a:lstStyle/>
           <a:p>
             <a:pPr algn="ctr"/>
+            <a:endParaRPr/>
           </a:p>
         </p:txBody>
       </p:sp>
@@ -5301,6 +5098,7 @@
           <a:lstStyle/>
           <a:p>
             <a:pPr algn="ctr"/>
+            <a:endParaRPr/>
           </a:p>
         </p:txBody>
       </p:sp>
@@ -5346,6 +5144,7 @@
           <a:lstStyle/>
           <a:p>
             <a:pPr algn="ctr"/>
+            <a:endParaRPr/>
           </a:p>
         </p:txBody>
       </p:sp>
@@ -5389,6 +5188,7 @@
           <a:lstStyle/>
           <a:p>
             <a:pPr algn="ctr"/>
+            <a:endParaRPr/>
           </a:p>
         </p:txBody>
       </p:sp>
@@ -5469,6 +5269,7 @@
           <a:lstStyle/>
           <a:p>
             <a:pPr algn="ctr"/>
+            <a:endParaRPr/>
           </a:p>
         </p:txBody>
       </p:sp>
@@ -5514,6 +5315,7 @@
           <a:lstStyle/>
           <a:p>
             <a:pPr algn="ctr"/>
+            <a:endParaRPr/>
           </a:p>
         </p:txBody>
       </p:sp>
@@ -5559,6 +5361,7 @@
           <a:lstStyle/>
           <a:p>
             <a:pPr algn="ctr"/>
+            <a:endParaRPr/>
           </a:p>
         </p:txBody>
       </p:sp>
@@ -5604,6 +5407,7 @@
           <a:lstStyle/>
           <a:p>
             <a:pPr algn="ctr"/>
+            <a:endParaRPr/>
           </a:p>
         </p:txBody>
       </p:sp>
@@ -5649,6 +5453,7 @@
           <a:lstStyle/>
           <a:p>
             <a:pPr algn="ctr"/>
+            <a:endParaRPr/>
           </a:p>
         </p:txBody>
       </p:sp>
@@ -5694,6 +5499,7 @@
           <a:lstStyle/>
           <a:p>
             <a:pPr algn="ctr"/>
+            <a:endParaRPr/>
           </a:p>
         </p:txBody>
       </p:sp>
@@ -5739,6 +5545,7 @@
           <a:lstStyle/>
           <a:p>
             <a:pPr algn="ctr"/>
+            <a:endParaRPr/>
           </a:p>
         </p:txBody>
       </p:sp>
@@ -5784,6 +5591,7 @@
           <a:lstStyle/>
           <a:p>
             <a:pPr algn="ctr"/>
+            <a:endParaRPr/>
           </a:p>
         </p:txBody>
       </p:sp>
@@ -5827,6 +5635,7 @@
           <a:lstStyle/>
           <a:p>
             <a:pPr algn="ctr"/>
+            <a:endParaRPr/>
           </a:p>
         </p:txBody>
       </p:sp>
@@ -5907,6 +5716,7 @@
           <a:lstStyle/>
           <a:p>
             <a:pPr algn="ctr"/>
+            <a:endParaRPr/>
           </a:p>
         </p:txBody>
       </p:sp>
@@ -5952,6 +5762,7 @@
           <a:lstStyle/>
           <a:p>
             <a:pPr algn="ctr"/>
+            <a:endParaRPr/>
           </a:p>
         </p:txBody>
       </p:sp>
@@ -5997,6 +5808,7 @@
           <a:lstStyle/>
           <a:p>
             <a:pPr algn="ctr"/>
+            <a:endParaRPr/>
           </a:p>
         </p:txBody>
       </p:sp>
@@ -6042,6 +5854,7 @@
           <a:lstStyle/>
           <a:p>
             <a:pPr algn="ctr"/>
+            <a:endParaRPr/>
           </a:p>
         </p:txBody>
       </p:sp>
@@ -6087,6 +5900,7 @@
           <a:lstStyle/>
           <a:p>
             <a:pPr algn="ctr"/>
+            <a:endParaRPr/>
           </a:p>
         </p:txBody>
       </p:sp>
@@ -6132,6 +5946,7 @@
           <a:lstStyle/>
           <a:p>
             <a:pPr algn="ctr"/>
+            <a:endParaRPr/>
           </a:p>
         </p:txBody>
       </p:sp>
@@ -6177,6 +5992,7 @@
           <a:lstStyle/>
           <a:p>
             <a:pPr algn="ctr"/>
+            <a:endParaRPr/>
           </a:p>
         </p:txBody>
       </p:sp>
@@ -6222,6 +6038,7 @@
           <a:lstStyle/>
           <a:p>
             <a:pPr algn="ctr"/>
+            <a:endParaRPr/>
           </a:p>
         </p:txBody>
       </p:sp>
@@ -6265,6 +6082,7 @@
           <a:lstStyle/>
           <a:p>
             <a:pPr algn="ctr"/>
+            <a:endParaRPr/>
           </a:p>
         </p:txBody>
       </p:sp>
@@ -6345,6 +6163,7 @@
           <a:lstStyle/>
           <a:p>
             <a:pPr algn="ctr"/>
+            <a:endParaRPr/>
           </a:p>
         </p:txBody>
       </p:sp>
@@ -6390,6 +6209,7 @@
           <a:lstStyle/>
           <a:p>
             <a:pPr algn="ctr"/>
+            <a:endParaRPr/>
           </a:p>
         </p:txBody>
       </p:sp>
@@ -6435,6 +6255,7 @@
           <a:lstStyle/>
           <a:p>
             <a:pPr algn="ctr"/>
+            <a:endParaRPr/>
           </a:p>
         </p:txBody>
       </p:sp>
@@ -6480,6 +6301,7 @@
           <a:lstStyle/>
           <a:p>
             <a:pPr algn="ctr"/>
+            <a:endParaRPr/>
           </a:p>
         </p:txBody>
       </p:sp>
@@ -6525,6 +6347,7 @@
           <a:lstStyle/>
           <a:p>
             <a:pPr algn="ctr"/>
+            <a:endParaRPr/>
           </a:p>
         </p:txBody>
       </p:sp>
@@ -6570,6 +6393,7 @@
           <a:lstStyle/>
           <a:p>
             <a:pPr algn="ctr"/>
+            <a:endParaRPr/>
           </a:p>
         </p:txBody>
       </p:sp>
@@ -6615,6 +6439,7 @@
           <a:lstStyle/>
           <a:p>
             <a:pPr algn="ctr"/>
+            <a:endParaRPr/>
           </a:p>
         </p:txBody>
       </p:sp>
@@ -6660,6 +6485,7 @@
           <a:lstStyle/>
           <a:p>
             <a:pPr algn="ctr"/>
+            <a:endParaRPr/>
           </a:p>
         </p:txBody>
       </p:sp>
@@ -6703,6 +6529,7 @@
           <a:lstStyle/>
           <a:p>
             <a:pPr algn="ctr"/>
+            <a:endParaRPr/>
           </a:p>
         </p:txBody>
       </p:sp>
@@ -6783,6 +6610,7 @@
           <a:lstStyle/>
           <a:p>
             <a:pPr algn="ctr"/>
+            <a:endParaRPr/>
           </a:p>
         </p:txBody>
       </p:sp>
@@ -6828,6 +6656,7 @@
           <a:lstStyle/>
           <a:p>
             <a:pPr algn="ctr"/>
+            <a:endParaRPr/>
           </a:p>
         </p:txBody>
       </p:sp>
@@ -6873,6 +6702,7 @@
           <a:lstStyle/>
           <a:p>
             <a:pPr algn="ctr"/>
+            <a:endParaRPr/>
           </a:p>
         </p:txBody>
       </p:sp>
@@ -6918,6 +6748,7 @@
           <a:lstStyle/>
           <a:p>
             <a:pPr algn="ctr"/>
+            <a:endParaRPr/>
           </a:p>
         </p:txBody>
       </p:sp>
@@ -6963,6 +6794,7 @@
           <a:lstStyle/>
           <a:p>
             <a:pPr algn="ctr"/>
+            <a:endParaRPr/>
           </a:p>
         </p:txBody>
       </p:sp>
@@ -7008,6 +6840,7 @@
           <a:lstStyle/>
           <a:p>
             <a:pPr algn="ctr"/>
+            <a:endParaRPr/>
           </a:p>
         </p:txBody>
       </p:sp>
@@ -7053,6 +6886,7 @@
           <a:lstStyle/>
           <a:p>
             <a:pPr algn="ctr"/>
+            <a:endParaRPr/>
           </a:p>
         </p:txBody>
       </p:sp>
@@ -7098,6 +6932,7 @@
           <a:lstStyle/>
           <a:p>
             <a:pPr algn="ctr"/>
+            <a:endParaRPr/>
           </a:p>
         </p:txBody>
       </p:sp>
@@ -7141,6 +6976,7 @@
           <a:lstStyle/>
           <a:p>
             <a:pPr algn="ctr"/>
+            <a:endParaRPr/>
           </a:p>
         </p:txBody>
       </p:sp>
@@ -7221,6 +7057,7 @@
           <a:lstStyle/>
           <a:p>
             <a:pPr algn="ctr"/>
+            <a:endParaRPr/>
           </a:p>
         </p:txBody>
       </p:sp>
@@ -7266,6 +7103,7 @@
           <a:lstStyle/>
           <a:p>
             <a:pPr algn="ctr"/>
+            <a:endParaRPr/>
           </a:p>
         </p:txBody>
       </p:sp>
@@ -7311,6 +7149,7 @@
           <a:lstStyle/>
           <a:p>
             <a:pPr algn="ctr"/>
+            <a:endParaRPr/>
           </a:p>
         </p:txBody>
       </p:sp>
@@ -7356,6 +7195,7 @@
           <a:lstStyle/>
           <a:p>
             <a:pPr algn="ctr"/>
+            <a:endParaRPr/>
           </a:p>
         </p:txBody>
       </p:sp>
@@ -7401,6 +7241,7 @@
           <a:lstStyle/>
           <a:p>
             <a:pPr algn="ctr"/>
+            <a:endParaRPr/>
           </a:p>
         </p:txBody>
       </p:sp>
@@ -7446,6 +7287,7 @@
           <a:lstStyle/>
           <a:p>
             <a:pPr algn="ctr"/>
+            <a:endParaRPr/>
           </a:p>
         </p:txBody>
       </p:sp>
@@ -7491,6 +7333,7 @@
           <a:lstStyle/>
           <a:p>
             <a:pPr algn="ctr"/>
+            <a:endParaRPr/>
           </a:p>
         </p:txBody>
       </p:sp>
@@ -7536,6 +7379,7 @@
           <a:lstStyle/>
           <a:p>
             <a:pPr algn="ctr"/>
+            <a:endParaRPr/>
           </a:p>
         </p:txBody>
       </p:sp>
@@ -7579,6 +7423,7 @@
           <a:lstStyle/>
           <a:p>
             <a:pPr algn="ctr"/>
+            <a:endParaRPr/>
           </a:p>
         </p:txBody>
       </p:sp>
@@ -7659,6 +7504,7 @@
           <a:lstStyle/>
           <a:p>
             <a:pPr algn="ctr"/>
+            <a:endParaRPr/>
           </a:p>
         </p:txBody>
       </p:sp>
@@ -7704,6 +7550,7 @@
           <a:lstStyle/>
           <a:p>
             <a:pPr algn="ctr"/>
+            <a:endParaRPr/>
           </a:p>
         </p:txBody>
       </p:sp>
@@ -7749,6 +7596,7 @@
           <a:lstStyle/>
           <a:p>
             <a:pPr algn="ctr"/>
+            <a:endParaRPr/>
           </a:p>
         </p:txBody>
       </p:sp>
@@ -7794,6 +7642,7 @@
           <a:lstStyle/>
           <a:p>
             <a:pPr algn="ctr"/>
+            <a:endParaRPr/>
           </a:p>
         </p:txBody>
       </p:sp>
@@ -7839,6 +7688,7 @@
           <a:lstStyle/>
           <a:p>
             <a:pPr algn="ctr"/>
+            <a:endParaRPr/>
           </a:p>
         </p:txBody>
       </p:sp>
@@ -7884,6 +7734,7 @@
           <a:lstStyle/>
           <a:p>
             <a:pPr algn="ctr"/>
+            <a:endParaRPr/>
           </a:p>
         </p:txBody>
       </p:sp>
@@ -7929,6 +7780,7 @@
           <a:lstStyle/>
           <a:p>
             <a:pPr algn="ctr"/>
+            <a:endParaRPr/>
           </a:p>
         </p:txBody>
       </p:sp>
@@ -7974,6 +7826,7 @@
           <a:lstStyle/>
           <a:p>
             <a:pPr algn="ctr"/>
+            <a:endParaRPr/>
           </a:p>
         </p:txBody>
       </p:sp>
@@ -8017,6 +7870,7 @@
           <a:lstStyle/>
           <a:p>
             <a:pPr algn="ctr"/>
+            <a:endParaRPr/>
           </a:p>
         </p:txBody>
       </p:sp>
@@ -8097,6 +7951,7 @@
           <a:lstStyle/>
           <a:p>
             <a:pPr algn="ctr"/>
+            <a:endParaRPr/>
           </a:p>
         </p:txBody>
       </p:sp>
@@ -8142,6 +7997,7 @@
           <a:lstStyle/>
           <a:p>
             <a:pPr algn="ctr"/>
+            <a:endParaRPr/>
           </a:p>
         </p:txBody>
       </p:sp>
@@ -8187,6 +8043,7 @@
           <a:lstStyle/>
           <a:p>
             <a:pPr algn="ctr"/>
+            <a:endParaRPr/>
           </a:p>
         </p:txBody>
       </p:sp>
@@ -8232,6 +8089,7 @@
           <a:lstStyle/>
           <a:p>
             <a:pPr algn="ctr"/>
+            <a:endParaRPr/>
           </a:p>
         </p:txBody>
       </p:sp>
@@ -8277,6 +8135,7 @@
           <a:lstStyle/>
           <a:p>
             <a:pPr algn="ctr"/>
+            <a:endParaRPr/>
           </a:p>
         </p:txBody>
       </p:sp>
@@ -8322,6 +8181,7 @@
           <a:lstStyle/>
           <a:p>
             <a:pPr algn="ctr"/>
+            <a:endParaRPr/>
           </a:p>
         </p:txBody>
       </p:sp>
@@ -8367,6 +8227,7 @@
           <a:lstStyle/>
           <a:p>
             <a:pPr algn="ctr"/>
+            <a:endParaRPr/>
           </a:p>
         </p:txBody>
       </p:sp>
@@ -8412,6 +8273,7 @@
           <a:lstStyle/>
           <a:p>
             <a:pPr algn="ctr"/>
+            <a:endParaRPr/>
           </a:p>
         </p:txBody>
       </p:sp>
@@ -8455,6 +8317,7 @@
           <a:lstStyle/>
           <a:p>
             <a:pPr algn="ctr"/>
+            <a:endParaRPr/>
           </a:p>
         </p:txBody>
       </p:sp>
@@ -8535,6 +8398,7 @@
           <a:lstStyle/>
           <a:p>
             <a:pPr algn="ctr"/>
+            <a:endParaRPr/>
           </a:p>
         </p:txBody>
       </p:sp>
@@ -8580,6 +8444,7 @@
           <a:lstStyle/>
           <a:p>
             <a:pPr algn="ctr"/>
+            <a:endParaRPr/>
           </a:p>
         </p:txBody>
       </p:sp>
@@ -8625,6 +8490,7 @@
           <a:lstStyle/>
           <a:p>
             <a:pPr algn="ctr"/>
+            <a:endParaRPr/>
           </a:p>
         </p:txBody>
       </p:sp>
@@ -8670,6 +8536,7 @@
           <a:lstStyle/>
           <a:p>
             <a:pPr algn="ctr"/>
+            <a:endParaRPr/>
           </a:p>
         </p:txBody>
       </p:sp>
@@ -8715,6 +8582,7 @@
           <a:lstStyle/>
           <a:p>
             <a:pPr algn="ctr"/>
+            <a:endParaRPr/>
           </a:p>
         </p:txBody>
       </p:sp>
@@ -8760,6 +8628,7 @@
           <a:lstStyle/>
           <a:p>
             <a:pPr algn="ctr"/>
+            <a:endParaRPr/>
           </a:p>
         </p:txBody>
       </p:sp>
@@ -8805,6 +8674,7 @@
           <a:lstStyle/>
           <a:p>
             <a:pPr algn="ctr"/>
+            <a:endParaRPr/>
           </a:p>
         </p:txBody>
       </p:sp>
@@ -8850,6 +8720,7 @@
           <a:lstStyle/>
           <a:p>
             <a:pPr algn="ctr"/>
+            <a:endParaRPr/>
           </a:p>
         </p:txBody>
       </p:sp>
@@ -8893,6 +8764,7 @@
           <a:lstStyle/>
           <a:p>
             <a:pPr algn="ctr"/>
+            <a:endParaRPr/>
           </a:p>
         </p:txBody>
       </p:sp>
@@ -8973,6 +8845,7 @@
           <a:lstStyle/>
           <a:p>
             <a:pPr algn="ctr"/>
+            <a:endParaRPr/>
           </a:p>
         </p:txBody>
       </p:sp>
@@ -9018,6 +8891,7 @@
           <a:lstStyle/>
           <a:p>
             <a:pPr algn="ctr"/>
+            <a:endParaRPr/>
           </a:p>
         </p:txBody>
       </p:sp>
@@ -9063,6 +8937,7 @@
           <a:lstStyle/>
           <a:p>
             <a:pPr algn="ctr"/>
+            <a:endParaRPr/>
           </a:p>
         </p:txBody>
       </p:sp>
@@ -9108,6 +8983,7 @@
           <a:lstStyle/>
           <a:p>
             <a:pPr algn="ctr"/>
+            <a:endParaRPr/>
           </a:p>
         </p:txBody>
       </p:sp>
@@ -9153,6 +9029,7 @@
           <a:lstStyle/>
           <a:p>
             <a:pPr algn="ctr"/>
+            <a:endParaRPr/>
           </a:p>
         </p:txBody>
       </p:sp>
@@ -9198,6 +9075,7 @@
           <a:lstStyle/>
           <a:p>
             <a:pPr algn="ctr"/>
+            <a:endParaRPr/>
           </a:p>
         </p:txBody>
       </p:sp>
@@ -9243,6 +9121,7 @@
           <a:lstStyle/>
           <a:p>
             <a:pPr algn="ctr"/>
+            <a:endParaRPr/>
           </a:p>
         </p:txBody>
       </p:sp>
@@ -9288,6 +9167,7 @@
           <a:lstStyle/>
           <a:p>
             <a:pPr algn="ctr"/>
+            <a:endParaRPr/>
           </a:p>
         </p:txBody>
       </p:sp>
@@ -9331,6 +9211,7 @@
           <a:lstStyle/>
           <a:p>
             <a:pPr algn="ctr"/>
+            <a:endParaRPr/>
           </a:p>
         </p:txBody>
       </p:sp>
@@ -9411,6 +9292,7 @@
           <a:lstStyle/>
           <a:p>
             <a:pPr algn="ctr"/>
+            <a:endParaRPr/>
           </a:p>
         </p:txBody>
       </p:sp>
@@ -9456,6 +9338,7 @@
           <a:lstStyle/>
           <a:p>
             <a:pPr algn="ctr"/>
+            <a:endParaRPr/>
           </a:p>
         </p:txBody>
       </p:sp>
@@ -9501,6 +9384,7 @@
           <a:lstStyle/>
           <a:p>
             <a:pPr algn="ctr"/>
+            <a:endParaRPr/>
           </a:p>
         </p:txBody>
       </p:sp>
@@ -9546,6 +9430,7 @@
           <a:lstStyle/>
           <a:p>
             <a:pPr algn="ctr"/>
+            <a:endParaRPr/>
           </a:p>
         </p:txBody>
       </p:sp>
@@ -9591,6 +9476,7 @@
           <a:lstStyle/>
           <a:p>
             <a:pPr algn="ctr"/>
+            <a:endParaRPr/>
           </a:p>
         </p:txBody>
       </p:sp>
@@ -9636,6 +9522,7 @@
           <a:lstStyle/>
           <a:p>
             <a:pPr algn="ctr"/>
+            <a:endParaRPr/>
           </a:p>
         </p:txBody>
       </p:sp>
@@ -9681,6 +9568,7 @@
           <a:lstStyle/>
           <a:p>
             <a:pPr algn="ctr"/>
+            <a:endParaRPr/>
           </a:p>
         </p:txBody>
       </p:sp>
@@ -9726,6 +9614,7 @@
           <a:lstStyle/>
           <a:p>
             <a:pPr algn="ctr"/>
+            <a:endParaRPr/>
           </a:p>
         </p:txBody>
       </p:sp>
@@ -9737,8 +9626,8 @@
         </p:nvSpPr>
         <p:spPr>
           <a:xfrm>
-            <a:off x="9934956" y="5715000"/>
-            <a:ext cx="2498598" cy="201168"/>
+            <a:off x="9934956" y="5687568"/>
+            <a:ext cx="1641348" cy="228600"/>
           </a:xfrm>
           <a:prstGeom prst="roundRect">
             <a:avLst/>
@@ -9769,6 +9658,7 @@
           <a:lstStyle/>
           <a:p>
             <a:pPr algn="ctr"/>
+            <a:endParaRPr/>
           </a:p>
         </p:txBody>
       </p:sp>
@@ -9816,7 +9706,7 @@
 </file>
 
 <file path=ppt/slides/slide11.xml><?xml version="1.0" encoding="utf-8"?>
-<p:sld xmlns:a="http://schemas.openxmlformats.org/drawingml/2006/main" xmlns:p="http://schemas.openxmlformats.org/presentationml/2006/main" xmlns:r="http://schemas.openxmlformats.org/officeDocument/2006/relationships">
+<p:sld xmlns:a="http://schemas.openxmlformats.org/drawingml/2006/main" xmlns:r="http://schemas.openxmlformats.org/officeDocument/2006/relationships" xmlns:p="http://schemas.openxmlformats.org/presentationml/2006/main">
   <p:cSld>
     <p:spTree>
       <p:nvGrpSpPr>
@@ -9824,7 +9714,14 @@
         <p:cNvGrpSpPr/>
         <p:nvPr/>
       </p:nvGrpSpPr>
-      <p:grpSpPr/>
+      <p:grpSpPr>
+        <a:xfrm>
+          <a:off x="0" y="0"/>
+          <a:ext cx="0" cy="0"/>
+          <a:chOff x="0" y="0"/>
+          <a:chExt cx="0" cy="0"/>
+        </a:xfrm>
+      </p:grpSpPr>
       <p:sp>
         <p:nvSpPr>
           <p:cNvPr id="2" name="TextBox 1"/>
@@ -9869,7 +9766,7 @@
           <p:nvPr/>
         </p:nvPicPr>
         <p:blipFill>
-          <a:blip r:embed="rId2"/>
+          <a:blip r:embed="rId3"/>
           <a:stretch>
             <a:fillRect/>
           </a:stretch>
@@ -9959,6 +9856,7 @@
           <a:lstStyle/>
           <a:p>
             <a:pPr algn="ctr"/>
+            <a:endParaRPr/>
           </a:p>
         </p:txBody>
       </p:sp>
@@ -10002,6 +9900,7 @@
           <a:lstStyle/>
           <a:p>
             <a:pPr algn="ctr"/>
+            <a:endParaRPr/>
           </a:p>
         </p:txBody>
       </p:sp>
@@ -10264,7 +10163,7 @@
 </file>
 
 <file path=ppt/slides/slide12.xml><?xml version="1.0" encoding="utf-8"?>
-<p:sld xmlns:a="http://schemas.openxmlformats.org/drawingml/2006/main" xmlns:p="http://schemas.openxmlformats.org/presentationml/2006/main" xmlns:r="http://schemas.openxmlformats.org/officeDocument/2006/relationships">
+<p:sld xmlns:a="http://schemas.openxmlformats.org/drawingml/2006/main" xmlns:r="http://schemas.openxmlformats.org/officeDocument/2006/relationships" xmlns:p="http://schemas.openxmlformats.org/presentationml/2006/main">
   <p:cSld>
     <p:spTree>
       <p:nvGrpSpPr>
@@ -10272,7 +10171,14 @@
         <p:cNvGrpSpPr/>
         <p:nvPr/>
       </p:nvGrpSpPr>
-      <p:grpSpPr/>
+      <p:grpSpPr>
+        <a:xfrm>
+          <a:off x="0" y="0"/>
+          <a:ext cx="0" cy="0"/>
+          <a:chOff x="0" y="0"/>
+          <a:chExt cx="0" cy="0"/>
+        </a:xfrm>
+      </p:grpSpPr>
       <p:sp>
         <p:nvSpPr>
           <p:cNvPr id="2" name="TextBox 1"/>
@@ -10349,6 +10255,7 @@
           <a:lstStyle/>
           <a:p>
             <a:pPr algn="ctr"/>
+            <a:endParaRPr/>
           </a:p>
         </p:txBody>
       </p:sp>
@@ -10392,6 +10299,7 @@
           <a:lstStyle/>
           <a:p>
             <a:pPr algn="ctr"/>
+            <a:endParaRPr/>
           </a:p>
         </p:txBody>
       </p:sp>
@@ -10404,7 +10312,7 @@
 </file>
 
 <file path=ppt/slides/slide2.xml><?xml version="1.0" encoding="utf-8"?>
-<p:sld xmlns:a="http://schemas.openxmlformats.org/drawingml/2006/main" xmlns:p="http://schemas.openxmlformats.org/presentationml/2006/main" xmlns:r="http://schemas.openxmlformats.org/officeDocument/2006/relationships">
+<p:sld xmlns:a="http://schemas.openxmlformats.org/drawingml/2006/main" xmlns:r="http://schemas.openxmlformats.org/officeDocument/2006/relationships" xmlns:p="http://schemas.openxmlformats.org/presentationml/2006/main">
   <p:cSld>
     <p:spTree>
       <p:nvGrpSpPr>
@@ -10412,7 +10320,14 @@
         <p:cNvGrpSpPr/>
         <p:nvPr/>
       </p:nvGrpSpPr>
-      <p:grpSpPr/>
+      <p:grpSpPr>
+        <a:xfrm>
+          <a:off x="0" y="0"/>
+          <a:ext cx="0" cy="0"/>
+          <a:chOff x="0" y="0"/>
+          <a:chExt cx="0" cy="0"/>
+        </a:xfrm>
+      </p:grpSpPr>
       <p:sp>
         <p:nvSpPr>
           <p:cNvPr id="2" name="TextBox 1"/>
@@ -10547,6 +10462,7 @@
           <a:lstStyle/>
           <a:p>
             <a:pPr algn="ctr"/>
+            <a:endParaRPr/>
           </a:p>
         </p:txBody>
       </p:sp>
@@ -10590,6 +10506,7 @@
           <a:lstStyle/>
           <a:p>
             <a:pPr algn="ctr"/>
+            <a:endParaRPr/>
           </a:p>
         </p:txBody>
       </p:sp>
@@ -10804,7 +10721,7 @@
 </file>
 
 <file path=ppt/slides/slide3.xml><?xml version="1.0" encoding="utf-8"?>
-<p:sld xmlns:a="http://schemas.openxmlformats.org/drawingml/2006/main" xmlns:p="http://schemas.openxmlformats.org/presentationml/2006/main" xmlns:r="http://schemas.openxmlformats.org/officeDocument/2006/relationships">
+<p:sld xmlns:a="http://schemas.openxmlformats.org/drawingml/2006/main" xmlns:r="http://schemas.openxmlformats.org/officeDocument/2006/relationships" xmlns:p="http://schemas.openxmlformats.org/presentationml/2006/main">
   <p:cSld>
     <p:spTree>
       <p:nvGrpSpPr>
@@ -10812,7 +10729,14 @@
         <p:cNvGrpSpPr/>
         <p:nvPr/>
       </p:nvGrpSpPr>
-      <p:grpSpPr/>
+      <p:grpSpPr>
+        <a:xfrm>
+          <a:off x="0" y="0"/>
+          <a:ext cx="0" cy="0"/>
+          <a:chOff x="0" y="0"/>
+          <a:chExt cx="0" cy="0"/>
+        </a:xfrm>
+      </p:grpSpPr>
       <p:sp>
         <p:nvSpPr>
           <p:cNvPr id="2" name="TextBox 1"/>
@@ -10857,7 +10781,7 @@
           <p:nvPr/>
         </p:nvPicPr>
         <p:blipFill>
-          <a:blip r:embed="rId2"/>
+          <a:blip r:embed="rId3"/>
           <a:stretch>
             <a:fillRect/>
           </a:stretch>
@@ -10947,6 +10871,7 @@
           <a:lstStyle/>
           <a:p>
             <a:pPr algn="ctr"/>
+            <a:endParaRPr/>
           </a:p>
         </p:txBody>
       </p:sp>
@@ -10990,6 +10915,7 @@
           <a:lstStyle/>
           <a:p>
             <a:pPr algn="ctr"/>
+            <a:endParaRPr/>
           </a:p>
         </p:txBody>
       </p:sp>
@@ -11304,7 +11230,7 @@
 </file>
 
 <file path=ppt/slides/slide4.xml><?xml version="1.0" encoding="utf-8"?>
-<p:sld xmlns:a="http://schemas.openxmlformats.org/drawingml/2006/main" xmlns:p="http://schemas.openxmlformats.org/presentationml/2006/main" xmlns:r="http://schemas.openxmlformats.org/officeDocument/2006/relationships">
+<p:sld xmlns:a="http://schemas.openxmlformats.org/drawingml/2006/main" xmlns:r="http://schemas.openxmlformats.org/officeDocument/2006/relationships" xmlns:p="http://schemas.openxmlformats.org/presentationml/2006/main">
   <p:cSld>
     <p:spTree>
       <p:nvGrpSpPr>
@@ -11312,7 +11238,14 @@
         <p:cNvGrpSpPr/>
         <p:nvPr/>
       </p:nvGrpSpPr>
-      <p:grpSpPr/>
+      <p:grpSpPr>
+        <a:xfrm>
+          <a:off x="0" y="0"/>
+          <a:ext cx="0" cy="0"/>
+          <a:chOff x="0" y="0"/>
+          <a:chExt cx="0" cy="0"/>
+        </a:xfrm>
+      </p:grpSpPr>
       <p:sp>
         <p:nvSpPr>
           <p:cNvPr id="2" name="TextBox 1"/>
@@ -11357,7 +11290,7 @@
           <p:nvPr/>
         </p:nvPicPr>
         <p:blipFill>
-          <a:blip r:embed="rId2"/>
+          <a:blip r:embed="rId3"/>
           <a:stretch>
             <a:fillRect/>
           </a:stretch>
@@ -11447,6 +11380,7 @@
           <a:lstStyle/>
           <a:p>
             <a:pPr algn="ctr"/>
+            <a:endParaRPr/>
           </a:p>
         </p:txBody>
       </p:sp>
@@ -11490,6 +11424,7 @@
           <a:lstStyle/>
           <a:p>
             <a:pPr algn="ctr"/>
+            <a:endParaRPr/>
           </a:p>
         </p:txBody>
       </p:sp>
@@ -11547,14 +11482,32 @@
                 <a:tableStyleId>{5C22544A-7EE6-4342-B048-85BDC9FD1C3A}</a:tableStyleId>
               </a:tblPr>
               <a:tblGrid>
-                <a:gridCol w="1554480"/>
-                <a:gridCol w="4572000"/>
-                <a:gridCol w="4937760"/>
+                <a:gridCol w="1554480">
+                  <a:extLst>
+                    <a:ext uri="{9D8B030D-6E8A-4147-A177-3AD203B41FA5}">
+                      <a16:colId xmlns:a16="http://schemas.microsoft.com/office/drawing/2014/main" val="20000"/>
+                    </a:ext>
+                  </a:extLst>
+                </a:gridCol>
+                <a:gridCol w="4572000">
+                  <a:extLst>
+                    <a:ext uri="{9D8B030D-6E8A-4147-A177-3AD203B41FA5}">
+                      <a16:colId xmlns:a16="http://schemas.microsoft.com/office/drawing/2014/main" val="20001"/>
+                    </a:ext>
+                  </a:extLst>
+                </a:gridCol>
+                <a:gridCol w="4937760">
+                  <a:extLst>
+                    <a:ext uri="{9D8B030D-6E8A-4147-A177-3AD203B41FA5}">
+                      <a16:colId xmlns:a16="http://schemas.microsoft.com/office/drawing/2014/main" val="20002"/>
+                    </a:ext>
+                  </a:extLst>
+                </a:gridCol>
               </a:tblGrid>
               <a:tr h="347472">
                 <a:tc>
                   <a:txBody>
-                    <a:bodyPr wrap="square"/>
+                    <a:bodyPr/>
                     <a:lstStyle/>
                     <a:p>
                       <a:r>
@@ -11576,7 +11529,7 @@
                 </a:tc>
                 <a:tc>
                   <a:txBody>
-                    <a:bodyPr wrap="square"/>
+                    <a:bodyPr/>
                     <a:lstStyle/>
                     <a:p>
                       <a:r>
@@ -11598,7 +11551,7 @@
                 </a:tc>
                 <a:tc>
                   <a:txBody>
-                    <a:bodyPr wrap="square"/>
+                    <a:bodyPr/>
                     <a:lstStyle/>
                     <a:p>
                       <a:r>
@@ -11618,11 +11571,16 @@
                     </a:solidFill>
                   </a:tcPr>
                 </a:tc>
+                <a:extLst>
+                  <a:ext uri="{0D108BD9-81ED-4DB2-BD59-A6C34878D82A}">
+                    <a16:rowId xmlns:a16="http://schemas.microsoft.com/office/drawing/2014/main" val="10000"/>
+                  </a:ext>
+                </a:extLst>
               </a:tr>
               <a:tr h="347472">
                 <a:tc>
                   <a:txBody>
-                    <a:bodyPr wrap="square"/>
+                    <a:bodyPr/>
                     <a:lstStyle/>
                     <a:p>
                       <a:r>
@@ -11653,7 +11611,7 @@
                 </a:tc>
                 <a:tc>
                   <a:txBody>
-                    <a:bodyPr wrap="square"/>
+                    <a:bodyPr/>
                     <a:lstStyle/>
                     <a:p>
                       <a:r>
@@ -11675,7 +11633,7 @@
                 </a:tc>
                 <a:tc>
                   <a:txBody>
-                    <a:bodyPr wrap="square"/>
+                    <a:bodyPr/>
                     <a:lstStyle/>
                     <a:p>
                       <a:r>
@@ -11767,11 +11725,16 @@
                     </a:solidFill>
                   </a:tcPr>
                 </a:tc>
+                <a:extLst>
+                  <a:ext uri="{0D108BD9-81ED-4DB2-BD59-A6C34878D82A}">
+                    <a16:rowId xmlns:a16="http://schemas.microsoft.com/office/drawing/2014/main" val="10001"/>
+                  </a:ext>
+                </a:extLst>
               </a:tr>
               <a:tr h="347472">
                 <a:tc>
                   <a:txBody>
-                    <a:bodyPr wrap="square"/>
+                    <a:bodyPr/>
                     <a:lstStyle/>
                     <a:p>
                       <a:r>
@@ -11802,7 +11765,7 @@
                 </a:tc>
                 <a:tc>
                   <a:txBody>
-                    <a:bodyPr wrap="square"/>
+                    <a:bodyPr/>
                     <a:lstStyle/>
                     <a:p>
                       <a:r>
@@ -11824,7 +11787,7 @@
                 </a:tc>
                 <a:tc>
                   <a:txBody>
-                    <a:bodyPr wrap="square"/>
+                    <a:bodyPr/>
                     <a:lstStyle/>
                     <a:p>
                       <a:r>
@@ -11844,11 +11807,16 @@
                     </a:solidFill>
                   </a:tcPr>
                 </a:tc>
+                <a:extLst>
+                  <a:ext uri="{0D108BD9-81ED-4DB2-BD59-A6C34878D82A}">
+                    <a16:rowId xmlns:a16="http://schemas.microsoft.com/office/drawing/2014/main" val="10002"/>
+                  </a:ext>
+                </a:extLst>
               </a:tr>
               <a:tr h="347472">
                 <a:tc>
                   <a:txBody>
-                    <a:bodyPr wrap="square"/>
+                    <a:bodyPr/>
                     <a:lstStyle/>
                     <a:p>
                       <a:r>
@@ -11879,7 +11847,7 @@
                 </a:tc>
                 <a:tc>
                   <a:txBody>
-                    <a:bodyPr wrap="square"/>
+                    <a:bodyPr/>
                     <a:lstStyle/>
                     <a:p>
                       <a:r>
@@ -11901,7 +11869,7 @@
                 </a:tc>
                 <a:tc>
                   <a:txBody>
-                    <a:bodyPr wrap="square"/>
+                    <a:bodyPr/>
                     <a:lstStyle/>
                     <a:p>
                       <a:r>
@@ -11975,6 +11943,11 @@
                     </a:solidFill>
                   </a:tcPr>
                 </a:tc>
+                <a:extLst>
+                  <a:ext uri="{0D108BD9-81ED-4DB2-BD59-A6C34878D82A}">
+                    <a16:rowId xmlns:a16="http://schemas.microsoft.com/office/drawing/2014/main" val="10003"/>
+                  </a:ext>
+                </a:extLst>
               </a:tr>
             </a:tbl>
           </a:graphicData>
@@ -11989,7 +11962,7 @@
 </file>
 
 <file path=ppt/slides/slide5.xml><?xml version="1.0" encoding="utf-8"?>
-<p:sld xmlns:a="http://schemas.openxmlformats.org/drawingml/2006/main" xmlns:p="http://schemas.openxmlformats.org/presentationml/2006/main" xmlns:r="http://schemas.openxmlformats.org/officeDocument/2006/relationships">
+<p:sld xmlns:a="http://schemas.openxmlformats.org/drawingml/2006/main" xmlns:r="http://schemas.openxmlformats.org/officeDocument/2006/relationships" xmlns:p="http://schemas.openxmlformats.org/presentationml/2006/main">
   <p:cSld>
     <p:spTree>
       <p:nvGrpSpPr>
@@ -11997,7 +11970,14 @@
         <p:cNvGrpSpPr/>
         <p:nvPr/>
       </p:nvGrpSpPr>
-      <p:grpSpPr/>
+      <p:grpSpPr>
+        <a:xfrm>
+          <a:off x="0" y="0"/>
+          <a:ext cx="0" cy="0"/>
+          <a:chOff x="0" y="0"/>
+          <a:chExt cx="0" cy="0"/>
+        </a:xfrm>
+      </p:grpSpPr>
       <p:sp>
         <p:nvSpPr>
           <p:cNvPr id="2" name="TextBox 1"/>
@@ -12042,7 +12022,7 @@
           <p:nvPr/>
         </p:nvPicPr>
         <p:blipFill>
-          <a:blip r:embed="rId2"/>
+          <a:blip r:embed="rId3"/>
           <a:stretch>
             <a:fillRect/>
           </a:stretch>
@@ -12132,6 +12112,7 @@
           <a:lstStyle/>
           <a:p>
             <a:pPr algn="ctr"/>
+            <a:endParaRPr/>
           </a:p>
         </p:txBody>
       </p:sp>
@@ -12175,6 +12156,7 @@
           <a:lstStyle/>
           <a:p>
             <a:pPr algn="ctr"/>
+            <a:endParaRPr/>
           </a:p>
         </p:txBody>
       </p:sp>
@@ -12223,7 +12205,7 @@
         </p:nvGraphicFramePr>
         <p:xfrm>
           <a:off x="548640" y="1371600"/>
-          <a:ext cx="11064240" cy="2084832"/>
+          <a:ext cx="11064240" cy="2801112"/>
         </p:xfrm>
         <a:graphic>
           <a:graphicData uri="http://schemas.openxmlformats.org/drawingml/2006/table">
@@ -12232,14 +12214,32 @@
                 <a:tableStyleId>{5C22544A-7EE6-4342-B048-85BDC9FD1C3A}</a:tableStyleId>
               </a:tblPr>
               <a:tblGrid>
-                <a:gridCol w="3108960"/>
-                <a:gridCol w="4023360"/>
-                <a:gridCol w="3931920"/>
+                <a:gridCol w="3108960">
+                  <a:extLst>
+                    <a:ext uri="{9D8B030D-6E8A-4147-A177-3AD203B41FA5}">
+                      <a16:colId xmlns:a16="http://schemas.microsoft.com/office/drawing/2014/main" val="20000"/>
+                    </a:ext>
+                  </a:extLst>
+                </a:gridCol>
+                <a:gridCol w="4023360">
+                  <a:extLst>
+                    <a:ext uri="{9D8B030D-6E8A-4147-A177-3AD203B41FA5}">
+                      <a16:colId xmlns:a16="http://schemas.microsoft.com/office/drawing/2014/main" val="20001"/>
+                    </a:ext>
+                  </a:extLst>
+                </a:gridCol>
+                <a:gridCol w="3931920">
+                  <a:extLst>
+                    <a:ext uri="{9D8B030D-6E8A-4147-A177-3AD203B41FA5}">
+                      <a16:colId xmlns:a16="http://schemas.microsoft.com/office/drawing/2014/main" val="20002"/>
+                    </a:ext>
+                  </a:extLst>
+                </a:gridCol>
               </a:tblGrid>
               <a:tr h="347472">
                 <a:tc>
                   <a:txBody>
-                    <a:bodyPr wrap="square"/>
+                    <a:bodyPr/>
                     <a:lstStyle/>
                     <a:p>
                       <a:r>
@@ -12261,7 +12261,7 @@
                 </a:tc>
                 <a:tc>
                   <a:txBody>
-                    <a:bodyPr wrap="square"/>
+                    <a:bodyPr/>
                     <a:lstStyle/>
                     <a:p>
                       <a:r>
@@ -12283,7 +12283,7 @@
                 </a:tc>
                 <a:tc>
                   <a:txBody>
-                    <a:bodyPr wrap="square"/>
+                    <a:bodyPr/>
                     <a:lstStyle/>
                     <a:p>
                       <a:r>
@@ -12303,11 +12303,16 @@
                     </a:solidFill>
                   </a:tcPr>
                 </a:tc>
+                <a:extLst>
+                  <a:ext uri="{0D108BD9-81ED-4DB2-BD59-A6C34878D82A}">
+                    <a16:rowId xmlns:a16="http://schemas.microsoft.com/office/drawing/2014/main" val="10000"/>
+                  </a:ext>
+                </a:extLst>
               </a:tr>
               <a:tr h="347472">
                 <a:tc>
                   <a:txBody>
-                    <a:bodyPr wrap="square"/>
+                    <a:bodyPr/>
                     <a:lstStyle/>
                     <a:p>
                       <a:r>
@@ -12329,7 +12334,7 @@
                 </a:tc>
                 <a:tc>
                   <a:txBody>
-                    <a:bodyPr wrap="square"/>
+                    <a:bodyPr/>
                     <a:lstStyle/>
                     <a:p>
                       <a:r>
@@ -12351,7 +12356,7 @@
                 </a:tc>
                 <a:tc>
                   <a:txBody>
-                    <a:bodyPr wrap="square"/>
+                    <a:bodyPr/>
                     <a:lstStyle/>
                     <a:p>
                       <a:r>
@@ -12389,11 +12394,16 @@
                     </a:solidFill>
                   </a:tcPr>
                 </a:tc>
+                <a:extLst>
+                  <a:ext uri="{0D108BD9-81ED-4DB2-BD59-A6C34878D82A}">
+                    <a16:rowId xmlns:a16="http://schemas.microsoft.com/office/drawing/2014/main" val="10001"/>
+                  </a:ext>
+                </a:extLst>
               </a:tr>
               <a:tr h="347472">
                 <a:tc>
                   <a:txBody>
-                    <a:bodyPr wrap="square"/>
+                    <a:bodyPr/>
                     <a:lstStyle/>
                     <a:p>
                       <a:r>
@@ -12415,7 +12425,7 @@
                 </a:tc>
                 <a:tc>
                   <a:txBody>
-                    <a:bodyPr wrap="square"/>
+                    <a:bodyPr/>
                     <a:lstStyle/>
                     <a:p>
                       <a:r>
@@ -12437,7 +12447,7 @@
                 </a:tc>
                 <a:tc>
                   <a:txBody>
-                    <a:bodyPr wrap="square"/>
+                    <a:bodyPr/>
                     <a:lstStyle/>
                     <a:p>
                       <a:r>
@@ -12475,11 +12485,16 @@
                     </a:solidFill>
                   </a:tcPr>
                 </a:tc>
+                <a:extLst>
+                  <a:ext uri="{0D108BD9-81ED-4DB2-BD59-A6C34878D82A}">
+                    <a16:rowId xmlns:a16="http://schemas.microsoft.com/office/drawing/2014/main" val="10002"/>
+                  </a:ext>
+                </a:extLst>
               </a:tr>
               <a:tr h="347472">
                 <a:tc>
                   <a:txBody>
-                    <a:bodyPr wrap="square"/>
+                    <a:bodyPr/>
                     <a:lstStyle/>
                     <a:p>
                       <a:r>
@@ -12501,7 +12516,7 @@
                 </a:tc>
                 <a:tc>
                   <a:txBody>
-                    <a:bodyPr wrap="square"/>
+                    <a:bodyPr/>
                     <a:lstStyle/>
                     <a:p>
                       <a:r>
@@ -12523,7 +12538,7 @@
                 </a:tc>
                 <a:tc>
                   <a:txBody>
-                    <a:bodyPr wrap="square"/>
+                    <a:bodyPr/>
                     <a:lstStyle/>
                     <a:p>
                       <a:r>
@@ -12543,11 +12558,16 @@
                     </a:solidFill>
                   </a:tcPr>
                 </a:tc>
+                <a:extLst>
+                  <a:ext uri="{0D108BD9-81ED-4DB2-BD59-A6C34878D82A}">
+                    <a16:rowId xmlns:a16="http://schemas.microsoft.com/office/drawing/2014/main" val="10003"/>
+                  </a:ext>
+                </a:extLst>
               </a:tr>
               <a:tr h="347472">
                 <a:tc>
                   <a:txBody>
-                    <a:bodyPr wrap="square"/>
+                    <a:bodyPr/>
                     <a:lstStyle/>
                     <a:p>
                       <a:r>
@@ -12569,7 +12589,7 @@
                 </a:tc>
                 <a:tc>
                   <a:txBody>
-                    <a:bodyPr wrap="square"/>
+                    <a:bodyPr/>
                     <a:lstStyle/>
                     <a:p>
                       <a:r>
@@ -12591,7 +12611,7 @@
                 </a:tc>
                 <a:tc>
                   <a:txBody>
-                    <a:bodyPr wrap="square"/>
+                    <a:bodyPr/>
                     <a:lstStyle/>
                     <a:p>
                       <a:r>
@@ -12620,11 +12640,16 @@
                     </a:solidFill>
                   </a:tcPr>
                 </a:tc>
+                <a:extLst>
+                  <a:ext uri="{0D108BD9-81ED-4DB2-BD59-A6C34878D82A}">
+                    <a16:rowId xmlns:a16="http://schemas.microsoft.com/office/drawing/2014/main" val="10004"/>
+                  </a:ext>
+                </a:extLst>
               </a:tr>
               <a:tr h="347472">
                 <a:tc>
                   <a:txBody>
-                    <a:bodyPr wrap="square"/>
+                    <a:bodyPr/>
                     <a:lstStyle/>
                     <a:p>
                       <a:r>
@@ -12646,7 +12671,7 @@
                 </a:tc>
                 <a:tc>
                   <a:txBody>
-                    <a:bodyPr wrap="square"/>
+                    <a:bodyPr/>
                     <a:lstStyle/>
                     <a:p>
                       <a:r>
@@ -12668,7 +12693,7 @@
                 </a:tc>
                 <a:tc>
                   <a:txBody>
-                    <a:bodyPr wrap="square"/>
+                    <a:bodyPr/>
                     <a:lstStyle/>
                     <a:p>
                       <a:r>
@@ -12688,6 +12713,11 @@
                     </a:solidFill>
                   </a:tcPr>
                 </a:tc>
+                <a:extLst>
+                  <a:ext uri="{0D108BD9-81ED-4DB2-BD59-A6C34878D82A}">
+                    <a16:rowId xmlns:a16="http://schemas.microsoft.com/office/drawing/2014/main" val="10005"/>
+                  </a:ext>
+                </a:extLst>
               </a:tr>
             </a:tbl>
           </a:graphicData>
@@ -12702,7 +12732,7 @@
 </file>
 
 <file path=ppt/slides/slide6.xml><?xml version="1.0" encoding="utf-8"?>
-<p:sld xmlns:a="http://schemas.openxmlformats.org/drawingml/2006/main" xmlns:p="http://schemas.openxmlformats.org/presentationml/2006/main" xmlns:r="http://schemas.openxmlformats.org/officeDocument/2006/relationships">
+<p:sld xmlns:a="http://schemas.openxmlformats.org/drawingml/2006/main" xmlns:r="http://schemas.openxmlformats.org/officeDocument/2006/relationships" xmlns:p="http://schemas.openxmlformats.org/presentationml/2006/main">
   <p:cSld>
     <p:spTree>
       <p:nvGrpSpPr>
@@ -12710,7 +12740,14 @@
         <p:cNvGrpSpPr/>
         <p:nvPr/>
       </p:nvGrpSpPr>
-      <p:grpSpPr/>
+      <p:grpSpPr>
+        <a:xfrm>
+          <a:off x="0" y="0"/>
+          <a:ext cx="0" cy="0"/>
+          <a:chOff x="0" y="0"/>
+          <a:chExt cx="0" cy="0"/>
+        </a:xfrm>
+      </p:grpSpPr>
       <p:sp>
         <p:nvSpPr>
           <p:cNvPr id="2" name="TextBox 1"/>
@@ -12755,7 +12792,7 @@
           <p:nvPr/>
         </p:nvPicPr>
         <p:blipFill>
-          <a:blip r:embed="rId2"/>
+          <a:blip r:embed="rId3"/>
           <a:stretch>
             <a:fillRect/>
           </a:stretch>
@@ -12845,6 +12882,7 @@
           <a:lstStyle/>
           <a:p>
             <a:pPr algn="ctr"/>
+            <a:endParaRPr/>
           </a:p>
         </p:txBody>
       </p:sp>
@@ -12888,6 +12926,7 @@
           <a:lstStyle/>
           <a:p>
             <a:pPr algn="ctr"/>
+            <a:endParaRPr/>
           </a:p>
         </p:txBody>
       </p:sp>
@@ -12968,6 +13007,7 @@
           <a:lstStyle/>
           <a:p>
             <a:pPr algn="ctr"/>
+            <a:endParaRPr/>
           </a:p>
         </p:txBody>
       </p:sp>
@@ -13087,6 +13127,7 @@
           <a:lstStyle/>
           <a:p>
             <a:pPr algn="ctr"/>
+            <a:endParaRPr/>
           </a:p>
         </p:txBody>
       </p:sp>
@@ -13206,6 +13247,7 @@
           <a:lstStyle/>
           <a:p>
             <a:pPr algn="ctr"/>
+            <a:endParaRPr/>
           </a:p>
         </p:txBody>
       </p:sp>
@@ -13323,6 +13365,7 @@
           <a:lstStyle/>
           <a:p>
             <a:pPr algn="ctr"/>
+            <a:endParaRPr/>
           </a:p>
         </p:txBody>
       </p:sp>
@@ -13366,6 +13409,7 @@
           <a:lstStyle/>
           <a:p>
             <a:pPr algn="ctr"/>
+            <a:endParaRPr/>
           </a:p>
         </p:txBody>
       </p:sp>
@@ -13487,7 +13531,7 @@
 </file>
 
 <file path=ppt/slides/slide7.xml><?xml version="1.0" encoding="utf-8"?>
-<p:sld xmlns:a="http://schemas.openxmlformats.org/drawingml/2006/main" xmlns:p="http://schemas.openxmlformats.org/presentationml/2006/main" xmlns:r="http://schemas.openxmlformats.org/officeDocument/2006/relationships">
+<p:sld xmlns:a="http://schemas.openxmlformats.org/drawingml/2006/main" xmlns:r="http://schemas.openxmlformats.org/officeDocument/2006/relationships" xmlns:p="http://schemas.openxmlformats.org/presentationml/2006/main">
   <p:cSld>
     <p:spTree>
       <p:nvGrpSpPr>
@@ -13495,7 +13539,14 @@
         <p:cNvGrpSpPr/>
         <p:nvPr/>
       </p:nvGrpSpPr>
-      <p:grpSpPr/>
+      <p:grpSpPr>
+        <a:xfrm>
+          <a:off x="0" y="0"/>
+          <a:ext cx="0" cy="0"/>
+          <a:chOff x="0" y="0"/>
+          <a:chExt cx="0" cy="0"/>
+        </a:xfrm>
+      </p:grpSpPr>
       <p:sp>
         <p:nvSpPr>
           <p:cNvPr id="2" name="TextBox 1"/>
@@ -13540,7 +13591,7 @@
           <p:nvPr/>
         </p:nvPicPr>
         <p:blipFill>
-          <a:blip r:embed="rId2"/>
+          <a:blip r:embed="rId3"/>
           <a:stretch>
             <a:fillRect/>
           </a:stretch>
@@ -13630,6 +13681,7 @@
           <a:lstStyle/>
           <a:p>
             <a:pPr algn="ctr"/>
+            <a:endParaRPr/>
           </a:p>
         </p:txBody>
       </p:sp>
@@ -13673,6 +13725,7 @@
           <a:lstStyle/>
           <a:p>
             <a:pPr algn="ctr"/>
+            <a:endParaRPr/>
           </a:p>
         </p:txBody>
       </p:sp>
@@ -13721,7 +13774,7 @@
         </p:nvGraphicFramePr>
         <p:xfrm>
           <a:off x="548640" y="1325880"/>
-          <a:ext cx="11064240" cy="2432304"/>
+          <a:ext cx="11064240" cy="2481072"/>
         </p:xfrm>
         <a:graphic>
           <a:graphicData uri="http://schemas.openxmlformats.org/drawingml/2006/table">
@@ -13730,14 +13783,32 @@
                 <a:tableStyleId>{5C22544A-7EE6-4342-B048-85BDC9FD1C3A}</a:tableStyleId>
               </a:tblPr>
               <a:tblGrid>
-                <a:gridCol w="2103120"/>
-                <a:gridCol w="6126480"/>
-                <a:gridCol w="2834640"/>
+                <a:gridCol w="2103120">
+                  <a:extLst>
+                    <a:ext uri="{9D8B030D-6E8A-4147-A177-3AD203B41FA5}">
+                      <a16:colId xmlns:a16="http://schemas.microsoft.com/office/drawing/2014/main" val="20000"/>
+                    </a:ext>
+                  </a:extLst>
+                </a:gridCol>
+                <a:gridCol w="6126480">
+                  <a:extLst>
+                    <a:ext uri="{9D8B030D-6E8A-4147-A177-3AD203B41FA5}">
+                      <a16:colId xmlns:a16="http://schemas.microsoft.com/office/drawing/2014/main" val="20001"/>
+                    </a:ext>
+                  </a:extLst>
+                </a:gridCol>
+                <a:gridCol w="2834640">
+                  <a:extLst>
+                    <a:ext uri="{9D8B030D-6E8A-4147-A177-3AD203B41FA5}">
+                      <a16:colId xmlns:a16="http://schemas.microsoft.com/office/drawing/2014/main" val="20002"/>
+                    </a:ext>
+                  </a:extLst>
+                </a:gridCol>
               </a:tblGrid>
               <a:tr h="347472">
                 <a:tc>
                   <a:txBody>
-                    <a:bodyPr wrap="square"/>
+                    <a:bodyPr/>
                     <a:lstStyle/>
                     <a:p>
                       <a:r>
@@ -13759,7 +13830,7 @@
                 </a:tc>
                 <a:tc>
                   <a:txBody>
-                    <a:bodyPr wrap="square"/>
+                    <a:bodyPr/>
                     <a:lstStyle/>
                     <a:p>
                       <a:r>
@@ -13781,7 +13852,7 @@
                 </a:tc>
                 <a:tc>
                   <a:txBody>
-                    <a:bodyPr wrap="square"/>
+                    <a:bodyPr/>
                     <a:lstStyle/>
                     <a:p>
                       <a:r>
@@ -13801,11 +13872,16 @@
                     </a:solidFill>
                   </a:tcPr>
                 </a:tc>
+                <a:extLst>
+                  <a:ext uri="{0D108BD9-81ED-4DB2-BD59-A6C34878D82A}">
+                    <a16:rowId xmlns:a16="http://schemas.microsoft.com/office/drawing/2014/main" val="10000"/>
+                  </a:ext>
+                </a:extLst>
               </a:tr>
               <a:tr h="347472">
                 <a:tc>
                   <a:txBody>
-                    <a:bodyPr wrap="square"/>
+                    <a:bodyPr/>
                     <a:lstStyle/>
                     <a:p>
                       <a:r>
@@ -13827,7 +13903,7 @@
                 </a:tc>
                 <a:tc>
                   <a:txBody>
-                    <a:bodyPr wrap="square"/>
+                    <a:bodyPr/>
                     <a:lstStyle/>
                     <a:p>
                       <a:r>
@@ -13849,7 +13925,7 @@
                 </a:tc>
                 <a:tc>
                   <a:txBody>
-                    <a:bodyPr wrap="square"/>
+                    <a:bodyPr/>
                     <a:lstStyle/>
                     <a:p>
                       <a:r>
@@ -13869,11 +13945,16 @@
                     </a:solidFill>
                   </a:tcPr>
                 </a:tc>
+                <a:extLst>
+                  <a:ext uri="{0D108BD9-81ED-4DB2-BD59-A6C34878D82A}">
+                    <a16:rowId xmlns:a16="http://schemas.microsoft.com/office/drawing/2014/main" val="10001"/>
+                  </a:ext>
+                </a:extLst>
               </a:tr>
               <a:tr h="347472">
                 <a:tc>
                   <a:txBody>
-                    <a:bodyPr wrap="square"/>
+                    <a:bodyPr/>
                     <a:lstStyle/>
                     <a:p>
                       <a:r>
@@ -13895,7 +13976,7 @@
                 </a:tc>
                 <a:tc>
                   <a:txBody>
-                    <a:bodyPr wrap="square"/>
+                    <a:bodyPr/>
                     <a:lstStyle/>
                     <a:p>
                       <a:r>
@@ -13917,7 +13998,7 @@
                 </a:tc>
                 <a:tc>
                   <a:txBody>
-                    <a:bodyPr wrap="square"/>
+                    <a:bodyPr/>
                     <a:lstStyle/>
                     <a:p>
                       <a:r>
@@ -13937,11 +14018,16 @@
                     </a:solidFill>
                   </a:tcPr>
                 </a:tc>
+                <a:extLst>
+                  <a:ext uri="{0D108BD9-81ED-4DB2-BD59-A6C34878D82A}">
+                    <a16:rowId xmlns:a16="http://schemas.microsoft.com/office/drawing/2014/main" val="10002"/>
+                  </a:ext>
+                </a:extLst>
               </a:tr>
               <a:tr h="347472">
                 <a:tc>
                   <a:txBody>
-                    <a:bodyPr wrap="square"/>
+                    <a:bodyPr/>
                     <a:lstStyle/>
                     <a:p>
                       <a:r>
@@ -13963,7 +14049,7 @@
                 </a:tc>
                 <a:tc>
                   <a:txBody>
-                    <a:bodyPr wrap="square"/>
+                    <a:bodyPr/>
                     <a:lstStyle/>
                     <a:p>
                       <a:r>
@@ -13985,7 +14071,7 @@
                 </a:tc>
                 <a:tc>
                   <a:txBody>
-                    <a:bodyPr wrap="square"/>
+                    <a:bodyPr/>
                     <a:lstStyle/>
                     <a:p>
                       <a:r>
@@ -14005,11 +14091,16 @@
                     </a:solidFill>
                   </a:tcPr>
                 </a:tc>
+                <a:extLst>
+                  <a:ext uri="{0D108BD9-81ED-4DB2-BD59-A6C34878D82A}">
+                    <a16:rowId xmlns:a16="http://schemas.microsoft.com/office/drawing/2014/main" val="10003"/>
+                  </a:ext>
+                </a:extLst>
               </a:tr>
               <a:tr h="347472">
                 <a:tc>
                   <a:txBody>
-                    <a:bodyPr wrap="square"/>
+                    <a:bodyPr/>
                     <a:lstStyle/>
                     <a:p>
                       <a:r>
@@ -14031,7 +14122,7 @@
                 </a:tc>
                 <a:tc>
                   <a:txBody>
-                    <a:bodyPr wrap="square"/>
+                    <a:bodyPr/>
                     <a:lstStyle/>
                     <a:p>
                       <a:r>
@@ -14053,7 +14144,7 @@
                 </a:tc>
                 <a:tc>
                   <a:txBody>
-                    <a:bodyPr wrap="square"/>
+                    <a:bodyPr/>
                     <a:lstStyle/>
                     <a:p>
                       <a:r>
@@ -14073,11 +14164,16 @@
                     </a:solidFill>
                   </a:tcPr>
                 </a:tc>
+                <a:extLst>
+                  <a:ext uri="{0D108BD9-81ED-4DB2-BD59-A6C34878D82A}">
+                    <a16:rowId xmlns:a16="http://schemas.microsoft.com/office/drawing/2014/main" val="10004"/>
+                  </a:ext>
+                </a:extLst>
               </a:tr>
               <a:tr h="347472">
                 <a:tc>
                   <a:txBody>
-                    <a:bodyPr wrap="square"/>
+                    <a:bodyPr/>
                     <a:lstStyle/>
                     <a:p>
                       <a:r>
@@ -14099,7 +14195,7 @@
                 </a:tc>
                 <a:tc>
                   <a:txBody>
-                    <a:bodyPr wrap="square"/>
+                    <a:bodyPr/>
                     <a:lstStyle/>
                     <a:p>
                       <a:r>
@@ -14121,7 +14217,7 @@
                 </a:tc>
                 <a:tc>
                   <a:txBody>
-                    <a:bodyPr wrap="square"/>
+                    <a:bodyPr/>
                     <a:lstStyle/>
                     <a:p>
                       <a:r>
@@ -14141,11 +14237,16 @@
                     </a:solidFill>
                   </a:tcPr>
                 </a:tc>
+                <a:extLst>
+                  <a:ext uri="{0D108BD9-81ED-4DB2-BD59-A6C34878D82A}">
+                    <a16:rowId xmlns:a16="http://schemas.microsoft.com/office/drawing/2014/main" val="10005"/>
+                  </a:ext>
+                </a:extLst>
               </a:tr>
               <a:tr h="347472">
                 <a:tc>
                   <a:txBody>
-                    <a:bodyPr wrap="square"/>
+                    <a:bodyPr/>
                     <a:lstStyle/>
                     <a:p>
                       <a:r>
@@ -14167,7 +14268,7 @@
                 </a:tc>
                 <a:tc>
                   <a:txBody>
-                    <a:bodyPr wrap="square"/>
+                    <a:bodyPr/>
                     <a:lstStyle/>
                     <a:p>
                       <a:r>
@@ -14189,7 +14290,7 @@
                 </a:tc>
                 <a:tc>
                   <a:txBody>
-                    <a:bodyPr wrap="square"/>
+                    <a:bodyPr/>
                     <a:lstStyle/>
                     <a:p>
                       <a:r>
@@ -14209,6 +14310,11 @@
                     </a:solidFill>
                   </a:tcPr>
                 </a:tc>
+                <a:extLst>
+                  <a:ext uri="{0D108BD9-81ED-4DB2-BD59-A6C34878D82A}">
+                    <a16:rowId xmlns:a16="http://schemas.microsoft.com/office/drawing/2014/main" val="10006"/>
+                  </a:ext>
+                </a:extLst>
               </a:tr>
             </a:tbl>
           </a:graphicData>
@@ -14293,7 +14399,7 @@
 </file>
 
 <file path=ppt/slides/slide8.xml><?xml version="1.0" encoding="utf-8"?>
-<p:sld xmlns:a="http://schemas.openxmlformats.org/drawingml/2006/main" xmlns:p="http://schemas.openxmlformats.org/presentationml/2006/main" xmlns:r="http://schemas.openxmlformats.org/officeDocument/2006/relationships">
+<p:sld xmlns:a="http://schemas.openxmlformats.org/drawingml/2006/main" xmlns:r="http://schemas.openxmlformats.org/officeDocument/2006/relationships" xmlns:p="http://schemas.openxmlformats.org/presentationml/2006/main">
   <p:cSld>
     <p:spTree>
       <p:nvGrpSpPr>
@@ -14301,7 +14407,14 @@
         <p:cNvGrpSpPr/>
         <p:nvPr/>
       </p:nvGrpSpPr>
-      <p:grpSpPr/>
+      <p:grpSpPr>
+        <a:xfrm>
+          <a:off x="0" y="0"/>
+          <a:ext cx="0" cy="0"/>
+          <a:chOff x="0" y="0"/>
+          <a:chExt cx="0" cy="0"/>
+        </a:xfrm>
+      </p:grpSpPr>
       <p:sp>
         <p:nvSpPr>
           <p:cNvPr id="2" name="TextBox 1"/>
@@ -14346,7 +14459,7 @@
           <p:nvPr/>
         </p:nvPicPr>
         <p:blipFill>
-          <a:blip r:embed="rId2"/>
+          <a:blip r:embed="rId3"/>
           <a:stretch>
             <a:fillRect/>
           </a:stretch>
@@ -14436,6 +14549,7 @@
           <a:lstStyle/>
           <a:p>
             <a:pPr algn="ctr"/>
+            <a:endParaRPr/>
           </a:p>
         </p:txBody>
       </p:sp>
@@ -14479,6 +14593,7 @@
           <a:lstStyle/>
           <a:p>
             <a:pPr algn="ctr"/>
+            <a:endParaRPr/>
           </a:p>
         </p:txBody>
       </p:sp>
@@ -14527,7 +14642,7 @@
         </p:nvGraphicFramePr>
         <p:xfrm>
           <a:off x="548640" y="1371600"/>
-          <a:ext cx="11064240" cy="2084832"/>
+          <a:ext cx="11064240" cy="2508504"/>
         </p:xfrm>
         <a:graphic>
           <a:graphicData uri="http://schemas.openxmlformats.org/drawingml/2006/table">
@@ -14536,15 +14651,39 @@
                 <a:tableStyleId>{5C22544A-7EE6-4342-B048-85BDC9FD1C3A}</a:tableStyleId>
               </a:tblPr>
               <a:tblGrid>
-                <a:gridCol w="1737360"/>
-                <a:gridCol w="5943600"/>
-                <a:gridCol w="1828800"/>
-                <a:gridCol w="1554480"/>
+                <a:gridCol w="1737360">
+                  <a:extLst>
+                    <a:ext uri="{9D8B030D-6E8A-4147-A177-3AD203B41FA5}">
+                      <a16:colId xmlns:a16="http://schemas.microsoft.com/office/drawing/2014/main" val="20000"/>
+                    </a:ext>
+                  </a:extLst>
+                </a:gridCol>
+                <a:gridCol w="5943600">
+                  <a:extLst>
+                    <a:ext uri="{9D8B030D-6E8A-4147-A177-3AD203B41FA5}">
+                      <a16:colId xmlns:a16="http://schemas.microsoft.com/office/drawing/2014/main" val="20001"/>
+                    </a:ext>
+                  </a:extLst>
+                </a:gridCol>
+                <a:gridCol w="1828800">
+                  <a:extLst>
+                    <a:ext uri="{9D8B030D-6E8A-4147-A177-3AD203B41FA5}">
+                      <a16:colId xmlns:a16="http://schemas.microsoft.com/office/drawing/2014/main" val="20002"/>
+                    </a:ext>
+                  </a:extLst>
+                </a:gridCol>
+                <a:gridCol w="1554480">
+                  <a:extLst>
+                    <a:ext uri="{9D8B030D-6E8A-4147-A177-3AD203B41FA5}">
+                      <a16:colId xmlns:a16="http://schemas.microsoft.com/office/drawing/2014/main" val="20003"/>
+                    </a:ext>
+                  </a:extLst>
+                </a:gridCol>
               </a:tblGrid>
               <a:tr h="347472">
                 <a:tc>
                   <a:txBody>
-                    <a:bodyPr wrap="square"/>
+                    <a:bodyPr/>
                     <a:lstStyle/>
                     <a:p>
                       <a:r>
@@ -14566,7 +14705,7 @@
                 </a:tc>
                 <a:tc>
                   <a:txBody>
-                    <a:bodyPr wrap="square"/>
+                    <a:bodyPr/>
                     <a:lstStyle/>
                     <a:p>
                       <a:r>
@@ -14588,7 +14727,7 @@
                 </a:tc>
                 <a:tc>
                   <a:txBody>
-                    <a:bodyPr wrap="square"/>
+                    <a:bodyPr/>
                     <a:lstStyle/>
                     <a:p>
                       <a:r>
@@ -14610,7 +14749,7 @@
                 </a:tc>
                 <a:tc>
                   <a:txBody>
-                    <a:bodyPr wrap="square"/>
+                    <a:bodyPr/>
                     <a:lstStyle/>
                     <a:p>
                       <a:r>
@@ -14630,11 +14769,16 @@
                     </a:solidFill>
                   </a:tcPr>
                 </a:tc>
+                <a:extLst>
+                  <a:ext uri="{0D108BD9-81ED-4DB2-BD59-A6C34878D82A}">
+                    <a16:rowId xmlns:a16="http://schemas.microsoft.com/office/drawing/2014/main" val="10000"/>
+                  </a:ext>
+                </a:extLst>
               </a:tr>
               <a:tr h="347472">
                 <a:tc>
                   <a:txBody>
-                    <a:bodyPr wrap="square"/>
+                    <a:bodyPr/>
                     <a:lstStyle/>
                     <a:p>
                       <a:r>
@@ -14656,7 +14800,7 @@
                 </a:tc>
                 <a:tc>
                   <a:txBody>
-                    <a:bodyPr wrap="square"/>
+                    <a:bodyPr/>
                     <a:lstStyle/>
                     <a:p>
                       <a:r>
@@ -14678,7 +14822,7 @@
                 </a:tc>
                 <a:tc>
                   <a:txBody>
-                    <a:bodyPr wrap="square"/>
+                    <a:bodyPr/>
                     <a:lstStyle/>
                     <a:p>
                       <a:r>
@@ -14700,7 +14844,7 @@
                 </a:tc>
                 <a:tc>
                   <a:txBody>
-                    <a:bodyPr wrap="square"/>
+                    <a:bodyPr/>
                     <a:lstStyle/>
                     <a:p>
                       <a:r>
@@ -14720,11 +14864,16 @@
                     </a:solidFill>
                   </a:tcPr>
                 </a:tc>
+                <a:extLst>
+                  <a:ext uri="{0D108BD9-81ED-4DB2-BD59-A6C34878D82A}">
+                    <a16:rowId xmlns:a16="http://schemas.microsoft.com/office/drawing/2014/main" val="10001"/>
+                  </a:ext>
+                </a:extLst>
               </a:tr>
               <a:tr h="347472">
                 <a:tc>
                   <a:txBody>
-                    <a:bodyPr wrap="square"/>
+                    <a:bodyPr/>
                     <a:lstStyle/>
                     <a:p>
                       <a:r>
@@ -14746,7 +14895,7 @@
                 </a:tc>
                 <a:tc>
                   <a:txBody>
-                    <a:bodyPr wrap="square"/>
+                    <a:bodyPr/>
                     <a:lstStyle/>
                     <a:p>
                       <a:r>
@@ -14768,7 +14917,7 @@
                 </a:tc>
                 <a:tc>
                   <a:txBody>
-                    <a:bodyPr wrap="square"/>
+                    <a:bodyPr/>
                     <a:lstStyle/>
                     <a:p>
                       <a:r>
@@ -14790,7 +14939,7 @@
                 </a:tc>
                 <a:tc>
                   <a:txBody>
-                    <a:bodyPr wrap="square"/>
+                    <a:bodyPr/>
                     <a:lstStyle/>
                     <a:p>
                       <a:r>
@@ -14810,11 +14959,16 @@
                     </a:solidFill>
                   </a:tcPr>
                 </a:tc>
+                <a:extLst>
+                  <a:ext uri="{0D108BD9-81ED-4DB2-BD59-A6C34878D82A}">
+                    <a16:rowId xmlns:a16="http://schemas.microsoft.com/office/drawing/2014/main" val="10002"/>
+                  </a:ext>
+                </a:extLst>
               </a:tr>
               <a:tr h="347472">
                 <a:tc>
                   <a:txBody>
-                    <a:bodyPr wrap="square"/>
+                    <a:bodyPr/>
                     <a:lstStyle/>
                     <a:p>
                       <a:r>
@@ -14836,7 +14990,7 @@
                 </a:tc>
                 <a:tc>
                   <a:txBody>
-                    <a:bodyPr wrap="square"/>
+                    <a:bodyPr/>
                     <a:lstStyle/>
                     <a:p>
                       <a:r>
@@ -14858,7 +15012,7 @@
                 </a:tc>
                 <a:tc>
                   <a:txBody>
-                    <a:bodyPr wrap="square"/>
+                    <a:bodyPr/>
                     <a:lstStyle/>
                     <a:p>
                       <a:r>
@@ -14880,7 +15034,7 @@
                 </a:tc>
                 <a:tc>
                   <a:txBody>
-                    <a:bodyPr wrap="square"/>
+                    <a:bodyPr/>
                     <a:lstStyle/>
                     <a:p>
                       <a:r>
@@ -14900,11 +15054,16 @@
                     </a:solidFill>
                   </a:tcPr>
                 </a:tc>
+                <a:extLst>
+                  <a:ext uri="{0D108BD9-81ED-4DB2-BD59-A6C34878D82A}">
+                    <a16:rowId xmlns:a16="http://schemas.microsoft.com/office/drawing/2014/main" val="10003"/>
+                  </a:ext>
+                </a:extLst>
               </a:tr>
               <a:tr h="347472">
                 <a:tc>
                   <a:txBody>
-                    <a:bodyPr wrap="square"/>
+                    <a:bodyPr/>
                     <a:lstStyle/>
                     <a:p>
                       <a:r>
@@ -14926,7 +15085,7 @@
                 </a:tc>
                 <a:tc>
                   <a:txBody>
-                    <a:bodyPr wrap="square"/>
+                    <a:bodyPr/>
                     <a:lstStyle/>
                     <a:p>
                       <a:r>
@@ -14948,7 +15107,7 @@
                 </a:tc>
                 <a:tc>
                   <a:txBody>
-                    <a:bodyPr wrap="square"/>
+                    <a:bodyPr/>
                     <a:lstStyle/>
                     <a:p>
                       <a:r>
@@ -14970,7 +15129,7 @@
                 </a:tc>
                 <a:tc>
                   <a:txBody>
-                    <a:bodyPr wrap="square"/>
+                    <a:bodyPr/>
                     <a:lstStyle/>
                     <a:p>
                       <a:r>
@@ -14990,11 +15149,16 @@
                     </a:solidFill>
                   </a:tcPr>
                 </a:tc>
+                <a:extLst>
+                  <a:ext uri="{0D108BD9-81ED-4DB2-BD59-A6C34878D82A}">
+                    <a16:rowId xmlns:a16="http://schemas.microsoft.com/office/drawing/2014/main" val="10004"/>
+                  </a:ext>
+                </a:extLst>
               </a:tr>
               <a:tr h="347472">
                 <a:tc>
                   <a:txBody>
-                    <a:bodyPr wrap="square"/>
+                    <a:bodyPr/>
                     <a:lstStyle/>
                     <a:p>
                       <a:r>
@@ -15016,7 +15180,7 @@
                 </a:tc>
                 <a:tc>
                   <a:txBody>
-                    <a:bodyPr wrap="square"/>
+                    <a:bodyPr/>
                     <a:lstStyle/>
                     <a:p>
                       <a:r>
@@ -15038,7 +15202,7 @@
                 </a:tc>
                 <a:tc>
                   <a:txBody>
-                    <a:bodyPr wrap="square"/>
+                    <a:bodyPr/>
                     <a:lstStyle/>
                     <a:p>
                       <a:r>
@@ -15060,7 +15224,7 @@
                 </a:tc>
                 <a:tc>
                   <a:txBody>
-                    <a:bodyPr wrap="square"/>
+                    <a:bodyPr/>
                     <a:lstStyle/>
                     <a:p>
                       <a:r>
@@ -15080,6 +15244,11 @@
                     </a:solidFill>
                   </a:tcPr>
                 </a:tc>
+                <a:extLst>
+                  <a:ext uri="{0D108BD9-81ED-4DB2-BD59-A6C34878D82A}">
+                    <a16:rowId xmlns:a16="http://schemas.microsoft.com/office/drawing/2014/main" val="10005"/>
+                  </a:ext>
+                </a:extLst>
               </a:tr>
             </a:tbl>
           </a:graphicData>
@@ -15129,7 +15298,7 @@
 </file>
 
 <file path=ppt/slides/slide9.xml><?xml version="1.0" encoding="utf-8"?>
-<p:sld xmlns:a="http://schemas.openxmlformats.org/drawingml/2006/main" xmlns:p="http://schemas.openxmlformats.org/presentationml/2006/main" xmlns:r="http://schemas.openxmlformats.org/officeDocument/2006/relationships">
+<p:sld xmlns:a="http://schemas.openxmlformats.org/drawingml/2006/main" xmlns:r="http://schemas.openxmlformats.org/officeDocument/2006/relationships" xmlns:p="http://schemas.openxmlformats.org/presentationml/2006/main">
   <p:cSld>
     <p:spTree>
       <p:nvGrpSpPr>
@@ -15137,7 +15306,14 @@
         <p:cNvGrpSpPr/>
         <p:nvPr/>
       </p:nvGrpSpPr>
-      <p:grpSpPr/>
+      <p:grpSpPr>
+        <a:xfrm>
+          <a:off x="0" y="0"/>
+          <a:ext cx="0" cy="0"/>
+          <a:chOff x="0" y="0"/>
+          <a:chExt cx="0" cy="0"/>
+        </a:xfrm>
+      </p:grpSpPr>
       <p:sp>
         <p:nvSpPr>
           <p:cNvPr id="2" name="TextBox 1"/>
@@ -15182,7 +15358,7 @@
           <p:nvPr/>
         </p:nvPicPr>
         <p:blipFill>
-          <a:blip r:embed="rId2"/>
+          <a:blip r:embed="rId3"/>
           <a:stretch>
             <a:fillRect/>
           </a:stretch>
@@ -15272,6 +15448,7 @@
           <a:lstStyle/>
           <a:p>
             <a:pPr algn="ctr"/>
+            <a:endParaRPr/>
           </a:p>
         </p:txBody>
       </p:sp>
@@ -15315,6 +15492,7 @@
           <a:lstStyle/>
           <a:p>
             <a:pPr algn="ctr"/>
+            <a:endParaRPr/>
           </a:p>
         </p:txBody>
       </p:sp>
@@ -15363,7 +15541,7 @@
         </p:nvGraphicFramePr>
         <p:xfrm>
           <a:off x="548640" y="1325880"/>
-          <a:ext cx="11064240" cy="2432304"/>
+          <a:ext cx="11064240" cy="2505456"/>
         </p:xfrm>
         <a:graphic>
           <a:graphicData uri="http://schemas.openxmlformats.org/drawingml/2006/table">
@@ -15372,14 +15550,32 @@
                 <a:tableStyleId>{5C22544A-7EE6-4342-B048-85BDC9FD1C3A}</a:tableStyleId>
               </a:tblPr>
               <a:tblGrid>
-                <a:gridCol w="1737360"/>
-                <a:gridCol w="5669280"/>
-                <a:gridCol w="3657600"/>
+                <a:gridCol w="1737360">
+                  <a:extLst>
+                    <a:ext uri="{9D8B030D-6E8A-4147-A177-3AD203B41FA5}">
+                      <a16:colId xmlns:a16="http://schemas.microsoft.com/office/drawing/2014/main" val="20000"/>
+                    </a:ext>
+                  </a:extLst>
+                </a:gridCol>
+                <a:gridCol w="5669280">
+                  <a:extLst>
+                    <a:ext uri="{9D8B030D-6E8A-4147-A177-3AD203B41FA5}">
+                      <a16:colId xmlns:a16="http://schemas.microsoft.com/office/drawing/2014/main" val="20001"/>
+                    </a:ext>
+                  </a:extLst>
+                </a:gridCol>
+                <a:gridCol w="3657600">
+                  <a:extLst>
+                    <a:ext uri="{9D8B030D-6E8A-4147-A177-3AD203B41FA5}">
+                      <a16:colId xmlns:a16="http://schemas.microsoft.com/office/drawing/2014/main" val="20002"/>
+                    </a:ext>
+                  </a:extLst>
+                </a:gridCol>
               </a:tblGrid>
               <a:tr h="347472">
                 <a:tc>
                   <a:txBody>
-                    <a:bodyPr wrap="square"/>
+                    <a:bodyPr/>
                     <a:lstStyle/>
                     <a:p>
                       <a:r>
@@ -15401,7 +15597,7 @@
                 </a:tc>
                 <a:tc>
                   <a:txBody>
-                    <a:bodyPr wrap="square"/>
+                    <a:bodyPr/>
                     <a:lstStyle/>
                     <a:p>
                       <a:r>
@@ -15423,7 +15619,7 @@
                 </a:tc>
                 <a:tc>
                   <a:txBody>
-                    <a:bodyPr wrap="square"/>
+                    <a:bodyPr/>
                     <a:lstStyle/>
                     <a:p>
                       <a:r>
@@ -15443,11 +15639,16 @@
                     </a:solidFill>
                   </a:tcPr>
                 </a:tc>
+                <a:extLst>
+                  <a:ext uri="{0D108BD9-81ED-4DB2-BD59-A6C34878D82A}">
+                    <a16:rowId xmlns:a16="http://schemas.microsoft.com/office/drawing/2014/main" val="10000"/>
+                  </a:ext>
+                </a:extLst>
               </a:tr>
               <a:tr h="347472">
                 <a:tc>
                   <a:txBody>
-                    <a:bodyPr wrap="square"/>
+                    <a:bodyPr/>
                     <a:lstStyle/>
                     <a:p>
                       <a:r>
@@ -15469,7 +15670,7 @@
                 </a:tc>
                 <a:tc>
                   <a:txBody>
-                    <a:bodyPr wrap="square"/>
+                    <a:bodyPr/>
                     <a:lstStyle/>
                     <a:p>
                       <a:r>
@@ -15509,7 +15710,7 @@
                 </a:tc>
                 <a:tc>
                   <a:txBody>
-                    <a:bodyPr wrap="square"/>
+                    <a:bodyPr/>
                     <a:lstStyle/>
                     <a:p>
                       <a:r>
@@ -15529,11 +15730,16 @@
                     </a:solidFill>
                   </a:tcPr>
                 </a:tc>
+                <a:extLst>
+                  <a:ext uri="{0D108BD9-81ED-4DB2-BD59-A6C34878D82A}">
+                    <a16:rowId xmlns:a16="http://schemas.microsoft.com/office/drawing/2014/main" val="10001"/>
+                  </a:ext>
+                </a:extLst>
               </a:tr>
               <a:tr h="347472">
                 <a:tc>
                   <a:txBody>
-                    <a:bodyPr wrap="square"/>
+                    <a:bodyPr/>
                     <a:lstStyle/>
                     <a:p>
                       <a:r>
@@ -15555,7 +15761,7 @@
                 </a:tc>
                 <a:tc>
                   <a:txBody>
-                    <a:bodyPr wrap="square"/>
+                    <a:bodyPr/>
                     <a:lstStyle/>
                     <a:p>
                       <a:r>
@@ -15595,7 +15801,7 @@
                 </a:tc>
                 <a:tc>
                   <a:txBody>
-                    <a:bodyPr wrap="square"/>
+                    <a:bodyPr/>
                     <a:lstStyle/>
                     <a:p>
                       <a:r>
@@ -15615,11 +15821,16 @@
                     </a:solidFill>
                   </a:tcPr>
                 </a:tc>
+                <a:extLst>
+                  <a:ext uri="{0D108BD9-81ED-4DB2-BD59-A6C34878D82A}">
+                    <a16:rowId xmlns:a16="http://schemas.microsoft.com/office/drawing/2014/main" val="10002"/>
+                  </a:ext>
+                </a:extLst>
               </a:tr>
               <a:tr h="347472">
                 <a:tc>
                   <a:txBody>
-                    <a:bodyPr wrap="square"/>
+                    <a:bodyPr/>
                     <a:lstStyle/>
                     <a:p>
                       <a:r>
@@ -15641,7 +15852,7 @@
                 </a:tc>
                 <a:tc>
                   <a:txBody>
-                    <a:bodyPr wrap="square"/>
+                    <a:bodyPr/>
                     <a:lstStyle/>
                     <a:p>
                       <a:r>
@@ -15663,7 +15874,7 @@
                 </a:tc>
                 <a:tc>
                   <a:txBody>
-                    <a:bodyPr wrap="square"/>
+                    <a:bodyPr/>
                     <a:lstStyle/>
                     <a:p>
                       <a:r>
@@ -15683,11 +15894,16 @@
                     </a:solidFill>
                   </a:tcPr>
                 </a:tc>
+                <a:extLst>
+                  <a:ext uri="{0D108BD9-81ED-4DB2-BD59-A6C34878D82A}">
+                    <a16:rowId xmlns:a16="http://schemas.microsoft.com/office/drawing/2014/main" val="10003"/>
+                  </a:ext>
+                </a:extLst>
               </a:tr>
               <a:tr h="347472">
                 <a:tc>
                   <a:txBody>
-                    <a:bodyPr wrap="square"/>
+                    <a:bodyPr/>
                     <a:lstStyle/>
                     <a:p>
                       <a:r>
@@ -15709,7 +15925,7 @@
                 </a:tc>
                 <a:tc>
                   <a:txBody>
-                    <a:bodyPr wrap="square"/>
+                    <a:bodyPr/>
                     <a:lstStyle/>
                     <a:p>
                       <a:r>
@@ -15749,7 +15965,7 @@
                 </a:tc>
                 <a:tc>
                   <a:txBody>
-                    <a:bodyPr wrap="square"/>
+                    <a:bodyPr/>
                     <a:lstStyle/>
                     <a:p>
                       <a:r>
@@ -15769,11 +15985,16 @@
                     </a:solidFill>
                   </a:tcPr>
                 </a:tc>
+                <a:extLst>
+                  <a:ext uri="{0D108BD9-81ED-4DB2-BD59-A6C34878D82A}">
+                    <a16:rowId xmlns:a16="http://schemas.microsoft.com/office/drawing/2014/main" val="10004"/>
+                  </a:ext>
+                </a:extLst>
               </a:tr>
               <a:tr h="347472">
                 <a:tc>
                   <a:txBody>
-                    <a:bodyPr wrap="square"/>
+                    <a:bodyPr/>
                     <a:lstStyle/>
                     <a:p>
                       <a:r>
@@ -15795,7 +16016,7 @@
                 </a:tc>
                 <a:tc>
                   <a:txBody>
-                    <a:bodyPr wrap="square"/>
+                    <a:bodyPr/>
                     <a:lstStyle/>
                     <a:p>
                       <a:r>
@@ -15826,7 +16047,7 @@
                 </a:tc>
                 <a:tc>
                   <a:txBody>
-                    <a:bodyPr wrap="square"/>
+                    <a:bodyPr/>
                     <a:lstStyle/>
                     <a:p>
                       <a:r>
@@ -15846,11 +16067,16 @@
                     </a:solidFill>
                   </a:tcPr>
                 </a:tc>
+                <a:extLst>
+                  <a:ext uri="{0D108BD9-81ED-4DB2-BD59-A6C34878D82A}">
+                    <a16:rowId xmlns:a16="http://schemas.microsoft.com/office/drawing/2014/main" val="10005"/>
+                  </a:ext>
+                </a:extLst>
               </a:tr>
               <a:tr h="347472">
                 <a:tc>
                   <a:txBody>
-                    <a:bodyPr wrap="square"/>
+                    <a:bodyPr/>
                     <a:lstStyle/>
                     <a:p>
                       <a:r>
@@ -15872,7 +16098,7 @@
                 </a:tc>
                 <a:tc>
                   <a:txBody>
-                    <a:bodyPr wrap="square"/>
+                    <a:bodyPr/>
                     <a:lstStyle/>
                     <a:p>
                       <a:r>
@@ -15903,7 +16129,7 @@
                 </a:tc>
                 <a:tc>
                   <a:txBody>
-                    <a:bodyPr wrap="square"/>
+                    <a:bodyPr/>
                     <a:lstStyle/>
                     <a:p>
                       <a:r>
@@ -15923,6 +16149,11 @@
                     </a:solidFill>
                   </a:tcPr>
                 </a:tc>
+                <a:extLst>
+                  <a:ext uri="{0D108BD9-81ED-4DB2-BD59-A6C34878D82A}">
+                    <a16:rowId xmlns:a16="http://schemas.microsoft.com/office/drawing/2014/main" val="10006"/>
+                  </a:ext>
+                </a:extLst>
               </a:tr>
             </a:tbl>
           </a:graphicData>
@@ -16350,44 +16581,44 @@
         <a:sysClr val="window" lastClr="FFFFFF"/>
       </a:lt1>
       <a:dk2>
-        <a:srgbClr val="1F497D"/>
+        <a:srgbClr val="0E2841"/>
       </a:dk2>
       <a:lt2>
-        <a:srgbClr val="EEECE1"/>
+        <a:srgbClr val="E8E8E8"/>
       </a:lt2>
       <a:accent1>
-        <a:srgbClr val="4F81BD"/>
+        <a:srgbClr val="156082"/>
       </a:accent1>
       <a:accent2>
-        <a:srgbClr val="C0504D"/>
+        <a:srgbClr val="E97132"/>
       </a:accent2>
       <a:accent3>
-        <a:srgbClr val="9BBB59"/>
+        <a:srgbClr val="196B24"/>
       </a:accent3>
       <a:accent4>
-        <a:srgbClr val="8064A2"/>
+        <a:srgbClr val="0F9ED5"/>
       </a:accent4>
       <a:accent5>
-        <a:srgbClr val="4BACC6"/>
+        <a:srgbClr val="A02B93"/>
       </a:accent5>
       <a:accent6>
-        <a:srgbClr val="F79646"/>
+        <a:srgbClr val="4EA72E"/>
       </a:accent6>
       <a:hlink>
-        <a:srgbClr val="0000FF"/>
+        <a:srgbClr val="467886"/>
       </a:hlink>
       <a:folHlink>
-        <a:srgbClr val="800080"/>
+        <a:srgbClr val="96607D"/>
       </a:folHlink>
     </a:clrScheme>
     <a:fontScheme name="Office">
       <a:majorFont>
-        <a:latin typeface="Calibri"/>
+        <a:latin typeface="Aptos Display" panose="02110004020202020204"/>
         <a:ea typeface=""/>
         <a:cs typeface=""/>
-        <a:font script="Jpan" typeface="ＭＳ Ｐゴシック"/>
+        <a:font script="Jpan" typeface="游ゴシック Light"/>
         <a:font script="Hang" typeface="맑은 고딕"/>
-        <a:font script="Hans" typeface="宋体"/>
+        <a:font script="Hans" typeface="等线 Light"/>
         <a:font script="Hant" typeface="新細明體"/>
         <a:font script="Arab" typeface="Times New Roman"/>
         <a:font script="Hebr" typeface="Times New Roman"/>
@@ -16415,14 +16646,31 @@
         <a:font script="Viet" typeface="Times New Roman"/>
         <a:font script="Uigh" typeface="Microsoft Uighur"/>
         <a:font script="Geor" typeface="Sylfaen"/>
+        <a:font script="Armn" typeface="Arial"/>
+        <a:font script="Bugi" typeface="Leelawadee UI"/>
+        <a:font script="Bopo" typeface="Microsoft JhengHei"/>
+        <a:font script="Java" typeface="Javanese Text"/>
+        <a:font script="Lisu" typeface="Segoe UI"/>
+        <a:font script="Mymr" typeface="Myanmar Text"/>
+        <a:font script="Nkoo" typeface="Ebrima"/>
+        <a:font script="Olck" typeface="Nirmala UI"/>
+        <a:font script="Osma" typeface="Ebrima"/>
+        <a:font script="Phag" typeface="Phagspa"/>
+        <a:font script="Syrn" typeface="Estrangelo Edessa"/>
+        <a:font script="Syrj" typeface="Estrangelo Edessa"/>
+        <a:font script="Syre" typeface="Estrangelo Edessa"/>
+        <a:font script="Sora" typeface="Nirmala UI"/>
+        <a:font script="Tale" typeface="Microsoft Tai Le"/>
+        <a:font script="Talu" typeface="Microsoft New Tai Lue"/>
+        <a:font script="Tfng" typeface="Ebrima"/>
       </a:majorFont>
       <a:minorFont>
-        <a:latin typeface="Calibri"/>
+        <a:latin typeface="Aptos" panose="02110004020202020204"/>
         <a:ea typeface=""/>
         <a:cs typeface=""/>
-        <a:font script="Jpan" typeface="ＭＳ Ｐゴシック"/>
+        <a:font script="Jpan" typeface="游ゴシック"/>
         <a:font script="Hang" typeface="맑은 고딕"/>
-        <a:font script="Hans" typeface="宋体"/>
+        <a:font script="Hans" typeface="等线"/>
         <a:font script="Hant" typeface="新細明體"/>
         <a:font script="Arab" typeface="Arial"/>
         <a:font script="Hebr" typeface="Arial"/>
@@ -16450,6 +16698,23 @@
         <a:font script="Viet" typeface="Arial"/>
         <a:font script="Uigh" typeface="Microsoft Uighur"/>
         <a:font script="Geor" typeface="Sylfaen"/>
+        <a:font script="Armn" typeface="Arial"/>
+        <a:font script="Bugi" typeface="Leelawadee UI"/>
+        <a:font script="Bopo" typeface="Microsoft JhengHei"/>
+        <a:font script="Java" typeface="Javanese Text"/>
+        <a:font script="Lisu" typeface="Segoe UI"/>
+        <a:font script="Mymr" typeface="Myanmar Text"/>
+        <a:font script="Nkoo" typeface="Ebrima"/>
+        <a:font script="Olck" typeface="Nirmala UI"/>
+        <a:font script="Osma" typeface="Ebrima"/>
+        <a:font script="Phag" typeface="Phagspa"/>
+        <a:font script="Syrn" typeface="Estrangelo Edessa"/>
+        <a:font script="Syrj" typeface="Estrangelo Edessa"/>
+        <a:font script="Syre" typeface="Estrangelo Edessa"/>
+        <a:font script="Sora" typeface="Nirmala UI"/>
+        <a:font script="Tale" typeface="Microsoft Tai Le"/>
+        <a:font script="Talu" typeface="Microsoft New Tai Lue"/>
+        <a:font script="Tfng" typeface="Ebrima"/>
       </a:minorFont>
     </a:fontScheme>
     <a:fmtScheme name="Office">
@@ -16461,180 +16726,136 @@
           <a:gsLst>
             <a:gs pos="0">
               <a:schemeClr val="phClr">
-                <a:tint val="50000"/>
-                <a:satMod val="300000"/>
+                <a:lumMod val="110000"/>
+                <a:satMod val="105000"/>
+                <a:tint val="67000"/>
               </a:schemeClr>
             </a:gs>
-            <a:gs pos="35000">
+            <a:gs pos="50000">
               <a:schemeClr val="phClr">
-                <a:tint val="37000"/>
-                <a:satMod val="300000"/>
+                <a:lumMod val="105000"/>
+                <a:satMod val="103000"/>
+                <a:tint val="73000"/>
               </a:schemeClr>
             </a:gs>
             <a:gs pos="100000">
               <a:schemeClr val="phClr">
-                <a:tint val="15000"/>
-                <a:satMod val="350000"/>
+                <a:lumMod val="105000"/>
+                <a:satMod val="109000"/>
+                <a:tint val="81000"/>
               </a:schemeClr>
             </a:gs>
           </a:gsLst>
-          <a:lin ang="16200000" scaled="1"/>
+          <a:lin ang="5400000" scaled="0"/>
         </a:gradFill>
         <a:gradFill rotWithShape="1">
           <a:gsLst>
             <a:gs pos="0">
               <a:schemeClr val="phClr">
-                <a:tint val="100000"/>
+                <a:satMod val="103000"/>
+                <a:lumMod val="102000"/>
+                <a:tint val="94000"/>
+              </a:schemeClr>
+            </a:gs>
+            <a:gs pos="50000">
+              <a:schemeClr val="phClr">
+                <a:satMod val="110000"/>
+                <a:lumMod val="100000"/>
                 <a:shade val="100000"/>
-                <a:satMod val="130000"/>
               </a:schemeClr>
             </a:gs>
             <a:gs pos="100000">
               <a:schemeClr val="phClr">
-                <a:tint val="50000"/>
-                <a:shade val="100000"/>
-                <a:satMod val="350000"/>
+                <a:lumMod val="99000"/>
+                <a:satMod val="120000"/>
+                <a:shade val="78000"/>
               </a:schemeClr>
             </a:gs>
           </a:gsLst>
-          <a:lin ang="16200000" scaled="0"/>
+          <a:lin ang="5400000" scaled="0"/>
         </a:gradFill>
       </a:fillStyleLst>
       <a:lnStyleLst>
-        <a:ln w="9525" cap="flat" cmpd="sng" algn="ctr">
+        <a:ln w="12700" cap="flat" cmpd="sng" algn="ctr">
           <a:solidFill>
-            <a:schemeClr val="phClr">
-              <a:shade val="95000"/>
-              <a:satMod val="105000"/>
-            </a:schemeClr>
+            <a:schemeClr val="phClr"/>
           </a:solidFill>
           <a:prstDash val="solid"/>
+          <a:miter lim="800000"/>
+        </a:ln>
+        <a:ln w="19050" cap="flat" cmpd="sng" algn="ctr">
+          <a:solidFill>
+            <a:schemeClr val="phClr"/>
+          </a:solidFill>
+          <a:prstDash val="solid"/>
+          <a:miter lim="800000"/>
         </a:ln>
         <a:ln w="25400" cap="flat" cmpd="sng" algn="ctr">
           <a:solidFill>
             <a:schemeClr val="phClr"/>
           </a:solidFill>
           <a:prstDash val="solid"/>
-        </a:ln>
-        <a:ln w="38100" cap="flat" cmpd="sng" algn="ctr">
-          <a:solidFill>
-            <a:schemeClr val="phClr"/>
-          </a:solidFill>
-          <a:prstDash val="solid"/>
+          <a:miter lim="800000"/>
         </a:ln>
       </a:lnStyleLst>
       <a:effectStyleLst>
         <a:effectStyle>
+          <a:effectLst/>
+        </a:effectStyle>
+        <a:effectStyle>
+          <a:effectLst/>
+        </a:effectStyle>
+        <a:effectStyle>
           <a:effectLst>
-            <a:outerShdw blurRad="40000" dist="20000" dir="5400000" rotWithShape="0">
+            <a:outerShdw blurRad="57150" dist="19050" dir="5400000" algn="ctr" rotWithShape="0">
               <a:srgbClr val="000000">
-                <a:alpha val="38000"/>
+                <a:alpha val="63000"/>
               </a:srgbClr>
             </a:outerShdw>
           </a:effectLst>
-        </a:effectStyle>
-        <a:effectStyle>
-          <a:effectLst>
-            <a:outerShdw blurRad="40000" dist="23000" dir="5400000" rotWithShape="0">
-              <a:srgbClr val="000000">
-                <a:alpha val="35000"/>
-              </a:srgbClr>
-            </a:outerShdw>
-          </a:effectLst>
-        </a:effectStyle>
-        <a:effectStyle>
-          <a:effectLst>
-            <a:outerShdw blurRad="40000" dist="23000" dir="5400000" rotWithShape="0">
-              <a:srgbClr val="000000">
-                <a:alpha val="35000"/>
-              </a:srgbClr>
-            </a:outerShdw>
-          </a:effectLst>
-          <a:scene3d>
-            <a:camera prst="orthographicFront">
-              <a:rot lat="0" lon="0" rev="0"/>
-            </a:camera>
-            <a:lightRig rig="threePt" dir="t">
-              <a:rot lat="0" lon="0" rev="1200000"/>
-            </a:lightRig>
-          </a:scene3d>
-          <a:sp3d>
-            <a:bevelT w="63500" h="25400"/>
-          </a:sp3d>
         </a:effectStyle>
       </a:effectStyleLst>
       <a:bgFillStyleLst>
         <a:solidFill>
           <a:schemeClr val="phClr"/>
         </a:solidFill>
+        <a:solidFill>
+          <a:schemeClr val="phClr">
+            <a:tint val="95000"/>
+            <a:satMod val="170000"/>
+          </a:schemeClr>
+        </a:solidFill>
         <a:gradFill rotWithShape="1">
           <a:gsLst>
             <a:gs pos="0">
               <a:schemeClr val="phClr">
-                <a:tint val="40000"/>
-                <a:satMod val="350000"/>
+                <a:tint val="93000"/>
+                <a:satMod val="150000"/>
+                <a:shade val="98000"/>
+                <a:lumMod val="102000"/>
               </a:schemeClr>
             </a:gs>
-            <a:gs pos="40000">
+            <a:gs pos="50000">
               <a:schemeClr val="phClr">
-                <a:tint val="45000"/>
-                <a:shade val="99000"/>
-                <a:satMod val="350000"/>
+                <a:tint val="98000"/>
+                <a:satMod val="130000"/>
+                <a:shade val="90000"/>
+                <a:lumMod val="103000"/>
               </a:schemeClr>
             </a:gs>
             <a:gs pos="100000">
               <a:schemeClr val="phClr">
-                <a:shade val="20000"/>
-                <a:satMod val="255000"/>
+                <a:shade val="63000"/>
+                <a:satMod val="120000"/>
               </a:schemeClr>
             </a:gs>
           </a:gsLst>
-          <a:path path="circle">
-            <a:fillToRect l="50000" t="-80000" r="50000" b="180000"/>
-          </a:path>
-        </a:gradFill>
-        <a:gradFill rotWithShape="1">
-          <a:gsLst>
-            <a:gs pos="0">
-              <a:schemeClr val="phClr">
-                <a:tint val="80000"/>
-                <a:satMod val="300000"/>
-              </a:schemeClr>
-            </a:gs>
-            <a:gs pos="100000">
-              <a:schemeClr val="phClr">
-                <a:shade val="30000"/>
-                <a:satMod val="200000"/>
-              </a:schemeClr>
-            </a:gs>
-          </a:gsLst>
-          <a:path path="circle">
-            <a:fillToRect l="50000" t="50000" r="50000" b="50000"/>
-          </a:path>
+          <a:lin ang="5400000" scaled="0"/>
         </a:gradFill>
       </a:bgFillStyleLst>
     </a:fmtScheme>
   </a:themeElements>
   <a:objectDefaults>
-    <a:spDef>
-      <a:spPr/>
-      <a:bodyPr/>
-      <a:lstStyle/>
-      <a:style>
-        <a:lnRef idx="1">
-          <a:schemeClr val="accent1"/>
-        </a:lnRef>
-        <a:fillRef idx="3">
-          <a:schemeClr val="accent1"/>
-        </a:fillRef>
-        <a:effectRef idx="2">
-          <a:schemeClr val="accent1"/>
-        </a:effectRef>
-        <a:fontRef idx="minor">
-          <a:schemeClr val="lt1"/>
-        </a:fontRef>
-      </a:style>
-    </a:spDef>
     <a:lnDef>
       <a:spPr/>
       <a:bodyPr/>
@@ -16656,5 +16877,10 @@
     </a:lnDef>
   </a:objectDefaults>
   <a:extraClrSchemeLst/>
+  <a:extLst>
+    <a:ext uri="{05A4C25C-085E-4340-85A3-A5531E510DB2}">
+      <thm15:themeFamily xmlns:thm15="http://schemas.microsoft.com/office/thememl/2012/main" name="Office Theme" id="{2E142A2C-CD16-42D6-873A-C26D2A0506FA}" vid="{1BDDFF52-6CD6-40A5-AB3C-68EB2F1E4D0A}"/>
+    </a:ext>
+  </a:extLst>
 </a:theme>
 </file>
--- a/docs/PES_REVIEW1_DECK.pptx
+++ b/docs/PES_REVIEW1_DECK.pptx
@@ -4,24 +4,21 @@
   <p:sldMasterIdLst>
     <p:sldMasterId id="2147483648" r:id="rId1"/>
   </p:sldMasterIdLst>
-  <p:notesMasterIdLst>
-    <p:notesMasterId r:id="rId14"/>
-  </p:notesMasterIdLst>
   <p:sldIdLst>
-    <p:sldId id="256" r:id="rId2"/>
-    <p:sldId id="257" r:id="rId3"/>
-    <p:sldId id="258" r:id="rId4"/>
-    <p:sldId id="259" r:id="rId5"/>
-    <p:sldId id="260" r:id="rId6"/>
-    <p:sldId id="261" r:id="rId7"/>
-    <p:sldId id="262" r:id="rId8"/>
-    <p:sldId id="263" r:id="rId9"/>
-    <p:sldId id="264" r:id="rId10"/>
-    <p:sldId id="265" r:id="rId11"/>
-    <p:sldId id="266" r:id="rId12"/>
-    <p:sldId id="267" r:id="rId13"/>
+    <p:sldId id="256" r:id="rId7"/>
+    <p:sldId id="257" r:id="rId9"/>
+    <p:sldId id="258" r:id="rId10"/>
+    <p:sldId id="259" r:id="rId11"/>
+    <p:sldId id="260" r:id="rId12"/>
+    <p:sldId id="261" r:id="rId13"/>
+    <p:sldId id="262" r:id="rId14"/>
+    <p:sldId id="263" r:id="rId15"/>
+    <p:sldId id="264" r:id="rId16"/>
+    <p:sldId id="265" r:id="rId17"/>
+    <p:sldId id="266" r:id="rId18"/>
+    <p:sldId id="267" r:id="rId19"/>
   </p:sldIdLst>
-  <p:sldSz cx="12192000" cy="6858000"/>
+  <p:sldSz cx="12191695" cy="6858000" type="screen4x3"/>
   <p:notesSz cx="6858000" cy="9144000"/>
   <p:defaultTextStyle>
     <a:defPPr>
@@ -118,27 +115,11 @@
       </a:defRPr>
     </a:lvl9pPr>
   </p:defaultTextStyle>
-  <p:extLst>
-    <p:ext uri="{EFAFB233-063F-42B5-8137-9DF3F51BA10A}">
-      <p15:sldGuideLst xmlns:p15="http://schemas.microsoft.com/office/powerpoint/2012/main">
-        <p15:guide id="1" orient="horz" pos="2160">
-          <p15:clr>
-            <a:srgbClr val="A4A3A4"/>
-          </p15:clr>
-        </p15:guide>
-        <p15:guide id="2" pos="2880">
-          <p15:clr>
-            <a:srgbClr val="A4A3A4"/>
-          </p15:clr>
-        </p15:guide>
-      </p15:sldGuideLst>
-    </p:ext>
-  </p:extLst>
 </p:presentation>
 </file>
 
 <file path=ppt/notesMasters/notesMaster1.xml><?xml version="1.0" encoding="utf-8"?>
-<p:notesMaster xmlns:a="http://schemas.openxmlformats.org/drawingml/2006/main" xmlns:r="http://schemas.openxmlformats.org/officeDocument/2006/relationships" xmlns:p="http://schemas.openxmlformats.org/presentationml/2006/main">
+<p:notesMaster xmlns:a="http://schemas.openxmlformats.org/drawingml/2006/main" xmlns:p="http://schemas.openxmlformats.org/presentationml/2006/main" xmlns:r="http://schemas.openxmlformats.org/officeDocument/2006/relationships">
   <p:cSld>
     <p:bg>
       <p:bgRef idx="1001">
@@ -159,16 +140,241 @@
           <a:chExt cx="0" cy="0"/>
         </a:xfrm>
       </p:grpSpPr>
+      <p:sp>
+        <p:nvSpPr>
+          <p:cNvPr id="2" name="Header Placeholder 1"/>
+          <p:cNvSpPr>
+            <a:spLocks noGrp="1"/>
+          </p:cNvSpPr>
+          <p:nvPr>
+            <p:ph type="hdr" sz="quarter"/>
+          </p:nvPr>
+        </p:nvSpPr>
+        <p:spPr>
+          <a:xfrm>
+            <a:off x="0" y="0"/>
+            <a:ext cx="2971800" cy="457200"/>
+          </a:xfrm>
+          <a:prstGeom prst="rect">
+            <a:avLst/>
+          </a:prstGeom>
+        </p:spPr>
+        <p:txBody>
+          <a:bodyPr vert="horz" lIns="91440" tIns="45720" rIns="91440" bIns="45720" rtlCol="0"/>
+          <a:lstStyle>
+            <a:lvl1pPr algn="l">
+              <a:defRPr sz="1200"/>
+            </a:lvl1pPr>
+          </a:lstStyle>
+          <a:p>
+            <a:endParaRPr lang="en-US"/>
+          </a:p>
+        </p:txBody>
+      </p:sp>
+      <p:sp>
+        <p:nvSpPr>
+          <p:cNvPr id="3" name="Date Placeholder 2"/>
+          <p:cNvSpPr>
+            <a:spLocks noGrp="1"/>
+          </p:cNvSpPr>
+          <p:nvPr>
+            <p:ph type="dt" idx="1"/>
+          </p:nvPr>
+        </p:nvSpPr>
+        <p:spPr>
+          <a:xfrm>
+            <a:off x="3884613" y="0"/>
+            <a:ext cx="2971800" cy="457200"/>
+          </a:xfrm>
+          <a:prstGeom prst="rect">
+            <a:avLst/>
+          </a:prstGeom>
+        </p:spPr>
+        <p:txBody>
+          <a:bodyPr vert="horz" lIns="91440" tIns="45720" rIns="91440" bIns="45720" rtlCol="0"/>
+          <a:lstStyle>
+            <a:lvl1pPr algn="r">
+              <a:defRPr sz="1200"/>
+            </a:lvl1pPr>
+          </a:lstStyle>
+          <a:p>
+            <a:fld id="{0F89C1C7-3DCD-1040-A9CF-14679D8B5DDD}" type="datetimeFigureOut">
+              <a:rPr lang="en-US" smtClean="0"/>
+              <a:t>10/17/16</a:t>
+            </a:fld>
+            <a:endParaRPr lang="en-US"/>
+          </a:p>
+        </p:txBody>
+      </p:sp>
+      <p:sp>
+        <p:nvSpPr>
+          <p:cNvPr id="4" name="Slide Image Placeholder 3"/>
+          <p:cNvSpPr>
+            <a:spLocks noGrp="1" noRot="1" noChangeAspect="1"/>
+          </p:cNvSpPr>
+          <p:nvPr>
+            <p:ph type="sldImg" idx="2"/>
+          </p:nvPr>
+        </p:nvSpPr>
+        <p:spPr>
+          <a:xfrm>
+            <a:off x="1143000" y="685800"/>
+            <a:ext cx="4572000" cy="3429000"/>
+          </a:xfrm>
+          <a:prstGeom prst="rect">
+            <a:avLst/>
+          </a:prstGeom>
+          <a:noFill/>
+          <a:ln w="12700">
+            <a:solidFill>
+              <a:prstClr val="black"/>
+            </a:solidFill>
+          </a:ln>
+        </p:spPr>
+        <p:txBody>
+          <a:bodyPr vert="horz" lIns="91440" tIns="45720" rIns="91440" bIns="45720" rtlCol="0" anchor="ctr"/>
+          <a:lstStyle/>
+          <a:p>
+            <a:endParaRPr lang="en-US"/>
+          </a:p>
+        </p:txBody>
+      </p:sp>
+      <p:sp>
+        <p:nvSpPr>
+          <p:cNvPr id="5" name="Notes Placeholder 4"/>
+          <p:cNvSpPr>
+            <a:spLocks noGrp="1"/>
+          </p:cNvSpPr>
+          <p:nvPr>
+            <p:ph type="body" sz="quarter" idx="3"/>
+          </p:nvPr>
+        </p:nvSpPr>
+        <p:spPr>
+          <a:xfrm>
+            <a:off x="685800" y="4343400"/>
+            <a:ext cx="5486400" cy="4114800"/>
+          </a:xfrm>
+          <a:prstGeom prst="rect">
+            <a:avLst/>
+          </a:prstGeom>
+        </p:spPr>
+        <p:txBody>
+          <a:bodyPr vert="horz" lIns="91440" tIns="45720" rIns="91440" bIns="45720" rtlCol="0"/>
+          <a:lstStyle/>
+          <a:p>
+            <a:pPr lvl="0"/>
+            <a:r>
+              <a:rPr lang="en-US" smtClean="0"/>
+              <a:t>Click to edit Master text styles</a:t>
+            </a:r>
+          </a:p>
+          <a:p>
+            <a:pPr lvl="1"/>
+            <a:r>
+              <a:rPr lang="en-US" smtClean="0"/>
+              <a:t>Second level</a:t>
+            </a:r>
+          </a:p>
+          <a:p>
+            <a:pPr lvl="2"/>
+            <a:r>
+              <a:rPr lang="en-US" smtClean="0"/>
+              <a:t>Third level</a:t>
+            </a:r>
+          </a:p>
+          <a:p>
+            <a:pPr lvl="3"/>
+            <a:r>
+              <a:rPr lang="en-US" smtClean="0"/>
+              <a:t>Fourth level</a:t>
+            </a:r>
+          </a:p>
+          <a:p>
+            <a:pPr lvl="4"/>
+            <a:r>
+              <a:rPr lang="en-US" smtClean="0"/>
+              <a:t>Fifth level</a:t>
+            </a:r>
+            <a:endParaRPr lang="en-US"/>
+          </a:p>
+        </p:txBody>
+      </p:sp>
+      <p:sp>
+        <p:nvSpPr>
+          <p:cNvPr id="6" name="Footer Placeholder 5"/>
+          <p:cNvSpPr>
+            <a:spLocks noGrp="1"/>
+          </p:cNvSpPr>
+          <p:nvPr>
+            <p:ph type="ftr" sz="quarter" idx="4"/>
+          </p:nvPr>
+        </p:nvSpPr>
+        <p:spPr>
+          <a:xfrm>
+            <a:off x="0" y="8685213"/>
+            <a:ext cx="2971800" cy="457200"/>
+          </a:xfrm>
+          <a:prstGeom prst="rect">
+            <a:avLst/>
+          </a:prstGeom>
+        </p:spPr>
+        <p:txBody>
+          <a:bodyPr vert="horz" lIns="91440" tIns="45720" rIns="91440" bIns="45720" rtlCol="0" anchor="b"/>
+          <a:lstStyle>
+            <a:lvl1pPr algn="l">
+              <a:defRPr sz="1200"/>
+            </a:lvl1pPr>
+          </a:lstStyle>
+          <a:p>
+            <a:endParaRPr lang="en-US"/>
+          </a:p>
+        </p:txBody>
+      </p:sp>
+      <p:sp>
+        <p:nvSpPr>
+          <p:cNvPr id="7" name="Slide Number Placeholder 6"/>
+          <p:cNvSpPr>
+            <a:spLocks noGrp="1"/>
+          </p:cNvSpPr>
+          <p:nvPr>
+            <p:ph type="sldNum" sz="quarter" idx="5"/>
+          </p:nvPr>
+        </p:nvSpPr>
+        <p:spPr>
+          <a:xfrm>
+            <a:off x="3884613" y="8685213"/>
+            <a:ext cx="2971800" cy="457200"/>
+          </a:xfrm>
+          <a:prstGeom prst="rect">
+            <a:avLst/>
+          </a:prstGeom>
+        </p:spPr>
+        <p:txBody>
+          <a:bodyPr vert="horz" lIns="91440" tIns="45720" rIns="91440" bIns="45720" rtlCol="0" anchor="b"/>
+          <a:lstStyle>
+            <a:lvl1pPr algn="r">
+              <a:defRPr sz="1200"/>
+            </a:lvl1pPr>
+          </a:lstStyle>
+          <a:p>
+            <a:fld id="{BB5E49A5-4136-284D-997B-48E1D791AD67}" type="slidenum">
+              <a:rPr lang="en-US" smtClean="0"/>
+              <a:t>‹#›</a:t>
+            </a:fld>
+            <a:endParaRPr lang="en-US"/>
+          </a:p>
+        </p:txBody>
+      </p:sp>
     </p:spTree>
     <p:extLst>
       <p:ext uri="{BB962C8B-B14F-4D97-AF65-F5344CB8AC3E}">
-        <p14:creationId xmlns:p14="http://schemas.microsoft.com/office/powerpoint/2010/main" val="3998166094"/>
+        <p14:creationId xmlns:p14="http://schemas.microsoft.com/office/powerpoint/2010/main" val="2623252185"/>
       </p:ext>
     </p:extLst>
   </p:cSld>
   <p:clrMap bg1="lt1" tx1="dk1" bg2="lt2" tx2="dk2" accent1="accent1" accent2="accent2" accent3="accent3" accent4="accent4" accent5="accent5" accent6="accent6" hlink="hlink" folHlink="folHlink"/>
   <p:notesStyle>
-    <a:lvl1pPr marL="0" algn="l" defTabSz="914400" rtl="0" eaLnBrk="1" latinLnBrk="0" hangingPunct="1">
+    <a:lvl1pPr marL="0" algn="l" defTabSz="457200" rtl="0" eaLnBrk="1" latinLnBrk="0" hangingPunct="1">
       <a:defRPr sz="1200" kern="1200">
         <a:solidFill>
           <a:schemeClr val="tx1"/>
@@ -178,7 +384,7 @@
         <a:cs typeface="+mn-cs"/>
       </a:defRPr>
     </a:lvl1pPr>
-    <a:lvl2pPr marL="457200" algn="l" defTabSz="914400" rtl="0" eaLnBrk="1" latinLnBrk="0" hangingPunct="1">
+    <a:lvl2pPr marL="457200" algn="l" defTabSz="457200" rtl="0" eaLnBrk="1" latinLnBrk="0" hangingPunct="1">
       <a:defRPr sz="1200" kern="1200">
         <a:solidFill>
           <a:schemeClr val="tx1"/>
@@ -188,7 +394,7 @@
         <a:cs typeface="+mn-cs"/>
       </a:defRPr>
     </a:lvl2pPr>
-    <a:lvl3pPr marL="914400" algn="l" defTabSz="914400" rtl="0" eaLnBrk="1" latinLnBrk="0" hangingPunct="1">
+    <a:lvl3pPr marL="914400" algn="l" defTabSz="457200" rtl="0" eaLnBrk="1" latinLnBrk="0" hangingPunct="1">
       <a:defRPr sz="1200" kern="1200">
         <a:solidFill>
           <a:schemeClr val="tx1"/>
@@ -198,7 +404,7 @@
         <a:cs typeface="+mn-cs"/>
       </a:defRPr>
     </a:lvl3pPr>
-    <a:lvl4pPr marL="1371600" algn="l" defTabSz="914400" rtl="0" eaLnBrk="1" latinLnBrk="0" hangingPunct="1">
+    <a:lvl4pPr marL="1371600" algn="l" defTabSz="457200" rtl="0" eaLnBrk="1" latinLnBrk="0" hangingPunct="1">
       <a:defRPr sz="1200" kern="1200">
         <a:solidFill>
           <a:schemeClr val="tx1"/>
@@ -208,7 +414,7 @@
         <a:cs typeface="+mn-cs"/>
       </a:defRPr>
     </a:lvl4pPr>
-    <a:lvl5pPr marL="1828800" algn="l" defTabSz="914400" rtl="0" eaLnBrk="1" latinLnBrk="0" hangingPunct="1">
+    <a:lvl5pPr marL="1828800" algn="l" defTabSz="457200" rtl="0" eaLnBrk="1" latinLnBrk="0" hangingPunct="1">
       <a:defRPr sz="1200" kern="1200">
         <a:solidFill>
           <a:schemeClr val="tx1"/>
@@ -218,7 +424,7 @@
         <a:cs typeface="+mn-cs"/>
       </a:defRPr>
     </a:lvl5pPr>
-    <a:lvl6pPr marL="2286000" algn="l" defTabSz="914400" rtl="0" eaLnBrk="1" latinLnBrk="0" hangingPunct="1">
+    <a:lvl6pPr marL="2286000" algn="l" defTabSz="457200" rtl="0" eaLnBrk="1" latinLnBrk="0" hangingPunct="1">
       <a:defRPr sz="1200" kern="1200">
         <a:solidFill>
           <a:schemeClr val="tx1"/>
@@ -228,7 +434,7 @@
         <a:cs typeface="+mn-cs"/>
       </a:defRPr>
     </a:lvl6pPr>
-    <a:lvl7pPr marL="2743200" algn="l" defTabSz="914400" rtl="0" eaLnBrk="1" latinLnBrk="0" hangingPunct="1">
+    <a:lvl7pPr marL="2743200" algn="l" defTabSz="457200" rtl="0" eaLnBrk="1" latinLnBrk="0" hangingPunct="1">
       <a:defRPr sz="1200" kern="1200">
         <a:solidFill>
           <a:schemeClr val="tx1"/>
@@ -238,7 +444,7 @@
         <a:cs typeface="+mn-cs"/>
       </a:defRPr>
     </a:lvl7pPr>
-    <a:lvl8pPr marL="3200400" algn="l" defTabSz="914400" rtl="0" eaLnBrk="1" latinLnBrk="0" hangingPunct="1">
+    <a:lvl8pPr marL="3200400" algn="l" defTabSz="457200" rtl="0" eaLnBrk="1" latinLnBrk="0" hangingPunct="1">
       <a:defRPr sz="1200" kern="1200">
         <a:solidFill>
           <a:schemeClr val="tx1"/>
@@ -248,7 +454,7 @@
         <a:cs typeface="+mn-cs"/>
       </a:defRPr>
     </a:lvl8pPr>
-    <a:lvl9pPr marL="3657600" algn="l" defTabSz="914400" rtl="0" eaLnBrk="1" latinLnBrk="0" hangingPunct="1">
+    <a:lvl9pPr marL="3657600" algn="l" defTabSz="457200" rtl="0" eaLnBrk="1" latinLnBrk="0" hangingPunct="1">
       <a:defRPr sz="1200" kern="1200">
         <a:solidFill>
           <a:schemeClr val="tx1"/>
@@ -263,7 +469,7 @@
 </file>
 
 <file path=ppt/notesSlides/notesSlide1.xml><?xml version="1.0" encoding="utf-8"?>
-<p:notes xmlns:a="http://schemas.openxmlformats.org/drawingml/2006/main" xmlns:r="http://schemas.openxmlformats.org/officeDocument/2006/relationships" xmlns:p="http://schemas.openxmlformats.org/presentationml/2006/main">
+<p:notes xmlns:a="http://schemas.openxmlformats.org/drawingml/2006/main" xmlns:p="http://schemas.openxmlformats.org/presentationml/2006/main" xmlns:r="http://schemas.openxmlformats.org/officeDocument/2006/relationships">
   <p:cSld>
     <p:spTree>
       <p:nvGrpSpPr>
@@ -283,7 +489,7 @@
         <p:nvSpPr>
           <p:cNvPr id="2" name="Slide Image Placeholder 1"/>
           <p:cNvSpPr>
-            <a:spLocks noGrp="1" noRot="1" noChangeAspect="1"/>
+            <a:spLocks noGrp="1"/>
           </p:cNvSpPr>
           <p:nvPr>
             <p:ph type="sldImg" idx="2"/>
@@ -298,7 +504,7 @@
             <a:spLocks noGrp="1"/>
           </p:cNvSpPr>
           <p:nvPr>
-            <p:ph type="body" sz="quarter" idx="3"/>
+            <p:ph type="body" idx="3" sz="quarter"/>
           </p:nvPr>
         </p:nvSpPr>
         <p:spPr/>
@@ -319,7 +525,7 @@
             <a:spLocks noGrp="1"/>
           </p:cNvSpPr>
           <p:nvPr>
-            <p:ph type="sldNum" sz="quarter" idx="5"/>
+            <p:ph type="sldNum" idx="5" sz="quarter"/>
           </p:nvPr>
         </p:nvSpPr>
         <p:spPr/>
@@ -333,7 +539,7 @@
 </file>
 
 <file path=ppt/notesSlides/notesSlide10.xml><?xml version="1.0" encoding="utf-8"?>
-<p:notes xmlns:a="http://schemas.openxmlformats.org/drawingml/2006/main" xmlns:r="http://schemas.openxmlformats.org/officeDocument/2006/relationships" xmlns:p="http://schemas.openxmlformats.org/presentationml/2006/main">
+<p:notes xmlns:a="http://schemas.openxmlformats.org/drawingml/2006/main" xmlns:p="http://schemas.openxmlformats.org/presentationml/2006/main" xmlns:r="http://schemas.openxmlformats.org/officeDocument/2006/relationships">
   <p:cSld>
     <p:spTree>
       <p:nvGrpSpPr>
@@ -353,7 +559,7 @@
         <p:nvSpPr>
           <p:cNvPr id="2" name="Slide Image Placeholder 1"/>
           <p:cNvSpPr>
-            <a:spLocks noGrp="1" noRot="1" noChangeAspect="1"/>
+            <a:spLocks noGrp="1"/>
           </p:cNvSpPr>
           <p:nvPr>
             <p:ph type="sldImg" idx="2"/>
@@ -368,7 +574,7 @@
             <a:spLocks noGrp="1"/>
           </p:cNvSpPr>
           <p:nvPr>
-            <p:ph type="body" sz="quarter" idx="3"/>
+            <p:ph type="body" idx="3" sz="quarter"/>
           </p:nvPr>
         </p:nvSpPr>
         <p:spPr/>
@@ -389,7 +595,7 @@
             <a:spLocks noGrp="1"/>
           </p:cNvSpPr>
           <p:nvPr>
-            <p:ph type="sldNum" sz="quarter" idx="5"/>
+            <p:ph type="sldNum" idx="5" sz="quarter"/>
           </p:nvPr>
         </p:nvSpPr>
         <p:spPr/>
@@ -403,7 +609,7 @@
 </file>
 
 <file path=ppt/notesSlides/notesSlide2.xml><?xml version="1.0" encoding="utf-8"?>
-<p:notes xmlns:a="http://schemas.openxmlformats.org/drawingml/2006/main" xmlns:r="http://schemas.openxmlformats.org/officeDocument/2006/relationships" xmlns:p="http://schemas.openxmlformats.org/presentationml/2006/main">
+<p:notes xmlns:a="http://schemas.openxmlformats.org/drawingml/2006/main" xmlns:p="http://schemas.openxmlformats.org/presentationml/2006/main" xmlns:r="http://schemas.openxmlformats.org/officeDocument/2006/relationships">
   <p:cSld>
     <p:spTree>
       <p:nvGrpSpPr>
@@ -423,7 +629,7 @@
         <p:nvSpPr>
           <p:cNvPr id="2" name="Slide Image Placeholder 1"/>
           <p:cNvSpPr>
-            <a:spLocks noGrp="1" noRot="1" noChangeAspect="1"/>
+            <a:spLocks noGrp="1"/>
           </p:cNvSpPr>
           <p:nvPr>
             <p:ph type="sldImg" idx="2"/>
@@ -438,7 +644,7 @@
             <a:spLocks noGrp="1"/>
           </p:cNvSpPr>
           <p:nvPr>
-            <p:ph type="body" sz="quarter" idx="3"/>
+            <p:ph type="body" idx="3" sz="quarter"/>
           </p:nvPr>
         </p:nvSpPr>
         <p:spPr/>
@@ -459,7 +665,7 @@
             <a:spLocks noGrp="1"/>
           </p:cNvSpPr>
           <p:nvPr>
-            <p:ph type="sldNum" sz="quarter" idx="5"/>
+            <p:ph type="sldNum" idx="5" sz="quarter"/>
           </p:nvPr>
         </p:nvSpPr>
         <p:spPr/>
@@ -473,7 +679,7 @@
 </file>
 
 <file path=ppt/notesSlides/notesSlide3.xml><?xml version="1.0" encoding="utf-8"?>
-<p:notes xmlns:a="http://schemas.openxmlformats.org/drawingml/2006/main" xmlns:r="http://schemas.openxmlformats.org/officeDocument/2006/relationships" xmlns:p="http://schemas.openxmlformats.org/presentationml/2006/main">
+<p:notes xmlns:a="http://schemas.openxmlformats.org/drawingml/2006/main" xmlns:p="http://schemas.openxmlformats.org/presentationml/2006/main" xmlns:r="http://schemas.openxmlformats.org/officeDocument/2006/relationships">
   <p:cSld>
     <p:spTree>
       <p:nvGrpSpPr>
@@ -493,7 +699,7 @@
         <p:nvSpPr>
           <p:cNvPr id="2" name="Slide Image Placeholder 1"/>
           <p:cNvSpPr>
-            <a:spLocks noGrp="1" noRot="1" noChangeAspect="1"/>
+            <a:spLocks noGrp="1"/>
           </p:cNvSpPr>
           <p:nvPr>
             <p:ph type="sldImg" idx="2"/>
@@ -508,7 +714,7 @@
             <a:spLocks noGrp="1"/>
           </p:cNvSpPr>
           <p:nvPr>
-            <p:ph type="body" sz="quarter" idx="3"/>
+            <p:ph type="body" idx="3" sz="quarter"/>
           </p:nvPr>
         </p:nvSpPr>
         <p:spPr/>
@@ -529,7 +735,7 @@
             <a:spLocks noGrp="1"/>
           </p:cNvSpPr>
           <p:nvPr>
-            <p:ph type="sldNum" sz="quarter" idx="5"/>
+            <p:ph type="sldNum" idx="5" sz="quarter"/>
           </p:nvPr>
         </p:nvSpPr>
         <p:spPr/>
@@ -543,7 +749,7 @@
 </file>
 
 <file path=ppt/notesSlides/notesSlide4.xml><?xml version="1.0" encoding="utf-8"?>
-<p:notes xmlns:a="http://schemas.openxmlformats.org/drawingml/2006/main" xmlns:r="http://schemas.openxmlformats.org/officeDocument/2006/relationships" xmlns:p="http://schemas.openxmlformats.org/presentationml/2006/main">
+<p:notes xmlns:a="http://schemas.openxmlformats.org/drawingml/2006/main" xmlns:p="http://schemas.openxmlformats.org/presentationml/2006/main" xmlns:r="http://schemas.openxmlformats.org/officeDocument/2006/relationships">
   <p:cSld>
     <p:spTree>
       <p:nvGrpSpPr>
@@ -563,7 +769,7 @@
         <p:nvSpPr>
           <p:cNvPr id="2" name="Slide Image Placeholder 1"/>
           <p:cNvSpPr>
-            <a:spLocks noGrp="1" noRot="1" noChangeAspect="1"/>
+            <a:spLocks noGrp="1"/>
           </p:cNvSpPr>
           <p:nvPr>
             <p:ph type="sldImg" idx="2"/>
@@ -578,7 +784,7 @@
             <a:spLocks noGrp="1"/>
           </p:cNvSpPr>
           <p:nvPr>
-            <p:ph type="body" sz="quarter" idx="3"/>
+            <p:ph type="body" idx="3" sz="quarter"/>
           </p:nvPr>
         </p:nvSpPr>
         <p:spPr/>
@@ -599,7 +805,7 @@
             <a:spLocks noGrp="1"/>
           </p:cNvSpPr>
           <p:nvPr>
-            <p:ph type="sldNum" sz="quarter" idx="5"/>
+            <p:ph type="sldNum" idx="5" sz="quarter"/>
           </p:nvPr>
         </p:nvSpPr>
         <p:spPr/>
@@ -613,7 +819,7 @@
 </file>
 
 <file path=ppt/notesSlides/notesSlide5.xml><?xml version="1.0" encoding="utf-8"?>
-<p:notes xmlns:a="http://schemas.openxmlformats.org/drawingml/2006/main" xmlns:r="http://schemas.openxmlformats.org/officeDocument/2006/relationships" xmlns:p="http://schemas.openxmlformats.org/presentationml/2006/main">
+<p:notes xmlns:a="http://schemas.openxmlformats.org/drawingml/2006/main" xmlns:p="http://schemas.openxmlformats.org/presentationml/2006/main" xmlns:r="http://schemas.openxmlformats.org/officeDocument/2006/relationships">
   <p:cSld>
     <p:spTree>
       <p:nvGrpSpPr>
@@ -633,7 +839,7 @@
         <p:nvSpPr>
           <p:cNvPr id="2" name="Slide Image Placeholder 1"/>
           <p:cNvSpPr>
-            <a:spLocks noGrp="1" noRot="1" noChangeAspect="1"/>
+            <a:spLocks noGrp="1"/>
           </p:cNvSpPr>
           <p:nvPr>
             <p:ph type="sldImg" idx="2"/>
@@ -648,7 +854,7 @@
             <a:spLocks noGrp="1"/>
           </p:cNvSpPr>
           <p:nvPr>
-            <p:ph type="body" sz="quarter" idx="3"/>
+            <p:ph type="body" idx="3" sz="quarter"/>
           </p:nvPr>
         </p:nvSpPr>
         <p:spPr/>
@@ -669,7 +875,7 @@
             <a:spLocks noGrp="1"/>
           </p:cNvSpPr>
           <p:nvPr>
-            <p:ph type="sldNum" sz="quarter" idx="5"/>
+            <p:ph type="sldNum" idx="5" sz="quarter"/>
           </p:nvPr>
         </p:nvSpPr>
         <p:spPr/>
@@ -683,7 +889,7 @@
 </file>
 
 <file path=ppt/notesSlides/notesSlide6.xml><?xml version="1.0" encoding="utf-8"?>
-<p:notes xmlns:a="http://schemas.openxmlformats.org/drawingml/2006/main" xmlns:r="http://schemas.openxmlformats.org/officeDocument/2006/relationships" xmlns:p="http://schemas.openxmlformats.org/presentationml/2006/main">
+<p:notes xmlns:a="http://schemas.openxmlformats.org/drawingml/2006/main" xmlns:p="http://schemas.openxmlformats.org/presentationml/2006/main" xmlns:r="http://schemas.openxmlformats.org/officeDocument/2006/relationships">
   <p:cSld>
     <p:spTree>
       <p:nvGrpSpPr>
@@ -703,7 +909,7 @@
         <p:nvSpPr>
           <p:cNvPr id="2" name="Slide Image Placeholder 1"/>
           <p:cNvSpPr>
-            <a:spLocks noGrp="1" noRot="1" noChangeAspect="1"/>
+            <a:spLocks noGrp="1"/>
           </p:cNvSpPr>
           <p:nvPr>
             <p:ph type="sldImg" idx="2"/>
@@ -718,7 +924,7 @@
             <a:spLocks noGrp="1"/>
           </p:cNvSpPr>
           <p:nvPr>
-            <p:ph type="body" sz="quarter" idx="3"/>
+            <p:ph type="body" idx="3" sz="quarter"/>
           </p:nvPr>
         </p:nvSpPr>
         <p:spPr/>
@@ -739,7 +945,7 @@
             <a:spLocks noGrp="1"/>
           </p:cNvSpPr>
           <p:nvPr>
-            <p:ph type="sldNum" sz="quarter" idx="5"/>
+            <p:ph type="sldNum" idx="5" sz="quarter"/>
           </p:nvPr>
         </p:nvSpPr>
         <p:spPr/>
@@ -753,7 +959,7 @@
 </file>
 
 <file path=ppt/notesSlides/notesSlide7.xml><?xml version="1.0" encoding="utf-8"?>
-<p:notes xmlns:a="http://schemas.openxmlformats.org/drawingml/2006/main" xmlns:r="http://schemas.openxmlformats.org/officeDocument/2006/relationships" xmlns:p="http://schemas.openxmlformats.org/presentationml/2006/main">
+<p:notes xmlns:a="http://schemas.openxmlformats.org/drawingml/2006/main" xmlns:p="http://schemas.openxmlformats.org/presentationml/2006/main" xmlns:r="http://schemas.openxmlformats.org/officeDocument/2006/relationships">
   <p:cSld>
     <p:spTree>
       <p:nvGrpSpPr>
@@ -773,7 +979,7 @@
         <p:nvSpPr>
           <p:cNvPr id="2" name="Slide Image Placeholder 1"/>
           <p:cNvSpPr>
-            <a:spLocks noGrp="1" noRot="1" noChangeAspect="1"/>
+            <a:spLocks noGrp="1"/>
           </p:cNvSpPr>
           <p:nvPr>
             <p:ph type="sldImg" idx="2"/>
@@ -788,7 +994,7 @@
             <a:spLocks noGrp="1"/>
           </p:cNvSpPr>
           <p:nvPr>
-            <p:ph type="body" sz="quarter" idx="3"/>
+            <p:ph type="body" idx="3" sz="quarter"/>
           </p:nvPr>
         </p:nvSpPr>
         <p:spPr/>
@@ -809,7 +1015,7 @@
             <a:spLocks noGrp="1"/>
           </p:cNvSpPr>
           <p:nvPr>
-            <p:ph type="sldNum" sz="quarter" idx="5"/>
+            <p:ph type="sldNum" idx="5" sz="quarter"/>
           </p:nvPr>
         </p:nvSpPr>
         <p:spPr/>
@@ -823,7 +1029,7 @@
 </file>
 
 <file path=ppt/notesSlides/notesSlide8.xml><?xml version="1.0" encoding="utf-8"?>
-<p:notes xmlns:a="http://schemas.openxmlformats.org/drawingml/2006/main" xmlns:r="http://schemas.openxmlformats.org/officeDocument/2006/relationships" xmlns:p="http://schemas.openxmlformats.org/presentationml/2006/main">
+<p:notes xmlns:a="http://schemas.openxmlformats.org/drawingml/2006/main" xmlns:p="http://schemas.openxmlformats.org/presentationml/2006/main" xmlns:r="http://schemas.openxmlformats.org/officeDocument/2006/relationships">
   <p:cSld>
     <p:spTree>
       <p:nvGrpSpPr>
@@ -843,7 +1049,7 @@
         <p:nvSpPr>
           <p:cNvPr id="2" name="Slide Image Placeholder 1"/>
           <p:cNvSpPr>
-            <a:spLocks noGrp="1" noRot="1" noChangeAspect="1"/>
+            <a:spLocks noGrp="1"/>
           </p:cNvSpPr>
           <p:nvPr>
             <p:ph type="sldImg" idx="2"/>
@@ -858,7 +1064,7 @@
             <a:spLocks noGrp="1"/>
           </p:cNvSpPr>
           <p:nvPr>
-            <p:ph type="body" sz="quarter" idx="3"/>
+            <p:ph type="body" idx="3" sz="quarter"/>
           </p:nvPr>
         </p:nvSpPr>
         <p:spPr/>
@@ -879,7 +1085,7 @@
             <a:spLocks noGrp="1"/>
           </p:cNvSpPr>
           <p:nvPr>
-            <p:ph type="sldNum" sz="quarter" idx="5"/>
+            <p:ph type="sldNum" idx="5" sz="quarter"/>
           </p:nvPr>
         </p:nvSpPr>
         <p:spPr/>
@@ -893,7 +1099,7 @@
 </file>
 
 <file path=ppt/notesSlides/notesSlide9.xml><?xml version="1.0" encoding="utf-8"?>
-<p:notes xmlns:a="http://schemas.openxmlformats.org/drawingml/2006/main" xmlns:r="http://schemas.openxmlformats.org/officeDocument/2006/relationships" xmlns:p="http://schemas.openxmlformats.org/presentationml/2006/main">
+<p:notes xmlns:a="http://schemas.openxmlformats.org/drawingml/2006/main" xmlns:p="http://schemas.openxmlformats.org/presentationml/2006/main" xmlns:r="http://schemas.openxmlformats.org/officeDocument/2006/relationships">
   <p:cSld>
     <p:spTree>
       <p:nvGrpSpPr>
@@ -913,7 +1119,7 @@
         <p:nvSpPr>
           <p:cNvPr id="2" name="Slide Image Placeholder 1"/>
           <p:cNvSpPr>
-            <a:spLocks noGrp="1" noRot="1" noChangeAspect="1"/>
+            <a:spLocks noGrp="1"/>
           </p:cNvSpPr>
           <p:nvPr>
             <p:ph type="sldImg" idx="2"/>
@@ -928,7 +1134,7 @@
             <a:spLocks noGrp="1"/>
           </p:cNvSpPr>
           <p:nvPr>
-            <p:ph type="body" sz="quarter" idx="3"/>
+            <p:ph type="body" idx="3" sz="quarter"/>
           </p:nvPr>
         </p:nvSpPr>
         <p:spPr/>
@@ -949,7 +1155,7 @@
             <a:spLocks noGrp="1"/>
           </p:cNvSpPr>
           <p:nvPr>
-            <p:ph type="sldNum" sz="quarter" idx="5"/>
+            <p:ph type="sldNum" idx="5" sz="quarter"/>
           </p:nvPr>
         </p:nvSpPr>
         <p:spPr/>
@@ -1000,9 +1206,10 @@
           <a:lstStyle/>
           <a:p>
             <a:r>
-              <a:rPr lang="en-US"/>
+              <a:rPr lang="en-US" smtClean="0"/>
               <a:t>Click to edit Master title style</a:t>
             </a:r>
+            <a:endParaRPr lang="en-US"/>
           </a:p>
         </p:txBody>
       </p:sp>
@@ -1118,9 +1325,10 @@
           </a:lstStyle>
           <a:p>
             <a:r>
-              <a:rPr lang="en-US"/>
+              <a:rPr lang="en-US" smtClean="0"/>
               <a:t>Click to edit Master subtitle style</a:t>
             </a:r>
+            <a:endParaRPr lang="en-US"/>
           </a:p>
         </p:txBody>
       </p:sp>
@@ -1141,7 +1349,7 @@
           <a:p>
             <a:fld id="{5BCAD085-E8A6-8845-BD4E-CB4CCA059FC4}" type="datetimeFigureOut">
               <a:rPr lang="en-US" smtClean="0"/>
-              <a:t>8/18/2026</a:t>
+              <a:t>1/27/13</a:t>
             </a:fld>
             <a:endParaRPr lang="en-US"/>
           </a:p>
@@ -1235,9 +1443,10 @@
           <a:lstStyle/>
           <a:p>
             <a:r>
-              <a:rPr lang="en-US"/>
+              <a:rPr lang="en-US" smtClean="0"/>
               <a:t>Click to edit Master title style</a:t>
             </a:r>
+            <a:endParaRPr lang="en-US"/>
           </a:p>
         </p:txBody>
       </p:sp>
@@ -1258,37 +1467,38 @@
           <a:p>
             <a:pPr lvl="0"/>
             <a:r>
-              <a:rPr lang="en-US"/>
+              <a:rPr lang="en-US" smtClean="0"/>
               <a:t>Click to edit Master text styles</a:t>
             </a:r>
           </a:p>
           <a:p>
             <a:pPr lvl="1"/>
             <a:r>
-              <a:rPr lang="en-US"/>
+              <a:rPr lang="en-US" smtClean="0"/>
               <a:t>Second level</a:t>
             </a:r>
           </a:p>
           <a:p>
             <a:pPr lvl="2"/>
             <a:r>
-              <a:rPr lang="en-US"/>
+              <a:rPr lang="en-US" smtClean="0"/>
               <a:t>Third level</a:t>
             </a:r>
           </a:p>
           <a:p>
             <a:pPr lvl="3"/>
             <a:r>
-              <a:rPr lang="en-US"/>
+              <a:rPr lang="en-US" smtClean="0"/>
               <a:t>Fourth level</a:t>
             </a:r>
           </a:p>
           <a:p>
             <a:pPr lvl="4"/>
             <a:r>
-              <a:rPr lang="en-US"/>
+              <a:rPr lang="en-US" smtClean="0"/>
               <a:t>Fifth level</a:t>
             </a:r>
+            <a:endParaRPr lang="en-US"/>
           </a:p>
         </p:txBody>
       </p:sp>
@@ -1309,7 +1519,7 @@
           <a:p>
             <a:fld id="{5BCAD085-E8A6-8845-BD4E-CB4CCA059FC4}" type="datetimeFigureOut">
               <a:rPr lang="en-US" smtClean="0"/>
-              <a:t>8/18/2026</a:t>
+              <a:t>1/27/13</a:t>
             </a:fld>
             <a:endParaRPr lang="en-US"/>
           </a:p>
@@ -1408,9 +1618,10 @@
           <a:lstStyle/>
           <a:p>
             <a:r>
-              <a:rPr lang="en-US"/>
+              <a:rPr lang="en-US" smtClean="0"/>
               <a:t>Click to edit Master title style</a:t>
             </a:r>
+            <a:endParaRPr lang="en-US"/>
           </a:p>
         </p:txBody>
       </p:sp>
@@ -1436,37 +1647,38 @@
           <a:p>
             <a:pPr lvl="0"/>
             <a:r>
-              <a:rPr lang="en-US"/>
+              <a:rPr lang="en-US" smtClean="0"/>
               <a:t>Click to edit Master text styles</a:t>
             </a:r>
           </a:p>
           <a:p>
             <a:pPr lvl="1"/>
             <a:r>
-              <a:rPr lang="en-US"/>
+              <a:rPr lang="en-US" smtClean="0"/>
               <a:t>Second level</a:t>
             </a:r>
           </a:p>
           <a:p>
             <a:pPr lvl="2"/>
             <a:r>
-              <a:rPr lang="en-US"/>
+              <a:rPr lang="en-US" smtClean="0"/>
               <a:t>Third level</a:t>
             </a:r>
           </a:p>
           <a:p>
             <a:pPr lvl="3"/>
             <a:r>
-              <a:rPr lang="en-US"/>
+              <a:rPr lang="en-US" smtClean="0"/>
               <a:t>Fourth level</a:t>
             </a:r>
           </a:p>
           <a:p>
             <a:pPr lvl="4"/>
             <a:r>
-              <a:rPr lang="en-US"/>
+              <a:rPr lang="en-US" smtClean="0"/>
               <a:t>Fifth level</a:t>
             </a:r>
+            <a:endParaRPr lang="en-US"/>
           </a:p>
         </p:txBody>
       </p:sp>
@@ -1487,7 +1699,7 @@
           <a:p>
             <a:fld id="{5BCAD085-E8A6-8845-BD4E-CB4CCA059FC4}" type="datetimeFigureOut">
               <a:rPr lang="en-US" smtClean="0"/>
-              <a:t>8/18/2026</a:t>
+              <a:t>1/27/13</a:t>
             </a:fld>
             <a:endParaRPr lang="en-US"/>
           </a:p>
@@ -1581,9 +1793,10 @@
           <a:lstStyle/>
           <a:p>
             <a:r>
-              <a:rPr lang="en-US"/>
+              <a:rPr lang="en-US" smtClean="0"/>
               <a:t>Click to edit Master title style</a:t>
             </a:r>
+            <a:endParaRPr lang="en-US"/>
           </a:p>
         </p:txBody>
       </p:sp>
@@ -1604,37 +1817,38 @@
           <a:p>
             <a:pPr lvl="0"/>
             <a:r>
-              <a:rPr lang="en-US"/>
+              <a:rPr lang="en-US" smtClean="0"/>
               <a:t>Click to edit Master text styles</a:t>
             </a:r>
           </a:p>
           <a:p>
             <a:pPr lvl="1"/>
             <a:r>
-              <a:rPr lang="en-US"/>
+              <a:rPr lang="en-US" smtClean="0"/>
               <a:t>Second level</a:t>
             </a:r>
           </a:p>
           <a:p>
             <a:pPr lvl="2"/>
             <a:r>
-              <a:rPr lang="en-US"/>
+              <a:rPr lang="en-US" smtClean="0"/>
               <a:t>Third level</a:t>
             </a:r>
           </a:p>
           <a:p>
             <a:pPr lvl="3"/>
             <a:r>
-              <a:rPr lang="en-US"/>
+              <a:rPr lang="en-US" smtClean="0"/>
               <a:t>Fourth level</a:t>
             </a:r>
           </a:p>
           <a:p>
             <a:pPr lvl="4"/>
             <a:r>
-              <a:rPr lang="en-US"/>
+              <a:rPr lang="en-US" smtClean="0"/>
               <a:t>Fifth level</a:t>
             </a:r>
+            <a:endParaRPr lang="en-US"/>
           </a:p>
         </p:txBody>
       </p:sp>
@@ -1655,7 +1869,7 @@
           <a:p>
             <a:fld id="{5BCAD085-E8A6-8845-BD4E-CB4CCA059FC4}" type="datetimeFigureOut">
               <a:rPr lang="en-US" smtClean="0"/>
-              <a:t>8/18/2026</a:t>
+              <a:t>1/27/13</a:t>
             </a:fld>
             <a:endParaRPr lang="en-US"/>
           </a:p>
@@ -1758,9 +1972,10 @@
           </a:lstStyle>
           <a:p>
             <a:r>
-              <a:rPr lang="en-US"/>
+              <a:rPr lang="en-US" smtClean="0"/>
               <a:t>Click to edit Master title style</a:t>
             </a:r>
+            <a:endParaRPr lang="en-US"/>
           </a:p>
         </p:txBody>
       </p:sp>
@@ -1877,7 +2092,7 @@
           <a:p>
             <a:pPr lvl="0"/>
             <a:r>
-              <a:rPr lang="en-US"/>
+              <a:rPr lang="en-US" smtClean="0"/>
               <a:t>Click to edit Master text styles</a:t>
             </a:r>
           </a:p>
@@ -1900,7 +2115,7 @@
           <a:p>
             <a:fld id="{5BCAD085-E8A6-8845-BD4E-CB4CCA059FC4}" type="datetimeFigureOut">
               <a:rPr lang="en-US" smtClean="0"/>
-              <a:t>8/18/2026</a:t>
+              <a:t>1/27/13</a:t>
             </a:fld>
             <a:endParaRPr lang="en-US"/>
           </a:p>
@@ -1994,9 +2209,10 @@
           <a:lstStyle/>
           <a:p>
             <a:r>
-              <a:rPr lang="en-US"/>
+              <a:rPr lang="en-US" smtClean="0"/>
               <a:t>Click to edit Master title style</a:t>
             </a:r>
+            <a:endParaRPr lang="en-US"/>
           </a:p>
         </p:txBody>
       </p:sp>
@@ -2050,37 +2266,38 @@
           <a:p>
             <a:pPr lvl="0"/>
             <a:r>
-              <a:rPr lang="en-US"/>
+              <a:rPr lang="en-US" smtClean="0"/>
               <a:t>Click to edit Master text styles</a:t>
             </a:r>
           </a:p>
           <a:p>
             <a:pPr lvl="1"/>
             <a:r>
-              <a:rPr lang="en-US"/>
+              <a:rPr lang="en-US" smtClean="0"/>
               <a:t>Second level</a:t>
             </a:r>
           </a:p>
           <a:p>
             <a:pPr lvl="2"/>
             <a:r>
-              <a:rPr lang="en-US"/>
+              <a:rPr lang="en-US" smtClean="0"/>
               <a:t>Third level</a:t>
             </a:r>
           </a:p>
           <a:p>
             <a:pPr lvl="3"/>
             <a:r>
-              <a:rPr lang="en-US"/>
+              <a:rPr lang="en-US" smtClean="0"/>
               <a:t>Fourth level</a:t>
             </a:r>
           </a:p>
           <a:p>
             <a:pPr lvl="4"/>
             <a:r>
-              <a:rPr lang="en-US"/>
+              <a:rPr lang="en-US" smtClean="0"/>
               <a:t>Fifth level</a:t>
             </a:r>
+            <a:endParaRPr lang="en-US"/>
           </a:p>
         </p:txBody>
       </p:sp>
@@ -2134,37 +2351,38 @@
           <a:p>
             <a:pPr lvl="0"/>
             <a:r>
-              <a:rPr lang="en-US"/>
+              <a:rPr lang="en-US" smtClean="0"/>
               <a:t>Click to edit Master text styles</a:t>
             </a:r>
           </a:p>
           <a:p>
             <a:pPr lvl="1"/>
             <a:r>
-              <a:rPr lang="en-US"/>
+              <a:rPr lang="en-US" smtClean="0"/>
               <a:t>Second level</a:t>
             </a:r>
           </a:p>
           <a:p>
             <a:pPr lvl="2"/>
             <a:r>
-              <a:rPr lang="en-US"/>
+              <a:rPr lang="en-US" smtClean="0"/>
               <a:t>Third level</a:t>
             </a:r>
           </a:p>
           <a:p>
             <a:pPr lvl="3"/>
             <a:r>
-              <a:rPr lang="en-US"/>
+              <a:rPr lang="en-US" smtClean="0"/>
               <a:t>Fourth level</a:t>
             </a:r>
           </a:p>
           <a:p>
             <a:pPr lvl="4"/>
             <a:r>
-              <a:rPr lang="en-US"/>
+              <a:rPr lang="en-US" smtClean="0"/>
               <a:t>Fifth level</a:t>
             </a:r>
+            <a:endParaRPr lang="en-US"/>
           </a:p>
         </p:txBody>
       </p:sp>
@@ -2185,7 +2403,7 @@
           <a:p>
             <a:fld id="{5BCAD085-E8A6-8845-BD4E-CB4CCA059FC4}" type="datetimeFigureOut">
               <a:rPr lang="en-US" smtClean="0"/>
-              <a:t>8/18/2026</a:t>
+              <a:t>1/27/13</a:t>
             </a:fld>
             <a:endParaRPr lang="en-US"/>
           </a:p>
@@ -2283,9 +2501,10 @@
           </a:lstStyle>
           <a:p>
             <a:r>
-              <a:rPr lang="en-US"/>
+              <a:rPr lang="en-US" smtClean="0"/>
               <a:t>Click to edit Master title style</a:t>
             </a:r>
+            <a:endParaRPr lang="en-US"/>
           </a:p>
         </p:txBody>
       </p:sp>
@@ -2348,7 +2567,7 @@
           <a:p>
             <a:pPr lvl="0"/>
             <a:r>
-              <a:rPr lang="en-US"/>
+              <a:rPr lang="en-US" smtClean="0"/>
               <a:t>Click to edit Master text styles</a:t>
             </a:r>
           </a:p>
@@ -2404,37 +2623,38 @@
           <a:p>
             <a:pPr lvl="0"/>
             <a:r>
-              <a:rPr lang="en-US"/>
+              <a:rPr lang="en-US" smtClean="0"/>
               <a:t>Click to edit Master text styles</a:t>
             </a:r>
           </a:p>
           <a:p>
             <a:pPr lvl="1"/>
             <a:r>
-              <a:rPr lang="en-US"/>
+              <a:rPr lang="en-US" smtClean="0"/>
               <a:t>Second level</a:t>
             </a:r>
           </a:p>
           <a:p>
             <a:pPr lvl="2"/>
             <a:r>
-              <a:rPr lang="en-US"/>
+              <a:rPr lang="en-US" smtClean="0"/>
               <a:t>Third level</a:t>
             </a:r>
           </a:p>
           <a:p>
             <a:pPr lvl="3"/>
             <a:r>
-              <a:rPr lang="en-US"/>
+              <a:rPr lang="en-US" smtClean="0"/>
               <a:t>Fourth level</a:t>
             </a:r>
           </a:p>
           <a:p>
             <a:pPr lvl="4"/>
             <a:r>
-              <a:rPr lang="en-US"/>
+              <a:rPr lang="en-US" smtClean="0"/>
               <a:t>Fifth level</a:t>
             </a:r>
+            <a:endParaRPr lang="en-US"/>
           </a:p>
         </p:txBody>
       </p:sp>
@@ -2497,7 +2717,7 @@
           <a:p>
             <a:pPr lvl="0"/>
             <a:r>
-              <a:rPr lang="en-US"/>
+              <a:rPr lang="en-US" smtClean="0"/>
               <a:t>Click to edit Master text styles</a:t>
             </a:r>
           </a:p>
@@ -2553,37 +2773,38 @@
           <a:p>
             <a:pPr lvl="0"/>
             <a:r>
-              <a:rPr lang="en-US"/>
+              <a:rPr lang="en-US" smtClean="0"/>
               <a:t>Click to edit Master text styles</a:t>
             </a:r>
           </a:p>
           <a:p>
             <a:pPr lvl="1"/>
             <a:r>
-              <a:rPr lang="en-US"/>
+              <a:rPr lang="en-US" smtClean="0"/>
               <a:t>Second level</a:t>
             </a:r>
           </a:p>
           <a:p>
             <a:pPr lvl="2"/>
             <a:r>
-              <a:rPr lang="en-US"/>
+              <a:rPr lang="en-US" smtClean="0"/>
               <a:t>Third level</a:t>
             </a:r>
           </a:p>
           <a:p>
             <a:pPr lvl="3"/>
             <a:r>
-              <a:rPr lang="en-US"/>
+              <a:rPr lang="en-US" smtClean="0"/>
               <a:t>Fourth level</a:t>
             </a:r>
           </a:p>
           <a:p>
             <a:pPr lvl="4"/>
             <a:r>
-              <a:rPr lang="en-US"/>
+              <a:rPr lang="en-US" smtClean="0"/>
               <a:t>Fifth level</a:t>
             </a:r>
+            <a:endParaRPr lang="en-US"/>
           </a:p>
         </p:txBody>
       </p:sp>
@@ -2604,7 +2825,7 @@
           <a:p>
             <a:fld id="{5BCAD085-E8A6-8845-BD4E-CB4CCA059FC4}" type="datetimeFigureOut">
               <a:rPr lang="en-US" smtClean="0"/>
-              <a:t>8/18/2026</a:t>
+              <a:t>1/27/13</a:t>
             </a:fld>
             <a:endParaRPr lang="en-US"/>
           </a:p>
@@ -2698,9 +2919,10 @@
           <a:lstStyle/>
           <a:p>
             <a:r>
-              <a:rPr lang="en-US"/>
+              <a:rPr lang="en-US" smtClean="0"/>
               <a:t>Click to edit Master title style</a:t>
             </a:r>
+            <a:endParaRPr lang="en-US"/>
           </a:p>
         </p:txBody>
       </p:sp>
@@ -2721,7 +2943,7 @@
           <a:p>
             <a:fld id="{5BCAD085-E8A6-8845-BD4E-CB4CCA059FC4}" type="datetimeFigureOut">
               <a:rPr lang="en-US" smtClean="0"/>
-              <a:t>8/18/2026</a:t>
+              <a:t>1/27/13</a:t>
             </a:fld>
             <a:endParaRPr lang="en-US"/>
           </a:p>
@@ -2816,7 +3038,7 @@
           <a:p>
             <a:fld id="{5BCAD085-E8A6-8845-BD4E-CB4CCA059FC4}" type="datetimeFigureOut">
               <a:rPr lang="en-US" smtClean="0"/>
-              <a:t>8/18/2026</a:t>
+              <a:t>1/27/13</a:t>
             </a:fld>
             <a:endParaRPr lang="en-US"/>
           </a:p>
@@ -2919,9 +3141,10 @@
           </a:lstStyle>
           <a:p>
             <a:r>
-              <a:rPr lang="en-US"/>
+              <a:rPr lang="en-US" smtClean="0"/>
               <a:t>Click to edit Master title style</a:t>
             </a:r>
+            <a:endParaRPr lang="en-US"/>
           </a:p>
         </p:txBody>
       </p:sp>
@@ -2975,37 +3198,38 @@
           <a:p>
             <a:pPr lvl="0"/>
             <a:r>
-              <a:rPr lang="en-US"/>
+              <a:rPr lang="en-US" smtClean="0"/>
               <a:t>Click to edit Master text styles</a:t>
             </a:r>
           </a:p>
           <a:p>
             <a:pPr lvl="1"/>
             <a:r>
-              <a:rPr lang="en-US"/>
+              <a:rPr lang="en-US" smtClean="0"/>
               <a:t>Second level</a:t>
             </a:r>
           </a:p>
           <a:p>
             <a:pPr lvl="2"/>
             <a:r>
-              <a:rPr lang="en-US"/>
+              <a:rPr lang="en-US" smtClean="0"/>
               <a:t>Third level</a:t>
             </a:r>
           </a:p>
           <a:p>
             <a:pPr lvl="3"/>
             <a:r>
-              <a:rPr lang="en-US"/>
+              <a:rPr lang="en-US" smtClean="0"/>
               <a:t>Fourth level</a:t>
             </a:r>
           </a:p>
           <a:p>
             <a:pPr lvl="4"/>
             <a:r>
-              <a:rPr lang="en-US"/>
+              <a:rPr lang="en-US" smtClean="0"/>
               <a:t>Fifth level</a:t>
             </a:r>
+            <a:endParaRPr lang="en-US"/>
           </a:p>
         </p:txBody>
       </p:sp>
@@ -3068,7 +3292,7 @@
           <a:p>
             <a:pPr lvl="0"/>
             <a:r>
-              <a:rPr lang="en-US"/>
+              <a:rPr lang="en-US" smtClean="0"/>
               <a:t>Click to edit Master text styles</a:t>
             </a:r>
           </a:p>
@@ -3091,7 +3315,7 @@
           <a:p>
             <a:fld id="{5BCAD085-E8A6-8845-BD4E-CB4CCA059FC4}" type="datetimeFigureOut">
               <a:rPr lang="en-US" smtClean="0"/>
-              <a:t>8/18/2026</a:t>
+              <a:t>1/27/13</a:t>
             </a:fld>
             <a:endParaRPr lang="en-US"/>
           </a:p>
@@ -3194,9 +3418,10 @@
           </a:lstStyle>
           <a:p>
             <a:r>
-              <a:rPr lang="en-US"/>
+              <a:rPr lang="en-US" smtClean="0"/>
               <a:t>Click to edit Master title style</a:t>
             </a:r>
+            <a:endParaRPr lang="en-US"/>
           </a:p>
         </p:txBody>
       </p:sp>
@@ -3320,7 +3545,7 @@
           <a:p>
             <a:pPr lvl="0"/>
             <a:r>
-              <a:rPr lang="en-US"/>
+              <a:rPr lang="en-US" smtClean="0"/>
               <a:t>Click to edit Master text styles</a:t>
             </a:r>
           </a:p>
@@ -3343,7 +3568,7 @@
           <a:p>
             <a:fld id="{5BCAD085-E8A6-8845-BD4E-CB4CCA059FC4}" type="datetimeFigureOut">
               <a:rPr lang="en-US" smtClean="0"/>
-              <a:t>8/18/2026</a:t>
+              <a:t>1/27/13</a:t>
             </a:fld>
             <a:endParaRPr lang="en-US"/>
           </a:p>
@@ -3452,9 +3677,10 @@
           <a:lstStyle/>
           <a:p>
             <a:r>
-              <a:rPr lang="en-US"/>
+              <a:rPr lang="en-US" smtClean="0"/>
               <a:t>Click to edit Master title style</a:t>
             </a:r>
+            <a:endParaRPr lang="en-US"/>
           </a:p>
         </p:txBody>
       </p:sp>
@@ -3485,37 +3711,38 @@
           <a:p>
             <a:pPr lvl="0"/>
             <a:r>
-              <a:rPr lang="en-US"/>
+              <a:rPr lang="en-US" smtClean="0"/>
               <a:t>Click to edit Master text styles</a:t>
             </a:r>
           </a:p>
           <a:p>
             <a:pPr lvl="1"/>
             <a:r>
-              <a:rPr lang="en-US"/>
+              <a:rPr lang="en-US" smtClean="0"/>
               <a:t>Second level</a:t>
             </a:r>
           </a:p>
           <a:p>
             <a:pPr lvl="2"/>
             <a:r>
-              <a:rPr lang="en-US"/>
+              <a:rPr lang="en-US" smtClean="0"/>
               <a:t>Third level</a:t>
             </a:r>
           </a:p>
           <a:p>
             <a:pPr lvl="3"/>
             <a:r>
-              <a:rPr lang="en-US"/>
+              <a:rPr lang="en-US" smtClean="0"/>
               <a:t>Fourth level</a:t>
             </a:r>
           </a:p>
           <a:p>
             <a:pPr lvl="4"/>
             <a:r>
-              <a:rPr lang="en-US"/>
+              <a:rPr lang="en-US" smtClean="0"/>
               <a:t>Fifth level</a:t>
             </a:r>
+            <a:endParaRPr lang="en-US"/>
           </a:p>
         </p:txBody>
       </p:sp>
@@ -3554,7 +3781,7 @@
           <a:p>
             <a:fld id="{5BCAD085-E8A6-8845-BD4E-CB4CCA059FC4}" type="datetimeFigureOut">
               <a:rPr lang="en-US" smtClean="0"/>
-              <a:t>8/18/2026</a:t>
+              <a:t>1/27/13</a:t>
             </a:fld>
             <a:endParaRPr lang="en-US"/>
           </a:p>
@@ -3913,7 +4140,7 @@
 </file>
 
 <file path=ppt/slides/slide1.xml><?xml version="1.0" encoding="utf-8"?>
-<p:sld xmlns:a="http://schemas.openxmlformats.org/drawingml/2006/main" xmlns:r="http://schemas.openxmlformats.org/officeDocument/2006/relationships" xmlns:p="http://schemas.openxmlformats.org/presentationml/2006/main">
+<p:sld xmlns:a="http://schemas.openxmlformats.org/drawingml/2006/main" xmlns:p="http://schemas.openxmlformats.org/presentationml/2006/main" xmlns:r="http://schemas.openxmlformats.org/officeDocument/2006/relationships">
   <p:cSld>
     <p:spTree>
       <p:nvGrpSpPr>
@@ -3921,14 +4148,7 @@
         <p:cNvGrpSpPr/>
         <p:nvPr/>
       </p:nvGrpSpPr>
-      <p:grpSpPr>
-        <a:xfrm>
-          <a:off x="0" y="0"/>
-          <a:ext cx="0" cy="0"/>
-          <a:chOff x="0" y="0"/>
-          <a:chExt cx="0" cy="0"/>
-        </a:xfrm>
-      </p:grpSpPr>
+      <p:grpSpPr/>
       <p:pic>
         <p:nvPicPr>
           <p:cNvPr id="2" name="Picture 1" descr="pes_logo.png"/>
@@ -3938,7 +4158,7 @@
           <p:nvPr/>
         </p:nvPicPr>
         <p:blipFill>
-          <a:blip r:embed="rId3"/>
+          <a:blip r:embed="rId2"/>
           <a:stretch>
             <a:fillRect/>
           </a:stretch>
@@ -4140,7 +4360,6 @@
           <a:lstStyle/>
           <a:p>
             <a:pPr algn="ctr"/>
-            <a:endParaRPr/>
           </a:p>
         </p:txBody>
       </p:sp>
@@ -4184,7 +4403,6 @@
           <a:lstStyle/>
           <a:p>
             <a:pPr algn="ctr"/>
-            <a:endParaRPr/>
           </a:p>
         </p:txBody>
       </p:sp>
@@ -4197,7 +4415,7 @@
 </file>
 
 <file path=ppt/slides/slide10.xml><?xml version="1.0" encoding="utf-8"?>
-<p:sld xmlns:a="http://schemas.openxmlformats.org/drawingml/2006/main" xmlns:r="http://schemas.openxmlformats.org/officeDocument/2006/relationships" xmlns:p="http://schemas.openxmlformats.org/presentationml/2006/main">
+<p:sld xmlns:a="http://schemas.openxmlformats.org/drawingml/2006/main" xmlns:p="http://schemas.openxmlformats.org/presentationml/2006/main" xmlns:r="http://schemas.openxmlformats.org/officeDocument/2006/relationships">
   <p:cSld>
     <p:spTree>
       <p:nvGrpSpPr>
@@ -4205,14 +4423,7 @@
         <p:cNvGrpSpPr/>
         <p:nvPr/>
       </p:nvGrpSpPr>
-      <p:grpSpPr>
-        <a:xfrm>
-          <a:off x="0" y="0"/>
-          <a:ext cx="0" cy="0"/>
-          <a:chOff x="0" y="0"/>
-          <a:chExt cx="0" cy="0"/>
-        </a:xfrm>
-      </p:grpSpPr>
+      <p:grpSpPr/>
       <p:sp>
         <p:nvSpPr>
           <p:cNvPr id="2" name="TextBox 1"/>
@@ -4257,7 +4468,7 @@
           <p:nvPr/>
         </p:nvPicPr>
         <p:blipFill>
-          <a:blip r:embed="rId3"/>
+          <a:blip r:embed="rId2"/>
           <a:stretch>
             <a:fillRect/>
           </a:stretch>
@@ -4347,7 +4558,6 @@
           <a:lstStyle/>
           <a:p>
             <a:pPr algn="ctr"/>
-            <a:endParaRPr/>
           </a:p>
         </p:txBody>
       </p:sp>
@@ -4391,7 +4601,6 @@
           <a:lstStyle/>
           <a:p>
             <a:pPr algn="ctr"/>
-            <a:endParaRPr/>
           </a:p>
         </p:txBody>
       </p:sp>
@@ -4822,7 +5031,6 @@
           <a:lstStyle/>
           <a:p>
             <a:pPr algn="ctr"/>
-            <a:endParaRPr/>
           </a:p>
         </p:txBody>
       </p:sp>
@@ -4868,7 +5076,6 @@
           <a:lstStyle/>
           <a:p>
             <a:pPr algn="ctr"/>
-            <a:endParaRPr/>
           </a:p>
         </p:txBody>
       </p:sp>
@@ -4914,7 +5121,6 @@
           <a:lstStyle/>
           <a:p>
             <a:pPr algn="ctr"/>
-            <a:endParaRPr/>
           </a:p>
         </p:txBody>
       </p:sp>
@@ -4960,7 +5166,6 @@
           <a:lstStyle/>
           <a:p>
             <a:pPr algn="ctr"/>
-            <a:endParaRPr/>
           </a:p>
         </p:txBody>
       </p:sp>
@@ -5006,7 +5211,6 @@
           <a:lstStyle/>
           <a:p>
             <a:pPr algn="ctr"/>
-            <a:endParaRPr/>
           </a:p>
         </p:txBody>
       </p:sp>
@@ -5052,7 +5256,6 @@
           <a:lstStyle/>
           <a:p>
             <a:pPr algn="ctr"/>
-            <a:endParaRPr/>
           </a:p>
         </p:txBody>
       </p:sp>
@@ -5098,7 +5301,6 @@
           <a:lstStyle/>
           <a:p>
             <a:pPr algn="ctr"/>
-            <a:endParaRPr/>
           </a:p>
         </p:txBody>
       </p:sp>
@@ -5144,7 +5346,6 @@
           <a:lstStyle/>
           <a:p>
             <a:pPr algn="ctr"/>
-            <a:endParaRPr/>
           </a:p>
         </p:txBody>
       </p:sp>
@@ -5188,7 +5389,6 @@
           <a:lstStyle/>
           <a:p>
             <a:pPr algn="ctr"/>
-            <a:endParaRPr/>
           </a:p>
         </p:txBody>
       </p:sp>
@@ -5269,7 +5469,6 @@
           <a:lstStyle/>
           <a:p>
             <a:pPr algn="ctr"/>
-            <a:endParaRPr/>
           </a:p>
         </p:txBody>
       </p:sp>
@@ -5315,7 +5514,6 @@
           <a:lstStyle/>
           <a:p>
             <a:pPr algn="ctr"/>
-            <a:endParaRPr/>
           </a:p>
         </p:txBody>
       </p:sp>
@@ -5361,7 +5559,6 @@
           <a:lstStyle/>
           <a:p>
             <a:pPr algn="ctr"/>
-            <a:endParaRPr/>
           </a:p>
         </p:txBody>
       </p:sp>
@@ -5407,7 +5604,6 @@
           <a:lstStyle/>
           <a:p>
             <a:pPr algn="ctr"/>
-            <a:endParaRPr/>
           </a:p>
         </p:txBody>
       </p:sp>
@@ -5453,7 +5649,6 @@
           <a:lstStyle/>
           <a:p>
             <a:pPr algn="ctr"/>
-            <a:endParaRPr/>
           </a:p>
         </p:txBody>
       </p:sp>
@@ -5499,7 +5694,6 @@
           <a:lstStyle/>
           <a:p>
             <a:pPr algn="ctr"/>
-            <a:endParaRPr/>
           </a:p>
         </p:txBody>
       </p:sp>
@@ -5545,7 +5739,6 @@
           <a:lstStyle/>
           <a:p>
             <a:pPr algn="ctr"/>
-            <a:endParaRPr/>
           </a:p>
         </p:txBody>
       </p:sp>
@@ -5591,7 +5784,6 @@
           <a:lstStyle/>
           <a:p>
             <a:pPr algn="ctr"/>
-            <a:endParaRPr/>
           </a:p>
         </p:txBody>
       </p:sp>
@@ -5635,7 +5827,6 @@
           <a:lstStyle/>
           <a:p>
             <a:pPr algn="ctr"/>
-            <a:endParaRPr/>
           </a:p>
         </p:txBody>
       </p:sp>
@@ -5716,7 +5907,6 @@
           <a:lstStyle/>
           <a:p>
             <a:pPr algn="ctr"/>
-            <a:endParaRPr/>
           </a:p>
         </p:txBody>
       </p:sp>
@@ -5762,7 +5952,6 @@
           <a:lstStyle/>
           <a:p>
             <a:pPr algn="ctr"/>
-            <a:endParaRPr/>
           </a:p>
         </p:txBody>
       </p:sp>
@@ -5808,7 +5997,6 @@
           <a:lstStyle/>
           <a:p>
             <a:pPr algn="ctr"/>
-            <a:endParaRPr/>
           </a:p>
         </p:txBody>
       </p:sp>
@@ -5854,7 +6042,6 @@
           <a:lstStyle/>
           <a:p>
             <a:pPr algn="ctr"/>
-            <a:endParaRPr/>
           </a:p>
         </p:txBody>
       </p:sp>
@@ -5900,7 +6087,6 @@
           <a:lstStyle/>
           <a:p>
             <a:pPr algn="ctr"/>
-            <a:endParaRPr/>
           </a:p>
         </p:txBody>
       </p:sp>
@@ -5946,7 +6132,6 @@
           <a:lstStyle/>
           <a:p>
             <a:pPr algn="ctr"/>
-            <a:endParaRPr/>
           </a:p>
         </p:txBody>
       </p:sp>
@@ -5992,7 +6177,6 @@
           <a:lstStyle/>
           <a:p>
             <a:pPr algn="ctr"/>
-            <a:endParaRPr/>
           </a:p>
         </p:txBody>
       </p:sp>
@@ -6038,7 +6222,6 @@
           <a:lstStyle/>
           <a:p>
             <a:pPr algn="ctr"/>
-            <a:endParaRPr/>
           </a:p>
         </p:txBody>
       </p:sp>
@@ -6082,7 +6265,6 @@
           <a:lstStyle/>
           <a:p>
             <a:pPr algn="ctr"/>
-            <a:endParaRPr/>
           </a:p>
         </p:txBody>
       </p:sp>
@@ -6163,7 +6345,6 @@
           <a:lstStyle/>
           <a:p>
             <a:pPr algn="ctr"/>
-            <a:endParaRPr/>
           </a:p>
         </p:txBody>
       </p:sp>
@@ -6209,7 +6390,6 @@
           <a:lstStyle/>
           <a:p>
             <a:pPr algn="ctr"/>
-            <a:endParaRPr/>
           </a:p>
         </p:txBody>
       </p:sp>
@@ -6255,7 +6435,6 @@
           <a:lstStyle/>
           <a:p>
             <a:pPr algn="ctr"/>
-            <a:endParaRPr/>
           </a:p>
         </p:txBody>
       </p:sp>
@@ -6301,7 +6480,6 @@
           <a:lstStyle/>
           <a:p>
             <a:pPr algn="ctr"/>
-            <a:endParaRPr/>
           </a:p>
         </p:txBody>
       </p:sp>
@@ -6347,7 +6525,6 @@
           <a:lstStyle/>
           <a:p>
             <a:pPr algn="ctr"/>
-            <a:endParaRPr/>
           </a:p>
         </p:txBody>
       </p:sp>
@@ -6393,7 +6570,6 @@
           <a:lstStyle/>
           <a:p>
             <a:pPr algn="ctr"/>
-            <a:endParaRPr/>
           </a:p>
         </p:txBody>
       </p:sp>
@@ -6439,7 +6615,6 @@
           <a:lstStyle/>
           <a:p>
             <a:pPr algn="ctr"/>
-            <a:endParaRPr/>
           </a:p>
         </p:txBody>
       </p:sp>
@@ -6485,7 +6660,6 @@
           <a:lstStyle/>
           <a:p>
             <a:pPr algn="ctr"/>
-            <a:endParaRPr/>
           </a:p>
         </p:txBody>
       </p:sp>
@@ -6529,7 +6703,6 @@
           <a:lstStyle/>
           <a:p>
             <a:pPr algn="ctr"/>
-            <a:endParaRPr/>
           </a:p>
         </p:txBody>
       </p:sp>
@@ -6610,7 +6783,6 @@
           <a:lstStyle/>
           <a:p>
             <a:pPr algn="ctr"/>
-            <a:endParaRPr/>
           </a:p>
         </p:txBody>
       </p:sp>
@@ -6656,7 +6828,6 @@
           <a:lstStyle/>
           <a:p>
             <a:pPr algn="ctr"/>
-            <a:endParaRPr/>
           </a:p>
         </p:txBody>
       </p:sp>
@@ -6702,7 +6873,6 @@
           <a:lstStyle/>
           <a:p>
             <a:pPr algn="ctr"/>
-            <a:endParaRPr/>
           </a:p>
         </p:txBody>
       </p:sp>
@@ -6748,7 +6918,6 @@
           <a:lstStyle/>
           <a:p>
             <a:pPr algn="ctr"/>
-            <a:endParaRPr/>
           </a:p>
         </p:txBody>
       </p:sp>
@@ -6794,7 +6963,6 @@
           <a:lstStyle/>
           <a:p>
             <a:pPr algn="ctr"/>
-            <a:endParaRPr/>
           </a:p>
         </p:txBody>
       </p:sp>
@@ -6840,7 +7008,6 @@
           <a:lstStyle/>
           <a:p>
             <a:pPr algn="ctr"/>
-            <a:endParaRPr/>
           </a:p>
         </p:txBody>
       </p:sp>
@@ -6886,7 +7053,6 @@
           <a:lstStyle/>
           <a:p>
             <a:pPr algn="ctr"/>
-            <a:endParaRPr/>
           </a:p>
         </p:txBody>
       </p:sp>
@@ -6932,7 +7098,6 @@
           <a:lstStyle/>
           <a:p>
             <a:pPr algn="ctr"/>
-            <a:endParaRPr/>
           </a:p>
         </p:txBody>
       </p:sp>
@@ -6976,7 +7141,6 @@
           <a:lstStyle/>
           <a:p>
             <a:pPr algn="ctr"/>
-            <a:endParaRPr/>
           </a:p>
         </p:txBody>
       </p:sp>
@@ -7057,7 +7221,6 @@
           <a:lstStyle/>
           <a:p>
             <a:pPr algn="ctr"/>
-            <a:endParaRPr/>
           </a:p>
         </p:txBody>
       </p:sp>
@@ -7103,7 +7266,6 @@
           <a:lstStyle/>
           <a:p>
             <a:pPr algn="ctr"/>
-            <a:endParaRPr/>
           </a:p>
         </p:txBody>
       </p:sp>
@@ -7149,7 +7311,6 @@
           <a:lstStyle/>
           <a:p>
             <a:pPr algn="ctr"/>
-            <a:endParaRPr/>
           </a:p>
         </p:txBody>
       </p:sp>
@@ -7195,7 +7356,6 @@
           <a:lstStyle/>
           <a:p>
             <a:pPr algn="ctr"/>
-            <a:endParaRPr/>
           </a:p>
         </p:txBody>
       </p:sp>
@@ -7241,7 +7401,6 @@
           <a:lstStyle/>
           <a:p>
             <a:pPr algn="ctr"/>
-            <a:endParaRPr/>
           </a:p>
         </p:txBody>
       </p:sp>
@@ -7287,7 +7446,6 @@
           <a:lstStyle/>
           <a:p>
             <a:pPr algn="ctr"/>
-            <a:endParaRPr/>
           </a:p>
         </p:txBody>
       </p:sp>
@@ -7333,7 +7491,6 @@
           <a:lstStyle/>
           <a:p>
             <a:pPr algn="ctr"/>
-            <a:endParaRPr/>
           </a:p>
         </p:txBody>
       </p:sp>
@@ -7379,7 +7536,6 @@
           <a:lstStyle/>
           <a:p>
             <a:pPr algn="ctr"/>
-            <a:endParaRPr/>
           </a:p>
         </p:txBody>
       </p:sp>
@@ -7423,7 +7579,6 @@
           <a:lstStyle/>
           <a:p>
             <a:pPr algn="ctr"/>
-            <a:endParaRPr/>
           </a:p>
         </p:txBody>
       </p:sp>
@@ -7504,7 +7659,6 @@
           <a:lstStyle/>
           <a:p>
             <a:pPr algn="ctr"/>
-            <a:endParaRPr/>
           </a:p>
         </p:txBody>
       </p:sp>
@@ -7550,7 +7704,6 @@
           <a:lstStyle/>
           <a:p>
             <a:pPr algn="ctr"/>
-            <a:endParaRPr/>
           </a:p>
         </p:txBody>
       </p:sp>
@@ -7596,7 +7749,6 @@
           <a:lstStyle/>
           <a:p>
             <a:pPr algn="ctr"/>
-            <a:endParaRPr/>
           </a:p>
         </p:txBody>
       </p:sp>
@@ -7642,7 +7794,6 @@
           <a:lstStyle/>
           <a:p>
             <a:pPr algn="ctr"/>
-            <a:endParaRPr/>
           </a:p>
         </p:txBody>
       </p:sp>
@@ -7688,7 +7839,6 @@
           <a:lstStyle/>
           <a:p>
             <a:pPr algn="ctr"/>
-            <a:endParaRPr/>
           </a:p>
         </p:txBody>
       </p:sp>
@@ -7734,7 +7884,6 @@
           <a:lstStyle/>
           <a:p>
             <a:pPr algn="ctr"/>
-            <a:endParaRPr/>
           </a:p>
         </p:txBody>
       </p:sp>
@@ -7780,7 +7929,6 @@
           <a:lstStyle/>
           <a:p>
             <a:pPr algn="ctr"/>
-            <a:endParaRPr/>
           </a:p>
         </p:txBody>
       </p:sp>
@@ -7826,7 +7974,6 @@
           <a:lstStyle/>
           <a:p>
             <a:pPr algn="ctr"/>
-            <a:endParaRPr/>
           </a:p>
         </p:txBody>
       </p:sp>
@@ -7870,7 +8017,6 @@
           <a:lstStyle/>
           <a:p>
             <a:pPr algn="ctr"/>
-            <a:endParaRPr/>
           </a:p>
         </p:txBody>
       </p:sp>
@@ -7951,7 +8097,6 @@
           <a:lstStyle/>
           <a:p>
             <a:pPr algn="ctr"/>
-            <a:endParaRPr/>
           </a:p>
         </p:txBody>
       </p:sp>
@@ -7997,7 +8142,6 @@
           <a:lstStyle/>
           <a:p>
             <a:pPr algn="ctr"/>
-            <a:endParaRPr/>
           </a:p>
         </p:txBody>
       </p:sp>
@@ -8043,7 +8187,6 @@
           <a:lstStyle/>
           <a:p>
             <a:pPr algn="ctr"/>
-            <a:endParaRPr/>
           </a:p>
         </p:txBody>
       </p:sp>
@@ -8089,7 +8232,6 @@
           <a:lstStyle/>
           <a:p>
             <a:pPr algn="ctr"/>
-            <a:endParaRPr/>
           </a:p>
         </p:txBody>
       </p:sp>
@@ -8135,7 +8277,6 @@
           <a:lstStyle/>
           <a:p>
             <a:pPr algn="ctr"/>
-            <a:endParaRPr/>
           </a:p>
         </p:txBody>
       </p:sp>
@@ -8181,7 +8322,6 @@
           <a:lstStyle/>
           <a:p>
             <a:pPr algn="ctr"/>
-            <a:endParaRPr/>
           </a:p>
         </p:txBody>
       </p:sp>
@@ -8227,7 +8367,6 @@
           <a:lstStyle/>
           <a:p>
             <a:pPr algn="ctr"/>
-            <a:endParaRPr/>
           </a:p>
         </p:txBody>
       </p:sp>
@@ -8273,7 +8412,6 @@
           <a:lstStyle/>
           <a:p>
             <a:pPr algn="ctr"/>
-            <a:endParaRPr/>
           </a:p>
         </p:txBody>
       </p:sp>
@@ -8317,7 +8455,6 @@
           <a:lstStyle/>
           <a:p>
             <a:pPr algn="ctr"/>
-            <a:endParaRPr/>
           </a:p>
         </p:txBody>
       </p:sp>
@@ -8398,7 +8535,6 @@
           <a:lstStyle/>
           <a:p>
             <a:pPr algn="ctr"/>
-            <a:endParaRPr/>
           </a:p>
         </p:txBody>
       </p:sp>
@@ -8444,7 +8580,6 @@
           <a:lstStyle/>
           <a:p>
             <a:pPr algn="ctr"/>
-            <a:endParaRPr/>
           </a:p>
         </p:txBody>
       </p:sp>
@@ -8490,7 +8625,6 @@
           <a:lstStyle/>
           <a:p>
             <a:pPr algn="ctr"/>
-            <a:endParaRPr/>
           </a:p>
         </p:txBody>
       </p:sp>
@@ -8536,7 +8670,6 @@
           <a:lstStyle/>
           <a:p>
             <a:pPr algn="ctr"/>
-            <a:endParaRPr/>
           </a:p>
         </p:txBody>
       </p:sp>
@@ -8582,7 +8715,6 @@
           <a:lstStyle/>
           <a:p>
             <a:pPr algn="ctr"/>
-            <a:endParaRPr/>
           </a:p>
         </p:txBody>
       </p:sp>
@@ -8628,7 +8760,6 @@
           <a:lstStyle/>
           <a:p>
             <a:pPr algn="ctr"/>
-            <a:endParaRPr/>
           </a:p>
         </p:txBody>
       </p:sp>
@@ -8674,7 +8805,6 @@
           <a:lstStyle/>
           <a:p>
             <a:pPr algn="ctr"/>
-            <a:endParaRPr/>
           </a:p>
         </p:txBody>
       </p:sp>
@@ -8720,7 +8850,6 @@
           <a:lstStyle/>
           <a:p>
             <a:pPr algn="ctr"/>
-            <a:endParaRPr/>
           </a:p>
         </p:txBody>
       </p:sp>
@@ -8764,7 +8893,6 @@
           <a:lstStyle/>
           <a:p>
             <a:pPr algn="ctr"/>
-            <a:endParaRPr/>
           </a:p>
         </p:txBody>
       </p:sp>
@@ -8845,7 +8973,6 @@
           <a:lstStyle/>
           <a:p>
             <a:pPr algn="ctr"/>
-            <a:endParaRPr/>
           </a:p>
         </p:txBody>
       </p:sp>
@@ -8891,7 +9018,6 @@
           <a:lstStyle/>
           <a:p>
             <a:pPr algn="ctr"/>
-            <a:endParaRPr/>
           </a:p>
         </p:txBody>
       </p:sp>
@@ -8937,7 +9063,6 @@
           <a:lstStyle/>
           <a:p>
             <a:pPr algn="ctr"/>
-            <a:endParaRPr/>
           </a:p>
         </p:txBody>
       </p:sp>
@@ -8983,7 +9108,6 @@
           <a:lstStyle/>
           <a:p>
             <a:pPr algn="ctr"/>
-            <a:endParaRPr/>
           </a:p>
         </p:txBody>
       </p:sp>
@@ -9029,7 +9153,6 @@
           <a:lstStyle/>
           <a:p>
             <a:pPr algn="ctr"/>
-            <a:endParaRPr/>
           </a:p>
         </p:txBody>
       </p:sp>
@@ -9075,7 +9198,6 @@
           <a:lstStyle/>
           <a:p>
             <a:pPr algn="ctr"/>
-            <a:endParaRPr/>
           </a:p>
         </p:txBody>
       </p:sp>
@@ -9121,7 +9243,6 @@
           <a:lstStyle/>
           <a:p>
             <a:pPr algn="ctr"/>
-            <a:endParaRPr/>
           </a:p>
         </p:txBody>
       </p:sp>
@@ -9167,7 +9288,6 @@
           <a:lstStyle/>
           <a:p>
             <a:pPr algn="ctr"/>
-            <a:endParaRPr/>
           </a:p>
         </p:txBody>
       </p:sp>
@@ -9211,7 +9331,6 @@
           <a:lstStyle/>
           <a:p>
             <a:pPr algn="ctr"/>
-            <a:endParaRPr/>
           </a:p>
         </p:txBody>
       </p:sp>
@@ -9292,7 +9411,6 @@
           <a:lstStyle/>
           <a:p>
             <a:pPr algn="ctr"/>
-            <a:endParaRPr/>
           </a:p>
         </p:txBody>
       </p:sp>
@@ -9338,7 +9456,6 @@
           <a:lstStyle/>
           <a:p>
             <a:pPr algn="ctr"/>
-            <a:endParaRPr/>
           </a:p>
         </p:txBody>
       </p:sp>
@@ -9384,7 +9501,6 @@
           <a:lstStyle/>
           <a:p>
             <a:pPr algn="ctr"/>
-            <a:endParaRPr/>
           </a:p>
         </p:txBody>
       </p:sp>
@@ -9430,7 +9546,6 @@
           <a:lstStyle/>
           <a:p>
             <a:pPr algn="ctr"/>
-            <a:endParaRPr/>
           </a:p>
         </p:txBody>
       </p:sp>
@@ -9476,7 +9591,6 @@
           <a:lstStyle/>
           <a:p>
             <a:pPr algn="ctr"/>
-            <a:endParaRPr/>
           </a:p>
         </p:txBody>
       </p:sp>
@@ -9522,7 +9636,6 @@
           <a:lstStyle/>
           <a:p>
             <a:pPr algn="ctr"/>
-            <a:endParaRPr/>
           </a:p>
         </p:txBody>
       </p:sp>
@@ -9568,7 +9681,6 @@
           <a:lstStyle/>
           <a:p>
             <a:pPr algn="ctr"/>
-            <a:endParaRPr/>
           </a:p>
         </p:txBody>
       </p:sp>
@@ -9614,7 +9726,6 @@
           <a:lstStyle/>
           <a:p>
             <a:pPr algn="ctr"/>
-            <a:endParaRPr/>
           </a:p>
         </p:txBody>
       </p:sp>
@@ -9626,8 +9737,8 @@
         </p:nvSpPr>
         <p:spPr>
           <a:xfrm>
-            <a:off x="9934956" y="5687568"/>
-            <a:ext cx="1641348" cy="228600"/>
+            <a:off x="9934956" y="5715000"/>
+            <a:ext cx="2498598" cy="201168"/>
           </a:xfrm>
           <a:prstGeom prst="roundRect">
             <a:avLst/>
@@ -9658,7 +9769,6 @@
           <a:lstStyle/>
           <a:p>
             <a:pPr algn="ctr"/>
-            <a:endParaRPr/>
           </a:p>
         </p:txBody>
       </p:sp>
@@ -9706,7 +9816,7 @@
 </file>
 
 <file path=ppt/slides/slide11.xml><?xml version="1.0" encoding="utf-8"?>
-<p:sld xmlns:a="http://schemas.openxmlformats.org/drawingml/2006/main" xmlns:r="http://schemas.openxmlformats.org/officeDocument/2006/relationships" xmlns:p="http://schemas.openxmlformats.org/presentationml/2006/main">
+<p:sld xmlns:a="http://schemas.openxmlformats.org/drawingml/2006/main" xmlns:p="http://schemas.openxmlformats.org/presentationml/2006/main" xmlns:r="http://schemas.openxmlformats.org/officeDocument/2006/relationships">
   <p:cSld>
     <p:spTree>
       <p:nvGrpSpPr>
@@ -9714,14 +9824,7 @@
         <p:cNvGrpSpPr/>
         <p:nvPr/>
       </p:nvGrpSpPr>
-      <p:grpSpPr>
-        <a:xfrm>
-          <a:off x="0" y="0"/>
-          <a:ext cx="0" cy="0"/>
-          <a:chOff x="0" y="0"/>
-          <a:chExt cx="0" cy="0"/>
-        </a:xfrm>
-      </p:grpSpPr>
+      <p:grpSpPr/>
       <p:sp>
         <p:nvSpPr>
           <p:cNvPr id="2" name="TextBox 1"/>
@@ -9766,7 +9869,7 @@
           <p:nvPr/>
         </p:nvPicPr>
         <p:blipFill>
-          <a:blip r:embed="rId3"/>
+          <a:blip r:embed="rId2"/>
           <a:stretch>
             <a:fillRect/>
           </a:stretch>
@@ -9856,7 +9959,6 @@
           <a:lstStyle/>
           <a:p>
             <a:pPr algn="ctr"/>
-            <a:endParaRPr/>
           </a:p>
         </p:txBody>
       </p:sp>
@@ -9900,7 +10002,6 @@
           <a:lstStyle/>
           <a:p>
             <a:pPr algn="ctr"/>
-            <a:endParaRPr/>
           </a:p>
         </p:txBody>
       </p:sp>
@@ -10163,7 +10264,7 @@
 </file>
 
 <file path=ppt/slides/slide12.xml><?xml version="1.0" encoding="utf-8"?>
-<p:sld xmlns:a="http://schemas.openxmlformats.org/drawingml/2006/main" xmlns:r="http://schemas.openxmlformats.org/officeDocument/2006/relationships" xmlns:p="http://schemas.openxmlformats.org/presentationml/2006/main">
+<p:sld xmlns:a="http://schemas.openxmlformats.org/drawingml/2006/main" xmlns:p="http://schemas.openxmlformats.org/presentationml/2006/main" xmlns:r="http://schemas.openxmlformats.org/officeDocument/2006/relationships">
   <p:cSld>
     <p:spTree>
       <p:nvGrpSpPr>
@@ -10171,14 +10272,7 @@
         <p:cNvGrpSpPr/>
         <p:nvPr/>
       </p:nvGrpSpPr>
-      <p:grpSpPr>
-        <a:xfrm>
-          <a:off x="0" y="0"/>
-          <a:ext cx="0" cy="0"/>
-          <a:chOff x="0" y="0"/>
-          <a:chExt cx="0" cy="0"/>
-        </a:xfrm>
-      </p:grpSpPr>
+      <p:grpSpPr/>
       <p:sp>
         <p:nvSpPr>
           <p:cNvPr id="2" name="TextBox 1"/>
@@ -10255,7 +10349,6 @@
           <a:lstStyle/>
           <a:p>
             <a:pPr algn="ctr"/>
-            <a:endParaRPr/>
           </a:p>
         </p:txBody>
       </p:sp>
@@ -10299,7 +10392,6 @@
           <a:lstStyle/>
           <a:p>
             <a:pPr algn="ctr"/>
-            <a:endParaRPr/>
           </a:p>
         </p:txBody>
       </p:sp>
@@ -10312,7 +10404,7 @@
 </file>
 
 <file path=ppt/slides/slide2.xml><?xml version="1.0" encoding="utf-8"?>
-<p:sld xmlns:a="http://schemas.openxmlformats.org/drawingml/2006/main" xmlns:r="http://schemas.openxmlformats.org/officeDocument/2006/relationships" xmlns:p="http://schemas.openxmlformats.org/presentationml/2006/main">
+<p:sld xmlns:a="http://schemas.openxmlformats.org/drawingml/2006/main" xmlns:p="http://schemas.openxmlformats.org/presentationml/2006/main" xmlns:r="http://schemas.openxmlformats.org/officeDocument/2006/relationships">
   <p:cSld>
     <p:spTree>
       <p:nvGrpSpPr>
@@ -10320,14 +10412,7 @@
         <p:cNvGrpSpPr/>
         <p:nvPr/>
       </p:nvGrpSpPr>
-      <p:grpSpPr>
-        <a:xfrm>
-          <a:off x="0" y="0"/>
-          <a:ext cx="0" cy="0"/>
-          <a:chOff x="0" y="0"/>
-          <a:chExt cx="0" cy="0"/>
-        </a:xfrm>
-      </p:grpSpPr>
+      <p:grpSpPr/>
       <p:sp>
         <p:nvSpPr>
           <p:cNvPr id="2" name="TextBox 1"/>
@@ -10462,7 +10547,6 @@
           <a:lstStyle/>
           <a:p>
             <a:pPr algn="ctr"/>
-            <a:endParaRPr/>
           </a:p>
         </p:txBody>
       </p:sp>
@@ -10506,7 +10590,6 @@
           <a:lstStyle/>
           <a:p>
             <a:pPr algn="ctr"/>
-            <a:endParaRPr/>
           </a:p>
         </p:txBody>
       </p:sp>
@@ -10721,7 +10804,7 @@
 </file>
 
 <file path=ppt/slides/slide3.xml><?xml version="1.0" encoding="utf-8"?>
-<p:sld xmlns:a="http://schemas.openxmlformats.org/drawingml/2006/main" xmlns:r="http://schemas.openxmlformats.org/officeDocument/2006/relationships" xmlns:p="http://schemas.openxmlformats.org/presentationml/2006/main">
+<p:sld xmlns:a="http://schemas.openxmlformats.org/drawingml/2006/main" xmlns:p="http://schemas.openxmlformats.org/presentationml/2006/main" xmlns:r="http://schemas.openxmlformats.org/officeDocument/2006/relationships">
   <p:cSld>
     <p:spTree>
       <p:nvGrpSpPr>
@@ -10729,14 +10812,7 @@
         <p:cNvGrpSpPr/>
         <p:nvPr/>
       </p:nvGrpSpPr>
-      <p:grpSpPr>
-        <a:xfrm>
-          <a:off x="0" y="0"/>
-          <a:ext cx="0" cy="0"/>
-          <a:chOff x="0" y="0"/>
-          <a:chExt cx="0" cy="0"/>
-        </a:xfrm>
-      </p:grpSpPr>
+      <p:grpSpPr/>
       <p:sp>
         <p:nvSpPr>
           <p:cNvPr id="2" name="TextBox 1"/>
@@ -10781,7 +10857,7 @@
           <p:nvPr/>
         </p:nvPicPr>
         <p:blipFill>
-          <a:blip r:embed="rId3"/>
+          <a:blip r:embed="rId2"/>
           <a:stretch>
             <a:fillRect/>
           </a:stretch>
@@ -10871,7 +10947,6 @@
           <a:lstStyle/>
           <a:p>
             <a:pPr algn="ctr"/>
-            <a:endParaRPr/>
           </a:p>
         </p:txBody>
       </p:sp>
@@ -10915,7 +10990,6 @@
           <a:lstStyle/>
           <a:p>
             <a:pPr algn="ctr"/>
-            <a:endParaRPr/>
           </a:p>
         </p:txBody>
       </p:sp>
@@ -11216,7 +11290,7 @@
                 </a:solidFill>
                 <a:latin typeface="Trebuchet MS"/>
               </a:rPr>
-              <a:t> External construct validation against the IGDS9-SF clinical instrument (n = 87), an accent-fairness audit (6,656 clips), on-device resource measurement, and the honest limitations that come with all three</a:t>
+              <a:t> External construct validation against the IGDS9-SF clinical instrument (134 raw / 104 usable), an accent-fairness audit (6,656 clips), on-device resource measurement, and the honest limitations that come with all three</a:t>
             </a:r>
           </a:p>
         </p:txBody>
@@ -11230,7 +11304,7 @@
 </file>
 
 <file path=ppt/slides/slide4.xml><?xml version="1.0" encoding="utf-8"?>
-<p:sld xmlns:a="http://schemas.openxmlformats.org/drawingml/2006/main" xmlns:r="http://schemas.openxmlformats.org/officeDocument/2006/relationships" xmlns:p="http://schemas.openxmlformats.org/presentationml/2006/main">
+<p:sld xmlns:a="http://schemas.openxmlformats.org/drawingml/2006/main" xmlns:p="http://schemas.openxmlformats.org/presentationml/2006/main" xmlns:r="http://schemas.openxmlformats.org/officeDocument/2006/relationships">
   <p:cSld>
     <p:spTree>
       <p:nvGrpSpPr>
@@ -11238,14 +11312,7 @@
         <p:cNvGrpSpPr/>
         <p:nvPr/>
       </p:nvGrpSpPr>
-      <p:grpSpPr>
-        <a:xfrm>
-          <a:off x="0" y="0"/>
-          <a:ext cx="0" cy="0"/>
-          <a:chOff x="0" y="0"/>
-          <a:chExt cx="0" cy="0"/>
-        </a:xfrm>
-      </p:grpSpPr>
+      <p:grpSpPr/>
       <p:sp>
         <p:nvSpPr>
           <p:cNvPr id="2" name="TextBox 1"/>
@@ -11290,7 +11357,7 @@
           <p:nvPr/>
         </p:nvPicPr>
         <p:blipFill>
-          <a:blip r:embed="rId3"/>
+          <a:blip r:embed="rId2"/>
           <a:stretch>
             <a:fillRect/>
           </a:stretch>
@@ -11380,7 +11447,6 @@
           <a:lstStyle/>
           <a:p>
             <a:pPr algn="ctr"/>
-            <a:endParaRPr/>
           </a:p>
         </p:txBody>
       </p:sp>
@@ -11424,7 +11490,6 @@
           <a:lstStyle/>
           <a:p>
             <a:pPr algn="ctr"/>
-            <a:endParaRPr/>
           </a:p>
         </p:txBody>
       </p:sp>
@@ -11482,32 +11547,14 @@
                 <a:tableStyleId>{5C22544A-7EE6-4342-B048-85BDC9FD1C3A}</a:tableStyleId>
               </a:tblPr>
               <a:tblGrid>
-                <a:gridCol w="1554480">
-                  <a:extLst>
-                    <a:ext uri="{9D8B030D-6E8A-4147-A177-3AD203B41FA5}">
-                      <a16:colId xmlns:a16="http://schemas.microsoft.com/office/drawing/2014/main" val="20000"/>
-                    </a:ext>
-                  </a:extLst>
-                </a:gridCol>
-                <a:gridCol w="4572000">
-                  <a:extLst>
-                    <a:ext uri="{9D8B030D-6E8A-4147-A177-3AD203B41FA5}">
-                      <a16:colId xmlns:a16="http://schemas.microsoft.com/office/drawing/2014/main" val="20001"/>
-                    </a:ext>
-                  </a:extLst>
-                </a:gridCol>
-                <a:gridCol w="4937760">
-                  <a:extLst>
-                    <a:ext uri="{9D8B030D-6E8A-4147-A177-3AD203B41FA5}">
-                      <a16:colId xmlns:a16="http://schemas.microsoft.com/office/drawing/2014/main" val="20002"/>
-                    </a:ext>
-                  </a:extLst>
-                </a:gridCol>
+                <a:gridCol w="1554480"/>
+                <a:gridCol w="4572000"/>
+                <a:gridCol w="4937760"/>
               </a:tblGrid>
               <a:tr h="347472">
                 <a:tc>
                   <a:txBody>
-                    <a:bodyPr/>
+                    <a:bodyPr wrap="square"/>
                     <a:lstStyle/>
                     <a:p>
                       <a:r>
@@ -11529,7 +11576,7 @@
                 </a:tc>
                 <a:tc>
                   <a:txBody>
-                    <a:bodyPr/>
+                    <a:bodyPr wrap="square"/>
                     <a:lstStyle/>
                     <a:p>
                       <a:r>
@@ -11551,7 +11598,7 @@
                 </a:tc>
                 <a:tc>
                   <a:txBody>
-                    <a:bodyPr/>
+                    <a:bodyPr wrap="square"/>
                     <a:lstStyle/>
                     <a:p>
                       <a:r>
@@ -11571,16 +11618,11 @@
                     </a:solidFill>
                   </a:tcPr>
                 </a:tc>
-                <a:extLst>
-                  <a:ext uri="{0D108BD9-81ED-4DB2-BD59-A6C34878D82A}">
-                    <a16:rowId xmlns:a16="http://schemas.microsoft.com/office/drawing/2014/main" val="10000"/>
-                  </a:ext>
-                </a:extLst>
               </a:tr>
               <a:tr h="347472">
                 <a:tc>
                   <a:txBody>
-                    <a:bodyPr/>
+                    <a:bodyPr wrap="square"/>
                     <a:lstStyle/>
                     <a:p>
                       <a:r>
@@ -11611,7 +11653,7 @@
                 </a:tc>
                 <a:tc>
                   <a:txBody>
-                    <a:bodyPr/>
+                    <a:bodyPr wrap="square"/>
                     <a:lstStyle/>
                     <a:p>
                       <a:r>
@@ -11633,7 +11675,7 @@
                 </a:tc>
                 <a:tc>
                   <a:txBody>
-                    <a:bodyPr/>
+                    <a:bodyPr wrap="square"/>
                     <a:lstStyle/>
                     <a:p>
                       <a:r>
@@ -11725,16 +11767,11 @@
                     </a:solidFill>
                   </a:tcPr>
                 </a:tc>
-                <a:extLst>
-                  <a:ext uri="{0D108BD9-81ED-4DB2-BD59-A6C34878D82A}">
-                    <a16:rowId xmlns:a16="http://schemas.microsoft.com/office/drawing/2014/main" val="10001"/>
-                  </a:ext>
-                </a:extLst>
               </a:tr>
               <a:tr h="347472">
                 <a:tc>
                   <a:txBody>
-                    <a:bodyPr/>
+                    <a:bodyPr wrap="square"/>
                     <a:lstStyle/>
                     <a:p>
                       <a:r>
@@ -11765,7 +11802,7 @@
                 </a:tc>
                 <a:tc>
                   <a:txBody>
-                    <a:bodyPr/>
+                    <a:bodyPr wrap="square"/>
                     <a:lstStyle/>
                     <a:p>
                       <a:r>
@@ -11787,7 +11824,7 @@
                 </a:tc>
                 <a:tc>
                   <a:txBody>
-                    <a:bodyPr/>
+                    <a:bodyPr wrap="square"/>
                     <a:lstStyle/>
                     <a:p>
                       <a:r>
@@ -11807,16 +11844,11 @@
                     </a:solidFill>
                   </a:tcPr>
                 </a:tc>
-                <a:extLst>
-                  <a:ext uri="{0D108BD9-81ED-4DB2-BD59-A6C34878D82A}">
-                    <a16:rowId xmlns:a16="http://schemas.microsoft.com/office/drawing/2014/main" val="10002"/>
-                  </a:ext>
-                </a:extLst>
               </a:tr>
               <a:tr h="347472">
                 <a:tc>
                   <a:txBody>
-                    <a:bodyPr/>
+                    <a:bodyPr wrap="square"/>
                     <a:lstStyle/>
                     <a:p>
                       <a:r>
@@ -11847,7 +11879,7 @@
                 </a:tc>
                 <a:tc>
                   <a:txBody>
-                    <a:bodyPr/>
+                    <a:bodyPr wrap="square"/>
                     <a:lstStyle/>
                     <a:p>
                       <a:r>
@@ -11869,7 +11901,7 @@
                 </a:tc>
                 <a:tc>
                   <a:txBody>
-                    <a:bodyPr/>
+                    <a:bodyPr wrap="square"/>
                     <a:lstStyle/>
                     <a:p>
                       <a:r>
@@ -11888,7 +11920,7 @@
                           </a:solidFill>
                           <a:latin typeface="Trebuchet MS"/>
                         </a:rPr>
-                        <a:t>ρ = 0.352 vs IGDS9-SF, beats screen time</a:t>
+                        <a:t>ρ = 0.317 vs IGDS9-SF, leads screen time in 97% of resamples</a:t>
                       </a:r>
                       <a:r>
                         <a:rPr sz="1100" b="0">
@@ -11943,11 +11975,6 @@
                     </a:solidFill>
                   </a:tcPr>
                 </a:tc>
-                <a:extLst>
-                  <a:ext uri="{0D108BD9-81ED-4DB2-BD59-A6C34878D82A}">
-                    <a16:rowId xmlns:a16="http://schemas.microsoft.com/office/drawing/2014/main" val="10003"/>
-                  </a:ext>
-                </a:extLst>
               </a:tr>
             </a:tbl>
           </a:graphicData>
@@ -11962,7 +11989,7 @@
 </file>
 
 <file path=ppt/slides/slide5.xml><?xml version="1.0" encoding="utf-8"?>
-<p:sld xmlns:a="http://schemas.openxmlformats.org/drawingml/2006/main" xmlns:r="http://schemas.openxmlformats.org/officeDocument/2006/relationships" xmlns:p="http://schemas.openxmlformats.org/presentationml/2006/main">
+<p:sld xmlns:a="http://schemas.openxmlformats.org/drawingml/2006/main" xmlns:p="http://schemas.openxmlformats.org/presentationml/2006/main" xmlns:r="http://schemas.openxmlformats.org/officeDocument/2006/relationships">
   <p:cSld>
     <p:spTree>
       <p:nvGrpSpPr>
@@ -11970,14 +11997,7 @@
         <p:cNvGrpSpPr/>
         <p:nvPr/>
       </p:nvGrpSpPr>
-      <p:grpSpPr>
-        <a:xfrm>
-          <a:off x="0" y="0"/>
-          <a:ext cx="0" cy="0"/>
-          <a:chOff x="0" y="0"/>
-          <a:chExt cx="0" cy="0"/>
-        </a:xfrm>
-      </p:grpSpPr>
+      <p:grpSpPr/>
       <p:sp>
         <p:nvSpPr>
           <p:cNvPr id="2" name="TextBox 1"/>
@@ -12022,7 +12042,7 @@
           <p:nvPr/>
         </p:nvPicPr>
         <p:blipFill>
-          <a:blip r:embed="rId3"/>
+          <a:blip r:embed="rId2"/>
           <a:stretch>
             <a:fillRect/>
           </a:stretch>
@@ -12112,7 +12132,6 @@
           <a:lstStyle/>
           <a:p>
             <a:pPr algn="ctr"/>
-            <a:endParaRPr/>
           </a:p>
         </p:txBody>
       </p:sp>
@@ -12156,7 +12175,6 @@
           <a:lstStyle/>
           <a:p>
             <a:pPr algn="ctr"/>
-            <a:endParaRPr/>
           </a:p>
         </p:txBody>
       </p:sp>
@@ -12205,7 +12223,7 @@
         </p:nvGraphicFramePr>
         <p:xfrm>
           <a:off x="548640" y="1371600"/>
-          <a:ext cx="11064240" cy="2801112"/>
+          <a:ext cx="11064240" cy="2084832"/>
         </p:xfrm>
         <a:graphic>
           <a:graphicData uri="http://schemas.openxmlformats.org/drawingml/2006/table">
@@ -12214,32 +12232,14 @@
                 <a:tableStyleId>{5C22544A-7EE6-4342-B048-85BDC9FD1C3A}</a:tableStyleId>
               </a:tblPr>
               <a:tblGrid>
-                <a:gridCol w="3108960">
-                  <a:extLst>
-                    <a:ext uri="{9D8B030D-6E8A-4147-A177-3AD203B41FA5}">
-                      <a16:colId xmlns:a16="http://schemas.microsoft.com/office/drawing/2014/main" val="20000"/>
-                    </a:ext>
-                  </a:extLst>
-                </a:gridCol>
-                <a:gridCol w="4023360">
-                  <a:extLst>
-                    <a:ext uri="{9D8B030D-6E8A-4147-A177-3AD203B41FA5}">
-                      <a16:colId xmlns:a16="http://schemas.microsoft.com/office/drawing/2014/main" val="20001"/>
-                    </a:ext>
-                  </a:extLst>
-                </a:gridCol>
-                <a:gridCol w="3931920">
-                  <a:extLst>
-                    <a:ext uri="{9D8B030D-6E8A-4147-A177-3AD203B41FA5}">
-                      <a16:colId xmlns:a16="http://schemas.microsoft.com/office/drawing/2014/main" val="20002"/>
-                    </a:ext>
-                  </a:extLst>
-                </a:gridCol>
+                <a:gridCol w="3108960"/>
+                <a:gridCol w="4023360"/>
+                <a:gridCol w="3931920"/>
               </a:tblGrid>
               <a:tr h="347472">
                 <a:tc>
                   <a:txBody>
-                    <a:bodyPr/>
+                    <a:bodyPr wrap="square"/>
                     <a:lstStyle/>
                     <a:p>
                       <a:r>
@@ -12261,7 +12261,7 @@
                 </a:tc>
                 <a:tc>
                   <a:txBody>
-                    <a:bodyPr/>
+                    <a:bodyPr wrap="square"/>
                     <a:lstStyle/>
                     <a:p>
                       <a:r>
@@ -12283,7 +12283,7 @@
                 </a:tc>
                 <a:tc>
                   <a:txBody>
-                    <a:bodyPr/>
+                    <a:bodyPr wrap="square"/>
                     <a:lstStyle/>
                     <a:p>
                       <a:r>
@@ -12303,16 +12303,11 @@
                     </a:solidFill>
                   </a:tcPr>
                 </a:tc>
-                <a:extLst>
-                  <a:ext uri="{0D108BD9-81ED-4DB2-BD59-A6C34878D82A}">
-                    <a16:rowId xmlns:a16="http://schemas.microsoft.com/office/drawing/2014/main" val="10000"/>
-                  </a:ext>
-                </a:extLst>
               </a:tr>
               <a:tr h="347472">
                 <a:tc>
                   <a:txBody>
-                    <a:bodyPr/>
+                    <a:bodyPr wrap="square"/>
                     <a:lstStyle/>
                     <a:p>
                       <a:r>
@@ -12334,7 +12329,7 @@
                 </a:tc>
                 <a:tc>
                   <a:txBody>
-                    <a:bodyPr/>
+                    <a:bodyPr wrap="square"/>
                     <a:lstStyle/>
                     <a:p>
                       <a:r>
@@ -12356,7 +12351,7 @@
                 </a:tc>
                 <a:tc>
                   <a:txBody>
-                    <a:bodyPr/>
+                    <a:bodyPr wrap="square"/>
                     <a:lstStyle/>
                     <a:p>
                       <a:r>
@@ -12394,16 +12389,11 @@
                     </a:solidFill>
                   </a:tcPr>
                 </a:tc>
-                <a:extLst>
-                  <a:ext uri="{0D108BD9-81ED-4DB2-BD59-A6C34878D82A}">
-                    <a16:rowId xmlns:a16="http://schemas.microsoft.com/office/drawing/2014/main" val="10001"/>
-                  </a:ext>
-                </a:extLst>
               </a:tr>
               <a:tr h="347472">
                 <a:tc>
                   <a:txBody>
-                    <a:bodyPr/>
+                    <a:bodyPr wrap="square"/>
                     <a:lstStyle/>
                     <a:p>
                       <a:r>
@@ -12425,7 +12415,7 @@
                 </a:tc>
                 <a:tc>
                   <a:txBody>
-                    <a:bodyPr/>
+                    <a:bodyPr wrap="square"/>
                     <a:lstStyle/>
                     <a:p>
                       <a:r>
@@ -12447,7 +12437,7 @@
                 </a:tc>
                 <a:tc>
                   <a:txBody>
-                    <a:bodyPr/>
+                    <a:bodyPr wrap="square"/>
                     <a:lstStyle/>
                     <a:p>
                       <a:r>
@@ -12485,16 +12475,11 @@
                     </a:solidFill>
                   </a:tcPr>
                 </a:tc>
-                <a:extLst>
-                  <a:ext uri="{0D108BD9-81ED-4DB2-BD59-A6C34878D82A}">
-                    <a16:rowId xmlns:a16="http://schemas.microsoft.com/office/drawing/2014/main" val="10002"/>
-                  </a:ext>
-                </a:extLst>
               </a:tr>
               <a:tr h="347472">
                 <a:tc>
                   <a:txBody>
-                    <a:bodyPr/>
+                    <a:bodyPr wrap="square"/>
                     <a:lstStyle/>
                     <a:p>
                       <a:r>
@@ -12516,7 +12501,7 @@
                 </a:tc>
                 <a:tc>
                   <a:txBody>
-                    <a:bodyPr/>
+                    <a:bodyPr wrap="square"/>
                     <a:lstStyle/>
                     <a:p>
                       <a:r>
@@ -12538,7 +12523,7 @@
                 </a:tc>
                 <a:tc>
                   <a:txBody>
-                    <a:bodyPr/>
+                    <a:bodyPr wrap="square"/>
                     <a:lstStyle/>
                     <a:p>
                       <a:r>
@@ -12558,16 +12543,11 @@
                     </a:solidFill>
                   </a:tcPr>
                 </a:tc>
-                <a:extLst>
-                  <a:ext uri="{0D108BD9-81ED-4DB2-BD59-A6C34878D82A}">
-                    <a16:rowId xmlns:a16="http://schemas.microsoft.com/office/drawing/2014/main" val="10003"/>
-                  </a:ext>
-                </a:extLst>
               </a:tr>
               <a:tr h="347472">
                 <a:tc>
                   <a:txBody>
-                    <a:bodyPr/>
+                    <a:bodyPr wrap="square"/>
                     <a:lstStyle/>
                     <a:p>
                       <a:r>
@@ -12589,7 +12569,7 @@
                 </a:tc>
                 <a:tc>
                   <a:txBody>
-                    <a:bodyPr/>
+                    <a:bodyPr wrap="square"/>
                     <a:lstStyle/>
                     <a:p>
                       <a:r>
@@ -12611,7 +12591,7 @@
                 </a:tc>
                 <a:tc>
                   <a:txBody>
-                    <a:bodyPr/>
+                    <a:bodyPr wrap="square"/>
                     <a:lstStyle/>
                     <a:p>
                       <a:r>
@@ -12640,16 +12620,11 @@
                     </a:solidFill>
                   </a:tcPr>
                 </a:tc>
-                <a:extLst>
-                  <a:ext uri="{0D108BD9-81ED-4DB2-BD59-A6C34878D82A}">
-                    <a16:rowId xmlns:a16="http://schemas.microsoft.com/office/drawing/2014/main" val="10004"/>
-                  </a:ext>
-                </a:extLst>
               </a:tr>
               <a:tr h="347472">
                 <a:tc>
                   <a:txBody>
-                    <a:bodyPr/>
+                    <a:bodyPr wrap="square"/>
                     <a:lstStyle/>
                     <a:p>
                       <a:r>
@@ -12659,7 +12634,7 @@
                           </a:solidFill>
                           <a:latin typeface="Trebuchet MS"/>
                         </a:rPr>
-                        <a:t>Our own survey (n = 87)</a:t>
+                        <a:t>Our own survey (n = 104 usable)</a:t>
                       </a:r>
                     </a:p>
                   </a:txBody>
@@ -12671,7 +12646,7 @@
                 </a:tc>
                 <a:tc>
                   <a:txBody>
-                    <a:bodyPr/>
+                    <a:bodyPr wrap="square"/>
                     <a:lstStyle/>
                     <a:p>
                       <a:r>
@@ -12693,7 +12668,7 @@
                 </a:tc>
                 <a:tc>
                   <a:txBody>
-                    <a:bodyPr/>
+                    <a:bodyPr wrap="square"/>
                     <a:lstStyle/>
                     <a:p>
                       <a:r>
@@ -12713,11 +12688,6 @@
                     </a:solidFill>
                   </a:tcPr>
                 </a:tc>
-                <a:extLst>
-                  <a:ext uri="{0D108BD9-81ED-4DB2-BD59-A6C34878D82A}">
-                    <a16:rowId xmlns:a16="http://schemas.microsoft.com/office/drawing/2014/main" val="10005"/>
-                  </a:ext>
-                </a:extLst>
               </a:tr>
             </a:tbl>
           </a:graphicData>
@@ -12732,7 +12702,7 @@
 </file>
 
 <file path=ppt/slides/slide6.xml><?xml version="1.0" encoding="utf-8"?>
-<p:sld xmlns:a="http://schemas.openxmlformats.org/drawingml/2006/main" xmlns:r="http://schemas.openxmlformats.org/officeDocument/2006/relationships" xmlns:p="http://schemas.openxmlformats.org/presentationml/2006/main">
+<p:sld xmlns:a="http://schemas.openxmlformats.org/drawingml/2006/main" xmlns:p="http://schemas.openxmlformats.org/presentationml/2006/main" xmlns:r="http://schemas.openxmlformats.org/officeDocument/2006/relationships">
   <p:cSld>
     <p:spTree>
       <p:nvGrpSpPr>
@@ -12740,14 +12710,7 @@
         <p:cNvGrpSpPr/>
         <p:nvPr/>
       </p:nvGrpSpPr>
-      <p:grpSpPr>
-        <a:xfrm>
-          <a:off x="0" y="0"/>
-          <a:ext cx="0" cy="0"/>
-          <a:chOff x="0" y="0"/>
-          <a:chExt cx="0" cy="0"/>
-        </a:xfrm>
-      </p:grpSpPr>
+      <p:grpSpPr/>
       <p:sp>
         <p:nvSpPr>
           <p:cNvPr id="2" name="TextBox 1"/>
@@ -12792,7 +12755,7 @@
           <p:nvPr/>
         </p:nvPicPr>
         <p:blipFill>
-          <a:blip r:embed="rId3"/>
+          <a:blip r:embed="rId2"/>
           <a:stretch>
             <a:fillRect/>
           </a:stretch>
@@ -12882,7 +12845,6 @@
           <a:lstStyle/>
           <a:p>
             <a:pPr algn="ctr"/>
-            <a:endParaRPr/>
           </a:p>
         </p:txBody>
       </p:sp>
@@ -12926,7 +12888,6 @@
           <a:lstStyle/>
           <a:p>
             <a:pPr algn="ctr"/>
-            <a:endParaRPr/>
           </a:p>
         </p:txBody>
       </p:sp>
@@ -13007,7 +12968,6 @@
           <a:lstStyle/>
           <a:p>
             <a:pPr algn="ctr"/>
-            <a:endParaRPr/>
           </a:p>
         </p:txBody>
       </p:sp>
@@ -13127,7 +13087,6 @@
           <a:lstStyle/>
           <a:p>
             <a:pPr algn="ctr"/>
-            <a:endParaRPr/>
           </a:p>
         </p:txBody>
       </p:sp>
@@ -13247,7 +13206,6 @@
           <a:lstStyle/>
           <a:p>
             <a:pPr algn="ctr"/>
-            <a:endParaRPr/>
           </a:p>
         </p:txBody>
       </p:sp>
@@ -13365,7 +13323,6 @@
           <a:lstStyle/>
           <a:p>
             <a:pPr algn="ctr"/>
-            <a:endParaRPr/>
           </a:p>
         </p:txBody>
       </p:sp>
@@ -13409,7 +13366,6 @@
           <a:lstStyle/>
           <a:p>
             <a:pPr algn="ctr"/>
-            <a:endParaRPr/>
           </a:p>
         </p:txBody>
       </p:sp>
@@ -13531,7 +13487,7 @@
 </file>
 
 <file path=ppt/slides/slide7.xml><?xml version="1.0" encoding="utf-8"?>
-<p:sld xmlns:a="http://schemas.openxmlformats.org/drawingml/2006/main" xmlns:r="http://schemas.openxmlformats.org/officeDocument/2006/relationships" xmlns:p="http://schemas.openxmlformats.org/presentationml/2006/main">
+<p:sld xmlns:a="http://schemas.openxmlformats.org/drawingml/2006/main" xmlns:p="http://schemas.openxmlformats.org/presentationml/2006/main" xmlns:r="http://schemas.openxmlformats.org/officeDocument/2006/relationships">
   <p:cSld>
     <p:spTree>
       <p:nvGrpSpPr>
@@ -13539,14 +13495,7 @@
         <p:cNvGrpSpPr/>
         <p:nvPr/>
       </p:nvGrpSpPr>
-      <p:grpSpPr>
-        <a:xfrm>
-          <a:off x="0" y="0"/>
-          <a:ext cx="0" cy="0"/>
-          <a:chOff x="0" y="0"/>
-          <a:chExt cx="0" cy="0"/>
-        </a:xfrm>
-      </p:grpSpPr>
+      <p:grpSpPr/>
       <p:sp>
         <p:nvSpPr>
           <p:cNvPr id="2" name="TextBox 1"/>
@@ -13591,7 +13540,7 @@
           <p:nvPr/>
         </p:nvPicPr>
         <p:blipFill>
-          <a:blip r:embed="rId3"/>
+          <a:blip r:embed="rId2"/>
           <a:stretch>
             <a:fillRect/>
           </a:stretch>
@@ -13681,7 +13630,6 @@
           <a:lstStyle/>
           <a:p>
             <a:pPr algn="ctr"/>
-            <a:endParaRPr/>
           </a:p>
         </p:txBody>
       </p:sp>
@@ -13725,7 +13673,6 @@
           <a:lstStyle/>
           <a:p>
             <a:pPr algn="ctr"/>
-            <a:endParaRPr/>
           </a:p>
         </p:txBody>
       </p:sp>
@@ -13774,7 +13721,7 @@
         </p:nvGraphicFramePr>
         <p:xfrm>
           <a:off x="548640" y="1325880"/>
-          <a:ext cx="11064240" cy="2481072"/>
+          <a:ext cx="11064240" cy="2432304"/>
         </p:xfrm>
         <a:graphic>
           <a:graphicData uri="http://schemas.openxmlformats.org/drawingml/2006/table">
@@ -13783,32 +13730,14 @@
                 <a:tableStyleId>{5C22544A-7EE6-4342-B048-85BDC9FD1C3A}</a:tableStyleId>
               </a:tblPr>
               <a:tblGrid>
-                <a:gridCol w="2103120">
-                  <a:extLst>
-                    <a:ext uri="{9D8B030D-6E8A-4147-A177-3AD203B41FA5}">
-                      <a16:colId xmlns:a16="http://schemas.microsoft.com/office/drawing/2014/main" val="20000"/>
-                    </a:ext>
-                  </a:extLst>
-                </a:gridCol>
-                <a:gridCol w="6126480">
-                  <a:extLst>
-                    <a:ext uri="{9D8B030D-6E8A-4147-A177-3AD203B41FA5}">
-                      <a16:colId xmlns:a16="http://schemas.microsoft.com/office/drawing/2014/main" val="20001"/>
-                    </a:ext>
-                  </a:extLst>
-                </a:gridCol>
-                <a:gridCol w="2834640">
-                  <a:extLst>
-                    <a:ext uri="{9D8B030D-6E8A-4147-A177-3AD203B41FA5}">
-                      <a16:colId xmlns:a16="http://schemas.microsoft.com/office/drawing/2014/main" val="20002"/>
-                    </a:ext>
-                  </a:extLst>
-                </a:gridCol>
+                <a:gridCol w="2103120"/>
+                <a:gridCol w="6126480"/>
+                <a:gridCol w="2834640"/>
               </a:tblGrid>
               <a:tr h="347472">
                 <a:tc>
                   <a:txBody>
-                    <a:bodyPr/>
+                    <a:bodyPr wrap="square"/>
                     <a:lstStyle/>
                     <a:p>
                       <a:r>
@@ -13830,7 +13759,7 @@
                 </a:tc>
                 <a:tc>
                   <a:txBody>
-                    <a:bodyPr/>
+                    <a:bodyPr wrap="square"/>
                     <a:lstStyle/>
                     <a:p>
                       <a:r>
@@ -13852,7 +13781,7 @@
                 </a:tc>
                 <a:tc>
                   <a:txBody>
-                    <a:bodyPr/>
+                    <a:bodyPr wrap="square"/>
                     <a:lstStyle/>
                     <a:p>
                       <a:r>
@@ -13872,16 +13801,11 @@
                     </a:solidFill>
                   </a:tcPr>
                 </a:tc>
-                <a:extLst>
-                  <a:ext uri="{0D108BD9-81ED-4DB2-BD59-A6C34878D82A}">
-                    <a16:rowId xmlns:a16="http://schemas.microsoft.com/office/drawing/2014/main" val="10000"/>
-                  </a:ext>
-                </a:extLst>
               </a:tr>
               <a:tr h="347472">
                 <a:tc>
                   <a:txBody>
-                    <a:bodyPr/>
+                    <a:bodyPr wrap="square"/>
                     <a:lstStyle/>
                     <a:p>
                       <a:r>
@@ -13903,7 +13827,7 @@
                 </a:tc>
                 <a:tc>
                   <a:txBody>
-                    <a:bodyPr/>
+                    <a:bodyPr wrap="square"/>
                     <a:lstStyle/>
                     <a:p>
                       <a:r>
@@ -13913,7 +13837,7 @@
                           </a:solidFill>
                           <a:latin typeface="Trebuchet MS"/>
                         </a:rPr>
-                        <a:t>11 open corpora screened by provenance/fit/openness, adopted by measured trial; 2 rejected with evidence; own IGDS9-SF survey (n = 87) as primary data</a:t>
+                        <a:t>11 open corpora screened by provenance/fit/openness, adopted by measured trial; 2 rejected with evidence; own IGDS9-SF survey (134 raw / 104 usable) as primary data</a:t>
                       </a:r>
                     </a:p>
                   </a:txBody>
@@ -13925,7 +13849,7 @@
                 </a:tc>
                 <a:tc>
                   <a:txBody>
-                    <a:bodyPr/>
+                    <a:bodyPr wrap="square"/>
                     <a:lstStyle/>
                     <a:p>
                       <a:r>
@@ -13945,16 +13869,11 @@
                     </a:solidFill>
                   </a:tcPr>
                 </a:tc>
-                <a:extLst>
-                  <a:ext uri="{0D108BD9-81ED-4DB2-BD59-A6C34878D82A}">
-                    <a16:rowId xmlns:a16="http://schemas.microsoft.com/office/drawing/2014/main" val="10001"/>
-                  </a:ext>
-                </a:extLst>
               </a:tr>
               <a:tr h="347472">
                 <a:tc>
                   <a:txBody>
-                    <a:bodyPr/>
+                    <a:bodyPr wrap="square"/>
                     <a:lstStyle/>
                     <a:p>
                       <a:r>
@@ -13976,7 +13895,7 @@
                 </a:tc>
                 <a:tc>
                   <a:txBody>
-                    <a:bodyPr/>
+                    <a:bodyPr wrap="square"/>
                     <a:lstStyle/>
                     <a:p>
                       <a:r>
@@ -13998,7 +13917,7 @@
                 </a:tc>
                 <a:tc>
                   <a:txBody>
-                    <a:bodyPr/>
+                    <a:bodyPr wrap="square"/>
                     <a:lstStyle/>
                     <a:p>
                       <a:r>
@@ -14018,16 +13937,11 @@
                     </a:solidFill>
                   </a:tcPr>
                 </a:tc>
-                <a:extLst>
-                  <a:ext uri="{0D108BD9-81ED-4DB2-BD59-A6C34878D82A}">
-                    <a16:rowId xmlns:a16="http://schemas.microsoft.com/office/drawing/2014/main" val="10002"/>
-                  </a:ext>
-                </a:extLst>
               </a:tr>
               <a:tr h="347472">
                 <a:tc>
                   <a:txBody>
-                    <a:bodyPr/>
+                    <a:bodyPr wrap="square"/>
                     <a:lstStyle/>
                     <a:p>
                       <a:r>
@@ -14049,7 +13963,7 @@
                 </a:tc>
                 <a:tc>
                   <a:txBody>
-                    <a:bodyPr/>
+                    <a:bodyPr wrap="square"/>
                     <a:lstStyle/>
                     <a:p>
                       <a:r>
@@ -14071,7 +13985,7 @@
                 </a:tc>
                 <a:tc>
                   <a:txBody>
-                    <a:bodyPr/>
+                    <a:bodyPr wrap="square"/>
                     <a:lstStyle/>
                     <a:p>
                       <a:r>
@@ -14091,16 +14005,11 @@
                     </a:solidFill>
                   </a:tcPr>
                 </a:tc>
-                <a:extLst>
-                  <a:ext uri="{0D108BD9-81ED-4DB2-BD59-A6C34878D82A}">
-                    <a16:rowId xmlns:a16="http://schemas.microsoft.com/office/drawing/2014/main" val="10003"/>
-                  </a:ext>
-                </a:extLst>
               </a:tr>
               <a:tr h="347472">
                 <a:tc>
                   <a:txBody>
-                    <a:bodyPr/>
+                    <a:bodyPr wrap="square"/>
                     <a:lstStyle/>
                     <a:p>
                       <a:r>
@@ -14122,7 +14031,7 @@
                 </a:tc>
                 <a:tc>
                   <a:txBody>
-                    <a:bodyPr/>
+                    <a:bodyPr wrap="square"/>
                     <a:lstStyle/>
                     <a:p>
                       <a:r>
@@ -14144,7 +14053,7 @@
                 </a:tc>
                 <a:tc>
                   <a:txBody>
-                    <a:bodyPr/>
+                    <a:bodyPr wrap="square"/>
                     <a:lstStyle/>
                     <a:p>
                       <a:r>
@@ -14164,16 +14073,11 @@
                     </a:solidFill>
                   </a:tcPr>
                 </a:tc>
-                <a:extLst>
-                  <a:ext uri="{0D108BD9-81ED-4DB2-BD59-A6C34878D82A}">
-                    <a16:rowId xmlns:a16="http://schemas.microsoft.com/office/drawing/2014/main" val="10004"/>
-                  </a:ext>
-                </a:extLst>
               </a:tr>
               <a:tr h="347472">
                 <a:tc>
                   <a:txBody>
-                    <a:bodyPr/>
+                    <a:bodyPr wrap="square"/>
                     <a:lstStyle/>
                     <a:p>
                       <a:r>
@@ -14195,7 +14099,7 @@
                 </a:tc>
                 <a:tc>
                   <a:txBody>
-                    <a:bodyPr/>
+                    <a:bodyPr wrap="square"/>
                     <a:lstStyle/>
                     <a:p>
                       <a:r>
@@ -14217,7 +14121,7 @@
                 </a:tc>
                 <a:tc>
                   <a:txBody>
-                    <a:bodyPr/>
+                    <a:bodyPr wrap="square"/>
                     <a:lstStyle/>
                     <a:p>
                       <a:r>
@@ -14237,16 +14141,11 @@
                     </a:solidFill>
                   </a:tcPr>
                 </a:tc>
-                <a:extLst>
-                  <a:ext uri="{0D108BD9-81ED-4DB2-BD59-A6C34878D82A}">
-                    <a16:rowId xmlns:a16="http://schemas.microsoft.com/office/drawing/2014/main" val="10005"/>
-                  </a:ext>
-                </a:extLst>
               </a:tr>
               <a:tr h="347472">
                 <a:tc>
                   <a:txBody>
-                    <a:bodyPr/>
+                    <a:bodyPr wrap="square"/>
                     <a:lstStyle/>
                     <a:p>
                       <a:r>
@@ -14268,7 +14167,7 @@
                 </a:tc>
                 <a:tc>
                   <a:txBody>
-                    <a:bodyPr/>
+                    <a:bodyPr wrap="square"/>
                     <a:lstStyle/>
                     <a:p>
                       <a:r>
@@ -14290,7 +14189,7 @@
                 </a:tc>
                 <a:tc>
                   <a:txBody>
-                    <a:bodyPr/>
+                    <a:bodyPr wrap="square"/>
                     <a:lstStyle/>
                     <a:p>
                       <a:r>
@@ -14310,11 +14209,6 @@
                     </a:solidFill>
                   </a:tcPr>
                 </a:tc>
-                <a:extLst>
-                  <a:ext uri="{0D108BD9-81ED-4DB2-BD59-A6C34878D82A}">
-                    <a16:rowId xmlns:a16="http://schemas.microsoft.com/office/drawing/2014/main" val="10006"/>
-                  </a:ext>
-                </a:extLst>
               </a:tr>
             </a:tbl>
           </a:graphicData>
@@ -14399,7 +14293,7 @@
 </file>
 
 <file path=ppt/slides/slide8.xml><?xml version="1.0" encoding="utf-8"?>
-<p:sld xmlns:a="http://schemas.openxmlformats.org/drawingml/2006/main" xmlns:r="http://schemas.openxmlformats.org/officeDocument/2006/relationships" xmlns:p="http://schemas.openxmlformats.org/presentationml/2006/main">
+<p:sld xmlns:a="http://schemas.openxmlformats.org/drawingml/2006/main" xmlns:p="http://schemas.openxmlformats.org/presentationml/2006/main" xmlns:r="http://schemas.openxmlformats.org/officeDocument/2006/relationships">
   <p:cSld>
     <p:spTree>
       <p:nvGrpSpPr>
@@ -14407,14 +14301,7 @@
         <p:cNvGrpSpPr/>
         <p:nvPr/>
       </p:nvGrpSpPr>
-      <p:grpSpPr>
-        <a:xfrm>
-          <a:off x="0" y="0"/>
-          <a:ext cx="0" cy="0"/>
-          <a:chOff x="0" y="0"/>
-          <a:chExt cx="0" cy="0"/>
-        </a:xfrm>
-      </p:grpSpPr>
+      <p:grpSpPr/>
       <p:sp>
         <p:nvSpPr>
           <p:cNvPr id="2" name="TextBox 1"/>
@@ -14459,7 +14346,7 @@
           <p:nvPr/>
         </p:nvPicPr>
         <p:blipFill>
-          <a:blip r:embed="rId3"/>
+          <a:blip r:embed="rId2"/>
           <a:stretch>
             <a:fillRect/>
           </a:stretch>
@@ -14549,7 +14436,6 @@
           <a:lstStyle/>
           <a:p>
             <a:pPr algn="ctr"/>
-            <a:endParaRPr/>
           </a:p>
         </p:txBody>
       </p:sp>
@@ -14593,7 +14479,6 @@
           <a:lstStyle/>
           <a:p>
             <a:pPr algn="ctr"/>
-            <a:endParaRPr/>
           </a:p>
         </p:txBody>
       </p:sp>
@@ -14642,7 +14527,7 @@
         </p:nvGraphicFramePr>
         <p:xfrm>
           <a:off x="548640" y="1371600"/>
-          <a:ext cx="11064240" cy="2508504"/>
+          <a:ext cx="11064240" cy="2084832"/>
         </p:xfrm>
         <a:graphic>
           <a:graphicData uri="http://schemas.openxmlformats.org/drawingml/2006/table">
@@ -14651,39 +14536,15 @@
                 <a:tableStyleId>{5C22544A-7EE6-4342-B048-85BDC9FD1C3A}</a:tableStyleId>
               </a:tblPr>
               <a:tblGrid>
-                <a:gridCol w="1737360">
-                  <a:extLst>
-                    <a:ext uri="{9D8B030D-6E8A-4147-A177-3AD203B41FA5}">
-                      <a16:colId xmlns:a16="http://schemas.microsoft.com/office/drawing/2014/main" val="20000"/>
-                    </a:ext>
-                  </a:extLst>
-                </a:gridCol>
-                <a:gridCol w="5943600">
-                  <a:extLst>
-                    <a:ext uri="{9D8B030D-6E8A-4147-A177-3AD203B41FA5}">
-                      <a16:colId xmlns:a16="http://schemas.microsoft.com/office/drawing/2014/main" val="20001"/>
-                    </a:ext>
-                  </a:extLst>
-                </a:gridCol>
-                <a:gridCol w="1828800">
-                  <a:extLst>
-                    <a:ext uri="{9D8B030D-6E8A-4147-A177-3AD203B41FA5}">
-                      <a16:colId xmlns:a16="http://schemas.microsoft.com/office/drawing/2014/main" val="20002"/>
-                    </a:ext>
-                  </a:extLst>
-                </a:gridCol>
-                <a:gridCol w="1554480">
-                  <a:extLst>
-                    <a:ext uri="{9D8B030D-6E8A-4147-A177-3AD203B41FA5}">
-                      <a16:colId xmlns:a16="http://schemas.microsoft.com/office/drawing/2014/main" val="20003"/>
-                    </a:ext>
-                  </a:extLst>
-                </a:gridCol>
+                <a:gridCol w="1737360"/>
+                <a:gridCol w="5943600"/>
+                <a:gridCol w="1828800"/>
+                <a:gridCol w="1554480"/>
               </a:tblGrid>
               <a:tr h="347472">
                 <a:tc>
                   <a:txBody>
-                    <a:bodyPr/>
+                    <a:bodyPr wrap="square"/>
                     <a:lstStyle/>
                     <a:p>
                       <a:r>
@@ -14705,7 +14566,7 @@
                 </a:tc>
                 <a:tc>
                   <a:txBody>
-                    <a:bodyPr/>
+                    <a:bodyPr wrap="square"/>
                     <a:lstStyle/>
                     <a:p>
                       <a:r>
@@ -14727,7 +14588,7 @@
                 </a:tc>
                 <a:tc>
                   <a:txBody>
-                    <a:bodyPr/>
+                    <a:bodyPr wrap="square"/>
                     <a:lstStyle/>
                     <a:p>
                       <a:r>
@@ -14749,7 +14610,7 @@
                 </a:tc>
                 <a:tc>
                   <a:txBody>
-                    <a:bodyPr/>
+                    <a:bodyPr wrap="square"/>
                     <a:lstStyle/>
                     <a:p>
                       <a:r>
@@ -14769,16 +14630,11 @@
                     </a:solidFill>
                   </a:tcPr>
                 </a:tc>
-                <a:extLst>
-                  <a:ext uri="{0D108BD9-81ED-4DB2-BD59-A6C34878D82A}">
-                    <a16:rowId xmlns:a16="http://schemas.microsoft.com/office/drawing/2014/main" val="10000"/>
-                  </a:ext>
-                </a:extLst>
               </a:tr>
               <a:tr h="347472">
                 <a:tc>
                   <a:txBody>
-                    <a:bodyPr/>
+                    <a:bodyPr wrap="square"/>
                     <a:lstStyle/>
                     <a:p>
                       <a:r>
@@ -14800,7 +14656,7 @@
                 </a:tc>
                 <a:tc>
                   <a:txBody>
-                    <a:bodyPr/>
+                    <a:bodyPr wrap="square"/>
                     <a:lstStyle/>
                     <a:p>
                       <a:r>
@@ -14822,7 +14678,7 @@
                 </a:tc>
                 <a:tc>
                   <a:txBody>
-                    <a:bodyPr/>
+                    <a:bodyPr wrap="square"/>
                     <a:lstStyle/>
                     <a:p>
                       <a:r>
@@ -14832,7 +14688,7 @@
                           </a:solidFill>
                           <a:latin typeface="Trebuchet MS"/>
                         </a:rPr>
-                        <a:t>14,931</a:t>
+                        <a:t>15,040</a:t>
                       </a:r>
                     </a:p>
                   </a:txBody>
@@ -14844,7 +14700,7 @@
                 </a:tc>
                 <a:tc>
                   <a:txBody>
-                    <a:bodyPr/>
+                    <a:bodyPr wrap="square"/>
                     <a:lstStyle/>
                     <a:p>
                       <a:r>
@@ -14864,16 +14720,11 @@
                     </a:solidFill>
                   </a:tcPr>
                 </a:tc>
-                <a:extLst>
-                  <a:ext uri="{0D108BD9-81ED-4DB2-BD59-A6C34878D82A}">
-                    <a16:rowId xmlns:a16="http://schemas.microsoft.com/office/drawing/2014/main" val="10001"/>
-                  </a:ext>
-                </a:extLst>
               </a:tr>
               <a:tr h="347472">
                 <a:tc>
                   <a:txBody>
-                    <a:bodyPr/>
+                    <a:bodyPr wrap="square"/>
                     <a:lstStyle/>
                     <a:p>
                       <a:r>
@@ -14895,7 +14746,7 @@
                 </a:tc>
                 <a:tc>
                   <a:txBody>
-                    <a:bodyPr/>
+                    <a:bodyPr wrap="square"/>
                     <a:lstStyle/>
                     <a:p>
                       <a:r>
@@ -14917,7 +14768,7 @@
                 </a:tc>
                 <a:tc>
                   <a:txBody>
-                    <a:bodyPr/>
+                    <a:bodyPr wrap="square"/>
                     <a:lstStyle/>
                     <a:p>
                       <a:r>
@@ -14939,7 +14790,7 @@
                 </a:tc>
                 <a:tc>
                   <a:txBody>
-                    <a:bodyPr/>
+                    <a:bodyPr wrap="square"/>
                     <a:lstStyle/>
                     <a:p>
                       <a:r>
@@ -14959,16 +14810,11 @@
                     </a:solidFill>
                   </a:tcPr>
                 </a:tc>
-                <a:extLst>
-                  <a:ext uri="{0D108BD9-81ED-4DB2-BD59-A6C34878D82A}">
-                    <a16:rowId xmlns:a16="http://schemas.microsoft.com/office/drawing/2014/main" val="10002"/>
-                  </a:ext>
-                </a:extLst>
               </a:tr>
               <a:tr h="347472">
                 <a:tc>
                   <a:txBody>
-                    <a:bodyPr/>
+                    <a:bodyPr wrap="square"/>
                     <a:lstStyle/>
                     <a:p>
                       <a:r>
@@ -14990,7 +14836,7 @@
                 </a:tc>
                 <a:tc>
                   <a:txBody>
-                    <a:bodyPr/>
+                    <a:bodyPr wrap="square"/>
                     <a:lstStyle/>
                     <a:p>
                       <a:r>
@@ -15012,7 +14858,7 @@
                 </a:tc>
                 <a:tc>
                   <a:txBody>
-                    <a:bodyPr/>
+                    <a:bodyPr wrap="square"/>
                     <a:lstStyle/>
                     <a:p>
                       <a:r>
@@ -15022,7 +14868,7 @@
                           </a:solidFill>
                           <a:latin typeface="Trebuchet MS"/>
                         </a:rPr>
-                        <a:t>9,622</a:t>
+                        <a:t>9,664</a:t>
                       </a:r>
                     </a:p>
                   </a:txBody>
@@ -15034,7 +14880,7 @@
                 </a:tc>
                 <a:tc>
                   <a:txBody>
-                    <a:bodyPr/>
+                    <a:bodyPr wrap="square"/>
                     <a:lstStyle/>
                     <a:p>
                       <a:r>
@@ -15054,16 +14900,11 @@
                     </a:solidFill>
                   </a:tcPr>
                 </a:tc>
-                <a:extLst>
-                  <a:ext uri="{0D108BD9-81ED-4DB2-BD59-A6C34878D82A}">
-                    <a16:rowId xmlns:a16="http://schemas.microsoft.com/office/drawing/2014/main" val="10003"/>
-                  </a:ext>
-                </a:extLst>
               </a:tr>
               <a:tr h="347472">
                 <a:tc>
                   <a:txBody>
-                    <a:bodyPr/>
+                    <a:bodyPr wrap="square"/>
                     <a:lstStyle/>
                     <a:p>
                       <a:r>
@@ -15085,7 +14926,7 @@
                 </a:tc>
                 <a:tc>
                   <a:txBody>
-                    <a:bodyPr/>
+                    <a:bodyPr wrap="square"/>
                     <a:lstStyle/>
                     <a:p>
                       <a:r>
@@ -15107,7 +14948,7 @@
                 </a:tc>
                 <a:tc>
                   <a:txBody>
-                    <a:bodyPr/>
+                    <a:bodyPr wrap="square"/>
                     <a:lstStyle/>
                     <a:p>
                       <a:r>
@@ -15117,7 +14958,7 @@
                           </a:solidFill>
                           <a:latin typeface="Trebuchet MS"/>
                         </a:rPr>
-                        <a:t>10,690</a:t>
+                        <a:t>10,729</a:t>
                       </a:r>
                     </a:p>
                   </a:txBody>
@@ -15129,7 +14970,7 @@
                 </a:tc>
                 <a:tc>
                   <a:txBody>
-                    <a:bodyPr/>
+                    <a:bodyPr wrap="square"/>
                     <a:lstStyle/>
                     <a:p>
                       <a:r>
@@ -15149,16 +14990,11 @@
                     </a:solidFill>
                   </a:tcPr>
                 </a:tc>
-                <a:extLst>
-                  <a:ext uri="{0D108BD9-81ED-4DB2-BD59-A6C34878D82A}">
-                    <a16:rowId xmlns:a16="http://schemas.microsoft.com/office/drawing/2014/main" val="10004"/>
-                  </a:ext>
-                </a:extLst>
               </a:tr>
               <a:tr h="347472">
                 <a:tc>
                   <a:txBody>
-                    <a:bodyPr/>
+                    <a:bodyPr wrap="square"/>
                     <a:lstStyle/>
                     <a:p>
                       <a:r>
@@ -15180,7 +15016,7 @@
                 </a:tc>
                 <a:tc>
                   <a:txBody>
-                    <a:bodyPr/>
+                    <a:bodyPr wrap="square"/>
                     <a:lstStyle/>
                     <a:p>
                       <a:r>
@@ -15190,7 +15026,7 @@
                           </a:solidFill>
                           <a:latin typeface="Trebuchet MS"/>
                         </a:rPr>
-                        <a:t>backend 12,037 · ML 5,883 · ChildApp 11,127 · ParentApp 7,243 · tests 4,718 · docs 6,061 · CI 234</a:t>
+                        <a:t>backend 12,061 · ML 5,941 · ChildApp 11,127 · ParentApp 7,243 · tests 4,742 · docs 6,139 · CI 240</a:t>
                       </a:r>
                     </a:p>
                   </a:txBody>
@@ -15202,7 +15038,7 @@
                 </a:tc>
                 <a:tc>
                   <a:txBody>
-                    <a:bodyPr/>
+                    <a:bodyPr wrap="square"/>
                     <a:lstStyle/>
                     <a:p>
                       <a:r>
@@ -15212,7 +15048,7 @@
                           </a:solidFill>
                           <a:latin typeface="Trebuchet MS"/>
                         </a:rPr>
-                        <a:t>47,303</a:t>
+                        <a:t>47,493</a:t>
                       </a:r>
                     </a:p>
                   </a:txBody>
@@ -15224,7 +15060,7 @@
                 </a:tc>
                 <a:tc>
                   <a:txBody>
-                    <a:bodyPr/>
+                    <a:bodyPr wrap="square"/>
                     <a:lstStyle/>
                     <a:p>
                       <a:r>
@@ -15244,11 +15080,6 @@
                     </a:solidFill>
                   </a:tcPr>
                 </a:tc>
-                <a:extLst>
-                  <a:ext uri="{0D108BD9-81ED-4DB2-BD59-A6C34878D82A}">
-                    <a16:rowId xmlns:a16="http://schemas.microsoft.com/office/drawing/2014/main" val="10005"/>
-                  </a:ext>
-                </a:extLst>
               </a:tr>
             </a:tbl>
           </a:graphicData>
@@ -15298,7 +15129,7 @@
 </file>
 
 <file path=ppt/slides/slide9.xml><?xml version="1.0" encoding="utf-8"?>
-<p:sld xmlns:a="http://schemas.openxmlformats.org/drawingml/2006/main" xmlns:r="http://schemas.openxmlformats.org/officeDocument/2006/relationships" xmlns:p="http://schemas.openxmlformats.org/presentationml/2006/main">
+<p:sld xmlns:a="http://schemas.openxmlformats.org/drawingml/2006/main" xmlns:p="http://schemas.openxmlformats.org/presentationml/2006/main" xmlns:r="http://schemas.openxmlformats.org/officeDocument/2006/relationships">
   <p:cSld>
     <p:spTree>
       <p:nvGrpSpPr>
@@ -15306,14 +15137,7 @@
         <p:cNvGrpSpPr/>
         <p:nvPr/>
       </p:nvGrpSpPr>
-      <p:grpSpPr>
-        <a:xfrm>
-          <a:off x="0" y="0"/>
-          <a:ext cx="0" cy="0"/>
-          <a:chOff x="0" y="0"/>
-          <a:chExt cx="0" cy="0"/>
-        </a:xfrm>
-      </p:grpSpPr>
+      <p:grpSpPr/>
       <p:sp>
         <p:nvSpPr>
           <p:cNvPr id="2" name="TextBox 1"/>
@@ -15358,7 +15182,7 @@
           <p:nvPr/>
         </p:nvPicPr>
         <p:blipFill>
-          <a:blip r:embed="rId3"/>
+          <a:blip r:embed="rId2"/>
           <a:stretch>
             <a:fillRect/>
           </a:stretch>
@@ -15448,7 +15272,6 @@
           <a:lstStyle/>
           <a:p>
             <a:pPr algn="ctr"/>
-            <a:endParaRPr/>
           </a:p>
         </p:txBody>
       </p:sp>
@@ -15492,7 +15315,6 @@
           <a:lstStyle/>
           <a:p>
             <a:pPr algn="ctr"/>
-            <a:endParaRPr/>
           </a:p>
         </p:txBody>
       </p:sp>
@@ -15541,7 +15363,7 @@
         </p:nvGraphicFramePr>
         <p:xfrm>
           <a:off x="548640" y="1325880"/>
-          <a:ext cx="11064240" cy="2505456"/>
+          <a:ext cx="11064240" cy="2432304"/>
         </p:xfrm>
         <a:graphic>
           <a:graphicData uri="http://schemas.openxmlformats.org/drawingml/2006/table">
@@ -15550,32 +15372,14 @@
                 <a:tableStyleId>{5C22544A-7EE6-4342-B048-85BDC9FD1C3A}</a:tableStyleId>
               </a:tblPr>
               <a:tblGrid>
-                <a:gridCol w="1737360">
-                  <a:extLst>
-                    <a:ext uri="{9D8B030D-6E8A-4147-A177-3AD203B41FA5}">
-                      <a16:colId xmlns:a16="http://schemas.microsoft.com/office/drawing/2014/main" val="20000"/>
-                    </a:ext>
-                  </a:extLst>
-                </a:gridCol>
-                <a:gridCol w="5669280">
-                  <a:extLst>
-                    <a:ext uri="{9D8B030D-6E8A-4147-A177-3AD203B41FA5}">
-                      <a16:colId xmlns:a16="http://schemas.microsoft.com/office/drawing/2014/main" val="20001"/>
-                    </a:ext>
-                  </a:extLst>
-                </a:gridCol>
-                <a:gridCol w="3657600">
-                  <a:extLst>
-                    <a:ext uri="{9D8B030D-6E8A-4147-A177-3AD203B41FA5}">
-                      <a16:colId xmlns:a16="http://schemas.microsoft.com/office/drawing/2014/main" val="20002"/>
-                    </a:ext>
-                  </a:extLst>
-                </a:gridCol>
+                <a:gridCol w="1737360"/>
+                <a:gridCol w="5669280"/>
+                <a:gridCol w="3657600"/>
               </a:tblGrid>
               <a:tr h="347472">
                 <a:tc>
                   <a:txBody>
-                    <a:bodyPr/>
+                    <a:bodyPr wrap="square"/>
                     <a:lstStyle/>
                     <a:p>
                       <a:r>
@@ -15597,7 +15401,7 @@
                 </a:tc>
                 <a:tc>
                   <a:txBody>
-                    <a:bodyPr/>
+                    <a:bodyPr wrap="square"/>
                     <a:lstStyle/>
                     <a:p>
                       <a:r>
@@ -15619,7 +15423,7 @@
                 </a:tc>
                 <a:tc>
                   <a:txBody>
-                    <a:bodyPr/>
+                    <a:bodyPr wrap="square"/>
                     <a:lstStyle/>
                     <a:p>
                       <a:r>
@@ -15639,16 +15443,11 @@
                     </a:solidFill>
                   </a:tcPr>
                 </a:tc>
-                <a:extLst>
-                  <a:ext uri="{0D108BD9-81ED-4DB2-BD59-A6C34878D82A}">
-                    <a16:rowId xmlns:a16="http://schemas.microsoft.com/office/drawing/2014/main" val="10000"/>
-                  </a:ext>
-                </a:extLst>
               </a:tr>
               <a:tr h="347472">
                 <a:tc>
                   <a:txBody>
-                    <a:bodyPr/>
+                    <a:bodyPr wrap="square"/>
                     <a:lstStyle/>
                     <a:p>
                       <a:r>
@@ -15670,7 +15469,7 @@
                 </a:tc>
                 <a:tc>
                   <a:txBody>
-                    <a:bodyPr/>
+                    <a:bodyPr wrap="square"/>
                     <a:lstStyle/>
                     <a:p>
                       <a:r>
@@ -15710,7 +15509,7 @@
                 </a:tc>
                 <a:tc>
                   <a:txBody>
-                    <a:bodyPr/>
+                    <a:bodyPr wrap="square"/>
                     <a:lstStyle/>
                     <a:p>
                       <a:r>
@@ -15730,16 +15529,11 @@
                     </a:solidFill>
                   </a:tcPr>
                 </a:tc>
-                <a:extLst>
-                  <a:ext uri="{0D108BD9-81ED-4DB2-BD59-A6C34878D82A}">
-                    <a16:rowId xmlns:a16="http://schemas.microsoft.com/office/drawing/2014/main" val="10001"/>
-                  </a:ext>
-                </a:extLst>
               </a:tr>
               <a:tr h="347472">
                 <a:tc>
                   <a:txBody>
-                    <a:bodyPr/>
+                    <a:bodyPr wrap="square"/>
                     <a:lstStyle/>
                     <a:p>
                       <a:r>
@@ -15761,7 +15555,7 @@
                 </a:tc>
                 <a:tc>
                   <a:txBody>
-                    <a:bodyPr/>
+                    <a:bodyPr wrap="square"/>
                     <a:lstStyle/>
                     <a:p>
                       <a:r>
@@ -15801,7 +15595,7 @@
                 </a:tc>
                 <a:tc>
                   <a:txBody>
-                    <a:bodyPr/>
+                    <a:bodyPr wrap="square"/>
                     <a:lstStyle/>
                     <a:p>
                       <a:r>
@@ -15821,16 +15615,11 @@
                     </a:solidFill>
                   </a:tcPr>
                 </a:tc>
-                <a:extLst>
-                  <a:ext uri="{0D108BD9-81ED-4DB2-BD59-A6C34878D82A}">
-                    <a16:rowId xmlns:a16="http://schemas.microsoft.com/office/drawing/2014/main" val="10002"/>
-                  </a:ext>
-                </a:extLst>
               </a:tr>
               <a:tr h="347472">
                 <a:tc>
                   <a:txBody>
-                    <a:bodyPr/>
+                    <a:bodyPr wrap="square"/>
                     <a:lstStyle/>
                     <a:p>
                       <a:r>
@@ -15852,7 +15641,7 @@
                 </a:tc>
                 <a:tc>
                   <a:txBody>
-                    <a:bodyPr/>
+                    <a:bodyPr wrap="square"/>
                     <a:lstStyle/>
                     <a:p>
                       <a:r>
@@ -15874,7 +15663,7 @@
                 </a:tc>
                 <a:tc>
                   <a:txBody>
-                    <a:bodyPr/>
+                    <a:bodyPr wrap="square"/>
                     <a:lstStyle/>
                     <a:p>
                       <a:r>
@@ -15894,16 +15683,11 @@
                     </a:solidFill>
                   </a:tcPr>
                 </a:tc>
-                <a:extLst>
-                  <a:ext uri="{0D108BD9-81ED-4DB2-BD59-A6C34878D82A}">
-                    <a16:rowId xmlns:a16="http://schemas.microsoft.com/office/drawing/2014/main" val="10003"/>
-                  </a:ext>
-                </a:extLst>
               </a:tr>
               <a:tr h="347472">
                 <a:tc>
                   <a:txBody>
-                    <a:bodyPr/>
+                    <a:bodyPr wrap="square"/>
                     <a:lstStyle/>
                     <a:p>
                       <a:r>
@@ -15925,7 +15709,7 @@
                 </a:tc>
                 <a:tc>
                   <a:txBody>
-                    <a:bodyPr/>
+                    <a:bodyPr wrap="square"/>
                     <a:lstStyle/>
                     <a:p>
                       <a:r>
@@ -15944,7 +15728,7 @@
                           </a:solidFill>
                           <a:latin typeface="Trebuchet MS"/>
                         </a:rPr>
-                        <a:t>0.352</a:t>
+                        <a:t>0.317</a:t>
                       </a:r>
                       <a:r>
                         <a:rPr sz="1000" b="0">
@@ -15953,7 +15737,7 @@
                           </a:solidFill>
                           <a:latin typeface="Trebuchet MS"/>
                         </a:rPr>
-                        <a:t> [0.158, 0.521] vs IGDS9-SF (n = 86); hours baseline 0.155; Δρ = +0.195 [0.026, 0.372]; pattern 0.358 vs volume 0.202</a:t>
+                        <a:t> [0.137, 0.478] vs IGDS9-SF (n = 86); hours baseline 0.147; Δρ = +0.167 [-0.002, 0.341]; pattern 0.330 vs volume 0.128</a:t>
                       </a:r>
                     </a:p>
                   </a:txBody>
@@ -15965,7 +15749,7 @@
                 </a:tc>
                 <a:tc>
                   <a:txBody>
-                    <a:bodyPr/>
+                    <a:bodyPr wrap="square"/>
                     <a:lstStyle/>
                     <a:p>
                       <a:r>
@@ -15975,7 +15759,7 @@
                           </a:solidFill>
                           <a:latin typeface="Trebuchet MS"/>
                         </a:rPr>
-                        <a:t>Pre-specified exclusions; paired bootstrap; genre null p = 0.491 reported; caseness withheld (1 positive)</a:t>
+                        <a:t>Pre-specified exclusions; paired bootstrap; late batch folded in per pre-stated rule; genre null p = 0.598 reported; caseness withheld (1 positive)</a:t>
                       </a:r>
                     </a:p>
                   </a:txBody>
@@ -15985,16 +15769,11 @@
                     </a:solidFill>
                   </a:tcPr>
                 </a:tc>
-                <a:extLst>
-                  <a:ext uri="{0D108BD9-81ED-4DB2-BD59-A6C34878D82A}">
-                    <a16:rowId xmlns:a16="http://schemas.microsoft.com/office/drawing/2014/main" val="10004"/>
-                  </a:ext>
-                </a:extLst>
               </a:tr>
               <a:tr h="347472">
                 <a:tc>
                   <a:txBody>
-                    <a:bodyPr/>
+                    <a:bodyPr wrap="square"/>
                     <a:lstStyle/>
                     <a:p>
                       <a:r>
@@ -16016,7 +15795,7 @@
                 </a:tc>
                 <a:tc>
                   <a:txBody>
-                    <a:bodyPr/>
+                    <a:bodyPr wrap="square"/>
                     <a:lstStyle/>
                     <a:p>
                       <a:r>
@@ -16047,7 +15826,7 @@
                 </a:tc>
                 <a:tc>
                   <a:txBody>
-                    <a:bodyPr/>
+                    <a:bodyPr wrap="square"/>
                     <a:lstStyle/>
                     <a:p>
                       <a:r>
@@ -16067,16 +15846,11 @@
                     </a:solidFill>
                   </a:tcPr>
                 </a:tc>
-                <a:extLst>
-                  <a:ext uri="{0D108BD9-81ED-4DB2-BD59-A6C34878D82A}">
-                    <a16:rowId xmlns:a16="http://schemas.microsoft.com/office/drawing/2014/main" val="10005"/>
-                  </a:ext>
-                </a:extLst>
               </a:tr>
               <a:tr h="347472">
                 <a:tc>
                   <a:txBody>
-                    <a:bodyPr/>
+                    <a:bodyPr wrap="square"/>
                     <a:lstStyle/>
                     <a:p>
                       <a:r>
@@ -16098,7 +15872,7 @@
                 </a:tc>
                 <a:tc>
                   <a:txBody>
-                    <a:bodyPr/>
+                    <a:bodyPr wrap="square"/>
                     <a:lstStyle/>
                     <a:p>
                       <a:r>
@@ -16129,7 +15903,7 @@
                 </a:tc>
                 <a:tc>
                   <a:txBody>
-                    <a:bodyPr/>
+                    <a:bodyPr wrap="square"/>
                     <a:lstStyle/>
                     <a:p>
                       <a:r>
@@ -16149,11 +15923,6 @@
                     </a:solidFill>
                   </a:tcPr>
                 </a:tc>
-                <a:extLst>
-                  <a:ext uri="{0D108BD9-81ED-4DB2-BD59-A6C34878D82A}">
-                    <a16:rowId xmlns:a16="http://schemas.microsoft.com/office/drawing/2014/main" val="10006"/>
-                  </a:ext>
-                </a:extLst>
               </a:tr>
             </a:tbl>
           </a:graphicData>
@@ -16581,44 +16350,44 @@
         <a:sysClr val="window" lastClr="FFFFFF"/>
       </a:lt1>
       <a:dk2>
-        <a:srgbClr val="0E2841"/>
+        <a:srgbClr val="1F497D"/>
       </a:dk2>
       <a:lt2>
-        <a:srgbClr val="E8E8E8"/>
+        <a:srgbClr val="EEECE1"/>
       </a:lt2>
       <a:accent1>
-        <a:srgbClr val="156082"/>
+        <a:srgbClr val="4F81BD"/>
       </a:accent1>
       <a:accent2>
-        <a:srgbClr val="E97132"/>
+        <a:srgbClr val="C0504D"/>
       </a:accent2>
       <a:accent3>
-        <a:srgbClr val="196B24"/>
+        <a:srgbClr val="9BBB59"/>
       </a:accent3>
       <a:accent4>
-        <a:srgbClr val="0F9ED5"/>
+        <a:srgbClr val="8064A2"/>
       </a:accent4>
       <a:accent5>
-        <a:srgbClr val="A02B93"/>
+        <a:srgbClr val="4BACC6"/>
       </a:accent5>
       <a:accent6>
-        <a:srgbClr val="4EA72E"/>
+        <a:srgbClr val="F79646"/>
       </a:accent6>
       <a:hlink>
-        <a:srgbClr val="467886"/>
+        <a:srgbClr val="0000FF"/>
       </a:hlink>
       <a:folHlink>
-        <a:srgbClr val="96607D"/>
+        <a:srgbClr val="800080"/>
       </a:folHlink>
     </a:clrScheme>
     <a:fontScheme name="Office">
       <a:majorFont>
-        <a:latin typeface="Aptos Display" panose="02110004020202020204"/>
+        <a:latin typeface="Calibri"/>
         <a:ea typeface=""/>
         <a:cs typeface=""/>
-        <a:font script="Jpan" typeface="游ゴシック Light"/>
+        <a:font script="Jpan" typeface="ＭＳ Ｐゴシック"/>
         <a:font script="Hang" typeface="맑은 고딕"/>
-        <a:font script="Hans" typeface="等线 Light"/>
+        <a:font script="Hans" typeface="宋体"/>
         <a:font script="Hant" typeface="新細明體"/>
         <a:font script="Arab" typeface="Times New Roman"/>
         <a:font script="Hebr" typeface="Times New Roman"/>
@@ -16646,31 +16415,14 @@
         <a:font script="Viet" typeface="Times New Roman"/>
         <a:font script="Uigh" typeface="Microsoft Uighur"/>
         <a:font script="Geor" typeface="Sylfaen"/>
-        <a:font script="Armn" typeface="Arial"/>
-        <a:font script="Bugi" typeface="Leelawadee UI"/>
-        <a:font script="Bopo" typeface="Microsoft JhengHei"/>
-        <a:font script="Java" typeface="Javanese Text"/>
-        <a:font script="Lisu" typeface="Segoe UI"/>
-        <a:font script="Mymr" typeface="Myanmar Text"/>
-        <a:font script="Nkoo" typeface="Ebrima"/>
-        <a:font script="Olck" typeface="Nirmala UI"/>
-        <a:font script="Osma" typeface="Ebrima"/>
-        <a:font script="Phag" typeface="Phagspa"/>
-        <a:font script="Syrn" typeface="Estrangelo Edessa"/>
-        <a:font script="Syrj" typeface="Estrangelo Edessa"/>
-        <a:font script="Syre" typeface="Estrangelo Edessa"/>
-        <a:font script="Sora" typeface="Nirmala UI"/>
-        <a:font script="Tale" typeface="Microsoft Tai Le"/>
-        <a:font script="Talu" typeface="Microsoft New Tai Lue"/>
-        <a:font script="Tfng" typeface="Ebrima"/>
       </a:majorFont>
       <a:minorFont>
-        <a:latin typeface="Aptos" panose="02110004020202020204"/>
+        <a:latin typeface="Calibri"/>
         <a:ea typeface=""/>
         <a:cs typeface=""/>
-        <a:font script="Jpan" typeface="游ゴシック"/>
+        <a:font script="Jpan" typeface="ＭＳ Ｐゴシック"/>
         <a:font script="Hang" typeface="맑은 고딕"/>
-        <a:font script="Hans" typeface="等线"/>
+        <a:font script="Hans" typeface="宋体"/>
         <a:font script="Hant" typeface="新細明體"/>
         <a:font script="Arab" typeface="Arial"/>
         <a:font script="Hebr" typeface="Arial"/>
@@ -16698,23 +16450,6 @@
         <a:font script="Viet" typeface="Arial"/>
         <a:font script="Uigh" typeface="Microsoft Uighur"/>
         <a:font script="Geor" typeface="Sylfaen"/>
-        <a:font script="Armn" typeface="Arial"/>
-        <a:font script="Bugi" typeface="Leelawadee UI"/>
-        <a:font script="Bopo" typeface="Microsoft JhengHei"/>
-        <a:font script="Java" typeface="Javanese Text"/>
-        <a:font script="Lisu" typeface="Segoe UI"/>
-        <a:font script="Mymr" typeface="Myanmar Text"/>
-        <a:font script="Nkoo" typeface="Ebrima"/>
-        <a:font script="Olck" typeface="Nirmala UI"/>
-        <a:font script="Osma" typeface="Ebrima"/>
-        <a:font script="Phag" typeface="Phagspa"/>
-        <a:font script="Syrn" typeface="Estrangelo Edessa"/>
-        <a:font script="Syrj" typeface="Estrangelo Edessa"/>
-        <a:font script="Syre" typeface="Estrangelo Edessa"/>
-        <a:font script="Sora" typeface="Nirmala UI"/>
-        <a:font script="Tale" typeface="Microsoft Tai Le"/>
-        <a:font script="Talu" typeface="Microsoft New Tai Lue"/>
-        <a:font script="Tfng" typeface="Ebrima"/>
       </a:minorFont>
     </a:fontScheme>
     <a:fmtScheme name="Office">
@@ -16726,136 +16461,180 @@
           <a:gsLst>
             <a:gs pos="0">
               <a:schemeClr val="phClr">
-                <a:lumMod val="110000"/>
-                <a:satMod val="105000"/>
-                <a:tint val="67000"/>
+                <a:tint val="50000"/>
+                <a:satMod val="300000"/>
               </a:schemeClr>
             </a:gs>
-            <a:gs pos="50000">
+            <a:gs pos="35000">
               <a:schemeClr val="phClr">
-                <a:lumMod val="105000"/>
-                <a:satMod val="103000"/>
-                <a:tint val="73000"/>
+                <a:tint val="37000"/>
+                <a:satMod val="300000"/>
               </a:schemeClr>
             </a:gs>
             <a:gs pos="100000">
               <a:schemeClr val="phClr">
-                <a:lumMod val="105000"/>
-                <a:satMod val="109000"/>
-                <a:tint val="81000"/>
+                <a:tint val="15000"/>
+                <a:satMod val="350000"/>
               </a:schemeClr>
             </a:gs>
           </a:gsLst>
-          <a:lin ang="5400000" scaled="0"/>
+          <a:lin ang="16200000" scaled="1"/>
         </a:gradFill>
         <a:gradFill rotWithShape="1">
           <a:gsLst>
             <a:gs pos="0">
               <a:schemeClr val="phClr">
-                <a:satMod val="103000"/>
-                <a:lumMod val="102000"/>
-                <a:tint val="94000"/>
-              </a:schemeClr>
-            </a:gs>
-            <a:gs pos="50000">
-              <a:schemeClr val="phClr">
-                <a:satMod val="110000"/>
-                <a:lumMod val="100000"/>
+                <a:tint val="100000"/>
                 <a:shade val="100000"/>
+                <a:satMod val="130000"/>
               </a:schemeClr>
             </a:gs>
             <a:gs pos="100000">
               <a:schemeClr val="phClr">
-                <a:lumMod val="99000"/>
-                <a:satMod val="120000"/>
-                <a:shade val="78000"/>
+                <a:tint val="50000"/>
+                <a:shade val="100000"/>
+                <a:satMod val="350000"/>
               </a:schemeClr>
             </a:gs>
           </a:gsLst>
-          <a:lin ang="5400000" scaled="0"/>
+          <a:lin ang="16200000" scaled="0"/>
         </a:gradFill>
       </a:fillStyleLst>
       <a:lnStyleLst>
-        <a:ln w="12700" cap="flat" cmpd="sng" algn="ctr">
+        <a:ln w="9525" cap="flat" cmpd="sng" algn="ctr">
           <a:solidFill>
-            <a:schemeClr val="phClr"/>
+            <a:schemeClr val="phClr">
+              <a:shade val="95000"/>
+              <a:satMod val="105000"/>
+            </a:schemeClr>
           </a:solidFill>
           <a:prstDash val="solid"/>
-          <a:miter lim="800000"/>
-        </a:ln>
-        <a:ln w="19050" cap="flat" cmpd="sng" algn="ctr">
-          <a:solidFill>
-            <a:schemeClr val="phClr"/>
-          </a:solidFill>
-          <a:prstDash val="solid"/>
-          <a:miter lim="800000"/>
         </a:ln>
         <a:ln w="25400" cap="flat" cmpd="sng" algn="ctr">
           <a:solidFill>
             <a:schemeClr val="phClr"/>
           </a:solidFill>
           <a:prstDash val="solid"/>
-          <a:miter lim="800000"/>
+        </a:ln>
+        <a:ln w="38100" cap="flat" cmpd="sng" algn="ctr">
+          <a:solidFill>
+            <a:schemeClr val="phClr"/>
+          </a:solidFill>
+          <a:prstDash val="solid"/>
         </a:ln>
       </a:lnStyleLst>
       <a:effectStyleLst>
         <a:effectStyle>
-          <a:effectLst/>
-        </a:effectStyle>
-        <a:effectStyle>
-          <a:effectLst/>
+          <a:effectLst>
+            <a:outerShdw blurRad="40000" dist="20000" dir="5400000" rotWithShape="0">
+              <a:srgbClr val="000000">
+                <a:alpha val="38000"/>
+              </a:srgbClr>
+            </a:outerShdw>
+          </a:effectLst>
         </a:effectStyle>
         <a:effectStyle>
           <a:effectLst>
-            <a:outerShdw blurRad="57150" dist="19050" dir="5400000" algn="ctr" rotWithShape="0">
+            <a:outerShdw blurRad="40000" dist="23000" dir="5400000" rotWithShape="0">
               <a:srgbClr val="000000">
-                <a:alpha val="63000"/>
+                <a:alpha val="35000"/>
               </a:srgbClr>
             </a:outerShdw>
           </a:effectLst>
+        </a:effectStyle>
+        <a:effectStyle>
+          <a:effectLst>
+            <a:outerShdw blurRad="40000" dist="23000" dir="5400000" rotWithShape="0">
+              <a:srgbClr val="000000">
+                <a:alpha val="35000"/>
+              </a:srgbClr>
+            </a:outerShdw>
+          </a:effectLst>
+          <a:scene3d>
+            <a:camera prst="orthographicFront">
+              <a:rot lat="0" lon="0" rev="0"/>
+            </a:camera>
+            <a:lightRig rig="threePt" dir="t">
+              <a:rot lat="0" lon="0" rev="1200000"/>
+            </a:lightRig>
+          </a:scene3d>
+          <a:sp3d>
+            <a:bevelT w="63500" h="25400"/>
+          </a:sp3d>
         </a:effectStyle>
       </a:effectStyleLst>
       <a:bgFillStyleLst>
         <a:solidFill>
           <a:schemeClr val="phClr"/>
         </a:solidFill>
-        <a:solidFill>
-          <a:schemeClr val="phClr">
-            <a:tint val="95000"/>
-            <a:satMod val="170000"/>
-          </a:schemeClr>
-        </a:solidFill>
         <a:gradFill rotWithShape="1">
           <a:gsLst>
             <a:gs pos="0">
               <a:schemeClr val="phClr">
-                <a:tint val="93000"/>
-                <a:satMod val="150000"/>
-                <a:shade val="98000"/>
-                <a:lumMod val="102000"/>
+                <a:tint val="40000"/>
+                <a:satMod val="350000"/>
               </a:schemeClr>
             </a:gs>
-            <a:gs pos="50000">
+            <a:gs pos="40000">
               <a:schemeClr val="phClr">
-                <a:tint val="98000"/>
-                <a:satMod val="130000"/>
-                <a:shade val="90000"/>
-                <a:lumMod val="103000"/>
+                <a:tint val="45000"/>
+                <a:shade val="99000"/>
+                <a:satMod val="350000"/>
               </a:schemeClr>
             </a:gs>
             <a:gs pos="100000">
               <a:schemeClr val="phClr">
-                <a:shade val="63000"/>
-                <a:satMod val="120000"/>
+                <a:shade val="20000"/>
+                <a:satMod val="255000"/>
               </a:schemeClr>
             </a:gs>
           </a:gsLst>
-          <a:lin ang="5400000" scaled="0"/>
+          <a:path path="circle">
+            <a:fillToRect l="50000" t="-80000" r="50000" b="180000"/>
+          </a:path>
+        </a:gradFill>
+        <a:gradFill rotWithShape="1">
+          <a:gsLst>
+            <a:gs pos="0">
+              <a:schemeClr val="phClr">
+                <a:tint val="80000"/>
+                <a:satMod val="300000"/>
+              </a:schemeClr>
+            </a:gs>
+            <a:gs pos="100000">
+              <a:schemeClr val="phClr">
+                <a:shade val="30000"/>
+                <a:satMod val="200000"/>
+              </a:schemeClr>
+            </a:gs>
+          </a:gsLst>
+          <a:path path="circle">
+            <a:fillToRect l="50000" t="50000" r="50000" b="50000"/>
+          </a:path>
         </a:gradFill>
       </a:bgFillStyleLst>
     </a:fmtScheme>
   </a:themeElements>
   <a:objectDefaults>
+    <a:spDef>
+      <a:spPr/>
+      <a:bodyPr/>
+      <a:lstStyle/>
+      <a:style>
+        <a:lnRef idx="1">
+          <a:schemeClr val="accent1"/>
+        </a:lnRef>
+        <a:fillRef idx="3">
+          <a:schemeClr val="accent1"/>
+        </a:fillRef>
+        <a:effectRef idx="2">
+          <a:schemeClr val="accent1"/>
+        </a:effectRef>
+        <a:fontRef idx="minor">
+          <a:schemeClr val="lt1"/>
+        </a:fontRef>
+      </a:style>
+    </a:spDef>
     <a:lnDef>
       <a:spPr/>
       <a:bodyPr/>
@@ -16877,10 +16656,5 @@
     </a:lnDef>
   </a:objectDefaults>
   <a:extraClrSchemeLst/>
-  <a:extLst>
-    <a:ext uri="{05A4C25C-085E-4340-85A3-A5531E510DB2}">
-      <thm15:themeFamily xmlns:thm15="http://schemas.microsoft.com/office/thememl/2012/main" name="Office Theme" id="{2E142A2C-CD16-42D6-873A-C26D2A0506FA}" vid="{1BDDFF52-6CD6-40A5-AB3C-68EB2F1E4D0A}"/>
-    </a:ext>
-  </a:extLst>
 </a:theme>
 </file>
--- a/docs/PES_REVIEW1_DECK.pptx
+++ b/docs/PES_REVIEW1_DECK.pptx
@@ -8050,7 +8050,7 @@
                 </a:solidFill>
                 <a:latin typeface="Trebuchet MS"/>
               </a:rPr>
-              <a:t>External validation survey (IGDS9-SF, n = 87) + analysis</a:t>
+              <a:t>External validation survey (IGDS9-SF, n = 134) + analysis</a:t>
             </a:r>
           </a:p>
         </p:txBody>
@@ -14688,7 +14688,7 @@
                           </a:solidFill>
                           <a:latin typeface="Trebuchet MS"/>
                         </a:rPr>
-                        <a:t>15,040</a:t>
+                        <a:t>15,192</a:t>
                       </a:r>
                     </a:p>
                   </a:txBody>
@@ -14958,7 +14958,7 @@
                           </a:solidFill>
                           <a:latin typeface="Trebuchet MS"/>
                         </a:rPr>
-                        <a:t>10,729</a:t>
+                        <a:t>10,860</a:t>
                       </a:r>
                     </a:p>
                   </a:txBody>
@@ -15026,7 +15026,7 @@
                           </a:solidFill>
                           <a:latin typeface="Trebuchet MS"/>
                         </a:rPr>
-                        <a:t>backend 12,061 · ML 5,941 · ChildApp 11,127 · ParentApp 7,243 · tests 4,742 · docs 6,139 · CI 240</a:t>
+                        <a:t>backend 12,061 · ML 5,962 · ChildApp 11,127 · ParentApp 7,243 · tests 4,742 · docs 6,401 · CI 240</a:t>
                       </a:r>
                     </a:p>
                   </a:txBody>
@@ -15048,7 +15048,7 @@
                           </a:solidFill>
                           <a:latin typeface="Trebuchet MS"/>
                         </a:rPr>
-                        <a:t>47,493</a:t>
+                        <a:t>47,776</a:t>
                       </a:r>
                     </a:p>
                   </a:txBody>
@@ -15737,7 +15737,7 @@
                           </a:solidFill>
                           <a:latin typeface="Trebuchet MS"/>
                         </a:rPr>
-                        <a:t> [0.137, 0.478] vs IGDS9-SF (n = 86); hours baseline 0.147; Δρ = +0.167 [-0.002, 0.341]; pattern 0.330 vs volume 0.128</a:t>
+                        <a:t> [0.137, 0.478] vs IGDS9-SF (n = 103); hours baseline 0.147; Δρ = +0.167 [-0.002, 0.341]; pattern 0.330 vs volume 0.128</a:t>
                       </a:r>
                     </a:p>
                   </a:txBody>

--- a/docs/PES_REVIEW1_DECK.pptx
+++ b/docs/PES_REVIEW1_DECK.pptx
@@ -513,7 +513,7 @@
           <a:lstStyle/>
           <a:p>
             <a:r>
-              <a:t>One sentence: a deployed, multimodal screening system for parents that measures HOW a child plays, not just how long — externally validated against a clinical instrument.</a:t>
+              <a:t>One sentence: a deployed, multimodal screening system for parents that measures HOW a child plays, not just how long — externally validated against a clinical instrument, with its limitations named before you ask.</a:t>
             </a:r>
           </a:p>
         </p:txBody>
@@ -583,7 +583,7 @@
           <a:lstStyle/>
           <a:p>
             <a:r>
-              <a:t>IEEE format; the full 44-entry list is in the report, 22 in the IEEE paper.</a:t>
+              <a:t>IEEE format; the full 48-entry list is in the report, 31 in the IEEE paper.</a:t>
             </a:r>
           </a:p>
         </p:txBody>
@@ -1073,7 +1073,7 @@
           <a:lstStyle/>
           <a:p>
             <a:r>
-              <a:t>Demo per DEMO_RUNBOOK §3 (parent dashboard → alerts + verdict → nudge → chat/emotion → live capture in Roblox → tamper). Backup video ready. Testing: 290 automated tests in CI on both DB dialects; load, fuzz, CVE, MobSF; on-device drill numbers here are MEASURED (Galaxy M52, 2026-08-18). Results table: every number is from the committed JSONs; 7 CI guards fail the build if the paper and data disagree.</a:t>
+              <a:t>Demo per DEMO_RUNBOOK §3 (parent dashboard → alerts + verdict → nudge → chat/emotion → live capture in Roblox → tamper). Backup video ready. Testing: 291 automated tests + 7 research-integrity guards in CI on both DB dialects; load, fuzz, CVE, MobSF; on-device drill numbers here are MEASURED (Galaxy M52, 2026-08-18). Results table: every number is from the committed JSONs; 7 CI guards fail the build if the paper and data disagree.</a:t>
             </a:r>
           </a:p>
         </p:txBody>
@@ -8926,7 +8926,7 @@
                 </a:solidFill>
                 <a:latin typeface="Trebuchet MS"/>
               </a:rPr>
-              <a:t>Report (47 pp) · IEEE paper (5 pp) · defense kit</a:t>
+              <a:t>Report (48 pp) · IEEE paper (6 pp) · defense kit</a:t>
             </a:r>
           </a:p>
         </p:txBody>
@@ -11812,7 +11812,7 @@
                           </a:solidFill>
                           <a:latin typeface="Trebuchet MS"/>
                         </a:rPr>
-                        <a:t>Both apps + Flask backend built and deployed; 3-model ensemble with calibration + SHAP; 11 real open datasets adopted by measured trial; ablations with CIs; family pilot; 266 tests in CI</a:t>
+                        <a:t>Both apps + Flask backend built and deployed; 3-model ensemble with calibration + SHAP; 11 real open datasets adopted by measured trial; ablations with CIs; family pilot; 266 tests in CI at Phase-2 close (291 now)</a:t>
                       </a:r>
                     </a:p>
                   </a:txBody>
@@ -11834,7 +11834,7 @@
                           </a:solidFill>
                           <a:latin typeface="Trebuchet MS"/>
                         </a:rPr>
-                        <a:t>Review feedback: "labels are synthetic" → grounded on 2 real surveys and stated on every slide; "voice number looks inflated" → speaker-independent split (–9 pts, honest); "no Hindi" → dual-script HASOC path + Devanagari keyboard</a:t>
+                        <a:t>Review feedback: "labels are synthetic" → grounded on 2 real surveys and stated on every slide; "voice number looks inflated" → speaker-independent split (–8.3 pts, honest); "no Hindi" → dual-script HASOC path + Devanagari keyboard</a:t>
                       </a:r>
                     </a:p>
                   </a:txBody>
@@ -11889,7 +11889,7 @@
                           </a:solidFill>
                           <a:latin typeface="Trebuchet MS"/>
                         </a:rPr>
-                        <a:t>External validation survey; accent-fairness audit; on-device resource drill; v2.4.0 released; 47-page report + 5-page IEEE paper</a:t>
+                        <a:t>External validation survey; accent-fairness audit; on-device resource drill; v2.4.0 released; 48-page report + 6-page IEEE paper</a:t>
                       </a:r>
                     </a:p>
                   </a:txBody>
@@ -12465,7 +12465,7 @@
                           </a:solidFill>
                           <a:latin typeface="Trebuchet MS"/>
                         </a:rPr>
-                        <a:t>; base rate grounds thresholds; chat channel justified — and replicated locally (ρ = 0.315)</a:t>
+                        <a:t>; base rate grounds thresholds; chat channel justified — and replicated locally (ρ = 0.323)</a:t>
                       </a:r>
                     </a:p>
                   </a:txBody>
@@ -14688,7 +14688,7 @@
                           </a:solidFill>
                           <a:latin typeface="Trebuchet MS"/>
                         </a:rPr>
-                        <a:t>15,192</a:t>
+                        <a:t>15,193</a:t>
                       </a:r>
                     </a:p>
                   </a:txBody>
@@ -14868,7 +14868,7 @@
                           </a:solidFill>
                           <a:latin typeface="Trebuchet MS"/>
                         </a:rPr>
-                        <a:t>9,664</a:t>
+                        <a:t>9,681</a:t>
                       </a:r>
                     </a:p>
                   </a:txBody>
@@ -14958,7 +14958,7 @@
                           </a:solidFill>
                           <a:latin typeface="Trebuchet MS"/>
                         </a:rPr>
-                        <a:t>10,860</a:t>
+                        <a:t>10,861</a:t>
                       </a:r>
                     </a:p>
                   </a:txBody>
@@ -15026,7 +15026,7 @@
                           </a:solidFill>
                           <a:latin typeface="Trebuchet MS"/>
                         </a:rPr>
-                        <a:t>backend 12,061 · ML 5,962 · ChildApp 11,127 · ParentApp 7,243 · tests 4,742 · docs 6,401 · CI 240</a:t>
+                        <a:t>backend 12,061 · ML 5,962 · ChildApp 11,127 · ParentApp 7,243 · tests 4,742 · docs 6,403 · CI 257</a:t>
                       </a:r>
                     </a:p>
                   </a:txBody>
@@ -15048,7 +15048,7 @@
                           </a:solidFill>
                           <a:latin typeface="Trebuchet MS"/>
                         </a:rPr>
-                        <a:t>47,776</a:t>
+                        <a:t>47,795</a:t>
                       </a:r>
                     </a:p>
                   </a:txBody>
@@ -15651,7 +15651,7 @@
                           </a:solidFill>
                           <a:latin typeface="Trebuchet MS"/>
                         </a:rPr>
-                        <a:t>0.574 acc speaker-independent (chance 0.25); random split 0.657 → 9-pt leakage exposed</a:t>
+                        <a:t>0.574 acc speaker-independent (chance 0.25); random split 0.657 → 8.3-pt leakage exposed</a:t>
                       </a:r>
                     </a:p>
                   </a:txBody>
@@ -15737,7 +15737,25 @@
                           </a:solidFill>
                           <a:latin typeface="Trebuchet MS"/>
                         </a:rPr>
-                        <a:t> [0.137, 0.478] vs IGDS9-SF (n = 103); hours baseline 0.147; Δρ = +0.167 [-0.002, 0.341]; pattern 0.330 vs volume 0.128</a:t>
+                        <a:t> [0.137, 0.478] vs IGDS9-SF (n = 103); hours baseline 0.147; Δρ = +0.167 [-0.002, 0.341]; pattern 0.330 vs volume 0.128, formal contrast </a:t>
+                      </a:r>
+                      <a:r>
+                        <a:rPr sz="1000" b="1">
+                          <a:solidFill>
+                            <a:srgbClr val="1A1A1A"/>
+                          </a:solidFill>
+                          <a:latin typeface="Trebuchet MS"/>
+                        </a:rPr>
+                        <a:t>+0.199</a:t>
+                      </a:r>
+                      <a:r>
+                        <a:rPr sz="1000" b="0">
+                          <a:solidFill>
+                            <a:srgbClr val="1A1A1A"/>
+                          </a:solidFill>
+                          <a:latin typeface="Trebuchet MS"/>
+                        </a:rPr>
+                        <a:t> [0.019, 0.380]</a:t>
                       </a:r>
                     </a:p>
                   </a:txBody>
@@ -15913,7 +15931,7 @@
                           </a:solidFill>
                           <a:latin typeface="Trebuchet MS"/>
                         </a:rPr>
-                        <a:t>180 backend (SQLite + Postgres) + 110 JVM + 7 guards; 288-req load 0 errors; fuzz; CVE; MobSF</a:t>
+                        <a:t>181 backend (SQLite + Postgres) + 110 JVM + 7 guards, all in CI; 288-req load 0 errors; fuzz; CVE; MobSF</a:t>
                       </a:r>
                     </a:p>
                   </a:txBody>

--- a/docs/PES_REVIEW1_DECK.pptx
+++ b/docs/PES_REVIEW1_DECK.pptx
@@ -11080,7 +11080,7 @@
                 </a:solidFill>
                 <a:latin typeface="Trebuchet MS"/>
               </a:rPr>
-              <a:t> Internet Gaming Disorder is WHO-recognised (ICD-11); parents notice </a:t>
+              <a:t> Internet Gaming Disorder (IGD) is a WHO-recognised condition (listed in ICD-11, the WHO disease catalogue); parents notice it </a:t>
             </a:r>
             <a:r>
               <a:rPr sz="1600" b="1">
@@ -11098,7 +11098,7 @@
                 </a:solidFill>
                 <a:latin typeface="Trebuchet MS"/>
               </a:rPr>
-              <a:t>, from the outside. Existing tools are self-report questionnaires (need the child's honest cooperation) or screen-time counters (measure </a:t>
+              <a:t>, from the outside. Existing tools are self-report questionnaires (the child rates themself, so needs honest cooperation) or screen-time counters (measure </a:t>
             </a:r>
             <a:r>
               <a:rPr sz="1600" b="1">
@@ -11116,7 +11116,7 @@
                 </a:solidFill>
                 <a:latin typeface="Trebuchet MS"/>
               </a:rPr>
-              <a:t>, a weak correlate of severity)</a:t>
+              <a:t>, which only weakly tracks severity)</a:t>
             </a:r>
           </a:p>
           <a:p>
@@ -11150,7 +11150,7 @@
                 </a:solidFill>
                 <a:latin typeface="Trebuchet MS"/>
               </a:rPr>
-              <a:t> A deployed three-tier system — Child app (passive capture) → cloud ML backend → Parent app — that fuses </a:t>
+              <a:t> A deployed three-tier system — Child app (background capture) → cloud ML backend → Parent app — that combines </a:t>
             </a:r>
             <a:r>
               <a:rPr sz="1600" b="1">
@@ -11186,7 +11186,7 @@
                 </a:solidFill>
                 <a:latin typeface="Trebuchet MS"/>
               </a:rPr>
-              <a:t> (English + romanised Hindi + Devanagari) and </a:t>
+              <a:t> (English, plus Hindi in romanised Latin letters or Devanagari script) and </a:t>
             </a:r>
             <a:r>
               <a:rPr sz="1600" b="1">
@@ -11204,7 +11204,7 @@
                 </a:solidFill>
                 <a:latin typeface="Trebuchet MS"/>
               </a:rPr>
-              <a:t> into one calibrated, explainable *screening* signal with a plain-language "why"</a:t>
+              <a:t> into one calibrated (a 0.8 score means about 80% of such cases really are high-risk), explainable screening signal with a plain-language "why"</a:t>
             </a:r>
           </a:p>
           <a:p>
@@ -11238,7 +11238,7 @@
                 </a:solidFill>
                 <a:latin typeface="Trebuchet MS"/>
               </a:rPr>
-              <a:t> Minors on Android; guardian-consented; screening and awareness — </a:t>
+              <a:t> Minors on Android; guardian-consented; screening and awareness — a signal that flags concern for a parent, </a:t>
             </a:r>
             <a:r>
               <a:rPr sz="1600" b="1">
@@ -11290,7 +11290,7 @@
                 </a:solidFill>
                 <a:latin typeface="Trebuchet MS"/>
               </a:rPr>
-              <a:t> External construct validation against the IGDS9-SF clinical instrument (134 raw / 104 usable), an accent-fairness audit (6,656 clips), on-device resource measurement, and the honest limitations that come with all three</a:t>
+              <a:t> External (construct) validation: does our score track IGDS9-SF, the standard 9-question clinical screening questionnaire for gaming disorder? (134 raw / 104 usable); an accent-fairness audit of speech-to-text (6,656 clips); on-device resource measurement; and the honest limitations of each</a:t>
             </a:r>
           </a:p>
         </p:txBody>
@@ -11663,7 +11663,7 @@
                           </a:solidFill>
                           <a:latin typeface="Trebuchet MS"/>
                         </a:rPr>
-                        <a:t>AI-driven prediction app: playtime + chat sentiment + speech emotion; Casual / At-risk / Addicted; parental dashboard; Flutter/React Native + Firebase; Android + iOS; camera for facial expression; screen-recording OCR; Kaggle datasets</a:t>
+                        <a:t>AI-driven prediction app: playtime + chat sentiment + speech emotion; Casual / At-risk / Addicted; parental dashboard; Flutter/React Native + Firebase; Android + iOS; camera for facial expression; screen-recording OCR (reading on-screen text from screenshots); Kaggle datasets</a:t>
                       </a:r>
                     </a:p>
                   </a:txBody>
@@ -11757,7 +11757,7 @@
                           </a:solidFill>
                           <a:latin typeface="Trebuchet MS"/>
                         </a:rPr>
-                        <a:t> (synthetic provenance)</a:t>
+                        <a:t> (synthetic provenance: the data was generated, not collected from real players)</a:t>
                       </a:r>
                     </a:p>
                   </a:txBody>
@@ -11812,7 +11812,7 @@
                           </a:solidFill>
                           <a:latin typeface="Trebuchet MS"/>
                         </a:rPr>
-                        <a:t>Both apps + Flask backend built and deployed; 3-model ensemble with calibration + SHAP; 11 real open datasets adopted by measured trial; ablations with CIs; family pilot; 266 tests in CI at Phase-2 close (291 now)</a:t>
+                        <a:t>Apps + Flask backend deployed; 3-model ensemble + calibration + SHAP (per-prediction ‘why’ for parents); 11 real open datasets adopted by measured trial; ablations (retrain minus one part) + confidence intervals; family pilot; 266 CI tests at Phase-2 close (291 now)</a:t>
                       </a:r>
                     </a:p>
                   </a:txBody>
@@ -11834,7 +11834,7 @@
                           </a:solidFill>
                           <a:latin typeface="Trebuchet MS"/>
                         </a:rPr>
-                        <a:t>Review feedback: "labels are synthetic" → grounded on 2 real surveys and stated on every slide; "voice number looks inflated" → speaker-independent split (–8.3 pts, honest); "no Hindi" → dual-script HASOC path + Devanagari keyboard</a:t>
+                        <a:t>Review feedback: "labels are synthetic" → grounded on 2 real surveys, stated on every slide; "voice number looks inflated" → speaker-independent split (no speaker in both train + test; –8.3 pts, honest); "no Hindi" → HASOC (Hindi hate-speech corpus) in both scripts + Devanagari keyboard</a:t>
                       </a:r>
                     </a:p>
                   </a:txBody>
@@ -11889,7 +11889,7 @@
                           </a:solidFill>
                           <a:latin typeface="Trebuchet MS"/>
                         </a:rPr>
-                        <a:t>External validation survey; accent-fairness audit; on-device resource drill; v2.4.0 released; 48-page report + 6-page IEEE paper</a:t>
+                        <a:t>External validation survey; accent-fairness audit; on-device resource drill (CPU / memory measured on a phone); v2.4.0 released; 48-page report + 6-page IEEE paper</a:t>
                       </a:r>
                     </a:p>
                   </a:txBody>
@@ -11920,7 +11920,7 @@
                           </a:solidFill>
                           <a:latin typeface="Trebuchet MS"/>
                         </a:rPr>
-                        <a:t>ρ = 0.317 vs IGDS9-SF, leads screen time in 97% of resamples</a:t>
+                        <a:t>ρ = 0.317 (rank correlation) vs IGDS9-SF, leads screen time in 97% of resamples</a:t>
                       </a:r>
                       <a:r>
                         <a:rPr sz="1100" b="0">
@@ -11929,7 +11929,7 @@
                           </a:solidFill>
                           <a:latin typeface="Trebuchet MS"/>
                         </a:rPr>
-                        <a:t>; "is it fair across accents?" → </a:t>
+                        <a:t>; "fair across accents?" → </a:t>
                       </a:r>
                       <a:r>
                         <a:rPr sz="1100" b="1">
@@ -11947,7 +11947,7 @@
                           </a:solidFill>
                           <a:latin typeface="Trebuchet MS"/>
                         </a:rPr>
-                        <a:t>, WER gap named; "battery?" → </a:t>
+                        <a:t>, WER (word error rate) gap named; "battery?" → </a:t>
                       </a:r>
                       <a:r>
                         <a:rPr sz="1100" b="1">
@@ -11965,7 +11965,7 @@
                           </a:solidFill>
                           <a:latin typeface="Trebuchet MS"/>
                         </a:rPr>
-                        <a:t>, dual-STT fails our gate → default OFF</a:t>
+                        <a:t>, dual-STT (English/Hindi speech-to-text) fails gate → default OFF</a:t>
                       </a:r>
                     </a:p>
                   </a:txBody>
@@ -12339,7 +12339,7 @@
                           </a:solidFill>
                           <a:latin typeface="Trebuchet MS"/>
                         </a:rPr>
-                        <a:t>Parent–child relationship and behavioural patterns predict IGD better than raw exposure; interventions work through the family</a:t>
+                        <a:t>Parent–child relationship and behavioural patterns (how a child plays) predict IGD better than raw hours of play; interventions work through the family</a:t>
                       </a:r>
                     </a:p>
                   </a:txBody>
@@ -12361,7 +12361,7 @@
                           </a:solidFill>
                           <a:latin typeface="Trebuchet MS"/>
                         </a:rPr>
-                        <a:t>Guardian-in-the-loop screening; </a:t>
+                        <a:t>Guardian stays in the loop; </a:t>
                       </a:r>
                       <a:r>
                         <a:rPr sz="1100" b="1">
@@ -12379,7 +12379,7 @@
                           </a:solidFill>
                           <a:latin typeface="Trebuchet MS"/>
                         </a:rPr>
-                        <a:t> features (late-night, re-logins, binges) as first-class inputs; nudges, not blocks</a:t>
+                        <a:t> features (late-night play, re-logins, binges) are core model inputs; nudges, not blocks</a:t>
                       </a:r>
                     </a:p>
                   </a:txBody>
@@ -12403,7 +12403,7 @@
                           </a:solidFill>
                           <a:latin typeface="Trebuchet MS"/>
                         </a:rPr>
-                        <a:t>Pontes &amp; Griffiths 2015 (IGDS9-SF); LatAm IGDS9-SF dataset, n = 11,191</a:t>
+                        <a:t>Pontes &amp; Griffiths 2015 (IGDS9-SF); Latin-American IGDS9-SF dataset, n = 11,191</a:t>
                       </a:r>
                     </a:p>
                   </a:txBody>
@@ -12425,7 +12425,7 @@
                           </a:solidFill>
                           <a:latin typeface="Trebuchet MS"/>
                         </a:rPr>
-                        <a:t>A validated 9-item DSM-5 instrument exists; disordered-range base rate ≈ 6.4 %; toxic-chat involvement tracks severity (r = +0.156)</a:t>
+                        <a:t>Validated 9-item DSM-5 (psychiatric manual) instrument; base rate (how common the disordered range is) ≈ 6.4 %; toxic-chat involvement tracks severity (r = +0.156)</a:t>
                       </a:r>
                     </a:p>
                   </a:txBody>
@@ -12447,7 +12447,7 @@
                           </a:solidFill>
                           <a:latin typeface="Trebuchet MS"/>
                         </a:rPr>
-                        <a:t>IGDS9-SF as the </a:t>
+                        <a:t>IGDS9-SF is our </a:t>
                       </a:r>
                       <a:r>
                         <a:rPr sz="1100" b="1">
@@ -12465,7 +12465,7 @@
                           </a:solidFill>
                           <a:latin typeface="Trebuchet MS"/>
                         </a:rPr>
-                        <a:t>; base rate grounds thresholds; chat channel justified — and replicated locally (ρ = 0.323)</a:t>
+                        <a:t> (the real label we test against); base rate sets thresholds; chat channel justified — and reproduced in our survey (ρ = 0.323)</a:t>
                       </a:r>
                     </a:p>
                   </a:txBody>
@@ -12511,7 +12511,7 @@
                           </a:solidFill>
                           <a:latin typeface="Trebuchet MS"/>
                         </a:rPr>
-                        <a:t>Prior ML work models survey data or single signals; none deploys passive multi-signal capture to a guardian</a:t>
+                        <a:t>Prior ML work models questionnaire data or a single signal; none deploys passive capture of several signals reporting to a guardian</a:t>
                       </a:r>
                     </a:p>
                   </a:txBody>
@@ -12533,7 +12533,7 @@
                           </a:solidFill>
                           <a:latin typeface="Trebuchet MS"/>
                         </a:rPr>
-                        <a:t>The gap we fill: deployed, multimodal, explainable, calibrated</a:t>
+                        <a:t>The gap we fill: deployed, behaviour + chat + voice, explainable, calibrated</a:t>
                       </a:r>
                     </a:p>
                   </a:txBody>
@@ -12557,7 +12557,7 @@
                           </a:solidFill>
                           <a:latin typeface="Trebuchet MS"/>
                         </a:rPr>
-                        <a:t>Weld et al. 2021 (CONDA); Mandl et al. 2019 (HASOC); Javed et al. 2023 (Svarah)</a:t>
+                        <a:t>Weld et al. 2021 (CONDA, real in-game chat); Mandl et al. 2019 (HASOC); Javed et al. 2023 (Svarah)</a:t>
                       </a:r>
                     </a:p>
                   </a:txBody>
@@ -12579,7 +12579,7 @@
                           </a:solidFill>
                           <a:latin typeface="Trebuchet MS"/>
                         </a:rPr>
-                        <a:t>In-game chat and code-mixed Hindi are their own registers; Indian-accent ASR error is uneven</a:t>
+                        <a:t>Game chat and mixed Hindi–English are their own writing styles; speech-to-text (ASR) error varies by Indian accent</a:t>
                       </a:r>
                     </a:p>
                   </a:txBody>
@@ -12601,7 +12601,7 @@
                           </a:solidFill>
                           <a:latin typeface="Trebuchet MS"/>
                         </a:rPr>
-                        <a:t>Domain corpora over model capacity (toxic-BERT loses to our LogReg by 12 pts); dual-script Hindi; </a:t>
+                        <a:t>Domain data &gt; model size: pretrained toxic-BERT is 12 pts below our LogReg; dual-script Hindi; </a:t>
                       </a:r>
                       <a:r>
                         <a:rPr sz="1100" b="1">
@@ -12611,6 +12611,15 @@
                           <a:latin typeface="Trebuchet MS"/>
                         </a:rPr>
                         <a:t>accent-fairness audit</a:t>
+                      </a:r>
+                      <a:r>
+                        <a:rPr sz="1100" b="0">
+                          <a:solidFill>
+                            <a:srgbClr val="1A1A1A"/>
+                          </a:solidFill>
+                          <a:latin typeface="Trebuchet MS"/>
+                        </a:rPr>
+                        <a:t> (Svarah, Indian-English speech)</a:t>
                       </a:r>
                     </a:p>
                   </a:txBody>
@@ -12656,7 +12665,7 @@
                           </a:solidFill>
                           <a:latin typeface="Trebuchet MS"/>
                         </a:rPr>
-                        <a:t>Every pattern feature out-ranks every volume feature against IGDS9-SF</a:t>
+                        <a:t>Each pattern feature (how) beats each volume feature (how long) at tracking IGDS9-SF</a:t>
                       </a:r>
                     </a:p>
                   </a:txBody>
@@ -12678,7 +12687,7 @@
                           </a:solidFill>
                           <a:latin typeface="Trebuchet MS"/>
                         </a:rPr>
-                        <a:t>The design premise — measure *how*, not *how long* — confirmed against real labels</a:t>
+                        <a:t>Our design premise — measure how, not how long — confirmed against real questionnaire labels</a:t>
                       </a:r>
                     </a:p>
                   </a:txBody>
@@ -13037,10 +13046,10 @@
                 <a:latin typeface="Trebuchet MS"/>
               </a:rPr>
               <a:t>Game detection (allowlist → OS category → parent override)
-10 objective session features
-IME + accessibility chat capture (Devanagari layout)
-VAD-gated mic → on-device Vosk STT
-Anti-tamper · versioned consent (fails closed)</a:t>
+10 objective (measured) session features
+Chat: custom keyboard (IME) + accessibility service
+Mic on only during speech (VAD, voice-activity detection) → on-device Vosk speech-to-text
+Anti-tamper · versioned consent (no consent → no capture)</a:t>
             </a:r>
           </a:p>
         </p:txBody>
@@ -13156,10 +13165,10 @@
                 <a:latin typeface="Trebuchet MS"/>
               </a:rPr>
               <a:t>RF behaviour (10 feats) · LogReg+TF-IDF chat · HistGB voice
-Availability-weighted fusion 40/30/30
-Isotonic calibration · SHAP "why"
+Availability-weighted fusion 40/30/30 (re-weights over channels present)
+Isotonic calibration (monotone correction of scores) · SHAP "why"
 Alerts to all guardians · drift monitor (PSI/KS)
-Export scope = delete scope · HTTPS · tokens</a:t>
+Export and delete cover the same data · HTTPS · tokens</a:t>
             </a:r>
           </a:p>
         </p:txBody>
@@ -13274,10 +13283,10 @@
                 </a:solidFill>
                 <a:latin typeface="Trebuchet MS"/>
               </a:rPr>
-              <a:t>Risk band + plain-language why · 14-day trend
+              <a:t>Risk band + plain-language why · 14-day risk trend
 Real-time alerts (risk / toxicity / tamper)
-Accurate / false-alarm verdicts → Beta threshold tuner
-Nudges to child · weekly PDF
+Accurate / false-alarm verdicts → Beta threshold tuner (Bayesian; adjusts alert cut-off)
+Nudges to child · weekly PDF report
 "What we can and can't see" transparency</a:t>
             </a:r>
           </a:p>
@@ -13421,7 +13430,7 @@
                 </a:solidFill>
                 <a:latin typeface="Trebuchet MS"/>
               </a:rPr>
-              <a:t> session telemetry / chat lines / 10-s voice segments → per-channel scores → fused, calibrated risk + SHAP → dashboard + push alerts; raw audio </a:t>
+              <a:t> session telemetry (session start / end times) / chat lines / 10-s voice segments → one score per channel → fused, calibrated risk + SHAP "why" → dashboard + push alerts; raw audio </a:t>
             </a:r>
             <a:r>
               <a:rPr sz="1300" b="1">
@@ -13473,7 +13482,7 @@
                 </a:solidFill>
                 <a:latin typeface="Trebuchet MS"/>
               </a:rPr>
-              <a:t> game detection · session lifecycle · chat capture (IME/accessibility) · voice capture + STT · behaviour model · chat model · voice model · fusion &amp; alerting · feedback tuner · drift monitor · consent &amp; anti-tamper · parent dashboard</a:t>
+              <a:t> game detection · session lifecycle · chat capture (IME/accessibility) · voice capture + speech-to-text (STT) · behaviour model · chat model · voice model · fusion &amp; alerting · feedback tuner · drift monitor (flags data unlike the training data) · consent &amp; anti-tamper (flags disabled capture) · parent dashboard</a:t>
             </a:r>
           </a:p>
         </p:txBody>
@@ -13837,7 +13846,7 @@
                           </a:solidFill>
                           <a:latin typeface="Trebuchet MS"/>
                         </a:rPr>
-                        <a:t>11 open corpora screened by provenance/fit/openness, adopted by measured trial; 2 rejected with evidence; own IGDS9-SF survey (134 raw / 104 usable) as primary data</a:t>
+                        <a:t>11 open datasets screened for provenance (origin), task fit and open licence, adopted after a measured trial; 2 rejected with evidence; own IGDS9-SF survey (134 raw / 104 usable) as primary data</a:t>
                       </a:r>
                     </a:p>
                   </a:txBody>
@@ -13905,7 +13914,7 @@
                           </a:solidFill>
                           <a:latin typeface="Trebuchet MS"/>
                         </a:rPr>
-                        <a:t>ChildApp session telemetry, IME/accessibility chat, VAD-gated audio; Google-Form export for the survey</a:t>
+                        <a:t>ChildApp session telemetry, keyboard (IME) / accessibility chat capture, VAD-gated audio; the survey’s Google-Form CSV export</a:t>
                       </a:r>
                     </a:p>
                   </a:txBody>
@@ -13973,7 +13982,7 @@
                           </a:solidFill>
                           <a:latin typeface="Trebuchet MS"/>
                         </a:rPr>
-                        <a:t>Train/serve-aligned feature derivation (one shared function); TF-IDF word ∪ char_wb; 36 acoustic features; romanisation of Hindi; keyword-column matching for the survey</a:t>
+                        <a:t>One feature function shared by training and serving; TF-IDF over word + character n-grams; 36 acoustic features (pitch, energy, timbre); Hindi romanised to Latin spelling; survey columns matched by keyword</a:t>
                       </a:r>
                     </a:p>
                   </a:txBody>
@@ -14041,7 +14050,7 @@
                           </a:solidFill>
                           <a:latin typeface="Trebuchet MS"/>
                         </a:rPr>
-                        <a:t>RF (10 feats) · LogReg+isotonic chat with noisy-OR lexicon · HistGB voice; availability-weighted fusion</a:t>
+                        <a:t>RF (10 feats) · LogReg+isotonic chat + noisy-OR word list (can only raise scores) · HistGB voice; availability-weighted fusion</a:t>
                       </a:r>
                     </a:p>
                   </a:txBody>
@@ -14109,7 +14118,7 @@
                           </a:solidFill>
                           <a:latin typeface="Trebuchet MS"/>
                         </a:rPr>
-                        <a:t>SHAP per prediction; PR curve, confusion matrices, reliability diagrams, ablation tables, survey figure; parent-facing plain-language why</a:t>
+                        <a:t>SHAP per prediction → plain-language why for parents; precision–recall curve, confusion matrices, reliability diagrams (calibration plots), ablation tables, survey figure</a:t>
                       </a:r>
                     </a:p>
                   </a:txBody>
@@ -14177,7 +14186,7 @@
                           </a:solidFill>
                           <a:latin typeface="Trebuchet MS"/>
                         </a:rPr>
-                        <a:t>SQLite (dev) / Neon Postgres (prod), one code path; export = delete scope; audio never retained</a:t>
+                        <a:t>One code path: SQLite locally, Postgres (Neon) in prod; export = exactly what delete removes; audio never retained</a:t>
                       </a:r>
                     </a:p>
                   </a:txBody>
@@ -14279,7 +14288,7 @@
                 </a:solidFill>
                 <a:latin typeface="Trebuchet MS"/>
               </a:rPr>
-              <a:t>Android SDK 34 / Kotlin · Retrofit · Vosk 0.3.47 (Apache-2.0; en-in + hi small models) · Firebase Cloud Messaging · Python 3.11 · Flask · scikit-learn (RandomForest, LogisticRegression, HistGradientBoosting, isotonic) · SHAP · librosa / webrtcvad · psycopg2 · Postgres 16 (Neon) · Render · GitHub Actions · pytest · schemathesis · bandit · pip-audit · MobSF · LaTeX/IEEEtran · Datasets: Jigsaw, CONDA, Davidson, HASOC 2019 (gated), Hindi Wikipedia, RAVDESS, CREMA-D, EMO-DB, URDU, Gamers &amp; Anxiety (OSF), IGDS9-SF LatAm (OSF), StudentLife, Svarah (CC BY 4.0, gated).</a:t>
+              <a:t>Android SDK 34 / Kotlin · Retrofit · Vosk 0.3.47 offline speech-to-text (Apache-2.0; en-in + hi small models) · Firebase Cloud Messaging (push alerts) · Python 3.11 · Flask · scikit-learn (RandomForest, LogisticRegression, HistGradientBoosting, isotonic) · SHAP · librosa / webrtcvad (audio / VAD) · psycopg2 · Postgres 16 (Neon) · Render (cloud host) · GitHub Actions · pytest · schemathesis (API fuzzing) · bandit · pip-audit · MobSF (three security scanners) · LaTeX/IEEEtran · Datasets: Jigsaw (Wikipedia comment toxicity), CONDA, Davidson (Twitter hate speech), HASOC 2019 (gated: on request), Hindi Wikipedia, RAVDESS, CREMA-D, EMO-DB, URDU (emotional-speech corpora), Gamers &amp; Anxiety (OSF), IGDS9-SF LatAm (OSF), StudentLife, Svarah (CC BY 4.0, gated).</a:t>
             </a:r>
           </a:p>
         </p:txBody>
@@ -14666,7 +14675,7 @@
                           </a:solidFill>
                           <a:latin typeface="Trebuchet MS"/>
                         </a:rPr>
-                        <a:t>ML pipeline (3 models, calibration, fusion, ablations); backend serving + API; external validation survey + analysis; fairness audit; paper &amp; IEEE draft</a:t>
+                        <a:t>ML pipeline (3 models, calibration, fusion, ablations); backend model serving + REST API; external validation survey (IGDS9-SF) + analysis; accent-fairness audit; report &amp; IEEE paper draft</a:t>
                       </a:r>
                     </a:p>
                   </a:txBody>
@@ -14688,7 +14697,7 @@
                           </a:solidFill>
                           <a:latin typeface="Trebuchet MS"/>
                         </a:rPr>
-                        <a:t>15,193</a:t>
+                        <a:t>15,197</a:t>
                       </a:r>
                     </a:p>
                   </a:txBody>
@@ -14756,7 +14765,7 @@
                           </a:solidFill>
                           <a:latin typeface="Trebuchet MS"/>
                         </a:rPr>
-                        <a:t>ChildApp: game detection, session lifecycle, IME + Devanagari keyboard, accessibility capture, voice recorder + on-device STT, anti-tamper, consent; on-device drill</a:t>
+                        <a:t>ChildApp: game detection, session tracking, custom keyboard (IME) + Devanagari layout, accessibility chat capture, voice recorder + on-device speech-to-text, anti-tamper, consent; on-device resource drill</a:t>
                       </a:r>
                     </a:p>
                   </a:txBody>
@@ -14846,7 +14855,7 @@
                           </a:solidFill>
                           <a:latin typeface="Trebuchet MS"/>
                         </a:rPr>
-                        <a:t>Backend infra: Postgres/SQLite dual dialect, auth, rate limiting, alerts/FCM, drift monitor, export/delete; CI, tests, deployment (Render/Neon)</a:t>
+                        <a:t>Backend infra: one DB code path for SQLite (local) and Postgres (production), auth, rate limiting, alerts/FCM, drift monitor, export/delete; CI, tests, deployment (Render/Neon)</a:t>
                       </a:r>
                     </a:p>
                   </a:txBody>
@@ -14936,7 +14945,7 @@
                           </a:solidFill>
                           <a:latin typeface="Trebuchet MS"/>
                         </a:rPr>
-                        <a:t>ParentApp: dashboard, alerts + feedback verdicts, chat/emotion analysis screens, transparency screen, weekly PDF; privacy/ethics docs, survey instrument &amp; recruitment, review decks</a:t>
+                        <a:t>ParentApp: dashboard, alerts + accurate/false-alarm verdicts, chat/emotion analysis screens, “what we can and can’t see” transparency screen, weekly PDF; privacy/ethics docs, survey questionnaire &amp; recruitment, review decks</a:t>
                       </a:r>
                     </a:p>
                   </a:txBody>
@@ -14958,7 +14967,7 @@
                           </a:solidFill>
                           <a:latin typeface="Trebuchet MS"/>
                         </a:rPr>
-                        <a:t>10,861</a:t>
+                        <a:t>10,865</a:t>
                       </a:r>
                     </a:p>
                   </a:txBody>
@@ -15026,7 +15035,7 @@
                           </a:solidFill>
                           <a:latin typeface="Trebuchet MS"/>
                         </a:rPr>
-                        <a:t>backend 12,061 · ML 5,962 · ChildApp 11,127 · ParentApp 7,243 · tests 4,742 · docs 6,403 · CI 257</a:t>
+                        <a:t>backend 12,061 · ML 5,962 · ChildApp 11,127 · ParentApp 7,243 · tests 4,742 · docs 6,411 · CI 257</a:t>
                       </a:r>
                     </a:p>
                   </a:txBody>
@@ -15048,7 +15057,7 @@
                           </a:solidFill>
                           <a:latin typeface="Trebuchet MS"/>
                         </a:rPr>
-                        <a:t>47,795</a:t>
+                        <a:t>47,803</a:t>
                       </a:r>
                     </a:p>
                   </a:txBody>
@@ -15115,7 +15124,7 @@
                 </a:solidFill>
                 <a:latin typeface="Trebuchet MS"/>
               </a:rPr>
-              <a:t>LOC counted with `git ls-files | wc -l` on 2026-08-18 (source, tests, docs, CI), attributed by agreed module ownership; hours are team estimates. Timeline of every task/module: see the Gantt chart.</a:t>
+              <a:t>Lines of code (LOC) counted with `git ls-files | wc -l` on 2026-08-18 (source, tests, docs, CI) and attributed by the module ownership the team agreed; hours are team estimates. Timeline of every task/module: see the Gantt chart.</a:t>
             </a:r>
           </a:p>
         </p:txBody>
@@ -15497,7 +15506,7 @@
                           </a:solidFill>
                           <a:latin typeface="Trebuchet MS"/>
                         </a:rPr>
-                        <a:t>, grounded on 2 real surveys); ECE 0.062 → 0.015</a:t>
+                        <a:t>, grounded on 2 real surveys); ECE (calibration error) 0.062 → 0.015</a:t>
                       </a:r>
                     </a:p>
                   </a:txBody>
@@ -15519,7 +15528,7 @@
                           </a:solidFill>
                           <a:latin typeface="Trebuchet MS"/>
                         </a:rPr>
-                        <a:t>Ablations w/ CIs; hours-only baseline 0.702; pattern-5 0.902 vs volume-5 0.871</a:t>
+                        <a:t>Ablations w/ conf. intervals; hours-only baseline 0.702; 5 pattern feats 0.902 vs 5 volume 0.871</a:t>
                       </a:r>
                     </a:p>
                   </a:txBody>
@@ -15565,7 +15574,7 @@
                           </a:solidFill>
                           <a:latin typeface="Trebuchet MS"/>
                         </a:rPr>
-                        <a:t>In-domain PR-AUC </a:t>
+                        <a:t>In-domain (real in-game chat) PR-AUC </a:t>
                       </a:r>
                       <a:r>
                         <a:rPr sz="1000" b="1">
@@ -15583,7 +15592,7 @@
                           </a:solidFill>
                           <a:latin typeface="Trebuchet MS"/>
                         </a:rPr>
-                        <a:t> [0.807, 0.841]; P 0.956 / R 0.428 @ 0.95; Hindi P 0.968 (Devanagari) / 0.958 (romanised)</a:t>
+                        <a:t> [0.807, 0.841]; P 0.956 / R 0.428 at threshold 0.95; Hindi P 0.968 (Devanagari) / 0.958 (romanised)</a:t>
                       </a:r>
                     </a:p>
                   </a:txBody>
@@ -15605,7 +15614,7 @@
                           </a:solidFill>
                           <a:latin typeface="Trebuchet MS"/>
                         </a:rPr>
-                        <a:t>Ablation: − CONDA → 0.511; toxic-BERT baseline 0.709; HASOC held-out 933 rows</a:t>
+                        <a:t>Ablation: no CONDA → 0.511; toxic-BERT baseline 0.709; HASOC 933 rows held out (never trained on)</a:t>
                       </a:r>
                     </a:p>
                   </a:txBody>
@@ -15651,7 +15660,7 @@
                           </a:solidFill>
                           <a:latin typeface="Trebuchet MS"/>
                         </a:rPr>
-                        <a:t>0.574 acc speaker-independent (chance 0.25); random split 0.657 → 8.3-pt leakage exposed</a:t>
+                        <a:t>0.574 acc speaker-independent (chance 0.25); random split 0.657 → 8.3-pt leakage exposed (memorised voices)</a:t>
                       </a:r>
                     </a:p>
                   </a:txBody>
@@ -15673,7 +15682,7 @@
                           </a:solidFill>
                           <a:latin typeface="Trebuchet MS"/>
                         </a:rPr>
-                        <a:t>Speaker-independent CV; w2v2 headroom 0.776; augmentation ablation neutral</a:t>
+                        <a:t>Speaker-independent CV; wav2vec2 headroom 0.776 (larger model); augmentation: no effect</a:t>
                       </a:r>
                     </a:p>
                   </a:txBody>
@@ -15719,7 +15728,7 @@
                           </a:solidFill>
                           <a:latin typeface="Trebuchet MS"/>
                         </a:rPr>
-                        <a:t>ρ = </a:t>
+                        <a:t>Spearman ρ (rank correlation) = </a:t>
                       </a:r>
                       <a:r>
                         <a:rPr sz="1000" b="1">
@@ -15737,7 +15746,7 @@
                           </a:solidFill>
                           <a:latin typeface="Trebuchet MS"/>
                         </a:rPr>
-                        <a:t> [0.137, 0.478] vs IGDS9-SF (n = 103); hours baseline 0.147; Δρ = +0.167 [-0.002, 0.341]; pattern 0.330 vs volume 0.128, formal contrast </a:t>
+                        <a:t> [0.137, 0.478] vs IGDS9-SF (n = 103); screen-time hours alone 0.147; gain over hours Δρ = +0.167 [-0.002, 0.341]; pattern features 0.330 vs volume features 0.128, formal contrast (pattern − volume) </a:t>
                       </a:r>
                       <a:r>
                         <a:rPr sz="1000" b="1">
@@ -15777,7 +15786,7 @@
                           </a:solidFill>
                           <a:latin typeface="Trebuchet MS"/>
                         </a:rPr>
-                        <a:t>Pre-specified exclusions; paired bootstrap; late batch folded in per pre-stated rule; genre null p = 0.598 reported; caseness withheld (1 positive)</a:t>
+                        <a:t>Exclusions fixed in advance; paired bootstrap (same people); late batch folded in per pre-stated rule; genre null (no effect) p = 0.598 reported; cut-off sens./spec. withheld (1 positive)</a:t>
                       </a:r>
                     </a:p>
                   </a:txBody>
@@ -15832,7 +15841,7 @@
                           </a:solidFill>
                           <a:latin typeface="Trebuchet MS"/>
                         </a:rPr>
-                        <a:t> in 9.61 h / 6,656 clips, every accent group; WER 34.6 % Dravidian → 60.8 % Tibeto-Burman</a:t>
+                        <a:t> in 9.61 h / 6,656 clips, every accent group; WER (word error rate) by first-language family: 34.6 % Dravidian → 60.8 % Tibeto-Burman</a:t>
                       </a:r>
                     </a:p>
                   </a:txBody>
@@ -15854,7 +15863,7 @@
                           </a:solidFill>
                           <a:latin typeface="Trebuchet MS"/>
                         </a:rPr>
-                        <a:t>Svarah (117 speakers); deployed recogniser + served scorer</a:t>
+                        <a:t>Svarah (Indian-English, 117 speakers); deployed speech-to-text + scorer</a:t>
                       </a:r>
                     </a:p>
                   </a:txBody>
@@ -15900,7 +15909,7 @@
                           </a:solidFill>
                           <a:latin typeface="Trebuchet MS"/>
                         </a:rPr>
-                        <a:t>Live on Render + Neon; v2.4.0 signed APKs validated on device; 23-day pilot; default path 14 % CPU / 288 MB; dual-STT 51–72 % / 419 MB → </a:t>
+                        <a:t>Live on Render + Neon; v2.4.0 signed APKs validated on device; 23-day pilot; default path 14 % CPU / 288 MB; dual-STT (two speech-to-text engines) 51–72 % / 419 MB → </a:t>
                       </a:r>
                       <a:r>
                         <a:rPr sz="1000" b="1">
@@ -15909,7 +15918,7 @@
                           </a:solidFill>
                           <a:latin typeface="Trebuchet MS"/>
                         </a:rPr>
-                        <a:t>fails gate → default OFF</a:t>
+                        <a:t>fails resource gate → default OFF</a:t>
                       </a:r>
                     </a:p>
                   </a:txBody>
@@ -15931,7 +15940,7 @@
                           </a:solidFill>
                           <a:latin typeface="Trebuchet MS"/>
                         </a:rPr>
-                        <a:t>181 backend (SQLite + Postgres) + 110 JVM + 7 guards, all in CI; 288-req load 0 errors; fuzz; CVE; MobSF</a:t>
+                        <a:t>181 backend (SQLite + Postgres) + 110 JVM tests + 7 paper-vs-data guards, all in CI; 288-req load 0 errors; fuzz; CVE scan; MobSF</a:t>
                       </a:r>
                     </a:p>
                   </a:txBody>
@@ -16024,7 +16033,7 @@
                 </a:solidFill>
                 <a:latin typeface="Trebuchet MS"/>
               </a:rPr>
-              <a:t>Live demo (DEMO_RUNBOOK §3): parent dashboard → alert verdict → nudge → chat/emotion analysis → live capture in Roblox → tamper alert. Backup video ready. Two results AGAINST the system are reported: genre multiplier unsupported; 4 of 5 proxy names discredited → renamed in the product.</a:t>
+              <a:t>Live demo: parent dashboard → alert verdict → nudge → chat/emotion analysis → live capture in Roblox → tamper alert. Backup video ready. Two results AGAINST the system are reported: genre multiplier (per-genre risk weight) unsupported; 4 of 5 proxy names discredited → renamed in the product. PR-AUC = area under the precision–recall curve; right metric when toxic messages are rare.</a:t>
             </a:r>
           </a:p>
         </p:txBody>

--- a/docs/PES_REVIEW1_DECK.pptx
+++ b/docs/PES_REVIEW1_DECK.pptx
@@ -653,7 +653,7 @@
           <a:lstStyle/>
           <a:p>
             <a:r>
-              <a:t>Set the context in 60 s: IGD is WHO-recognised; parents notice late; questionnaires need cooperation, screen-time counters measure volume. We measure HOW a child plays. Say "screening, not diagnosis" out loud. Scope: minors, Android, guardian in the loop — and why (a guardian with duty of care is what makes screening the unwilling possible and proportionate).</a:t>
+              <a:t>NUMBERS BEHIND THIS SLIDE: Numbers moved off this slide. IGDS9-SF is a 9-question instrument (the 9 in its name is the item count). Calibration example: a calibrated score of 0.8 means about 80 percent of children who get that score really are high-risk. The architecture has three tiers: Child app (background capture), cloud ML backend, Parent app. Hindi chat is handled in both romanised Latin spelling and Devanagari script. The accent-fairness audit used the Svarah Indian-English speech dataset. Set the context in 60 s: IGD is WHO-recognised; parents notice late; questionnaires need cooperation, screen-time counters measure volume. We measure HOW a child plays. Say "screening, not diagnosis" out loud. Scope: minors, Android, guardian in the loop — and why (a guardian with duty of care is what makes screening the unwilling possible and proportionate).</a:t>
             </a:r>
           </a:p>
         </p:txBody>
@@ -723,7 +723,7 @@
           <a:lstStyle/>
           <a:p>
             <a:r>
-              <a:t>Phase 1 (approval) proposed the vision; Phase 2 built and evaluated the system; each review's feedback narrowed the design toward what could be validated. Be explicit that several Phase-1 ideas were dropped ON PURPOSE with a reason — camera/facial expression (privacy, no consent story), screen-recording OCR (privacy regression), iOS (no accessibility API for capture), Kaggle behaviour datasets (audited: synthetic provenance). Reviewers reward "we changed our mind because we measured" far more than "we did everything we said."</a:t>
+              <a:t>NUMBERS BEHIND THIS SLIDE: Numbers and details moved off slide 4. Phase-1 proposal detail dropped from the cell: three risk bands Casual, At-risk, Addicted; proposed stack Flutter or React Native with Firebase; Android plus iOS; the camera was dropped because there was no proportionate consent story for it. Phase-2 detail dropped: the ensemble is 3 models (behaviour, chat, voice) fused into one score; the per-prediction why comes from SHAP; the 11 datasets are open-licence and were adopted after a measured trial; ablations (retrain with one part removed) were run with confidence intervals; the 266 tests were CI tests. Phase-2 feedback detail dropped: the synthetic-label caveat is stated on every slide; the Hindi fix also added a Devanagari keyboard in the ChildApp. Voice leakage context: the leak came from random splits letting the same speakers into both training and test; the speaker-independent number is 8.3 points lower and is the one we report. Phase-3 detail dropped: v2.4.0 is the release version shipped with the on-device drill. Survey context for the 0.317: rho is a Spearman rank correlation; 95 percent interval 0.137 to 0.478 on n = 103 respondents with a computable score (104 usable of 134 raw); screen-time hours alone 0.147; the gain over hours is +0.167 with interval -0.002 to +0.341, which touches zero, so it is suggestive, not proven; the 97 percent of resamples is the share of paired bootstrap resamples (same people resampled) in which the score beat hours; the 97 percent is the same suggestive result stated another way. Accent audit context for the gap named on the slide: word error rate 34.6 percent for Dravidian first-language speakers versus 60.8 percent for Tibeto-Burman, over 9.61 hours and 6,656 clips. Battery context: the gate is the measured on-device CPU and memory budget; the dual speech-to-text path (English and Hindi engines running together) failed it, so it ships default OFF. Phase 1 (approval) proposed the vision; Phase 2 built and evaluated the system; each review's feedback narrowed the design toward what could be validated. Be explicit that several Phase-1 ideas were dropped ON PURPOSE with a reason — camera/facial expression (privacy, no consent story), screen-recording OCR (privacy regression), iOS (no accessibility API for capture), Kaggle behaviour datasets (audited: synthetic provenance). Reviewers reward "we changed our mind because we measured" far more than "we did everything we said."</a:t>
             </a:r>
           </a:p>
         </p:txBody>
@@ -793,7 +793,7 @@
           <a:lstStyle/>
           <a:p>
             <a:r>
-              <a:t>Three inferences that shaped the design, each tied to a paper the panel can check: (1) family factors and behavioural patterns, not hours, predict IGD → pattern features and a guardian in the loop; (2) IGDS9-SF is the validated short instrument → our external anchor; (3) domain data beats architecture for toxicity → CONDA in-game chat, HASOC Hindi. And one inference from our own survey that the literature did not give us: pattern &gt; volume, measured.</a:t>
+              <a:t>NUMBERS BEHIND THIS SLIDE: Numbers and terms moved off slide 5 into notes. 9-item: IGDS9-SF has 9 questions; it is the short form of the Internet Gaming Disorder Scale. DSM-5: the questionnaire follows the nine criteria for Internet Gaming Disorder in the fifth edition of the American Psychiatric Association manual. Context for the headline numbers still visible on the slide: n = 11,191 is the size of the open Latin-American IGDS9-SF dataset (OSF); 6.4 percent is the share of that dataset scoring in the disordered range, which is the base rate we use to set alert thresholds; r = +0.156 is the correlation between toxic-chat involvement and IGDS9-SF severity in that dataset, a small but present relationship; the chat-premise rho placeholder currently reads 0.323 (95 percent interval 0.144 to 0.491, n = 103) and is the same toxic-chat versus severity rank correlation measured in our own survey; 12 pts is the PR-AUC (area under the precision-recall curve) gap on real in-game chat between the pretrained toxic-BERT baseline at 0.709 and our deployed logistic regression at 0.825, whose 95 percent interval is 0.807 to 0.841; removing the CONDA in-game chat corpus from training drops our own model to 0.511, which is the evidence behind domain data beats model size. n = 104 usable is the number of survey respondents left from 134 raw after exclusions fixed in advance; the headline correlations are computed on the 103 of them with complete data, which is why slide 9 shows n = 103. Support for the last row, taken from slide 9 and not shown here: pattern composite rho 0.330 versus volume composite rho 0.128 against IGDS9-SF, with a formal pattern minus volume contrast interval of +0.019 to +0.380 that excludes zero; screen-time hours alone rho 0.147; the paired gain of the full score over hours alone is +0.167 with interval -0.002 to +0.341, which touches zero, so describe that gain as suggestive only. Overall construct validity rho is 0.317 with interval 0.137 to 0.478, moderate and clearly present, never call it strong. Simulated labels on the last row means the behaviour model was trained on labels from a simulation grounded on two real surveys, not on clinician labels; the survey row is the first test against real questionnaire answers. Three inferences that shaped the design, each tied to a paper the panel can check: (1) family factors and behavioural patterns, not hours, predict IGD → pattern features and a guardian in the loop; (2) IGDS9-SF is the validated short instrument → our external anchor; (3) domain data beats architecture for toxicity → CONDA in-game chat, HASOC Hindi. And one inference from our own survey that the literature did not give us: pattern &gt; volume, measured.</a:t>
             </a:r>
           </a:p>
         </p:txBody>
@@ -863,7 +863,7 @@
           <a:lstStyle/>
           <a:p>
             <a:r>
-              <a:t>Walk left to right. ChildApp: foreground-package game detection, 10 objective session features, custom keyboard + accessibility for chat, VAD-gated mic with on-device Vosk STT, anti-tamper, consent-gated. Backend: Flask on Render, Neon Postgres, three models + availability-weighted fusion (40/30/30 over channels PRESENT), isotonic calibration, SHAP why, alerts to every guardian, drift monitor, export = delete scope. ParentApp: dashboard, 14-day trend, alerts with verdicts → threshold tuner, nudges, capture-coverage transparency screen.</a:t>
+              <a:t>NUMBERS BEHIND THIS SLIDE: Slide 6 (Architecture) addendum: numbers and technical labels moved off the slide. "10 feats" in the backend box was the random-forest input count; it is the same 10 session features named in the ChildApp box (they include late-night play ratio, rapid re-login ratio and binge sessions per week), so only the duplicate was removed. Fusion weights 40/30/30 are behaviour/chat/voice and are availability-weighted, meaning re-normalised over whichever channels are present for that child. Technical labels replaced by plain words on the slide: game detection order is allowlist, then OS app category, then parent override; chat capture uses a custom IME keyboard plus an Android accessibility service; the microphone gate is VAD (voice-activity detection) and speech-to-text is on-device Vosk; the three models are a random forest for behaviour, logistic regression over TF-IDF for chat, and HistGradientBoosting (boosted trees) for voice; score correction is isotonic calibration (a monotone correction so predicted risk matches observed risk) and the plain-language why comes from SHAP; the drift monitor uses PSI and KS statistics; transport is HTTPS with token authentication; export covers exactly the data that delete removes; the alert cut-off tuner is a Beta (Bayesian) threshold tuner in the backend, driven by the parent accurate/false-alarm verdicts; anti-tamper flags disabled capture; consent is versioned and no consent means no capture; the transparency screen is the "what we can and cannot see" screen. Module placement stated on the slide: game detection, session tracking, chat capture, voice capture with speech-to-text, consent and anti-tamper run on the child phone; the three models, fusion and alerting, the feedback tuner and the drift monitor run in the Flask backend; the dashboard is the ParentApp. No other numbers appeared on this slide. Walk left to right. ChildApp: foreground-package game detection, 10 objective session features, custom keyboard + accessibility for chat, VAD-gated mic with on-device Vosk STT, anti-tamper, consent-gated. Backend: Flask on Render, Neon Postgres, three models + availability-weighted fusion (40/30/30 over channels PRESENT), isotonic calibration, SHAP why, alerts to every guardian, drift monitor, export = delete scope. ParentApp: dashboard, 14-day trend, alerts with verdicts → threshold tuner, nudges, capture-coverage transparency screen.</a:t>
             </a:r>
           </a:p>
         </p:txBody>
@@ -933,7 +933,7 @@
           <a:lstStyle/>
           <a:p>
             <a:r>
-              <a:t>Template asks for the data pipeline stages explicitly, and the SDK/API/tool list with licences. Everything is open-source; no licensed component. Mention that the two gated datasets (HASOC, Svarah) are NOT redistributed.</a:t>
+              <a:t>NUMBERS BEHIND THIS SLIDE: Numbers moved off this slide. 10 - the number of objective session features the behaviour random forest takes as input (was "RF (10 feats)" in the Modelling row). Details trimmed from the visible cells for fit, kept here: the chat model output (logistic regression) is first calibrated with isotonic regression, then combined with the keyword word list by noisy-OR (which can only raise the score), and only then fused with the other channels; survey CSV columns are matched to model features by keyword; audio capture on the child app is gated by VAD (voice-activity detection) so the microphone is only on during speech; chat capture uses the custom IME keyboard plus the Android accessibility service; TF-IDF runs over word and character n-grams; the calibration plots are reliability diagrams (predicted probability versus observed frequency). Numbers in the SDK and tools line (Android SDK 34, Vosk 0.3.47, Python 3.11, Postgres 16, HASOC 2019, CC BY 4.0) stay visible because that whole line is a headline item. Vosk model codes en-in and hi are the small Indian-English and Hindi models. Template asks for the data pipeline stages explicitly, and the SDK/API/tool list with licences. Everything is open-source; no licensed component. Mention that the two gated datasets (HASOC, Svarah) are NOT redistributed.</a:t>
             </a:r>
           </a:p>
         </p:txBody>
@@ -1073,7 +1073,7 @@
           <a:lstStyle/>
           <a:p>
             <a:r>
-              <a:t>Demo per DEMO_RUNBOOK §3 (parent dashboard → alerts + verdict → nudge → chat/emotion → live capture in Roblox → tamper). Backup video ready. Testing: 291 automated tests + 7 research-integrity guards in CI on both DB dialects; load, fuzz, CVE, MobSF; on-device drill numbers here are MEASURED (Galaxy M52, 2026-08-18). Results table: every number is from the committed JSONs; 7 CI guards fail the build if the paper and data disagree.</a:t>
+              <a:t>NUMBERS BEHIND THIS SLIDE: Numbers moved off slide 9 into notes. Behaviour model: macro-F1 0.918; 5-fold cross-validation accuracy 0.921 plus or minus 0.002; expected calibration error (ECE) 0.062 before isotonic calibration and 0.015 after (this is what the "much closer to a true probability" sentence refers to); hours-only (screen-time-only) baseline accuracy 0.702; five pattern features alone 0.902 versus five volume features alone 0.871. Chat model: in-domain PR-AUC 95 percent bootstrap interval 0.807 to 0.841; PR-AUC with the CONDA in-game chat corpus removed from training 0.511; HASOC Hindi held-out test set 933 rows, never used in training. Voice model: chance level for the four emotion classes is 0.25; wav2vec2 large-model headroom accuracy 0.776. External validation survey: Spearman rho 95 percent interval 0.137 to 0.478; n 103 respondents in the construct-validity analysis; screen-time hours alone rho 0.147; paired gain of our score over hours delta rho +0.167 with interval -0.002 to +0.341, which touches zero, so the gain over hours is suggestive rather than established; pattern composite rho 0.330; volume composite rho 0.128; formal pattern-minus-volume contrast +0.199 with interval +0.019 to +0.380, which excludes zero (this is the "gap distinguishable from zero" on the slide); genre multiplier test p 0.598, no effect; exactly one respondent scored in the IGDS9-SF disordered range, which is why sensitivity and specificity at a cut-off were not computed. Fairness audit: 9.61 hours of speech; 6,656 clips; the Svarah corpus has 117 speakers; WER 34.6 percent for Dravidian first-language speakers and 60.8 percent for Tibeto-Burman. System: current release is v2.4.0; the consented family pilot ran 23 days; dual-STT (two speech-to-text engines together, English plus Hindi) measured 51 to 72 percent CPU and 419 MB, versus 14 percent CPU and 288 MB for the default path, so it fails the resource gate and ships default OFF. Negative results: the per-genre risk multiplier is unsupported (p 0.598); 4 of 5 proxy feature names (features named after clinical symptoms) were discredited by the survey and renamed in the product, which is the "most features named after clinical symptoms" on the slide. Demo per DEMO_RUNBOOK §3 (parent dashboard → alerts + verdict → nudge → chat/emotion → live capture in Roblox → tamper). Backup video ready. Testing: 291 automated tests + 7 research-integrity guards in CI on both DB dialects; load, fuzz, CVE, MobSF; on-device drill numbers here are MEASURED (Galaxy M52, 2026-08-18). Results table: every number is from the committed JSONs; 7 CI guards fail the build if the paper and data disagree.</a:t>
             </a:r>
           </a:p>
         </p:txBody>
@@ -11080,7 +11080,7 @@
                 </a:solidFill>
                 <a:latin typeface="Trebuchet MS"/>
               </a:rPr>
-              <a:t> Internet Gaming Disorder (IGD) is a WHO-recognised condition (listed in ICD-11, the WHO disease catalogue); parents notice it </a:t>
+              <a:t> Internet Gaming Disorder (IGD) is a condition recognised by the WHO (listed in ICD-11, its disease catalogue), but parents notice it </a:t>
             </a:r>
             <a:r>
               <a:rPr sz="1600" b="1">
@@ -11098,7 +11098,7 @@
                 </a:solidFill>
                 <a:latin typeface="Trebuchet MS"/>
               </a:rPr>
-              <a:t>, from the outside. Existing tools are self-report questionnaires (the child rates themself, so needs honest cooperation) or screen-time counters (measure </a:t>
+              <a:t>, from the outside. Today’s tools are questionnaires the child must answer honestly, or screen-time counters that measure </a:t>
             </a:r>
             <a:r>
               <a:rPr sz="1600" b="1">
@@ -11116,7 +11116,7 @@
                 </a:solidFill>
                 <a:latin typeface="Trebuchet MS"/>
               </a:rPr>
-              <a:t>, which only weakly tracks severity)</a:t>
+              <a:t> a child plays, which only weakly tracks how serious the problem is.</a:t>
             </a:r>
           </a:p>
           <a:p>
@@ -11150,7 +11150,7 @@
                 </a:solidFill>
                 <a:latin typeface="Trebuchet MS"/>
               </a:rPr>
-              <a:t> A deployed three-tier system — Child app (background capture) → cloud ML backend → Parent app — that combines </a:t>
+              <a:t> A deployed system: a background-capturing Child app, a cloud machine-learning backend, and a Parent app. It combines </a:t>
             </a:r>
             <a:r>
               <a:rPr sz="1600" b="1">
@@ -11168,7 +11168,7 @@
                 </a:solidFill>
                 <a:latin typeface="Trebuchet MS"/>
               </a:rPr>
-              <a:t>, </a:t>
+              <a:t> (how the child plays), </a:t>
             </a:r>
             <a:r>
               <a:rPr sz="1600" b="1">
@@ -11186,7 +11186,7 @@
                 </a:solidFill>
                 <a:latin typeface="Trebuchet MS"/>
               </a:rPr>
-              <a:t> (English, plus Hindi in romanised Latin letters or Devanagari script) and </a:t>
+              <a:t> (English and Hindi, in Latin or Devanagari script) and </a:t>
             </a:r>
             <a:r>
               <a:rPr sz="1600" b="1">
@@ -11204,7 +11204,7 @@
                 </a:solidFill>
                 <a:latin typeface="Trebuchet MS"/>
               </a:rPr>
-              <a:t> into one calibrated (a 0.8 score means about 80% of such cases really are high-risk), explainable screening signal with a plain-language "why"</a:t>
+              <a:t> into one calibrated risk score (it can be read as a real probability), with a plain-language "why".</a:t>
             </a:r>
           </a:p>
           <a:p>
@@ -11238,7 +11238,7 @@
                 </a:solidFill>
                 <a:latin typeface="Trebuchet MS"/>
               </a:rPr>
-              <a:t> Minors on Android; guardian-consented; screening and awareness — a signal that flags concern for a parent, </a:t>
+              <a:t> Minors on Android, with a guardian’s consent. The output is a screening and awareness signal that flags concern for a parent. It is </a:t>
             </a:r>
             <a:r>
               <a:rPr sz="1600" b="1">
@@ -11256,7 +11256,7 @@
                 </a:solidFill>
                 <a:latin typeface="Trebuchet MS"/>
               </a:rPr>
-              <a:t> a clinical diagnosis. Cloud backend live in production; signed APKs on GitHub; consented family pilot ran 23 days</a:t>
+              <a:t> a clinical diagnosis. The cloud backend is live in production, signed APKs are on GitHub, and a consented family pilot ran for 23 days.</a:t>
             </a:r>
           </a:p>
           <a:p>
@@ -11290,7 +11290,7 @@
                 </a:solidFill>
                 <a:latin typeface="Trebuchet MS"/>
               </a:rPr>
-              <a:t> External (construct) validation: does our score track IGDS9-SF, the standard 9-question clinical screening questionnaire for gaming disorder? (134 raw / 104 usable); an accent-fairness audit of speech-to-text (6,656 clips); on-device resource measurement; and the honest limitations of each</a:t>
+              <a:t> An external check (construct validation): does our score track IGDS9-SF, the standard clinical screening questionnaire for gaming disorder? (134 raw / 104 usable survey responses). An accent-fairness audit of our speech-to-text on Indian English (6,656 clips). Measured CPU and memory cost on a phone. And the honest limitations of each.</a:t>
             </a:r>
           </a:p>
         </p:txBody>
@@ -11663,7 +11663,7 @@
                           </a:solidFill>
                           <a:latin typeface="Trebuchet MS"/>
                         </a:rPr>
-                        <a:t>AI-driven prediction app: playtime + chat sentiment + speech emotion; Casual / At-risk / Addicted; parental dashboard; Flutter/React Native + Firebase; Android + iOS; camera for facial expression; screen-recording OCR (reading on-screen text from screenshots); Kaggle datasets</a:t>
+                        <a:t>We proposed an app that predicts gaming-addiction risk from playtime, chat mood and voice emotion, with a parent dashboard. The original plan also included iOS, a camera for facial expressions, reading text off screenshots, and ready-made Kaggle datasets.</a:t>
                       </a:r>
                     </a:p>
                   </a:txBody>
@@ -11679,22 +11679,13 @@
                     <a:lstStyle/>
                     <a:p>
                       <a:r>
-                        <a:rPr sz="1100" b="0">
-                          <a:solidFill>
-                            <a:srgbClr val="1A1A1A"/>
-                          </a:solidFill>
-                          <a:latin typeface="Trebuchet MS"/>
-                        </a:rPr>
-                        <a:t>Narrowed to what is </a:t>
-                      </a:r>
-                      <a:r>
                         <a:rPr sz="1100" b="1">
                           <a:solidFill>
                             <a:srgbClr val="1A1A1A"/>
                           </a:solidFill>
                           <a:latin typeface="Trebuchet MS"/>
                         </a:rPr>
-                        <a:t>capturable, consentable and validatable</a:t>
+                        <a:t>Cut to what we could capture, consent to, and validate.</a:t>
                       </a:r>
                       <a:r>
                         <a:rPr sz="1100" b="0">
@@ -11703,61 +11694,7 @@
                           </a:solidFill>
                           <a:latin typeface="Trebuchet MS"/>
                         </a:rPr>
-                        <a:t>: native Android only (iOS has no capture API); camera </a:t>
-                      </a:r>
-                      <a:r>
-                        <a:rPr sz="1100" b="1">
-                          <a:solidFill>
-                            <a:srgbClr val="1A1A1A"/>
-                          </a:solidFill>
-                          <a:latin typeface="Trebuchet MS"/>
-                        </a:rPr>
-                        <a:t>dropped</a:t>
-                      </a:r>
-                      <a:r>
-                        <a:rPr sz="1100" b="0">
-                          <a:solidFill>
-                            <a:srgbClr val="1A1A1A"/>
-                          </a:solidFill>
-                          <a:latin typeface="Trebuchet MS"/>
-                        </a:rPr>
-                        <a:t> (no proportionate consent story); OCR </a:t>
-                      </a:r>
-                      <a:r>
-                        <a:rPr sz="1100" b="1">
-                          <a:solidFill>
-                            <a:srgbClr val="1A1A1A"/>
-                          </a:solidFill>
-                          <a:latin typeface="Trebuchet MS"/>
-                        </a:rPr>
-                        <a:t>dropped</a:t>
-                      </a:r>
-                      <a:r>
-                        <a:rPr sz="1100" b="0">
-                          <a:solidFill>
-                            <a:srgbClr val="1A1A1A"/>
-                          </a:solidFill>
-                          <a:latin typeface="Trebuchet MS"/>
-                        </a:rPr>
-                        <a:t> (privacy regression); Kaggle behaviour sets </a:t>
-                      </a:r>
-                      <a:r>
-                        <a:rPr sz="1100" b="1">
-                          <a:solidFill>
-                            <a:srgbClr val="1A1A1A"/>
-                          </a:solidFill>
-                          <a:latin typeface="Trebuchet MS"/>
-                        </a:rPr>
-                        <a:t>audited and rejected</a:t>
-                      </a:r>
-                      <a:r>
-                        <a:rPr sz="1100" b="0">
-                          <a:solidFill>
-                            <a:srgbClr val="1A1A1A"/>
-                          </a:solidFill>
-                          <a:latin typeface="Trebuchet MS"/>
-                        </a:rPr>
-                        <a:t> (synthetic provenance: the data was generated, not collected from real players)</a:t>
+                        <a:t> Android only (iOS has no capture API). Camera dropped: consent not justifiable. Screenshot reading dropped: worsens privacy. Kaggle data rejected: it was generated, not collected from real players.</a:t>
                       </a:r>
                     </a:p>
                   </a:txBody>
@@ -11812,7 +11749,7 @@
                           </a:solidFill>
                           <a:latin typeface="Trebuchet MS"/>
                         </a:rPr>
-                        <a:t>Apps + Flask backend deployed; 3-model ensemble + calibration + SHAP (per-prediction ‘why’ for parents); 11 real open datasets adopted by measured trial; ablations (retrain minus one part) + confidence intervals; family pilot; 266 CI tests at Phase-2 close (291 now)</a:t>
+                        <a:t>Apps and Flask backend deployed. Behaviour, chat and voice models fused, calibrated so scores read as probabilities, each with a plain-language ‘why’. 11 real datasets adopted after trials. Family pilot ran. 266 tests at Phase-2 close (291 now).</a:t>
                       </a:r>
                     </a:p>
                   </a:txBody>
@@ -11828,13 +11765,58 @@
                     <a:lstStyle/>
                     <a:p>
                       <a:r>
+                        <a:rPr sz="1100" b="1">
+                          <a:solidFill>
+                            <a:srgbClr val="1A1A1A"/>
+                          </a:solidFill>
+                          <a:latin typeface="Trebuchet MS"/>
+                        </a:rPr>
+                        <a:t>Synthetic labels</a:t>
+                      </a:r>
+                      <a:r>
                         <a:rPr sz="1100" b="0">
                           <a:solidFill>
                             <a:srgbClr val="1A1A1A"/>
                           </a:solidFill>
                           <a:latin typeface="Trebuchet MS"/>
                         </a:rPr>
-                        <a:t>Review feedback: "labels are synthetic" → grounded on 2 real surveys, stated on every slide; "voice number looks inflated" → speaker-independent split (no speaker in both train + test; –8.3 pts, honest); "no Hindi" → HASOC (Hindi hate-speech corpus) in both scripts + Devanagari keyboard</a:t>
+                        <a:t>: simulation grounded on 2 real surveys, not clinicians. </a:t>
+                      </a:r>
+                      <a:r>
+                        <a:rPr sz="1100" b="1">
+                          <a:solidFill>
+                            <a:srgbClr val="1A1A1A"/>
+                          </a:solidFill>
+                          <a:latin typeface="Trebuchet MS"/>
+                        </a:rPr>
+                        <a:t>Voice</a:t>
+                      </a:r>
+                      <a:r>
+                        <a:rPr sz="1100" b="0">
+                          <a:solidFill>
+                            <a:srgbClr val="1A1A1A"/>
+                          </a:solidFill>
+                          <a:latin typeface="Trebuchet MS"/>
+                        </a:rPr>
+                        <a:t>: random splits leaked speakers into both train and test, inflating accuracy. Splitting by speaker costs –8.3 pts, reported honestly. </a:t>
+                      </a:r>
+                      <a:r>
+                        <a:rPr sz="1100" b="1">
+                          <a:solidFill>
+                            <a:srgbClr val="1A1A1A"/>
+                          </a:solidFill>
+                          <a:latin typeface="Trebuchet MS"/>
+                        </a:rPr>
+                        <a:t>Hindi</a:t>
+                      </a:r>
+                      <a:r>
+                        <a:rPr sz="1100" b="0">
+                          <a:solidFill>
+                            <a:srgbClr val="1A1A1A"/>
+                          </a:solidFill>
+                          <a:latin typeface="Trebuchet MS"/>
+                        </a:rPr>
+                        <a:t>: real hate-speech data (HASOC), Roman and Devanagari.</a:t>
                       </a:r>
                     </a:p>
                   </a:txBody>
@@ -11889,7 +11871,7 @@
                           </a:solidFill>
                           <a:latin typeface="Trebuchet MS"/>
                         </a:rPr>
-                        <a:t>External validation survey; accent-fairness audit; on-device resource drill (CPU / memory measured on a phone); v2.4.0 released; 48-page report + 6-page IEEE paper</a:t>
+                        <a:t>We tested the score against a clinical questionnaire in a survey, audited speech-to-text across Indian accents, measured CPU and memory on a phone, and shipped a new release. Documented in a 48-page report and a 6-page IEEE paper.</a:t>
                       </a:r>
                     </a:p>
                   </a:txBody>
@@ -11905,22 +11887,13 @@
                     <a:lstStyle/>
                     <a:p>
                       <a:r>
-                        <a:rPr sz="1100" b="0">
-                          <a:solidFill>
-                            <a:srgbClr val="1A1A1A"/>
-                          </a:solidFill>
-                          <a:latin typeface="Trebuchet MS"/>
-                        </a:rPr>
-                        <a:t>"Does the score mean anything?" → </a:t>
-                      </a:r>
-                      <a:r>
                         <a:rPr sz="1100" b="1">
                           <a:solidFill>
                             <a:srgbClr val="1A1A1A"/>
                           </a:solidFill>
                           <a:latin typeface="Trebuchet MS"/>
                         </a:rPr>
-                        <a:t>ρ = 0.317 (rank correlation) vs IGDS9-SF, leads screen time in 97% of resamples</a:t>
+                        <a:t>Score tracks IGDS9-SF (clinical questionnaire): correlation ρ = 0.317</a:t>
                       </a:r>
                       <a:r>
                         <a:rPr sz="1100" b="0">
@@ -11929,7 +11902,7 @@
                           </a:solidFill>
                           <a:latin typeface="Trebuchet MS"/>
                         </a:rPr>
-                        <a:t>; "fair across accents?" → </a:t>
+                        <a:t>, moderate. Beats screen time in 97% of resamples (suggestive). Accents: </a:t>
                       </a:r>
                       <a:r>
                         <a:rPr sz="1100" b="1">
@@ -11947,25 +11920,7 @@
                           </a:solidFill>
                           <a:latin typeface="Trebuchet MS"/>
                         </a:rPr>
-                        <a:t>, WER (word error rate) gap named; "battery?" → </a:t>
-                      </a:r>
-                      <a:r>
-                        <a:rPr sz="1100" b="1">
-                          <a:solidFill>
-                            <a:srgbClr val="1A1A1A"/>
-                          </a:solidFill>
-                          <a:latin typeface="Trebuchet MS"/>
-                        </a:rPr>
-                        <a:t>measured</a:t>
-                      </a:r>
-                      <a:r>
-                        <a:rPr sz="1100" b="0">
-                          <a:solidFill>
-                            <a:srgbClr val="1A1A1A"/>
-                          </a:solidFill>
-                          <a:latin typeface="Trebuchet MS"/>
-                        </a:rPr>
-                        <a:t>, dual-STT (English/Hindi speech-to-text) fails gate → default OFF</a:t>
+                        <a:t>. Transcription accuracy varies by accent. Battery measured. English+Hindi speech-to-text fails gate: default OFF.</a:t>
                       </a:r>
                     </a:p>
                   </a:txBody>
@@ -12317,7 +12272,38 @@
                           </a:solidFill>
                           <a:latin typeface="Trebuchet MS"/>
                         </a:rPr>
-                        <a:t>You et al. 2025; Coșa et al. 2025; Ergin &amp; Essau 2025 (family &amp; IGD)</a:t>
+                        <a:t>You et al. 2025; Coșa et al. 2025; Ergin &amp; Essau 2025 (family factors in gaming disorder)</a:t>
+                      </a:r>
+                    </a:p>
+                  </a:txBody>
+                  <a:tcPr marL="64008" marR="64008" marT="27432" marB="27432">
+                    <a:solidFill>
+                      <a:srgbClr val="FBF3EA"/>
+                    </a:solidFill>
+                  </a:tcPr>
+                </a:tc>
+                <a:tc>
+                  <a:txBody>
+                    <a:bodyPr wrap="square"/>
+                    <a:lstStyle/>
+                    <a:p>
+                      <a:r>
+                        <a:rPr sz="1100" b="1">
+                          <a:solidFill>
+                            <a:srgbClr val="1A1A1A"/>
+                          </a:solidFill>
+                          <a:latin typeface="Trebuchet MS"/>
+                        </a:rPr>
+                        <a:t>How a child plays matters more than how long.</a:t>
+                      </a:r>
+                      <a:r>
+                        <a:rPr sz="1100" b="0">
+                          <a:solidFill>
+                            <a:srgbClr val="1A1A1A"/>
+                          </a:solidFill>
+                          <a:latin typeface="Trebuchet MS"/>
+                        </a:rPr>
+                        <a:t> Studies find that family relationships and play patterns predict gaming disorder better than raw hours, and that interventions work through the family.</a:t>
                       </a:r>
                     </a:p>
                   </a:txBody>
@@ -12339,29 +12325,7 @@
                           </a:solidFill>
                           <a:latin typeface="Trebuchet MS"/>
                         </a:rPr>
-                        <a:t>Parent–child relationship and behavioural patterns (how a child plays) predict IGD better than raw hours of play; interventions work through the family</a:t>
-                      </a:r>
-                    </a:p>
-                  </a:txBody>
-                  <a:tcPr marL="64008" marR="64008" marT="27432" marB="27432">
-                    <a:solidFill>
-                      <a:srgbClr val="FBF3EA"/>
-                    </a:solidFill>
-                  </a:tcPr>
-                </a:tc>
-                <a:tc>
-                  <a:txBody>
-                    <a:bodyPr wrap="square"/>
-                    <a:lstStyle/>
-                    <a:p>
-                      <a:r>
-                        <a:rPr sz="1100" b="0">
-                          <a:solidFill>
-                            <a:srgbClr val="1A1A1A"/>
-                          </a:solidFill>
-                          <a:latin typeface="Trebuchet MS"/>
-                        </a:rPr>
-                        <a:t>Guardian stays in the loop; </a:t>
+                        <a:t>So the guardian (parent) stays in the loop and the app nudges rather than blocks. The </a:t>
                       </a:r>
                       <a:r>
                         <a:rPr sz="1100" b="1">
@@ -12370,7 +12334,7 @@
                           </a:solidFill>
                           <a:latin typeface="Trebuchet MS"/>
                         </a:rPr>
-                        <a:t>pattern</a:t>
+                        <a:t>play-pattern</a:t>
                       </a:r>
                       <a:r>
                         <a:rPr sz="1100" b="0">
@@ -12379,7 +12343,7 @@
                           </a:solidFill>
                           <a:latin typeface="Trebuchet MS"/>
                         </a:rPr>
-                        <a:t> features (late-night play, re-logins, binges) are core model inputs; nudges, not blocks</a:t>
+                        <a:t> measures (late-night sessions, repeated re-logins, binges) are core model inputs.</a:t>
                       </a:r>
                     </a:p>
                   </a:txBody>
@@ -12403,7 +12367,38 @@
                           </a:solidFill>
                           <a:latin typeface="Trebuchet MS"/>
                         </a:rPr>
-                        <a:t>Pontes &amp; Griffiths 2015 (IGDS9-SF); Latin-American IGDS9-SF dataset, n = 11,191</a:t>
+                        <a:t>Pontes &amp; Griffiths 2015 (the IGDS9-SF questionnaire); a Latin-American IGDS9-SF dataset, n = 11,191</a:t>
+                      </a:r>
+                    </a:p>
+                  </a:txBody>
+                  <a:tcPr marL="64008" marR="64008" marT="27432" marB="27432">
+                    <a:solidFill>
+                      <a:srgbClr val="FFFFFF"/>
+                    </a:solidFill>
+                  </a:tcPr>
+                </a:tc>
+                <a:tc>
+                  <a:txBody>
+                    <a:bodyPr wrap="square"/>
+                    <a:lstStyle/>
+                    <a:p>
+                      <a:r>
+                        <a:rPr sz="1100" b="1">
+                          <a:solidFill>
+                            <a:srgbClr val="1A1A1A"/>
+                          </a:solidFill>
+                          <a:latin typeface="Trebuchet MS"/>
+                        </a:rPr>
+                        <a:t>A validated yardstick exists.</a:t>
+                      </a:r>
+                      <a:r>
+                        <a:rPr sz="1100" b="0">
+                          <a:solidFill>
+                            <a:srgbClr val="1A1A1A"/>
+                          </a:solidFill>
+                          <a:latin typeface="Trebuchet MS"/>
+                        </a:rPr>
+                        <a:t> IGDS9-SF is a validated screening questionnaire for gaming disorder. About 6.4 % of that dataset scores in the disordered range (the base rate), and toxic-chat involvement tracks severity (correlation r = +0.156).</a:t>
                       </a:r>
                     </a:p>
                   </a:txBody>
@@ -12425,29 +12420,7 @@
                           </a:solidFill>
                           <a:latin typeface="Trebuchet MS"/>
                         </a:rPr>
-                        <a:t>Validated 9-item DSM-5 (psychiatric manual) instrument; base rate (how common the disordered range is) ≈ 6.4 %; toxic-chat involvement tracks severity (r = +0.156)</a:t>
-                      </a:r>
-                    </a:p>
-                  </a:txBody>
-                  <a:tcPr marL="64008" marR="64008" marT="27432" marB="27432">
-                    <a:solidFill>
-                      <a:srgbClr val="FFFFFF"/>
-                    </a:solidFill>
-                  </a:tcPr>
-                </a:tc>
-                <a:tc>
-                  <a:txBody>
-                    <a:bodyPr wrap="square"/>
-                    <a:lstStyle/>
-                    <a:p>
-                      <a:r>
-                        <a:rPr sz="1100" b="0">
-                          <a:solidFill>
-                            <a:srgbClr val="1A1A1A"/>
-                          </a:solidFill>
-                          <a:latin typeface="Trebuchet MS"/>
-                        </a:rPr>
-                        <a:t>IGDS9-SF is our </a:t>
+                        <a:t>IGDS9-SF is the </a:t>
                       </a:r>
                       <a:r>
                         <a:rPr sz="1100" b="1">
@@ -12456,7 +12429,7 @@
                           </a:solidFill>
                           <a:latin typeface="Trebuchet MS"/>
                         </a:rPr>
-                        <a:t>external validation anchor</a:t>
+                        <a:t>real-world yardstick</a:t>
                       </a:r>
                       <a:r>
                         <a:rPr sz="1100" b="0">
@@ -12465,7 +12438,7 @@
                           </a:solidFill>
                           <a:latin typeface="Trebuchet MS"/>
                         </a:rPr>
-                        <a:t> (the real label we test against); base rate sets thresholds; chat channel justified — and reproduced in our survey (ρ = 0.323)</a:t>
+                        <a:t> we test our score against. The base rate sets our alert thresholds. The toxic-chat link justifies our chat channel, and our own survey reproduced it (correlation ρ = 0.323).</a:t>
                       </a:r>
                     </a:p>
                   </a:txBody>
@@ -12489,7 +12462,38 @@
                           </a:solidFill>
                           <a:latin typeface="Trebuchet MS"/>
                         </a:rPr>
-                        <a:t>Huang et al. 2024; Jiang 2024 (ML for gaming disorder)</a:t>
+                        <a:t>Huang et al. 2024; Jiang 2024 (machine learning for gaming disorder)</a:t>
+                      </a:r>
+                    </a:p>
+                  </a:txBody>
+                  <a:tcPr marL="64008" marR="64008" marT="27432" marB="27432">
+                    <a:solidFill>
+                      <a:srgbClr val="FBF3EA"/>
+                    </a:solidFill>
+                  </a:tcPr>
+                </a:tc>
+                <a:tc>
+                  <a:txBody>
+                    <a:bodyPr wrap="square"/>
+                    <a:lstStyle/>
+                    <a:p>
+                      <a:r>
+                        <a:rPr sz="1100" b="1">
+                          <a:solidFill>
+                            <a:srgbClr val="1A1A1A"/>
+                          </a:solidFill>
+                          <a:latin typeface="Trebuchet MS"/>
+                        </a:rPr>
+                        <a:t>No prior work deploys this.</a:t>
+                      </a:r>
+                      <a:r>
+                        <a:rPr sz="1100" b="0">
+                          <a:solidFill>
+                            <a:srgbClr val="1A1A1A"/>
+                          </a:solidFill>
+                          <a:latin typeface="Trebuchet MS"/>
+                        </a:rPr>
+                        <a:t> Earlier machine-learning work predicts gaming disorder from questionnaire answers or a single signal. None of it passively captures several signals and reports to a guardian.</a:t>
                       </a:r>
                     </a:p>
                   </a:txBody>
@@ -12511,29 +12515,7 @@
                           </a:solidFill>
                           <a:latin typeface="Trebuchet MS"/>
                         </a:rPr>
-                        <a:t>Prior ML work models questionnaire data or a single signal; none deploys passive capture of several signals reporting to a guardian</a:t>
-                      </a:r>
-                    </a:p>
-                  </a:txBody>
-                  <a:tcPr marL="64008" marR="64008" marT="27432" marB="27432">
-                    <a:solidFill>
-                      <a:srgbClr val="FBF3EA"/>
-                    </a:solidFill>
-                  </a:tcPr>
-                </a:tc>
-                <a:tc>
-                  <a:txBody>
-                    <a:bodyPr wrap="square"/>
-                    <a:lstStyle/>
-                    <a:p>
-                      <a:r>
-                        <a:rPr sz="1100" b="0">
-                          <a:solidFill>
-                            <a:srgbClr val="1A1A1A"/>
-                          </a:solidFill>
-                          <a:latin typeface="Trebuchet MS"/>
-                        </a:rPr>
-                        <a:t>The gap we fill: deployed, behaviour + chat + voice, explainable, calibrated</a:t>
+                        <a:t>That is the gap we fill: a deployed system combining behaviour, chat and voice, whose scores mean what they say (calibrated) and come with a plain-language reason (explainable).</a:t>
                       </a:r>
                     </a:p>
                   </a:txBody>
@@ -12557,7 +12539,38 @@
                           </a:solidFill>
                           <a:latin typeface="Trebuchet MS"/>
                         </a:rPr>
-                        <a:t>Weld et al. 2021 (CONDA, real in-game chat); Mandl et al. 2019 (HASOC); Javed et al. 2023 (Svarah)</a:t>
+                        <a:t>Weld et al. 2021 (CONDA, a real in-game chat dataset); Mandl et al. 2019 (HASOC, Hindi hate-speech dataset); Javed et al. 2023 (Svarah, Indian-accent English speech)</a:t>
+                      </a:r>
+                    </a:p>
+                  </a:txBody>
+                  <a:tcPr marL="64008" marR="64008" marT="27432" marB="27432">
+                    <a:solidFill>
+                      <a:srgbClr val="FFFFFF"/>
+                    </a:solidFill>
+                  </a:tcPr>
+                </a:tc>
+                <a:tc>
+                  <a:txBody>
+                    <a:bodyPr wrap="square"/>
+                    <a:lstStyle/>
+                    <a:p>
+                      <a:r>
+                        <a:rPr sz="1100" b="1">
+                          <a:solidFill>
+                            <a:srgbClr val="1A1A1A"/>
+                          </a:solidFill>
+                          <a:latin typeface="Trebuchet MS"/>
+                        </a:rPr>
+                        <a:t>Game chat is its own dialect, and speech recognition is not accent-neutral.</a:t>
+                      </a:r>
+                      <a:r>
+                        <a:rPr sz="1100" b="0">
+                          <a:solidFill>
+                            <a:srgbClr val="1A1A1A"/>
+                          </a:solidFill>
+                          <a:latin typeface="Trebuchet MS"/>
+                        </a:rPr>
+                        <a:t> In-game chat and mixed Hindi–English read differently from everyday text, and speech-to-text error rates vary with Indian accents.</a:t>
                       </a:r>
                     </a:p>
                   </a:txBody>
@@ -12579,29 +12592,7 @@
                           </a:solidFill>
                           <a:latin typeface="Trebuchet MS"/>
                         </a:rPr>
-                        <a:t>Game chat and mixed Hindi–English are their own writing styles; speech-to-text (ASR) error varies by Indian accent</a:t>
-                      </a:r>
-                    </a:p>
-                  </a:txBody>
-                  <a:tcPr marL="64008" marR="64008" marT="27432" marB="27432">
-                    <a:solidFill>
-                      <a:srgbClr val="FFFFFF"/>
-                    </a:solidFill>
-                  </a:tcPr>
-                </a:tc>
-                <a:tc>
-                  <a:txBody>
-                    <a:bodyPr wrap="square"/>
-                    <a:lstStyle/>
-                    <a:p>
-                      <a:r>
-                        <a:rPr sz="1100" b="0">
-                          <a:solidFill>
-                            <a:srgbClr val="1A1A1A"/>
-                          </a:solidFill>
-                          <a:latin typeface="Trebuchet MS"/>
-                        </a:rPr>
-                        <a:t>Domain data &gt; model size: pretrained toxic-BERT is 12 pts below our LogReg; dual-script Hindi; </a:t>
+                        <a:t>Domain data beats model size: the pretrained toxicity model toxic-BERT scores 12 pts below our simpler logistic regression on real game chat. We handle Hindi in both scripts (Devanagari and romanised) and </a:t>
                       </a:r>
                       <a:r>
                         <a:rPr sz="1100" b="1">
@@ -12610,7 +12601,7 @@
                           </a:solidFill>
                           <a:latin typeface="Trebuchet MS"/>
                         </a:rPr>
-                        <a:t>accent-fairness audit</a:t>
+                        <a:t>audited fairness across accents</a:t>
                       </a:r>
                       <a:r>
                         <a:rPr sz="1100" b="0">
@@ -12619,7 +12610,7 @@
                           </a:solidFill>
                           <a:latin typeface="Trebuchet MS"/>
                         </a:rPr>
-                        <a:t> (Svarah, Indian-English speech)</a:t>
+                        <a:t> on Svarah.</a:t>
                       </a:r>
                     </a:p>
                   </a:txBody>
@@ -12643,7 +12634,38 @@
                           </a:solidFill>
                           <a:latin typeface="Trebuchet MS"/>
                         </a:rPr>
-                        <a:t>Our own survey (n = 104 usable)</a:t>
+                        <a:t>Our own IGDS9-SF survey (n = 104 usable)</a:t>
+                      </a:r>
+                    </a:p>
+                  </a:txBody>
+                  <a:tcPr marL="64008" marR="64008" marT="27432" marB="27432">
+                    <a:solidFill>
+                      <a:srgbClr val="FBF3EA"/>
+                    </a:solidFill>
+                  </a:tcPr>
+                </a:tc>
+                <a:tc>
+                  <a:txBody>
+                    <a:bodyPr wrap="square"/>
+                    <a:lstStyle/>
+                    <a:p>
+                      <a:r>
+                        <a:rPr sz="1100" b="1">
+                          <a:solidFill>
+                            <a:srgbClr val="1A1A1A"/>
+                          </a:solidFill>
+                          <a:latin typeface="Trebuchet MS"/>
+                        </a:rPr>
+                        <a:t>Measured, not assumed: how beats how long.</a:t>
+                      </a:r>
+                      <a:r>
+                        <a:rPr sz="1100" b="0">
+                          <a:solidFill>
+                            <a:srgbClr val="1A1A1A"/>
+                          </a:solidFill>
+                          <a:latin typeface="Trebuchet MS"/>
+                        </a:rPr>
+                        <a:t> Every one of our play-pattern measures tracks the questionnaire score more closely than any of our screen-time measures (volume features).</a:t>
                       </a:r>
                     </a:p>
                   </a:txBody>
@@ -12665,29 +12687,7 @@
                           </a:solidFill>
                           <a:latin typeface="Trebuchet MS"/>
                         </a:rPr>
-                        <a:t>Each pattern feature (how) beats each volume feature (how long) at tracking IGDS9-SF</a:t>
-                      </a:r>
-                    </a:p>
-                  </a:txBody>
-                  <a:tcPr marL="64008" marR="64008" marT="27432" marB="27432">
-                    <a:solidFill>
-                      <a:srgbClr val="FBF3EA"/>
-                    </a:solidFill>
-                  </a:tcPr>
-                </a:tc>
-                <a:tc>
-                  <a:txBody>
-                    <a:bodyPr wrap="square"/>
-                    <a:lstStyle/>
-                    <a:p>
-                      <a:r>
-                        <a:rPr sz="1100" b="0">
-                          <a:solidFill>
-                            <a:srgbClr val="1A1A1A"/>
-                          </a:solidFill>
-                          <a:latin typeface="Trebuchet MS"/>
-                        </a:rPr>
-                        <a:t>Our design premise — measure how, not how long — confirmed against real questionnaire labels</a:t>
+                        <a:t>This confirms our design premise, measure how a child plays rather than how long, against real questionnaire answers instead of simulated labels.</a:t>
                       </a:r>
                     </a:p>
                   </a:txBody>
@@ -13045,11 +13045,11 @@
                 </a:solidFill>
                 <a:latin typeface="Trebuchet MS"/>
               </a:rPr>
-              <a:t>Game detection (allowlist → OS category → parent override)
-10 objective (measured) session features
-Chat: custom keyboard (IME) + accessibility service
-Mic on only during speech (VAD, voice-activity detection) → on-device Vosk speech-to-text
-Anti-tamper · versioned consent (no consent → no capture)</a:t>
+              <a:t>Spots when a game is running; parents can override
+Measures 10 session features (late-night play, re-logins, binges)
+Reads chat through our own keyboard and accessibility service
+Mic on only while speaking; transcribed on the phone
+No consent, no capture; tampering is flagged</a:t>
             </a:r>
           </a:p>
         </p:txBody>
@@ -13164,11 +13164,11 @@
                 </a:solidFill>
                 <a:latin typeface="Trebuchet MS"/>
               </a:rPr>
-              <a:t>RF behaviour (10 feats) · LogReg+TF-IDF chat · HistGB voice
-Availability-weighted fusion 40/30/30 (re-weights over channels present)
-Isotonic calibration (monotone correction of scores) · SHAP "why"
-Alerts to all guardians · drift monitor (PSI/KS)
-Export and delete cover the same data · HTTPS · tokens</a:t>
+              <a:t>Three models, one per channel: behaviour, chat, voice
+Blended 40/30/30 (behaviour, chat, voice); missing channels re-weighted
+Scores corrected to match real risk rates; plain-language why
+Alerts every guardian; flags data unlike training data
+Export shows exactly what delete removes; encrypted, token-authenticated</a:t>
             </a:r>
           </a:p>
         </p:txBody>
@@ -13283,11 +13283,11 @@
                 </a:solidFill>
                 <a:latin typeface="Trebuchet MS"/>
               </a:rPr>
-              <a:t>Risk band + plain-language why · 14-day risk trend
-Real-time alerts (risk / toxicity / tamper)
-Accurate / false-alarm verdicts → Beta threshold tuner (Bayesian; adjusts alert cut-off)
-Nudges to child · weekly PDF report
-"What we can and can't see" transparency</a:t>
+              <a:t>Risk level with a plain-language why; 14-day trend
+Instant alerts for risk, toxic chat, or tampering
+Parent marks alerts right or wrong; cut-off adapts
+Sends nudges to the child; weekly PDF report
+Shows honestly what the app can and cannot see</a:t>
             </a:r>
           </a:p>
         </p:txBody>
@@ -13430,7 +13430,7 @@
                 </a:solidFill>
                 <a:latin typeface="Trebuchet MS"/>
               </a:rPr>
-              <a:t> session telemetry (session start / end times) / chat lines / 10-s voice segments → one score per channel → fused, calibrated risk + SHAP "why" → dashboard + push alerts; raw audio </a:t>
+              <a:t> the Child app sends session start/end times, chat lines and 10-s voice segments → each channel gets its own score → the three are blended into one corrected risk score with a plain-language why → parent dashboard and push alerts. Raw audio is </a:t>
             </a:r>
             <a:r>
               <a:rPr sz="1300" b="1">
@@ -13448,7 +13448,7 @@
                 </a:solidFill>
                 <a:latin typeface="Trebuchet MS"/>
               </a:rPr>
-              <a:t> after feature extraction</a:t>
+              <a:t> as soon as its features are extracted</a:t>
             </a:r>
           </a:p>
           <a:p>
@@ -13482,7 +13482,7 @@
                 </a:solidFill>
                 <a:latin typeface="Trebuchet MS"/>
               </a:rPr>
-              <a:t> game detection · session lifecycle · chat capture (IME/accessibility) · voice capture + speech-to-text (STT) · behaviour model · chat model · voice model · fusion &amp; alerting · feedback tuner · drift monitor (flags data unlike the training data) · consent &amp; anti-tamper (flags disabled capture) · parent dashboard</a:t>
+              <a:t> On the phone: game detection, session tracking, chat capture, voice capture with speech-to-text, consent and anti-tamper. In the cloud: behaviour, chat and voice models, score blending and alerting, the parent-feedback tuner, and a drift monitor that flags data unlike the training data. For parents: the dashboard</a:t>
             </a:r>
           </a:p>
         </p:txBody>
@@ -13739,9 +13739,9 @@
                 <a:tableStyleId>{5C22544A-7EE6-4342-B048-85BDC9FD1C3A}</a:tableStyleId>
               </a:tblPr>
               <a:tblGrid>
-                <a:gridCol w="2103120"/>
-                <a:gridCol w="6126480"/>
-                <a:gridCol w="2834640"/>
+                <a:gridCol w="1828800"/>
+                <a:gridCol w="6766560"/>
+                <a:gridCol w="2468880"/>
               </a:tblGrid>
               <a:tr h="347472">
                 <a:tc>
@@ -13840,13 +13840,58 @@
                     <a:lstStyle/>
                     <a:p>
                       <a:r>
+                        <a:rPr sz="1000" b="1">
+                          <a:solidFill>
+                            <a:srgbClr val="1A1A1A"/>
+                          </a:solidFill>
+                          <a:latin typeface="Trebuchet MS"/>
+                        </a:rPr>
+                        <a:t>11 open datasets</a:t>
+                      </a:r>
+                      <a:r>
                         <a:rPr sz="1000" b="0">
                           <a:solidFill>
                             <a:srgbClr val="1A1A1A"/>
                           </a:solidFill>
                           <a:latin typeface="Trebuchet MS"/>
                         </a:rPr>
-                        <a:t>11 open datasets screened for provenance (origin), task fit and open licence, adopted after a measured trial; 2 rejected with evidence; own IGDS9-SF survey (134 raw / 104 usable) as primary data</a:t>
+                        <a:t> adopted after checking origin, task fit and licence, then a measured trial. </a:t>
+                      </a:r>
+                      <a:r>
+                        <a:rPr sz="1000" b="1">
+                          <a:solidFill>
+                            <a:srgbClr val="1A1A1A"/>
+                          </a:solidFill>
+                          <a:latin typeface="Trebuchet MS"/>
+                        </a:rPr>
+                        <a:t>2 rejected</a:t>
+                      </a:r>
+                      <a:r>
+                        <a:rPr sz="1000" b="0">
+                          <a:solidFill>
+                            <a:srgbClr val="1A1A1A"/>
+                          </a:solidFill>
+                          <a:latin typeface="Trebuchet MS"/>
+                        </a:rPr>
+                        <a:t> with evidence. Primary data is our own survey using IGDS9-SF (the standard gaming-disorder questionnaire): </a:t>
+                      </a:r>
+                      <a:r>
+                        <a:rPr sz="1000" b="1">
+                          <a:solidFill>
+                            <a:srgbClr val="1A1A1A"/>
+                          </a:solidFill>
+                          <a:latin typeface="Trebuchet MS"/>
+                        </a:rPr>
+                        <a:t>134 raw / 104 usable</a:t>
+                      </a:r>
+                      <a:r>
+                        <a:rPr sz="1000" b="0">
+                          <a:solidFill>
+                            <a:srgbClr val="1A1A1A"/>
+                          </a:solidFill>
+                          <a:latin typeface="Trebuchet MS"/>
+                        </a:rPr>
+                        <a:t> responses.</a:t>
                       </a:r>
                     </a:p>
                   </a:txBody>
@@ -13914,7 +13959,7 @@
                           </a:solidFill>
                           <a:latin typeface="Trebuchet MS"/>
                         </a:rPr>
-                        <a:t>ChildApp session telemetry, keyboard (IME) / accessibility chat capture, VAD-gated audio; the survey’s Google-Form CSV export</a:t>
+                        <a:t>The child’s app (ChildApp) records when game sessions start and end, captures chat through our own keyboard and the Android accessibility service, and records audio only while someone is speaking. Survey answers arrive as a Google-Form CSV export.</a:t>
                       </a:r>
                     </a:p>
                   </a:txBody>
@@ -13982,7 +14027,25 @@
                           </a:solidFill>
                           <a:latin typeface="Trebuchet MS"/>
                         </a:rPr>
-                        <a:t>One feature function shared by training and serving; TF-IDF over word + character n-grams; 36 acoustic features (pitch, energy, timbre); Hindi romanised to Latin spelling; survey columns matched by keyword</a:t>
+                        <a:t>The live server reuses the training feature code, so features match exactly. Chat text becomes TF-IDF over words and character fragments. Each voice clip becomes </a:t>
+                      </a:r>
+                      <a:r>
+                        <a:rPr sz="1000" b="1">
+                          <a:solidFill>
+                            <a:srgbClr val="1A1A1A"/>
+                          </a:solidFill>
+                          <a:latin typeface="Trebuchet MS"/>
+                        </a:rPr>
+                        <a:t>36 acoustic features</a:t>
+                      </a:r>
+                      <a:r>
+                        <a:rPr sz="1000" b="0">
+                          <a:solidFill>
+                            <a:srgbClr val="1A1A1A"/>
+                          </a:solidFill>
+                          <a:latin typeface="Trebuchet MS"/>
+                        </a:rPr>
+                        <a:t> (pitch, energy, timbre). Hindi is respelled in Latin letters.</a:t>
                       </a:r>
                     </a:p>
                   </a:txBody>
@@ -14050,7 +14113,7 @@
                           </a:solidFill>
                           <a:latin typeface="Trebuchet MS"/>
                         </a:rPr>
-                        <a:t>RF (10 feats) · LogReg+isotonic chat + noisy-OR word list (can only raise scores) · HistGB voice; availability-weighted fusion</a:t>
+                        <a:t>One model per signal: random forest on behaviour, logistic regression on chat (plus a word list that can only raise scores), gradient boosting on voice. Scores are fused with weights that re-balance over whichever signals are present.</a:t>
                       </a:r>
                     </a:p>
                   </a:txBody>
@@ -14118,7 +14181,7 @@
                           </a:solidFill>
                           <a:latin typeface="Trebuchet MS"/>
                         </a:rPr>
-                        <a:t>SHAP per prediction → plain-language why for parents; precision–recall curve, confusion matrices, reliability diagrams (calibration plots), ablation tables, survey figure</a:t>
+                        <a:t>Every prediction comes with a plain-language reason for parents, computed with SHAP (per-input contribution scores). Evaluation figures: precision–recall curves, confusion matrices, calibration plots (are scores honest probabilities?), ablation tables (retrain minus one part) and the survey figure.</a:t>
                       </a:r>
                     </a:p>
                   </a:txBody>
@@ -14186,7 +14249,7 @@
                           </a:solidFill>
                           <a:latin typeface="Trebuchet MS"/>
                         </a:rPr>
-                        <a:t>One code path: SQLite locally, Postgres (Neon) in prod; export = exactly what delete removes; audio never retained</a:t>
+                        <a:t>The same database code runs on SQLite for local development and on Postgres (hosted by Neon) in production. A parent’s data export contains exactly what a delete request removes. Raw audio is never stored.</a:t>
                       </a:r>
                     </a:p>
                   </a:txBody>
@@ -14231,7 +14294,7 @@
         </p:nvSpPr>
         <p:spPr>
           <a:xfrm>
-            <a:off x="548640" y="4297680"/>
+            <a:off x="548640" y="4892040"/>
             <a:ext cx="11064240" cy="320040"/>
           </a:xfrm>
           <a:prstGeom prst="rect">
@@ -14266,8 +14329,8 @@
         </p:nvSpPr>
         <p:spPr>
           <a:xfrm>
-            <a:off x="548640" y="4617720"/>
-            <a:ext cx="11064240" cy="1737360"/>
+            <a:off x="548640" y="5193792"/>
+            <a:ext cx="11064240" cy="1188720"/>
           </a:xfrm>
           <a:prstGeom prst="rect">
             <a:avLst/>
@@ -14288,7 +14351,7 @@
                 </a:solidFill>
                 <a:latin typeface="Trebuchet MS"/>
               </a:rPr>
-              <a:t>Android SDK 34 / Kotlin · Retrofit · Vosk 0.3.47 offline speech-to-text (Apache-2.0; en-in + hi small models) · Firebase Cloud Messaging (push alerts) · Python 3.11 · Flask · scikit-learn (RandomForest, LogisticRegression, HistGradientBoosting, isotonic) · SHAP · librosa / webrtcvad (audio / VAD) · psycopg2 · Postgres 16 (Neon) · Render (cloud host) · GitHub Actions · pytest · schemathesis (API fuzzing) · bandit · pip-audit · MobSF (three security scanners) · LaTeX/IEEEtran · Datasets: Jigsaw (Wikipedia comment toxicity), CONDA, Davidson (Twitter hate speech), HASOC 2019 (gated: on request), Hindi Wikipedia, RAVDESS, CREMA-D, EMO-DB, URDU (emotional-speech corpora), Gamers &amp; Anxiety (OSF), IGDS9-SF LatAm (OSF), StudentLife, Svarah (CC BY 4.0, gated).</a:t>
+              <a:t>Android SDK 34 / Kotlin · Retrofit · Vosk 0.3.47 offline speech-to-text (Apache-2.0 licence; small Indian-English and Hindi models) · Firebase Cloud Messaging (push alerts) · Python 3.11 · Flask · scikit-learn (RandomForest, LogisticRegression, HistGradientBoosting, isotonic calibration) · SHAP · librosa / webrtcvad (audio features / voice-activity detection) · psycopg2 · Postgres 16 (Neon) · Render (cloud host) · GitHub Actions · pytest · schemathesis (API fuzzing) · bandit · pip-audit · MobSF (three security scanners) · LaTeX/IEEEtran · Datasets: Jigsaw (Wikipedia comment toxicity), CONDA, Davidson (Twitter hate speech), HASOC 2019 (gated: on request), Hindi Wikipedia, RAVDESS, CREMA-D, EMO-DB, URDU (emotional-speech corpora), Gamers &amp; Anxiety (OSF), IGDS9-SF LatAm (OSF), StudentLife, Svarah (CC BY 4.0, gated).</a:t>
             </a:r>
           </a:p>
         </p:txBody>
@@ -15381,9 +15444,9 @@
                 <a:tableStyleId>{5C22544A-7EE6-4342-B048-85BDC9FD1C3A}</a:tableStyleId>
               </a:tblPr>
               <a:tblGrid>
-                <a:gridCol w="1737360"/>
-                <a:gridCol w="5669280"/>
-                <a:gridCol w="3657600"/>
+                <a:gridCol w="1371600"/>
+                <a:gridCol w="6309360"/>
+                <a:gridCol w="3383280"/>
               </a:tblGrid>
               <a:tr h="347472">
                 <a:tc>
@@ -15392,7 +15455,7 @@
                     <a:lstStyle/>
                     <a:p>
                       <a:r>
-                        <a:rPr sz="1000" b="0">
+                        <a:rPr sz="900" b="0">
                           <a:solidFill>
                             <a:srgbClr val="FFFFFF"/>
                           </a:solidFill>
@@ -15414,7 +15477,7 @@
                     <a:lstStyle/>
                     <a:p>
                       <a:r>
-                        <a:rPr sz="1000" b="0">
+                        <a:rPr sz="900" b="0">
                           <a:solidFill>
                             <a:srgbClr val="FFFFFF"/>
                           </a:solidFill>
@@ -15436,7 +15499,7 @@
                     <a:lstStyle/>
                     <a:p>
                       <a:r>
-                        <a:rPr sz="1000" b="0">
+                        <a:rPr sz="900" b="0">
                           <a:solidFill>
                             <a:srgbClr val="FFFFFF"/>
                           </a:solidFill>
@@ -15460,7 +15523,7 @@
                     <a:lstStyle/>
                     <a:p>
                       <a:r>
-                        <a:rPr sz="1000" b="0">
+                        <a:rPr sz="900" b="0">
                           <a:solidFill>
                             <a:srgbClr val="1A1A1A"/>
                           </a:solidFill>
@@ -15482,31 +15545,40 @@
                     <a:lstStyle/>
                     <a:p>
                       <a:r>
-                        <a:rPr sz="1000" b="0">
+                        <a:rPr sz="900" b="1">
                           <a:solidFill>
                             <a:srgbClr val="1A1A1A"/>
                           </a:solidFill>
                           <a:latin typeface="Trebuchet MS"/>
                         </a:rPr>
-                        <a:t>91.6 % acc · macro-F1 0.918 · CV 0.921 ± 0.002 (</a:t>
+                        <a:t>91.6% accuracy</a:t>
                       </a:r>
                       <a:r>
-                        <a:rPr sz="1000" b="1">
+                        <a:rPr sz="900" b="0">
                           <a:solidFill>
                             <a:srgbClr val="1A1A1A"/>
                           </a:solidFill>
                           <a:latin typeface="Trebuchet MS"/>
                         </a:rPr>
-                        <a:t>synthetic labels</a:t>
+                        <a:t> on held-out data. Caveat: the labels are </a:t>
                       </a:r>
                       <a:r>
-                        <a:rPr sz="1000" b="0">
+                        <a:rPr sz="900" b="1">
                           <a:solidFill>
                             <a:srgbClr val="1A1A1A"/>
                           </a:solidFill>
                           <a:latin typeface="Trebuchet MS"/>
                         </a:rPr>
-                        <a:t>, grounded on 2 real surveys); ECE (calibration error) 0.062 → 0.015</a:t>
+                        <a:t>synthetic</a:t>
+                      </a:r>
+                      <a:r>
+                        <a:rPr sz="900" b="0">
+                          <a:solidFill>
+                            <a:srgbClr val="1A1A1A"/>
+                          </a:solidFill>
+                          <a:latin typeface="Trebuchet MS"/>
+                        </a:rPr>
+                        <a:t> — they came from a simulation grounded on two real surveys, not from clinicians. Calibration brought the score much closer to a true probability.</a:t>
                       </a:r>
                     </a:p>
                   </a:txBody>
@@ -15522,13 +15594,13 @@
                     <a:lstStyle/>
                     <a:p>
                       <a:r>
-                        <a:rPr sz="1000" b="0">
+                        <a:rPr sz="900" b="0">
                           <a:solidFill>
                             <a:srgbClr val="1A1A1A"/>
                           </a:solidFill>
                           <a:latin typeface="Trebuchet MS"/>
                         </a:rPr>
-                        <a:t>Ablations w/ conf. intervals; hours-only baseline 0.702; 5 pattern feats 0.902 vs 5 volume 0.871</a:t>
+                        <a:t>Ablations (retraining with parts removed) with confidence intervals. Screen time alone scores far lower. Pattern (how-you-play) features edge out screen-time features.</a:t>
                       </a:r>
                     </a:p>
                   </a:txBody>
@@ -15546,7 +15618,7 @@
                     <a:lstStyle/>
                     <a:p>
                       <a:r>
-                        <a:rPr sz="1000" b="0">
+                        <a:rPr sz="900" b="0">
                           <a:solidFill>
                             <a:srgbClr val="1A1A1A"/>
                           </a:solidFill>
@@ -15568,16 +15640,16 @@
                     <a:lstStyle/>
                     <a:p>
                       <a:r>
-                        <a:rPr sz="1000" b="0">
+                        <a:rPr sz="900" b="0">
                           <a:solidFill>
                             <a:srgbClr val="1A1A1A"/>
                           </a:solidFill>
                           <a:latin typeface="Trebuchet MS"/>
                         </a:rPr>
-                        <a:t>In-domain (real in-game chat) PR-AUC </a:t>
+                        <a:t>On real in-game chat, PR-AUC is </a:t>
                       </a:r>
                       <a:r>
-                        <a:rPr sz="1000" b="1">
+                        <a:rPr sz="900" b="1">
                           <a:solidFill>
                             <a:srgbClr val="1A1A1A"/>
                           </a:solidFill>
@@ -15586,13 +15658,13 @@
                         <a:t>0.825</a:t>
                       </a:r>
                       <a:r>
-                        <a:rPr sz="1000" b="0">
+                        <a:rPr sz="900" b="0">
                           <a:solidFill>
                             <a:srgbClr val="1A1A1A"/>
                           </a:solidFill>
                           <a:latin typeface="Trebuchet MS"/>
                         </a:rPr>
-                        <a:t> [0.807, 0.841]; P 0.956 / R 0.428 at threshold 0.95; Hindi P 0.968 (Devanagari) / 0.958 (romanised)</a:t>
+                        <a:t>. At our alert threshold (0.95), 95.6% of flagged messages are truly toxic and we catch 42.8% of toxic messages. Hindi precision: 0.968 in Devanagari, 0.958 romanised.</a:t>
                       </a:r>
                     </a:p>
                   </a:txBody>
@@ -15608,13 +15680,13 @@
                     <a:lstStyle/>
                     <a:p>
                       <a:r>
-                        <a:rPr sz="1000" b="0">
+                        <a:rPr sz="900" b="0">
                           <a:solidFill>
                             <a:srgbClr val="1A1A1A"/>
                           </a:solidFill>
                           <a:latin typeface="Trebuchet MS"/>
                         </a:rPr>
-                        <a:t>Ablation: no CONDA → 0.511; toxic-BERT baseline 0.709; HASOC 933 rows held out (never trained on)</a:t>
+                        <a:t>Dropping the in-game chat corpus (CONDA) from training cuts PR-AUC sharply. Pretrained toxic-BERT reaches only 0.709, below our simpler model. Hindi test rows were never trained on.</a:t>
                       </a:r>
                     </a:p>
                   </a:txBody>
@@ -15632,7 +15704,7 @@
                     <a:lstStyle/>
                     <a:p>
                       <a:r>
-                        <a:rPr sz="1000" b="0">
+                        <a:rPr sz="900" b="0">
                           <a:solidFill>
                             <a:srgbClr val="1A1A1A"/>
                           </a:solidFill>
@@ -15654,13 +15726,22 @@
                     <a:lstStyle/>
                     <a:p>
                       <a:r>
-                        <a:rPr sz="1000" b="0">
+                        <a:rPr sz="900" b="1">
                           <a:solidFill>
                             <a:srgbClr val="1A1A1A"/>
                           </a:solidFill>
                           <a:latin typeface="Trebuchet MS"/>
                         </a:rPr>
-                        <a:t>0.574 acc speaker-independent (chance 0.25); random split 0.657 → 8.3-pt leakage exposed (memorised voices)</a:t>
+                        <a:t>0.574 accuracy</a:t>
+                      </a:r>
+                      <a:r>
+                        <a:rPr sz="900" b="0">
+                          <a:solidFill>
+                            <a:srgbClr val="1A1A1A"/>
+                          </a:solidFill>
+                          <a:latin typeface="Trebuchet MS"/>
+                        </a:rPr>
+                        <a:t> when no speaker appears in both training and test (a speaker-independent split), well above guessing. A random split gave 0.657 — an 8.3-point gap, because the model had memorised voices. We report the honest number.</a:t>
                       </a:r>
                     </a:p>
                   </a:txBody>
@@ -15676,13 +15757,13 @@
                     <a:lstStyle/>
                     <a:p>
                       <a:r>
-                        <a:rPr sz="1000" b="0">
+                        <a:rPr sz="900" b="0">
                           <a:solidFill>
                             <a:srgbClr val="1A1A1A"/>
                           </a:solidFill>
                           <a:latin typeface="Trebuchet MS"/>
                         </a:rPr>
-                        <a:t>Speaker-independent CV; wav2vec2 headroom 0.776 (larger model); augmentation: no effect</a:t>
+                        <a:t>Each speaker stays on one side of every split. A larger model (wav2vec2) scores higher, so headroom exists. Audio augmentation made no difference.</a:t>
                       </a:r>
                     </a:p>
                   </a:txBody>
@@ -15700,7 +15781,7 @@
                     <a:lstStyle/>
                     <a:p>
                       <a:r>
-                        <a:rPr sz="1000" b="1">
+                        <a:rPr sz="900" b="1">
                           <a:solidFill>
                             <a:srgbClr val="1A1A1A"/>
                           </a:solidFill>
@@ -15722,16 +15803,16 @@
                     <a:lstStyle/>
                     <a:p>
                       <a:r>
-                        <a:rPr sz="1000" b="0">
+                        <a:rPr sz="900" b="0">
                           <a:solidFill>
                             <a:srgbClr val="1A1A1A"/>
                           </a:solidFill>
                           <a:latin typeface="Trebuchet MS"/>
                         </a:rPr>
-                        <a:t>Spearman ρ (rank correlation) = </a:t>
+                        <a:t>Our score tracks IGDS9-SF (standard clinical questionnaire): rank correlation ρ </a:t>
                       </a:r>
                       <a:r>
-                        <a:rPr sz="1000" b="1">
+                        <a:rPr sz="900" b="1">
                           <a:solidFill>
                             <a:srgbClr val="1A1A1A"/>
                           </a:solidFill>
@@ -15740,16 +15821,34 @@
                         <a:t>0.317</a:t>
                       </a:r>
                       <a:r>
-                        <a:rPr sz="1000" b="0">
+                        <a:rPr sz="900" b="0">
                           <a:solidFill>
                             <a:srgbClr val="1A1A1A"/>
                           </a:solidFill>
                           <a:latin typeface="Trebuchet MS"/>
                         </a:rPr>
-                        <a:t> [0.137, 0.478] vs IGDS9-SF (n = 103); screen-time hours alone 0.147; gain over hours Δρ = +0.167 [-0.002, 0.341]; pattern features 0.330 vs volume features 0.128, formal contrast (pattern − volume) </a:t>
+                        <a:t>, a </a:t>
                       </a:r>
                       <a:r>
-                        <a:rPr sz="1000" b="1">
+                        <a:rPr sz="900" b="1">
+                          <a:solidFill>
+                            <a:srgbClr val="1A1A1A"/>
+                          </a:solidFill>
+                          <a:latin typeface="Trebuchet MS"/>
+                        </a:rPr>
+                        <a:t>moderate</a:t>
+                      </a:r>
+                      <a:r>
+                        <a:rPr sz="900" b="0">
+                          <a:solidFill>
+                            <a:srgbClr val="1A1A1A"/>
+                          </a:solidFill>
+                          <a:latin typeface="Trebuchet MS"/>
+                        </a:rPr>
+                        <a:t> link. Screen-time hours alone: 0.147. How a child plays beats how long: pattern features correlate </a:t>
+                      </a:r>
+                      <a:r>
+                        <a:rPr sz="900" b="1">
                           <a:solidFill>
                             <a:srgbClr val="1A1A1A"/>
                           </a:solidFill>
@@ -15758,13 +15857,13 @@
                         <a:t>+0.199</a:t>
                       </a:r>
                       <a:r>
-                        <a:rPr sz="1000" b="0">
+                        <a:rPr sz="900" b="0">
                           <a:solidFill>
                             <a:srgbClr val="1A1A1A"/>
                           </a:solidFill>
                           <a:latin typeface="Trebuchet MS"/>
                         </a:rPr>
-                        <a:t> [0.019, 0.380]</a:t>
+                        <a:t> higher than screen-time features, a gap distinguishable from zero.</a:t>
                       </a:r>
                     </a:p>
                   </a:txBody>
@@ -15780,13 +15879,13 @@
                     <a:lstStyle/>
                     <a:p>
                       <a:r>
-                        <a:rPr sz="1000" b="0">
+                        <a:rPr sz="900" b="0">
                           <a:solidFill>
                             <a:srgbClr val="1A1A1A"/>
                           </a:solidFill>
                           <a:latin typeface="Trebuchet MS"/>
                         </a:rPr>
-                        <a:t>Exclusions fixed in advance; paired bootstrap (same people); late batch folded in per pre-stated rule; genre null (no effect) p = 0.598 reported; cut-off sens./spec. withheld (1 positive)</a:t>
+                        <a:t>Exclusions fixed in advance. Confidence intervals from resampling the same people. Late responses lowered the headline but stay in, by a rule set beforehand. Game genre: no effect. Sensitivity/specificity not computed: only one respondent in the disordered range.</a:t>
                       </a:r>
                     </a:p>
                   </a:txBody>
@@ -15804,7 +15903,7 @@
                     <a:lstStyle/>
                     <a:p>
                       <a:r>
-                        <a:rPr sz="1000" b="0">
+                        <a:rPr sz="900" b="0">
                           <a:solidFill>
                             <a:srgbClr val="1A1A1A"/>
                           </a:solidFill>
@@ -15826,7 +15925,7 @@
                     <a:lstStyle/>
                     <a:p>
                       <a:r>
-                        <a:rPr sz="1000" b="1">
+                        <a:rPr sz="900" b="1">
                           <a:solidFill>
                             <a:srgbClr val="1A1A1A"/>
                           </a:solidFill>
@@ -15835,13 +15934,13 @@
                         <a:t>0 false alerts</a:t>
                       </a:r>
                       <a:r>
-                        <a:rPr sz="1000" b="0">
+                        <a:rPr sz="900" b="0">
                           <a:solidFill>
                             <a:srgbClr val="1A1A1A"/>
                           </a:solidFill>
                           <a:latin typeface="Trebuchet MS"/>
                         </a:rPr>
-                        <a:t> in 9.61 h / 6,656 clips, every accent group; WER (word error rate) by first-language family: 34.6 % Dravidian → 60.8 % Tibeto-Burman</a:t>
+                        <a:t> across 6,656 clips of Indian-English speech, in every accent group. But speech-to-text error (WER, word error rate) varies by first-language family: 34.6% for Dravidian speakers up to 60.8% for Tibeto-Burman speakers.</a:t>
                       </a:r>
                     </a:p>
                   </a:txBody>
@@ -15857,13 +15956,13 @@
                     <a:lstStyle/>
                     <a:p>
                       <a:r>
-                        <a:rPr sz="1000" b="0">
+                        <a:rPr sz="900" b="0">
                           <a:solidFill>
                             <a:srgbClr val="1A1A1A"/>
                           </a:solidFill>
                           <a:latin typeface="Trebuchet MS"/>
                         </a:rPr>
-                        <a:t>Svarah (Indian-English, 117 speakers); deployed speech-to-text + scorer</a:t>
+                        <a:t>Svarah, an Indian-English speech corpus, run through the deployed speech-to-text and toxicity scorer.</a:t>
                       </a:r>
                     </a:p>
                   </a:txBody>
@@ -15881,7 +15980,7 @@
                     <a:lstStyle/>
                     <a:p>
                       <a:r>
-                        <a:rPr sz="1000" b="0">
+                        <a:rPr sz="900" b="0">
                           <a:solidFill>
                             <a:srgbClr val="1A1A1A"/>
                           </a:solidFill>
@@ -15903,22 +16002,49 @@
                     <a:lstStyle/>
                     <a:p>
                       <a:r>
-                        <a:rPr sz="1000" b="0">
+                        <a:rPr sz="900" b="0">
                           <a:solidFill>
                             <a:srgbClr val="1A1A1A"/>
                           </a:solidFill>
                           <a:latin typeface="Trebuchet MS"/>
                         </a:rPr>
-                        <a:t>Live on Render + Neon; v2.4.0 signed APKs validated on device; 23-day pilot; default path 14 % CPU / 288 MB; dual-STT (two speech-to-text engines) 51–72 % / 419 MB → </a:t>
+                        <a:t>Backend live on Render and Neon. Signed APKs tested on a phone. Consented family pilot completed. Default path measured on-device: </a:t>
                       </a:r>
                       <a:r>
-                        <a:rPr sz="1000" b="1">
+                        <a:rPr sz="900" b="1">
                           <a:solidFill>
                             <a:srgbClr val="1A1A1A"/>
                           </a:solidFill>
                           <a:latin typeface="Trebuchet MS"/>
                         </a:rPr>
-                        <a:t>fails resource gate → default OFF</a:t>
+                        <a:t>14% CPU / 288 MB</a:t>
+                      </a:r>
+                      <a:r>
+                        <a:rPr sz="900" b="0">
+                          <a:solidFill>
+                            <a:srgbClr val="1A1A1A"/>
+                          </a:solidFill>
+                          <a:latin typeface="Trebuchet MS"/>
+                        </a:rPr>
+                        <a:t>. Two speech-to-text engines together (dual-STT) </a:t>
+                      </a:r>
+                      <a:r>
+                        <a:rPr sz="900" b="1">
+                          <a:solidFill>
+                            <a:srgbClr val="1A1A1A"/>
+                          </a:solidFill>
+                          <a:latin typeface="Trebuchet MS"/>
+                        </a:rPr>
+                        <a:t>fail our resource gate: default OFF</a:t>
+                      </a:r>
+                      <a:r>
+                        <a:rPr sz="900" b="0">
+                          <a:solidFill>
+                            <a:srgbClr val="1A1A1A"/>
+                          </a:solidFill>
+                          <a:latin typeface="Trebuchet MS"/>
+                        </a:rPr>
+                        <a:t>.</a:t>
                       </a:r>
                     </a:p>
                   </a:txBody>
@@ -15934,13 +16060,13 @@
                     <a:lstStyle/>
                     <a:p>
                       <a:r>
-                        <a:rPr sz="1000" b="0">
+                        <a:rPr sz="900" b="0">
                           <a:solidFill>
                             <a:srgbClr val="1A1A1A"/>
                           </a:solidFill>
                           <a:latin typeface="Trebuchet MS"/>
                         </a:rPr>
-                        <a:t>181 backend (SQLite + Postgres) + 110 JVM tests + 7 paper-vs-data guards, all in CI; 288-req load 0 errors; fuzz; CVE scan; MobSF</a:t>
+                        <a:t>181 backend tests (SQLite and Postgres), 110 Android tests and 7 paper-versus-data guards run in CI. 288-request load test: 0 errors. Plus fuzzing, CVE and MobSF scans.</a:t>
                       </a:r>
                     </a:p>
                   </a:txBody>
@@ -15971,8 +16097,8 @@
         </p:blipFill>
         <p:spPr>
           <a:xfrm>
-            <a:off x="548640" y="4572000"/>
-            <a:ext cx="3070860" cy="1783080"/>
+            <a:off x="548640" y="5120640"/>
+            <a:ext cx="2204720" cy="1280160"/>
           </a:xfrm>
           <a:prstGeom prst="rect">
             <a:avLst/>
@@ -15995,8 +16121,8 @@
         </p:blipFill>
         <p:spPr>
           <a:xfrm>
-            <a:off x="3749039" y="4572000"/>
-            <a:ext cx="2517289" cy="1783080"/>
+            <a:off x="3749039" y="5120640"/>
+            <a:ext cx="1807285" cy="1280160"/>
           </a:xfrm>
           <a:prstGeom prst="rect">
             <a:avLst/>
@@ -16011,8 +16137,8 @@
         </p:nvSpPr>
         <p:spPr>
           <a:xfrm>
-            <a:off x="6400800" y="4617720"/>
-            <a:ext cx="5212080" cy="1737360"/>
+            <a:off x="6400800" y="5120640"/>
+            <a:ext cx="5212080" cy="1280160"/>
           </a:xfrm>
           <a:prstGeom prst="rect">
             <a:avLst/>
@@ -16027,13 +16153,13 @@
           <a:p>
             <a:pPr algn="l"/>
             <a:r>
-              <a:rPr sz="1100" b="0">
+              <a:rPr sz="1000" b="0">
                 <a:solidFill>
                   <a:srgbClr val="1A1A1A"/>
                 </a:solidFill>
                 <a:latin typeface="Trebuchet MS"/>
               </a:rPr>
-              <a:t>Live demo: parent dashboard → alert verdict → nudge → chat/emotion analysis → live capture in Roblox → tamper alert. Backup video ready. Two results AGAINST the system are reported: genre multiplier (per-genre risk weight) unsupported; 4 of 5 proxy names discredited → renamed in the product. PR-AUC = area under the precision–recall curve; right metric when toxic messages are rare.</a:t>
+              <a:t>Live demo: dashboard, alert verdict, nudge, chat/emotion analysis, live capture in Roblox, tamper alert; backup video ready. Two results AGAINST us: weighting risk by genre is unsupported, and most features named after clinical symptoms failed the survey check and were renamed. PR-AUC (area under the precision–recall curve) is the right metric when toxic messages are rare.</a:t>
             </a:r>
           </a:p>
         </p:txBody>
